--- a/Introduccion a la Ingenieria/Clases/Clase 11 - Taller de prototipado inicial con IA/Presentacion.pptx
+++ b/Introduccion a la Ingenieria/Clases/Clase 11 - Taller de prototipado inicial con IA/Presentacion.pptx
@@ -17,6 +17,14 @@
     <p:sldId id="265" r:id="rId16"/>
     <p:sldId id="266" r:id="rId17"/>
     <p:sldId id="267" r:id="rId18"/>
+    <p:sldId id="268" r:id="rId19"/>
+    <p:sldId id="269" r:id="rId20"/>
+    <p:sldId id="270" r:id="rId21"/>
+    <p:sldId id="271" r:id="rId22"/>
+    <p:sldId id="272" r:id="rId23"/>
+    <p:sldId id="273" r:id="rId24"/>
+    <p:sldId id="274" r:id="rId25"/>
+    <p:sldId id="275" r:id="rId26"/>
   </p:sldIdLst>
   <p:sldSz cx="12191695" cy="6858000" type="screen4x3"/>
   <p:notesSz cx="6858000" cy="9144000"/>
@@ -3511,7 +3519,7 @@
         <p:spPr>
           <a:xfrm>
             <a:off x="0" y="0"/>
-            <a:ext cx="12191695" cy="1170432"/>
+            <a:ext cx="12191695" cy="960120"/>
           </a:xfrm>
           <a:prstGeom prst="rect">
             <a:avLst/>
@@ -3553,7 +3561,7 @@
         </p:nvSpPr>
         <p:spPr>
           <a:xfrm>
-            <a:off x="0" y="1170432"/>
+            <a:off x="0" y="960120"/>
             <a:ext cx="12191695" cy="41148"/>
           </a:xfrm>
           <a:prstGeom prst="rect">
@@ -3597,7 +3605,7 @@
         <p:spPr>
           <a:xfrm>
             <a:off x="457200" y="164592"/>
-            <a:ext cx="11277295" cy="384048"/>
+            <a:ext cx="11277295" cy="502920"/>
           </a:xfrm>
           <a:prstGeom prst="rect">
             <a:avLst/>
@@ -3617,7 +3625,7 @@
                 </a:solidFill>
                 <a:latin typeface="Calibri"/>
               </a:rPr>
-              <a:t>Cómo se expone en 3 minutos</a:t>
+              <a:t>La pregunta de entrada: mejor y además ilegal (2/2)</a:t>
             </a:r>
           </a:p>
         </p:txBody>
@@ -3630,8 +3638,8 @@
         </p:nvSpPr>
         <p:spPr>
           <a:xfrm>
-            <a:off x="457200" y="566928"/>
-            <a:ext cx="11277295" cy="411480"/>
+            <a:off x="457200" y="1170432"/>
+            <a:ext cx="11277295" cy="5230368"/>
           </a:xfrm>
           <a:prstGeom prst="rect">
             <a:avLst/>
@@ -3644,894 +3652,108 @@
           </a:bodyPr>
           <a:lstStyle/>
           <a:p>
-            <a:r>
-              <a:rPr sz="1400" b="0" i="0">
-                <a:solidFill>
-                  <a:srgbClr val="B8D8EE"/>
-                </a:solidFill>
-                <a:latin typeface="Calibri"/>
-              </a:rPr>
-              <a:t>Habla el vocero con la pantalla ya compartida · cronómetro en pantalla · se corta al llegar a cero</a:t>
-            </a:r>
-          </a:p>
-        </p:txBody>
-      </p:sp>
-      <p:sp>
-        <p:nvSpPr>
-          <p:cNvPr id="6" name="Rounded Rectangle 5"/>
-          <p:cNvSpPr/>
-          <p:nvPr/>
-        </p:nvSpPr>
-        <p:spPr>
-          <a:xfrm>
-            <a:off x="457200" y="1444752"/>
-            <a:ext cx="11277295" cy="908913"/>
-          </a:xfrm>
-          <a:prstGeom prst="roundRect">
-            <a:avLst>
-              <a:gd name="adj" fmla="val 12000"/>
-            </a:avLst>
-          </a:prstGeom>
-          <a:solidFill>
-            <a:srgbClr val="F2F2F2"/>
-          </a:solidFill>
-          <a:ln>
-            <a:noFill/>
-          </a:ln>
-        </p:spPr>
-        <p:style>
-          <a:lnRef idx="1">
-            <a:schemeClr val="accent1"/>
-          </a:lnRef>
-          <a:fillRef idx="3">
-            <a:schemeClr val="accent1"/>
-          </a:fillRef>
-          <a:effectRef idx="2">
-            <a:schemeClr val="accent1"/>
-          </a:effectRef>
-          <a:fontRef idx="minor">
-            <a:schemeClr val="lt1"/>
-          </a:fontRef>
-        </p:style>
-        <p:txBody>
-          <a:bodyPr rtlCol="0" anchor="ctr"/>
-          <a:lstStyle/>
-          <a:p>
-            <a:pPr algn="ctr"/>
-          </a:p>
-        </p:txBody>
-      </p:sp>
-      <p:sp>
-        <p:nvSpPr>
-          <p:cNvPr id="7" name="Rounded Rectangle 6"/>
-          <p:cNvSpPr/>
-          <p:nvPr/>
-        </p:nvSpPr>
-        <p:spPr>
-          <a:xfrm>
-            <a:off x="594360" y="1679752"/>
-            <a:ext cx="438912" cy="438912"/>
-          </a:xfrm>
-          <a:prstGeom prst="roundRect">
-            <a:avLst>
-              <a:gd name="adj" fmla="val 12000"/>
-            </a:avLst>
-          </a:prstGeom>
-          <a:solidFill>
-            <a:srgbClr val="095292"/>
-          </a:solidFill>
-          <a:ln>
-            <a:noFill/>
-          </a:ln>
-        </p:spPr>
-        <p:style>
-          <a:lnRef idx="1">
-            <a:schemeClr val="accent1"/>
-          </a:lnRef>
-          <a:fillRef idx="3">
-            <a:schemeClr val="accent1"/>
-          </a:fillRef>
-          <a:effectRef idx="2">
-            <a:schemeClr val="accent1"/>
-          </a:effectRef>
-          <a:fontRef idx="minor">
-            <a:schemeClr val="lt1"/>
-          </a:fontRef>
-        </p:style>
-        <p:txBody>
-          <a:bodyPr rtlCol="0" anchor="ctr"/>
-          <a:lstStyle/>
-          <a:p>
-            <a:pPr algn="ctr"/>
-          </a:p>
-        </p:txBody>
-      </p:sp>
-      <p:sp>
-        <p:nvSpPr>
-          <p:cNvPr id="8" name="TextBox 7"/>
-          <p:cNvSpPr txBox="1"/>
-          <p:nvPr/>
-        </p:nvSpPr>
-        <p:spPr>
-          <a:xfrm>
-            <a:off x="594360" y="1679752"/>
-            <a:ext cx="438912" cy="438912"/>
-          </a:xfrm>
-          <a:prstGeom prst="rect">
-            <a:avLst/>
-          </a:prstGeom>
-          <a:noFill/>
-        </p:spPr>
-        <p:txBody>
-          <a:bodyPr wrap="square" anchor="ctr"/>
-          <a:lstStyle/>
-          <a:p>
-            <a:pPr algn="ctr"/>
-            <a:r>
-              <a:rPr sz="1600" b="1" i="0">
-                <a:solidFill>
-                  <a:srgbClr val="FFFFFF"/>
-                </a:solidFill>
-                <a:latin typeface="Calibri"/>
-              </a:rPr>
-              <a:t>1</a:t>
-            </a:r>
-          </a:p>
-        </p:txBody>
-      </p:sp>
-      <p:sp>
-        <p:nvSpPr>
-          <p:cNvPr id="9" name="TextBox 8"/>
-          <p:cNvSpPr txBox="1"/>
-          <p:nvPr/>
-        </p:nvSpPr>
-        <p:spPr>
-          <a:xfrm>
-            <a:off x="1188720" y="1536192"/>
-            <a:ext cx="10271455" cy="744321"/>
-          </a:xfrm>
-          <a:prstGeom prst="rect">
-            <a:avLst/>
-          </a:prstGeom>
-          <a:noFill/>
-        </p:spPr>
-        <p:txBody>
-          <a:bodyPr wrap="square" anchor="ctr"/>
-          <a:lstStyle/>
-          <a:p>
-            <a:r>
-              <a:rPr sz="1500" b="1" i="0">
-                <a:solidFill>
-                  <a:srgbClr val="095292"/>
-                </a:solidFill>
-                <a:latin typeface="Calibri"/>
-              </a:rPr>
-              <a:t>25 s · El prompt</a:t>
-            </a:r>
-          </a:p>
-          <a:p>
             <a:pPr>
-              <a:spcBef>
-                <a:spcPts val="200"/>
-              </a:spcBef>
+              <a:spcAft>
+                <a:spcPts val="800"/>
+              </a:spcAft>
             </a:pPr>
             <a:r>
-              <a:rPr sz="1300" b="0" i="0">
-                <a:solidFill>
-                  <a:srgbClr val="333333"/>
-                </a:solidFill>
-                <a:latin typeface="Calibri"/>
-              </a:rPr>
-              <a:t>Lean las restricciones que pusieron. Solo esa parte.</a:t>
-            </a:r>
-          </a:p>
-        </p:txBody>
-      </p:sp>
-      <p:sp>
-        <p:nvSpPr>
-          <p:cNvPr id="10" name="Rounded Rectangle 9"/>
-          <p:cNvSpPr/>
-          <p:nvPr/>
-        </p:nvSpPr>
-        <p:spPr>
-          <a:xfrm>
-            <a:off x="457200" y="2445105"/>
-            <a:ext cx="11277295" cy="908913"/>
-          </a:xfrm>
-          <a:prstGeom prst="roundRect">
-            <a:avLst>
-              <a:gd name="adj" fmla="val 12000"/>
-            </a:avLst>
-          </a:prstGeom>
-          <a:solidFill>
-            <a:srgbClr val="E8F4FA"/>
-          </a:solidFill>
-          <a:ln>
-            <a:noFill/>
-          </a:ln>
-        </p:spPr>
-        <p:style>
-          <a:lnRef idx="1">
-            <a:schemeClr val="accent1"/>
-          </a:lnRef>
-          <a:fillRef idx="3">
-            <a:schemeClr val="accent1"/>
-          </a:fillRef>
-          <a:effectRef idx="2">
-            <a:schemeClr val="accent1"/>
-          </a:effectRef>
-          <a:fontRef idx="minor">
-            <a:schemeClr val="lt1"/>
-          </a:fontRef>
-        </p:style>
-        <p:txBody>
-          <a:bodyPr rtlCol="0" anchor="ctr"/>
-          <a:lstStyle/>
-          <a:p>
-            <a:pPr algn="ctr"/>
-          </a:p>
-        </p:txBody>
-      </p:sp>
-      <p:sp>
-        <p:nvSpPr>
-          <p:cNvPr id="11" name="Rounded Rectangle 10"/>
-          <p:cNvSpPr/>
-          <p:nvPr/>
-        </p:nvSpPr>
-        <p:spPr>
-          <a:xfrm>
-            <a:off x="594360" y="2680106"/>
-            <a:ext cx="438912" cy="438912"/>
-          </a:xfrm>
-          <a:prstGeom prst="roundRect">
-            <a:avLst>
-              <a:gd name="adj" fmla="val 12000"/>
-            </a:avLst>
-          </a:prstGeom>
-          <a:solidFill>
-            <a:srgbClr val="095292"/>
-          </a:solidFill>
-          <a:ln>
-            <a:noFill/>
-          </a:ln>
-        </p:spPr>
-        <p:style>
-          <a:lnRef idx="1">
-            <a:schemeClr val="accent1"/>
-          </a:lnRef>
-          <a:fillRef idx="3">
-            <a:schemeClr val="accent1"/>
-          </a:fillRef>
-          <a:effectRef idx="2">
-            <a:schemeClr val="accent1"/>
-          </a:effectRef>
-          <a:fontRef idx="minor">
-            <a:schemeClr val="lt1"/>
-          </a:fontRef>
-        </p:style>
-        <p:txBody>
-          <a:bodyPr rtlCol="0" anchor="ctr"/>
-          <a:lstStyle/>
-          <a:p>
-            <a:pPr algn="ctr"/>
-          </a:p>
-        </p:txBody>
-      </p:sp>
-      <p:sp>
-        <p:nvSpPr>
-          <p:cNvPr id="12" name="TextBox 11"/>
-          <p:cNvSpPr txBox="1"/>
-          <p:nvPr/>
-        </p:nvSpPr>
-        <p:spPr>
-          <a:xfrm>
-            <a:off x="594360" y="2680106"/>
-            <a:ext cx="438912" cy="438912"/>
-          </a:xfrm>
-          <a:prstGeom prst="rect">
-            <a:avLst/>
-          </a:prstGeom>
-          <a:noFill/>
-        </p:spPr>
-        <p:txBody>
-          <a:bodyPr wrap="square" anchor="ctr"/>
-          <a:lstStyle/>
-          <a:p>
-            <a:pPr algn="ctr"/>
-            <a:r>
-              <a:rPr sz="1600" b="1" i="0">
-                <a:solidFill>
-                  <a:srgbClr val="FFFFFF"/>
-                </a:solidFill>
-                <a:latin typeface="Calibri"/>
-              </a:rPr>
-              <a:t>2</a:t>
-            </a:r>
-          </a:p>
-        </p:txBody>
-      </p:sp>
-      <p:sp>
-        <p:nvSpPr>
-          <p:cNvPr id="13" name="TextBox 12"/>
-          <p:cNvSpPr txBox="1"/>
-          <p:nvPr/>
-        </p:nvSpPr>
-        <p:spPr>
-          <a:xfrm>
-            <a:off x="1188720" y="2536545"/>
-            <a:ext cx="10271455" cy="744321"/>
-          </a:xfrm>
-          <a:prstGeom prst="rect">
-            <a:avLst/>
-          </a:prstGeom>
-          <a:noFill/>
-        </p:spPr>
-        <p:txBody>
-          <a:bodyPr wrap="square" anchor="ctr"/>
-          <a:lstStyle/>
-          <a:p>
-            <a:r>
-              <a:rPr sz="1500" b="1" i="0">
-                <a:solidFill>
-                  <a:srgbClr val="095292"/>
-                </a:solidFill>
-                <a:latin typeface="Calibri"/>
-              </a:rPr>
-              <a:t>30 s · Las tres variantes</a:t>
+              <a:rPr sz="2000" b="0" i="0">
+                <a:solidFill>
+                  <a:srgbClr val="333333"/>
+                </a:solidFill>
+                <a:latin typeface="Calibri"/>
+              </a:rPr>
+              <a:t>–   Y lo hizo </a:t>
+            </a:r>
+            <a:r>
+              <a:rPr sz="2000" b="1" i="0">
+                <a:solidFill>
+                  <a:srgbClr val="333333"/>
+                </a:solidFill>
+                <a:latin typeface="Calibri"/>
+              </a:rPr>
+              <a:t>con total seguridad</a:t>
+            </a:r>
+            <a:r>
+              <a:rPr sz="2000" b="0" i="0">
+                <a:solidFill>
+                  <a:srgbClr val="333333"/>
+                </a:solidFill>
+                <a:latin typeface="Calibri"/>
+              </a:rPr>
+              <a:t>, sin ninguna señal de advertencia, que es la parte peligrosa.</a:t>
             </a:r>
           </a:p>
           <a:p>
             <a:pPr>
-              <a:spcBef>
-                <a:spcPts val="200"/>
-              </a:spcBef>
+              <a:spcAft>
+                <a:spcPts val="800"/>
+              </a:spcAft>
             </a:pPr>
             <a:r>
-              <a:rPr sz="1300" b="0" i="0">
-                <a:solidFill>
-                  <a:srgbClr val="333333"/>
-                </a:solidFill>
-                <a:latin typeface="Calibri"/>
-              </a:rPr>
-              <a:t>En una frase cada una.</a:t>
-            </a:r>
-          </a:p>
-        </p:txBody>
-      </p:sp>
-      <p:sp>
-        <p:nvSpPr>
-          <p:cNvPr id="14" name="Rounded Rectangle 13"/>
-          <p:cNvSpPr/>
-          <p:nvPr/>
-        </p:nvSpPr>
-        <p:spPr>
-          <a:xfrm>
-            <a:off x="457200" y="3445459"/>
-            <a:ext cx="11277295" cy="908913"/>
-          </a:xfrm>
-          <a:prstGeom prst="roundRect">
-            <a:avLst>
-              <a:gd name="adj" fmla="val 12000"/>
-            </a:avLst>
-          </a:prstGeom>
-          <a:solidFill>
-            <a:srgbClr val="F2F2F2"/>
-          </a:solidFill>
-          <a:ln>
-            <a:noFill/>
-          </a:ln>
-        </p:spPr>
-        <p:style>
-          <a:lnRef idx="1">
-            <a:schemeClr val="accent1"/>
-          </a:lnRef>
-          <a:fillRef idx="3">
-            <a:schemeClr val="accent1"/>
-          </a:fillRef>
-          <a:effectRef idx="2">
-            <a:schemeClr val="accent1"/>
-          </a:effectRef>
-          <a:fontRef idx="minor">
-            <a:schemeClr val="lt1"/>
-          </a:fontRef>
-        </p:style>
-        <p:txBody>
-          <a:bodyPr rtlCol="0" anchor="ctr"/>
-          <a:lstStyle/>
-          <a:p>
-            <a:pPr algn="ctr"/>
-          </a:p>
-        </p:txBody>
-      </p:sp>
-      <p:sp>
-        <p:nvSpPr>
-          <p:cNvPr id="15" name="Rounded Rectangle 14"/>
-          <p:cNvSpPr/>
-          <p:nvPr/>
-        </p:nvSpPr>
-        <p:spPr>
-          <a:xfrm>
-            <a:off x="594360" y="3680460"/>
-            <a:ext cx="438912" cy="438912"/>
-          </a:xfrm>
-          <a:prstGeom prst="roundRect">
-            <a:avLst>
-              <a:gd name="adj" fmla="val 12000"/>
-            </a:avLst>
-          </a:prstGeom>
-          <a:solidFill>
-            <a:srgbClr val="095292"/>
-          </a:solidFill>
-          <a:ln>
-            <a:noFill/>
-          </a:ln>
-        </p:spPr>
-        <p:style>
-          <a:lnRef idx="1">
-            <a:schemeClr val="accent1"/>
-          </a:lnRef>
-          <a:fillRef idx="3">
-            <a:schemeClr val="accent1"/>
-          </a:fillRef>
-          <a:effectRef idx="2">
-            <a:schemeClr val="accent1"/>
-          </a:effectRef>
-          <a:fontRef idx="minor">
-            <a:schemeClr val="lt1"/>
-          </a:fontRef>
-        </p:style>
-        <p:txBody>
-          <a:bodyPr rtlCol="0" anchor="ctr"/>
-          <a:lstStyle/>
-          <a:p>
-            <a:pPr algn="ctr"/>
-          </a:p>
-        </p:txBody>
-      </p:sp>
-      <p:sp>
-        <p:nvSpPr>
-          <p:cNvPr id="16" name="TextBox 15"/>
-          <p:cNvSpPr txBox="1"/>
-          <p:nvPr/>
-        </p:nvSpPr>
-        <p:spPr>
-          <a:xfrm>
-            <a:off x="594360" y="3680460"/>
-            <a:ext cx="438912" cy="438912"/>
-          </a:xfrm>
-          <a:prstGeom prst="rect">
-            <a:avLst/>
-          </a:prstGeom>
-          <a:noFill/>
-        </p:spPr>
-        <p:txBody>
-          <a:bodyPr wrap="square" anchor="ctr"/>
-          <a:lstStyle/>
-          <a:p>
-            <a:pPr algn="ctr"/>
-            <a:r>
-              <a:rPr sz="1600" b="1" i="0">
-                <a:solidFill>
-                  <a:srgbClr val="FFFFFF"/>
-                </a:solidFill>
-                <a:latin typeface="Calibri"/>
-              </a:rPr>
-              <a:t>3</a:t>
-            </a:r>
-          </a:p>
-        </p:txBody>
-      </p:sp>
-      <p:sp>
-        <p:nvSpPr>
-          <p:cNvPr id="17" name="TextBox 16"/>
-          <p:cNvSpPr txBox="1"/>
-          <p:nvPr/>
-        </p:nvSpPr>
-        <p:spPr>
-          <a:xfrm>
-            <a:off x="1188720" y="3536899"/>
-            <a:ext cx="10271455" cy="744321"/>
-          </a:xfrm>
-          <a:prstGeom prst="rect">
-            <a:avLst/>
-          </a:prstGeom>
-          <a:noFill/>
-        </p:spPr>
-        <p:txBody>
-          <a:bodyPr wrap="square" anchor="ctr"/>
-          <a:lstStyle/>
-          <a:p>
-            <a:r>
-              <a:rPr sz="1500" b="1" i="0">
-                <a:solidFill>
-                  <a:srgbClr val="095292"/>
-                </a:solidFill>
-                <a:latin typeface="Calibri"/>
-              </a:rPr>
-              <a:t>30 s · La que eligieron</a:t>
+              <a:rPr sz="2000" b="0" i="0">
+                <a:solidFill>
+                  <a:srgbClr val="333333"/>
+                </a:solidFill>
+                <a:latin typeface="Calibri"/>
+              </a:rPr>
+              <a:t>–   Vale la pena hacerlo en vivo si el tiempo alcanza —dos minutos de pantalla compartida con un prompt sin restricciones—, porque verlo proponer la cuenta de usuario delante de todos vale más que la diapositiva.</a:t>
             </a:r>
           </a:p>
           <a:p>
             <a:pPr>
-              <a:spcBef>
-                <a:spcPts val="200"/>
-              </a:spcBef>
+              <a:spcAft>
+                <a:spcPts val="800"/>
+              </a:spcAft>
             </a:pPr>
             <a:r>
-              <a:rPr sz="1300" b="0" i="0">
-                <a:solidFill>
-                  <a:srgbClr val="333333"/>
-                </a:solidFill>
-                <a:latin typeface="Calibri"/>
-              </a:rPr>
-              <a:t>Y el requisito en el que se apoyaron.</a:t>
-            </a:r>
-          </a:p>
-        </p:txBody>
-      </p:sp>
-      <p:sp>
-        <p:nvSpPr>
-          <p:cNvPr id="18" name="Rounded Rectangle 17"/>
-          <p:cNvSpPr/>
-          <p:nvPr/>
-        </p:nvSpPr>
-        <p:spPr>
-          <a:xfrm>
-            <a:off x="457200" y="4445812"/>
-            <a:ext cx="11277295" cy="908913"/>
-          </a:xfrm>
-          <a:prstGeom prst="roundRect">
-            <a:avLst>
-              <a:gd name="adj" fmla="val 12000"/>
-            </a:avLst>
-          </a:prstGeom>
-          <a:solidFill>
-            <a:srgbClr val="E8F4FA"/>
-          </a:solidFill>
-          <a:ln>
-            <a:noFill/>
-          </a:ln>
-        </p:spPr>
-        <p:style>
-          <a:lnRef idx="1">
-            <a:schemeClr val="accent1"/>
-          </a:lnRef>
-          <a:fillRef idx="3">
-            <a:schemeClr val="accent1"/>
-          </a:fillRef>
-          <a:effectRef idx="2">
-            <a:schemeClr val="accent1"/>
-          </a:effectRef>
-          <a:fontRef idx="minor">
-            <a:schemeClr val="lt1"/>
-          </a:fontRef>
-        </p:style>
-        <p:txBody>
-          <a:bodyPr rtlCol="0" anchor="ctr"/>
-          <a:lstStyle/>
-          <a:p>
-            <a:pPr algn="ctr"/>
-          </a:p>
-        </p:txBody>
-      </p:sp>
-      <p:sp>
-        <p:nvSpPr>
-          <p:cNvPr id="19" name="Rounded Rectangle 18"/>
-          <p:cNvSpPr/>
-          <p:nvPr/>
-        </p:nvSpPr>
-        <p:spPr>
-          <a:xfrm>
-            <a:off x="594360" y="4680813"/>
-            <a:ext cx="438912" cy="438912"/>
-          </a:xfrm>
-          <a:prstGeom prst="roundRect">
-            <a:avLst>
-              <a:gd name="adj" fmla="val 12000"/>
-            </a:avLst>
-          </a:prstGeom>
-          <a:solidFill>
-            <a:srgbClr val="095292"/>
-          </a:solidFill>
-          <a:ln>
-            <a:noFill/>
-          </a:ln>
-        </p:spPr>
-        <p:style>
-          <a:lnRef idx="1">
-            <a:schemeClr val="accent1"/>
-          </a:lnRef>
-          <a:fillRef idx="3">
-            <a:schemeClr val="accent1"/>
-          </a:fillRef>
-          <a:effectRef idx="2">
-            <a:schemeClr val="accent1"/>
-          </a:effectRef>
-          <a:fontRef idx="minor">
-            <a:schemeClr val="lt1"/>
-          </a:fontRef>
-        </p:style>
-        <p:txBody>
-          <a:bodyPr rtlCol="0" anchor="ctr"/>
-          <a:lstStyle/>
-          <a:p>
-            <a:pPr algn="ctr"/>
-          </a:p>
-        </p:txBody>
-      </p:sp>
-      <p:sp>
-        <p:nvSpPr>
-          <p:cNvPr id="20" name="TextBox 19"/>
-          <p:cNvSpPr txBox="1"/>
-          <p:nvPr/>
-        </p:nvSpPr>
-        <p:spPr>
-          <a:xfrm>
-            <a:off x="594360" y="4680813"/>
-            <a:ext cx="438912" cy="438912"/>
-          </a:xfrm>
-          <a:prstGeom prst="rect">
-            <a:avLst/>
-          </a:prstGeom>
-          <a:noFill/>
-        </p:spPr>
-        <p:txBody>
-          <a:bodyPr wrap="square" anchor="ctr"/>
-          <a:lstStyle/>
-          <a:p>
-            <a:pPr algn="ctr"/>
-            <a:r>
-              <a:rPr sz="1600" b="1" i="0">
-                <a:solidFill>
-                  <a:srgbClr val="FFFFFF"/>
-                </a:solidFill>
-                <a:latin typeface="Calibri"/>
-              </a:rPr>
-              <a:t>4</a:t>
-            </a:r>
-          </a:p>
-        </p:txBody>
-      </p:sp>
-      <p:sp>
-        <p:nvSpPr>
-          <p:cNvPr id="21" name="TextBox 20"/>
-          <p:cNvSpPr txBox="1"/>
-          <p:nvPr/>
-        </p:nvSpPr>
-        <p:spPr>
-          <a:xfrm>
-            <a:off x="1188720" y="4537252"/>
-            <a:ext cx="10271455" cy="744321"/>
-          </a:xfrm>
-          <a:prstGeom prst="rect">
-            <a:avLst/>
-          </a:prstGeom>
-          <a:noFill/>
-        </p:spPr>
-        <p:txBody>
-          <a:bodyPr wrap="square" anchor="ctr"/>
-          <a:lstStyle/>
-          <a:p>
-            <a:r>
-              <a:rPr sz="1500" b="1" i="0">
-                <a:solidFill>
-                  <a:srgbClr val="095292"/>
-                </a:solidFill>
-                <a:latin typeface="Calibri"/>
-              </a:rPr>
-              <a:t>70 s · Lo que corrigieron</a:t>
+              <a:rPr sz="2000" b="0" i="0">
+                <a:solidFill>
+                  <a:srgbClr val="333333"/>
+                </a:solidFill>
+                <a:latin typeface="Calibri"/>
+              </a:rPr>
+              <a:t>–   Si no alcanza, la apertura sola sirve: en el muro, la pregunta «¿cómo puede pasar eso?» produce respuestas que ya contienen la respuesta correcta.</a:t>
             </a:r>
           </a:p>
           <a:p>
             <a:pPr>
-              <a:spcBef>
-                <a:spcPts val="200"/>
-              </a:spcBef>
+              <a:spcAft>
+                <a:spcPts val="800"/>
+              </a:spcAft>
             </a:pPr>
             <a:r>
-              <a:rPr sz="1300" b="0" i="0">
-                <a:solidFill>
-                  <a:srgbClr val="333333"/>
-                </a:solidFill>
-                <a:latin typeface="Calibri"/>
-              </a:rPr>
-              <a:t>Dos correcciones con su razón y </a:t>
-            </a:r>
-            <a:r>
-              <a:rPr sz="1300" b="1" i="0">
-                <a:solidFill>
-                  <a:srgbClr val="333333"/>
-                </a:solidFill>
-                <a:latin typeface="Calibri"/>
-              </a:rPr>
-              <a:t>de qué sesión sale cada una</a:t>
-            </a:r>
-            <a:r>
-              <a:rPr sz="1300" b="0" i="0">
-                <a:solidFill>
-                  <a:srgbClr val="333333"/>
-                </a:solidFill>
-                <a:latin typeface="Calibri"/>
-              </a:rPr>
-              <a:t>. Es el minuto obligatorio.</a:t>
-            </a:r>
-          </a:p>
-        </p:txBody>
-      </p:sp>
-      <p:sp>
-        <p:nvSpPr>
-          <p:cNvPr id="22" name="Rounded Rectangle 21"/>
-          <p:cNvSpPr/>
-          <p:nvPr/>
-        </p:nvSpPr>
-        <p:spPr>
-          <a:xfrm>
-            <a:off x="457200" y="5446166"/>
-            <a:ext cx="11277295" cy="908913"/>
-          </a:xfrm>
-          <a:prstGeom prst="roundRect">
-            <a:avLst>
-              <a:gd name="adj" fmla="val 12000"/>
-            </a:avLst>
-          </a:prstGeom>
-          <a:solidFill>
-            <a:srgbClr val="F2F2F2"/>
-          </a:solidFill>
-          <a:ln>
-            <a:noFill/>
-          </a:ln>
-        </p:spPr>
-        <p:style>
-          <a:lnRef idx="1">
-            <a:schemeClr val="accent1"/>
-          </a:lnRef>
-          <a:fillRef idx="3">
-            <a:schemeClr val="accent1"/>
-          </a:fillRef>
-          <a:effectRef idx="2">
-            <a:schemeClr val="accent1"/>
-          </a:effectRef>
-          <a:fontRef idx="minor">
-            <a:schemeClr val="lt1"/>
-          </a:fontRef>
-        </p:style>
-        <p:txBody>
-          <a:bodyPr rtlCol="0" anchor="ctr"/>
-          <a:lstStyle/>
-          <a:p>
-            <a:pPr algn="ctr"/>
-          </a:p>
-        </p:txBody>
-      </p:sp>
-      <p:sp>
-        <p:nvSpPr>
-          <p:cNvPr id="23" name="Rounded Rectangle 22"/>
-          <p:cNvSpPr/>
-          <p:nvPr/>
-        </p:nvSpPr>
-        <p:spPr>
-          <a:xfrm>
-            <a:off x="594360" y="5681167"/>
-            <a:ext cx="438912" cy="438912"/>
-          </a:xfrm>
-          <a:prstGeom prst="roundRect">
-            <a:avLst>
-              <a:gd name="adj" fmla="val 12000"/>
-            </a:avLst>
-          </a:prstGeom>
-          <a:solidFill>
-            <a:srgbClr val="095292"/>
-          </a:solidFill>
-          <a:ln>
-            <a:noFill/>
-          </a:ln>
-        </p:spPr>
-        <p:style>
-          <a:lnRef idx="1">
-            <a:schemeClr val="accent1"/>
-          </a:lnRef>
-          <a:fillRef idx="3">
-            <a:schemeClr val="accent1"/>
-          </a:fillRef>
-          <a:effectRef idx="2">
-            <a:schemeClr val="accent1"/>
-          </a:effectRef>
-          <a:fontRef idx="minor">
-            <a:schemeClr val="lt1"/>
-          </a:fontRef>
-        </p:style>
-        <p:txBody>
-          <a:bodyPr rtlCol="0" anchor="ctr"/>
-          <a:lstStyle/>
-          <a:p>
-            <a:pPr algn="ctr"/>
-          </a:p>
-        </p:txBody>
-      </p:sp>
-      <p:sp>
-        <p:nvSpPr>
-          <p:cNvPr id="24" name="TextBox 23"/>
-          <p:cNvSpPr txBox="1"/>
-          <p:nvPr/>
-        </p:nvSpPr>
-        <p:spPr>
-          <a:xfrm>
-            <a:off x="594360" y="5681167"/>
-            <a:ext cx="438912" cy="438912"/>
-          </a:xfrm>
-          <a:prstGeom prst="rect">
-            <a:avLst/>
-          </a:prstGeom>
-          <a:noFill/>
-        </p:spPr>
-        <p:txBody>
-          <a:bodyPr wrap="square" anchor="ctr"/>
-          <a:lstStyle/>
-          <a:p>
-            <a:pPr algn="ctr"/>
-            <a:r>
-              <a:rPr sz="1600" b="1" i="0">
-                <a:solidFill>
-                  <a:srgbClr val="FFFFFF"/>
-                </a:solidFill>
-                <a:latin typeface="Calibri"/>
-              </a:rPr>
-              <a:t>5</a:t>
-            </a:r>
-          </a:p>
-        </p:txBody>
-      </p:sp>
-      <p:sp>
-        <p:nvSpPr>
-          <p:cNvPr id="25" name="TextBox 24"/>
-          <p:cNvSpPr txBox="1"/>
-          <p:nvPr/>
-        </p:nvSpPr>
-        <p:spPr>
-          <a:xfrm>
-            <a:off x="1188720" y="5537606"/>
-            <a:ext cx="10271455" cy="744321"/>
-          </a:xfrm>
-          <a:prstGeom prst="rect">
-            <a:avLst/>
-          </a:prstGeom>
-          <a:noFill/>
-        </p:spPr>
-        <p:txBody>
-          <a:bodyPr wrap="square" anchor="ctr"/>
-          <a:lstStyle/>
-          <a:p>
-            <a:r>
-              <a:rPr sz="1500" b="1" i="0">
-                <a:solidFill>
-                  <a:srgbClr val="095292"/>
-                </a:solidFill>
-                <a:latin typeface="Calibri"/>
-              </a:rPr>
-              <a:t>25 s · Lo que descartaron</a:t>
+              <a:rPr sz="2000" b="0" i="0">
+                <a:solidFill>
+                  <a:srgbClr val="333333"/>
+                </a:solidFill>
+                <a:latin typeface="Calibri"/>
+              </a:rPr>
+              <a:t>–   Recuerde el encuadre general del curso, que hoy se cierra: la IA está autorizada en dos sesiones de dieciséis, con la misma regla en las dos —se entrega el prompt y lo que se corrigió—.</a:t>
             </a:r>
           </a:p>
           <a:p>
             <a:pPr>
-              <a:spcBef>
-                <a:spcPts val="200"/>
-              </a:spcBef>
+              <a:spcAft>
+                <a:spcPts val="800"/>
+              </a:spcAft>
             </a:pPr>
             <a:r>
-              <a:rPr sz="1300" b="0" i="0">
-                <a:solidFill>
-                  <a:srgbClr val="333333"/>
-                </a:solidFill>
-                <a:latin typeface="Calibri"/>
-              </a:rPr>
-              <a:t>Una propuesta rechazada y el motivo.</a:t>
-            </a:r>
-          </a:p>
-        </p:txBody>
-      </p:sp>
-      <p:sp>
-        <p:nvSpPr>
-          <p:cNvPr id="26" name="TextBox 25"/>
+              <a:rPr sz="2000" b="0" i="0">
+                <a:solidFill>
+                  <a:srgbClr val="333333"/>
+                </a:solidFill>
+                <a:latin typeface="Calibri"/>
+              </a:rPr>
+              <a:t>–   Hoy esa regla vale la mitad de la nota del taller.</a:t>
+            </a:r>
+          </a:p>
+        </p:txBody>
+      </p:sp>
+      <p:sp>
+        <p:nvSpPr>
+          <p:cNvPr id="6" name="TextBox 5"/>
           <p:cNvSpPr txBox="1"/>
           <p:nvPr/>
         </p:nvSpPr>
@@ -4705,7 +3927,7 @@
                 </a:solidFill>
                 <a:latin typeface="Calibri"/>
               </a:rPr>
-              <a:t>Para la Clase 12</a:t>
+              <a:t>Qué hace bien y qué hace mal: un mapa honesto (1/2)</a:t>
             </a:r>
           </a:p>
         </p:txBody>
@@ -4744,25 +3966,7 @@
                 </a:solidFill>
                 <a:latin typeface="Calibri"/>
               </a:rPr>
-              <a:t>–   </a:t>
-            </a:r>
-            <a:r>
-              <a:rPr sz="2000" b="1" i="0">
-                <a:solidFill>
-                  <a:srgbClr val="333333"/>
-                </a:solidFill>
-                <a:latin typeface="Calibri"/>
-              </a:rPr>
-              <a:t>Trabajo dirigido:</a:t>
-            </a:r>
-            <a:r>
-              <a:rPr sz="2000" b="0" i="0">
-                <a:solidFill>
-                  <a:srgbClr val="333333"/>
-                </a:solidFill>
-                <a:latin typeface="Calibri"/>
-              </a:rPr>
-              <a:t> Uso de IA para generación de ideas — completar el registro del taller (prompt, variantes, elección, correcciones con su origen, descartes y declaración del uso) en el documento del equipo.</a:t>
+              <a:t>–   La razón es concreta: un equipo que lleva dos horas mirando su propio dibujo pierde la capacidad de ver alternativas</a:t>
             </a:r>
           </a:p>
           <a:p>
@@ -4778,7 +3982,7 @@
                 </a:solidFill>
                 <a:latin typeface="Calibri"/>
               </a:rPr>
-              <a:t>–   </a:t>
+              <a:t>–   Y abrir opciones es justo lo que más cuesta en ese momento. </a:t>
             </a:r>
             <a:r>
               <a:rPr sz="2000" b="1" i="0">
@@ -4787,7 +3991,7 @@
                 </a:solidFill>
                 <a:latin typeface="Calibri"/>
               </a:rPr>
-              <a:t>Trabajo independiente:</a:t>
+              <a:t>Hace bien: textos y casos de prueba.</a:t>
             </a:r>
             <a:r>
               <a:rPr sz="2000" b="0" i="0">
@@ -4796,43 +4000,7 @@
                 </a:solidFill>
                 <a:latin typeface="Calibri"/>
               </a:rPr>
-              <a:t> Corrección del prototipo: dejar el </a:t>
-            </a:r>
-            <a:r>
-              <a:rPr sz="2000" b="1" i="0">
-                <a:solidFill>
-                  <a:srgbClr val="333333"/>
-                </a:solidFill>
-                <a:latin typeface="Calibri"/>
-              </a:rPr>
-              <a:t>v2 navegable</a:t>
-            </a:r>
-            <a:r>
-              <a:rPr sz="2000" b="0" i="0">
-                <a:solidFill>
-                  <a:srgbClr val="333333"/>
-                </a:solidFill>
-                <a:latin typeface="Calibri"/>
-              </a:rPr>
-              <a:t> en la carpeta del equipo, con todas las correcciones aplicadas, y </a:t>
-            </a:r>
-            <a:r>
-              <a:rPr sz="2000" b="1" i="0">
-                <a:solidFill>
-                  <a:srgbClr val="333333"/>
-                </a:solidFill>
-                <a:latin typeface="Calibri"/>
-              </a:rPr>
-              <a:t>conseguir a la persona ajena</a:t>
-            </a:r>
-            <a:r>
-              <a:rPr sz="2000" b="0" i="0">
-                <a:solidFill>
-                  <a:srgbClr val="333333"/>
-                </a:solidFill>
-                <a:latin typeface="Calibri"/>
-              </a:rPr>
-              <a:t> que va a probarlo — solo el rol, no el nombre.</a:t>
+              <a:t> Rótulos, mensajes de error y, sobre todo</a:t>
             </a:r>
           </a:p>
           <a:p>
@@ -4857,7 +4025,7 @@
                 </a:solidFill>
                 <a:latin typeface="Calibri"/>
               </a:rPr>
-              <a:t>Clase 12 · Presentación de avances de proyectos</a:t>
+              <a:t>listas de casos que a nadie se le ocurrieron</a:t>
             </a:r>
             <a:r>
               <a:rPr sz="2000" b="0" i="0">
@@ -4866,43 +4034,7 @@
                 </a:solidFill>
                 <a:latin typeface="Calibri"/>
               </a:rPr>
-              <a:t> — arranca el </a:t>
-            </a:r>
-            <a:r>
-              <a:rPr sz="2000" b="1" i="0">
-                <a:solidFill>
-                  <a:srgbClr val="333333"/>
-                </a:solidFill>
-                <a:latin typeface="Calibri"/>
-              </a:rPr>
-              <a:t>corte 3</a:t>
-            </a:r>
-            <a:r>
-              <a:rPr sz="2000" b="0" i="0">
-                <a:solidFill>
-                  <a:srgbClr val="333333"/>
-                </a:solidFill>
-                <a:latin typeface="Calibri"/>
-              </a:rPr>
-              <a:t> con la </a:t>
-            </a:r>
-            <a:r>
-              <a:rPr sz="2000" b="1" i="0">
-                <a:solidFill>
-                  <a:srgbClr val="333333"/>
-                </a:solidFill>
-                <a:latin typeface="Calibri"/>
-              </a:rPr>
-              <a:t>presentación de avances</a:t>
-            </a:r>
-            <a:r>
-              <a:rPr sz="2000" b="0" i="0">
-                <a:solidFill>
-                  <a:srgbClr val="333333"/>
-                </a:solidFill>
-                <a:latin typeface="Calibri"/>
-              </a:rPr>
-              <a:t>: el prototipo se prueba con una persona ajena al equipo y se recibe retroalimentación entre pares.</a:t>
+              <a:t> — «¿qué pasa si el usuario escribe el título con una tilde de más?», «¿qué pasa si dos personas piden el mismo libro el mismo día?».</a:t>
             </a:r>
           </a:p>
           <a:p>
@@ -4918,43 +4050,7 @@
                 </a:solidFill>
                 <a:latin typeface="Calibri"/>
               </a:rPr>
-              <a:t>–   </a:t>
-            </a:r>
-            <a:r>
-              <a:rPr sz="2000" b="1" i="0">
-                <a:solidFill>
-                  <a:srgbClr val="333333"/>
-                </a:solidFill>
-                <a:latin typeface="Calibri"/>
-              </a:rPr>
-              <a:t>Aviso:</a:t>
-            </a:r>
-            <a:r>
-              <a:rPr sz="2000" b="0" i="0">
-                <a:solidFill>
-                  <a:srgbClr val="333333"/>
-                </a:solidFill>
-                <a:latin typeface="Calibri"/>
-              </a:rPr>
-              <a:t> Para la Clase 12 traigan el prototipo v2 navegable </a:t>
-            </a:r>
-            <a:r>
-              <a:rPr sz="2000" b="1" i="0">
-                <a:solidFill>
-                  <a:srgbClr val="333333"/>
-                </a:solidFill>
-                <a:latin typeface="Calibri"/>
-              </a:rPr>
-              <a:t>y la prueba ya hecha con una persona ajena al equipo</a:t>
-            </a:r>
-            <a:r>
-              <a:rPr sz="2000" b="0" i="0">
-                <a:solidFill>
-                  <a:srgbClr val="333333"/>
-                </a:solidFill>
-                <a:latin typeface="Calibri"/>
-              </a:rPr>
-              <a:t>, con la lista de lo que falló. Sin esa lista no hay nada que presentar: la Clase 12 es sobre lo que salió mal, no sobre lo que se planeó.</a:t>
+              <a:t>–   Aquí la IA es genuinamente superior a un equipo de primer semestre, porque enumerar casos es exactamente lo que hace bien.</a:t>
             </a:r>
           </a:p>
           <a:p>
@@ -4970,7 +4066,7 @@
                 </a:solidFill>
                 <a:latin typeface="Calibri"/>
               </a:rPr>
-              <a:t>–   </a:t>
+              <a:t>–   Vale la pena decírselo, porque es el uso que más les va a servir en la Clase 12. </a:t>
             </a:r>
             <a:r>
               <a:rPr sz="2000" b="1" i="0">
@@ -4979,7 +4075,7 @@
                 </a:solidFill>
                 <a:latin typeface="Calibri"/>
               </a:rPr>
-              <a:t>Antes de salir:</a:t>
+              <a:t>Hace mal: el contexto local.</a:t>
             </a:r>
             <a:r>
               <a:rPr sz="2000" b="0" i="0">
@@ -4988,7 +4084,7 @@
                 </a:solidFill>
                 <a:latin typeface="Calibri"/>
               </a:rPr>
-              <a:t> el enlace del documento del equipo en el chat, con permiso de lectura para el docente, y el nombre del vocero de hoy.</a:t>
+              <a:t> No sabe que no hay computador en el mostrador, que las voluntarias rotan, que el presupuesto es cero, que la conexión es intermitente.</a:t>
             </a:r>
           </a:p>
         </p:txBody>
@@ -5063,7 +4159,1957 @@
         <p:spPr>
           <a:xfrm>
             <a:off x="0" y="0"/>
-            <a:ext cx="12191695" cy="164592"/>
+            <a:ext cx="12191695" cy="960120"/>
+          </a:xfrm>
+          <a:prstGeom prst="rect">
+            <a:avLst/>
+          </a:prstGeom>
+          <a:solidFill>
+            <a:srgbClr val="095292"/>
+          </a:solidFill>
+          <a:ln>
+            <a:noFill/>
+          </a:ln>
+        </p:spPr>
+        <p:style>
+          <a:lnRef idx="1">
+            <a:schemeClr val="accent1"/>
+          </a:lnRef>
+          <a:fillRef idx="3">
+            <a:schemeClr val="accent1"/>
+          </a:fillRef>
+          <a:effectRef idx="2">
+            <a:schemeClr val="accent1"/>
+          </a:effectRef>
+          <a:fontRef idx="minor">
+            <a:schemeClr val="lt1"/>
+          </a:fontRef>
+        </p:style>
+        <p:txBody>
+          <a:bodyPr rtlCol="0" anchor="ctr"/>
+          <a:lstStyle/>
+          <a:p>
+            <a:pPr algn="ctr"/>
+          </a:p>
+        </p:txBody>
+      </p:sp>
+      <p:sp>
+        <p:nvSpPr>
+          <p:cNvPr id="3" name="Rectangle 2"/>
+          <p:cNvSpPr/>
+          <p:nvPr/>
+        </p:nvSpPr>
+        <p:spPr>
+          <a:xfrm>
+            <a:off x="0" y="960120"/>
+            <a:ext cx="12191695" cy="41148"/>
+          </a:xfrm>
+          <a:prstGeom prst="rect">
+            <a:avLst/>
+          </a:prstGeom>
+          <a:solidFill>
+            <a:srgbClr val="FFD000"/>
+          </a:solidFill>
+          <a:ln>
+            <a:noFill/>
+          </a:ln>
+        </p:spPr>
+        <p:style>
+          <a:lnRef idx="1">
+            <a:schemeClr val="accent1"/>
+          </a:lnRef>
+          <a:fillRef idx="3">
+            <a:schemeClr val="accent1"/>
+          </a:fillRef>
+          <a:effectRef idx="2">
+            <a:schemeClr val="accent1"/>
+          </a:effectRef>
+          <a:fontRef idx="minor">
+            <a:schemeClr val="lt1"/>
+          </a:fontRef>
+        </p:style>
+        <p:txBody>
+          <a:bodyPr rtlCol="0" anchor="ctr"/>
+          <a:lstStyle/>
+          <a:p>
+            <a:pPr algn="ctr"/>
+          </a:p>
+        </p:txBody>
+      </p:sp>
+      <p:sp>
+        <p:nvSpPr>
+          <p:cNvPr id="4" name="TextBox 3"/>
+          <p:cNvSpPr txBox="1"/>
+          <p:nvPr/>
+        </p:nvSpPr>
+        <p:spPr>
+          <a:xfrm>
+            <a:off x="457200" y="164592"/>
+            <a:ext cx="11277295" cy="502920"/>
+          </a:xfrm>
+          <a:prstGeom prst="rect">
+            <a:avLst/>
+          </a:prstGeom>
+          <a:noFill/>
+        </p:spPr>
+        <p:txBody>
+          <a:bodyPr wrap="square">
+            <a:spAutoFit/>
+          </a:bodyPr>
+          <a:lstStyle/>
+          <a:p>
+            <a:r>
+              <a:rPr sz="2600" b="1" i="0">
+                <a:solidFill>
+                  <a:srgbClr val="FFFFFF"/>
+                </a:solidFill>
+                <a:latin typeface="Calibri"/>
+              </a:rPr>
+              <a:t>Qué hace bien y qué hace mal: un mapa honesto (2/2)</a:t>
+            </a:r>
+          </a:p>
+        </p:txBody>
+      </p:sp>
+      <p:sp>
+        <p:nvSpPr>
+          <p:cNvPr id="5" name="TextBox 4"/>
+          <p:cNvSpPr txBox="1"/>
+          <p:nvPr/>
+        </p:nvSpPr>
+        <p:spPr>
+          <a:xfrm>
+            <a:off x="457200" y="1170432"/>
+            <a:ext cx="11277295" cy="5230368"/>
+          </a:xfrm>
+          <a:prstGeom prst="rect">
+            <a:avLst/>
+          </a:prstGeom>
+          <a:noFill/>
+        </p:spPr>
+        <p:txBody>
+          <a:bodyPr wrap="square">
+            <a:spAutoFit/>
+          </a:bodyPr>
+          <a:lstStyle/>
+          <a:p>
+            <a:pPr>
+              <a:spcAft>
+                <a:spcPts val="800"/>
+              </a:spcAft>
+            </a:pPr>
+            <a:r>
+              <a:rPr sz="2000" b="0" i="0">
+                <a:solidFill>
+                  <a:srgbClr val="333333"/>
+                </a:solidFill>
+                <a:latin typeface="Calibri"/>
+              </a:rPr>
+              <a:t>–   Y como no lo sabe, propone para un contexto que no es el suyo. </a:t>
+            </a:r>
+            <a:r>
+              <a:rPr sz="2000" b="1" i="0">
+                <a:solidFill>
+                  <a:srgbClr val="333333"/>
+                </a:solidFill>
+                <a:latin typeface="Calibri"/>
+              </a:rPr>
+              <a:t>Hace mal: inventar con seguridad.</a:t>
+            </a:r>
+            <a:r>
+              <a:rPr sz="2000" b="0" i="0">
+                <a:solidFill>
+                  <a:srgbClr val="333333"/>
+                </a:solidFill>
+                <a:latin typeface="Calibri"/>
+              </a:rPr>
+              <a:t> Esta es la característica que hay que dejar instalada para siempre</a:t>
+            </a:r>
+          </a:p>
+          <a:p>
+            <a:pPr>
+              <a:spcAft>
+                <a:spcPts val="800"/>
+              </a:spcAft>
+            </a:pPr>
+            <a:r>
+              <a:rPr sz="2000" b="0" i="0">
+                <a:solidFill>
+                  <a:srgbClr val="333333"/>
+                </a:solidFill>
+                <a:latin typeface="Calibri"/>
+              </a:rPr>
+              <a:t>–   Y ya la vieron en la sesión 9 con las referencias bibliográficas inexistentes: </a:t>
+            </a:r>
+            <a:r>
+              <a:rPr sz="2000" b="1" i="0">
+                <a:solidFill>
+                  <a:srgbClr val="333333"/>
+                </a:solidFill>
+                <a:latin typeface="Calibri"/>
+              </a:rPr>
+              <a:t>un modelo de lenguaje genera texto plausible, y no tiene manera de señalar cuándo lo plausible es incorrecto</a:t>
+            </a:r>
+            <a:r>
+              <a:rPr sz="2000" b="0" i="0">
+                <a:solidFill>
+                  <a:srgbClr val="333333"/>
+                </a:solidFill>
+                <a:latin typeface="Calibri"/>
+              </a:rPr>
+              <a:t>.</a:t>
+            </a:r>
+          </a:p>
+          <a:p>
+            <a:pPr>
+              <a:spcAft>
+                <a:spcPts val="800"/>
+              </a:spcAft>
+            </a:pPr>
+            <a:r>
+              <a:rPr sz="2000" b="0" i="0">
+                <a:solidFill>
+                  <a:srgbClr val="333333"/>
+                </a:solidFill>
+                <a:latin typeface="Calibri"/>
+              </a:rPr>
+              <a:t>–   Va a proponer funciones que violan las restricciones del equipo y a veces la ley, con el mismo tono seguro con el que propone las buenas.</a:t>
+            </a:r>
+          </a:p>
+          <a:p>
+            <a:pPr>
+              <a:spcAft>
+                <a:spcPts val="800"/>
+              </a:spcAft>
+            </a:pPr>
+            <a:r>
+              <a:rPr sz="2000" b="0" i="0">
+                <a:solidFill>
+                  <a:srgbClr val="333333"/>
+                </a:solidFill>
+                <a:latin typeface="Calibri"/>
+              </a:rPr>
+              <a:t>–   No hay una alarma; la alarma son ustedes.</a:t>
+            </a:r>
+          </a:p>
+        </p:txBody>
+      </p:sp>
+      <p:sp>
+        <p:nvSpPr>
+          <p:cNvPr id="6" name="TextBox 5"/>
+          <p:cNvSpPr txBox="1"/>
+          <p:nvPr/>
+        </p:nvSpPr>
+        <p:spPr>
+          <a:xfrm>
+            <a:off x="11185855" y="6473952"/>
+            <a:ext cx="640080" cy="274320"/>
+          </a:xfrm>
+          <a:prstGeom prst="rect">
+            <a:avLst/>
+          </a:prstGeom>
+          <a:noFill/>
+        </p:spPr>
+        <p:txBody>
+          <a:bodyPr wrap="square">
+            <a:spAutoFit/>
+          </a:bodyPr>
+          <a:lstStyle/>
+          <a:p>
+            <a:pPr algn="r"/>
+            <a:r>
+              <a:rPr sz="1100" b="0" i="0">
+                <a:solidFill>
+                  <a:srgbClr val="666666"/>
+                </a:solidFill>
+                <a:latin typeface="Calibri"/>
+              </a:rPr>
+              <a:t>12</a:t>
+            </a:r>
+          </a:p>
+        </p:txBody>
+      </p:sp>
+    </p:spTree>
+  </p:cSld>
+  <p:clrMapOvr>
+    <a:masterClrMapping/>
+  </p:clrMapOvr>
+</p:sld>
+</file>
+
+<file path=ppt/slides/slide13.xml><?xml version="1.0" encoding="utf-8"?>
+<p:sld xmlns:a="http://schemas.openxmlformats.org/drawingml/2006/main" xmlns:p="http://schemas.openxmlformats.org/presentationml/2006/main" xmlns:r="http://schemas.openxmlformats.org/officeDocument/2006/relationships">
+  <p:cSld>
+    <p:bg>
+      <p:bgPr>
+        <a:solidFill>
+          <a:srgbClr val="FFFFFF"/>
+        </a:solidFill>
+        <a:effectLst/>
+      </p:bgPr>
+    </p:bg>
+    <p:spTree>
+      <p:nvGrpSpPr>
+        <p:cNvPr id="1" name=""/>
+        <p:cNvGrpSpPr/>
+        <p:nvPr/>
+      </p:nvGrpSpPr>
+      <p:grpSpPr/>
+      <p:sp>
+        <p:nvSpPr>
+          <p:cNvPr id="2" name="Rectangle 1"/>
+          <p:cNvSpPr/>
+          <p:nvPr/>
+        </p:nvSpPr>
+        <p:spPr>
+          <a:xfrm>
+            <a:off x="0" y="0"/>
+            <a:ext cx="12191695" cy="960120"/>
+          </a:xfrm>
+          <a:prstGeom prst="rect">
+            <a:avLst/>
+          </a:prstGeom>
+          <a:solidFill>
+            <a:srgbClr val="095292"/>
+          </a:solidFill>
+          <a:ln>
+            <a:noFill/>
+          </a:ln>
+        </p:spPr>
+        <p:style>
+          <a:lnRef idx="1">
+            <a:schemeClr val="accent1"/>
+          </a:lnRef>
+          <a:fillRef idx="3">
+            <a:schemeClr val="accent1"/>
+          </a:fillRef>
+          <a:effectRef idx="2">
+            <a:schemeClr val="accent1"/>
+          </a:effectRef>
+          <a:fontRef idx="minor">
+            <a:schemeClr val="lt1"/>
+          </a:fontRef>
+        </p:style>
+        <p:txBody>
+          <a:bodyPr rtlCol="0" anchor="ctr"/>
+          <a:lstStyle/>
+          <a:p>
+            <a:pPr algn="ctr"/>
+          </a:p>
+        </p:txBody>
+      </p:sp>
+      <p:sp>
+        <p:nvSpPr>
+          <p:cNvPr id="3" name="Rectangle 2"/>
+          <p:cNvSpPr/>
+          <p:nvPr/>
+        </p:nvSpPr>
+        <p:spPr>
+          <a:xfrm>
+            <a:off x="0" y="960120"/>
+            <a:ext cx="12191695" cy="41148"/>
+          </a:xfrm>
+          <a:prstGeom prst="rect">
+            <a:avLst/>
+          </a:prstGeom>
+          <a:solidFill>
+            <a:srgbClr val="FFD000"/>
+          </a:solidFill>
+          <a:ln>
+            <a:noFill/>
+          </a:ln>
+        </p:spPr>
+        <p:style>
+          <a:lnRef idx="1">
+            <a:schemeClr val="accent1"/>
+          </a:lnRef>
+          <a:fillRef idx="3">
+            <a:schemeClr val="accent1"/>
+          </a:fillRef>
+          <a:effectRef idx="2">
+            <a:schemeClr val="accent1"/>
+          </a:effectRef>
+          <a:fontRef idx="minor">
+            <a:schemeClr val="lt1"/>
+          </a:fontRef>
+        </p:style>
+        <p:txBody>
+          <a:bodyPr rtlCol="0" anchor="ctr"/>
+          <a:lstStyle/>
+          <a:p>
+            <a:pPr algn="ctr"/>
+          </a:p>
+        </p:txBody>
+      </p:sp>
+      <p:sp>
+        <p:nvSpPr>
+          <p:cNvPr id="4" name="TextBox 3"/>
+          <p:cNvSpPr txBox="1"/>
+          <p:nvPr/>
+        </p:nvSpPr>
+        <p:spPr>
+          <a:xfrm>
+            <a:off x="457200" y="164592"/>
+            <a:ext cx="11277295" cy="502920"/>
+          </a:xfrm>
+          <a:prstGeom prst="rect">
+            <a:avLst/>
+          </a:prstGeom>
+          <a:noFill/>
+        </p:spPr>
+        <p:txBody>
+          <a:bodyPr wrap="square">
+            <a:spAutoFit/>
+          </a:bodyPr>
+          <a:lstStyle/>
+          <a:p>
+            <a:r>
+              <a:rPr sz="2600" b="1" i="0">
+                <a:solidFill>
+                  <a:srgbClr val="FFFFFF"/>
+                </a:solidFill>
+                <a:latin typeface="Calibri"/>
+              </a:rPr>
+              <a:t>El método: cinco pasos y por qué el primero decide todo (1/2)</a:t>
+            </a:r>
+          </a:p>
+        </p:txBody>
+      </p:sp>
+      <p:sp>
+        <p:nvSpPr>
+          <p:cNvPr id="5" name="TextBox 4"/>
+          <p:cNvSpPr txBox="1"/>
+          <p:nvPr/>
+        </p:nvSpPr>
+        <p:spPr>
+          <a:xfrm>
+            <a:off x="457200" y="1170432"/>
+            <a:ext cx="11277295" cy="5230368"/>
+          </a:xfrm>
+          <a:prstGeom prst="rect">
+            <a:avLst/>
+          </a:prstGeom>
+          <a:noFill/>
+        </p:spPr>
+        <p:txBody>
+          <a:bodyPr wrap="square">
+            <a:spAutoFit/>
+          </a:bodyPr>
+          <a:lstStyle/>
+          <a:p>
+            <a:pPr>
+              <a:spcAft>
+                <a:spcPts val="800"/>
+              </a:spcAft>
+            </a:pPr>
+            <a:r>
+              <a:rPr sz="1900" b="0" i="0">
+                <a:solidFill>
+                  <a:srgbClr val="333333"/>
+                </a:solidFill>
+                <a:latin typeface="Calibri"/>
+              </a:rPr>
+              <a:t>–   </a:t>
+            </a:r>
+            <a:r>
+              <a:rPr sz="1900" b="1" i="0">
+                <a:solidFill>
+                  <a:srgbClr val="333333"/>
+                </a:solidFill>
+                <a:latin typeface="Calibri"/>
+              </a:rPr>
+              <a:t>Paso 1: dar el contexto que no puede saber</a:t>
+            </a:r>
+            <a:r>
+              <a:rPr sz="1900" b="0" i="0">
+                <a:solidFill>
+                  <a:srgbClr val="333333"/>
+                </a:solidFill>
+                <a:latin typeface="Calibri"/>
+              </a:rPr>
+              <a:t> — el problema en una frase de la sesión 6, quién lo usa, y las restricciones.</a:t>
+            </a:r>
+          </a:p>
+          <a:p>
+            <a:pPr>
+              <a:spcAft>
+                <a:spcPts val="800"/>
+              </a:spcAft>
+            </a:pPr>
+            <a:r>
+              <a:rPr sz="1900" b="0" i="0">
+                <a:solidFill>
+                  <a:srgbClr val="333333"/>
+                </a:solidFill>
+                <a:latin typeface="Calibri"/>
+              </a:rPr>
+              <a:t>–   Es el paso que decide la calidad de todo lo demás, y el que los estudiantes se saltan.</a:t>
+            </a:r>
+          </a:p>
+          <a:p>
+            <a:pPr>
+              <a:spcAft>
+                <a:spcPts val="800"/>
+              </a:spcAft>
+            </a:pPr>
+            <a:r>
+              <a:rPr sz="1900" b="0" i="0">
+                <a:solidFill>
+                  <a:srgbClr val="333333"/>
+                </a:solidFill>
+                <a:latin typeface="Calibri"/>
+              </a:rPr>
+              <a:t>–   La diferencia entre «mejora esta pantalla de biblioteca» y un prompt de diez líneas con las cuatro restricciones escritas no es de grado: es la diferencia entre recibir la solución promedio de internet y recibir tres opciones aplicables. </a:t>
+            </a:r>
+            <a:r>
+              <a:rPr sz="1900" b="1" i="0">
+                <a:solidFill>
+                  <a:srgbClr val="333333"/>
+                </a:solidFill>
+                <a:latin typeface="Calibri"/>
+              </a:rPr>
+              <a:t>Paso 2: pedir variantes, no una respuesta.</a:t>
+            </a:r>
+            <a:r>
+              <a:rPr sz="1900" b="0" i="0">
+                <a:solidFill>
+                  <a:srgbClr val="333333"/>
+                </a:solidFill>
+                <a:latin typeface="Calibri"/>
+              </a:rPr>
+              <a:t> «Dame tres maneras distintas de…».</a:t>
+            </a:r>
+          </a:p>
+          <a:p>
+            <a:pPr>
+              <a:spcAft>
+                <a:spcPts val="800"/>
+              </a:spcAft>
+            </a:pPr>
+            <a:r>
+              <a:rPr sz="1900" b="0" i="0">
+                <a:solidFill>
+                  <a:srgbClr val="333333"/>
+                </a:solidFill>
+                <a:latin typeface="Calibri"/>
+              </a:rPr>
+              <a:t>–   El argumento es psicológico y hay que decirlo: una sola respuesta invita a aceptarla —está ahí, está completa, está bien escrita—; tres obligan a comparar, y comparar es donde ellos aportan.</a:t>
+            </a:r>
+          </a:p>
+          <a:p>
+            <a:pPr>
+              <a:spcAft>
+                <a:spcPts val="800"/>
+              </a:spcAft>
+            </a:pPr>
+            <a:r>
+              <a:rPr sz="1900" b="0" i="0">
+                <a:solidFill>
+                  <a:srgbClr val="333333"/>
+                </a:solidFill>
+                <a:latin typeface="Calibri"/>
+              </a:rPr>
+              <a:t>–   Es la matriz de decisión de la sesión 8 aplicada a lo que devuelve un asistente. </a:t>
+            </a:r>
+            <a:r>
+              <a:rPr sz="1900" b="1" i="0">
+                <a:solidFill>
+                  <a:srgbClr val="333333"/>
+                </a:solidFill>
+                <a:latin typeface="Calibri"/>
+              </a:rPr>
+              <a:t>Paso 3: prohibir explícitamente lo prohibido.</a:t>
+            </a:r>
+            <a:r>
+              <a:rPr sz="1900" b="0" i="0">
+                <a:solidFill>
+                  <a:srgbClr val="333333"/>
+                </a:solidFill>
+                <a:latin typeface="Calibri"/>
+              </a:rPr>
+              <a:t> «Sin crear cuentas de usuario</a:t>
+            </a:r>
+          </a:p>
+          <a:p>
+            <a:pPr>
+              <a:spcAft>
+                <a:spcPts val="800"/>
+              </a:spcAft>
+            </a:pPr>
+            <a:r>
+              <a:rPr sz="1900" b="0" i="0">
+                <a:solidFill>
+                  <a:srgbClr val="333333"/>
+                </a:solidFill>
+                <a:latin typeface="Calibri"/>
+              </a:rPr>
+              <a:t>–   Sin pedir datos personales, sin instalar nada, sin imágenes.» La regla en cuatro palabras: </a:t>
+            </a:r>
+            <a:r>
+              <a:rPr sz="1900" b="1" i="0">
+                <a:solidFill>
+                  <a:srgbClr val="333333"/>
+                </a:solidFill>
+                <a:latin typeface="Calibri"/>
+              </a:rPr>
+              <a:t>si no lo dice, lo va a proponer</a:t>
+            </a:r>
+            <a:r>
+              <a:rPr sz="1900" b="0" i="0">
+                <a:solidFill>
+                  <a:srgbClr val="333333"/>
+                </a:solidFill>
+                <a:latin typeface="Calibri"/>
+              </a:rPr>
+              <a:t>.</a:t>
+            </a:r>
+          </a:p>
+          <a:p>
+            <a:pPr>
+              <a:spcAft>
+                <a:spcPts val="800"/>
+              </a:spcAft>
+            </a:pPr>
+            <a:r>
+              <a:rPr sz="1900" b="0" i="0">
+                <a:solidFill>
+                  <a:srgbClr val="333333"/>
+                </a:solidFill>
+                <a:latin typeface="Calibri"/>
+              </a:rPr>
+              <a:t>–   Y aquí hay una lección de ingeniería más general que vale la pena señalar: los requisitos no funcionales que escribieron en la sesión 7 son precisamente lo que hay que poner en el prompt, porque son lo que el mundo no adivina.</a:t>
+            </a:r>
+          </a:p>
+        </p:txBody>
+      </p:sp>
+      <p:sp>
+        <p:nvSpPr>
+          <p:cNvPr id="6" name="TextBox 5"/>
+          <p:cNvSpPr txBox="1"/>
+          <p:nvPr/>
+        </p:nvSpPr>
+        <p:spPr>
+          <a:xfrm>
+            <a:off x="11185855" y="6473952"/>
+            <a:ext cx="640080" cy="274320"/>
+          </a:xfrm>
+          <a:prstGeom prst="rect">
+            <a:avLst/>
+          </a:prstGeom>
+          <a:noFill/>
+        </p:spPr>
+        <p:txBody>
+          <a:bodyPr wrap="square">
+            <a:spAutoFit/>
+          </a:bodyPr>
+          <a:lstStyle/>
+          <a:p>
+            <a:pPr algn="r"/>
+            <a:r>
+              <a:rPr sz="1100" b="0" i="0">
+                <a:solidFill>
+                  <a:srgbClr val="666666"/>
+                </a:solidFill>
+                <a:latin typeface="Calibri"/>
+              </a:rPr>
+              <a:t>13</a:t>
+            </a:r>
+          </a:p>
+        </p:txBody>
+      </p:sp>
+    </p:spTree>
+  </p:cSld>
+  <p:clrMapOvr>
+    <a:masterClrMapping/>
+  </p:clrMapOvr>
+</p:sld>
+</file>
+
+<file path=ppt/slides/slide14.xml><?xml version="1.0" encoding="utf-8"?>
+<p:sld xmlns:a="http://schemas.openxmlformats.org/drawingml/2006/main" xmlns:p="http://schemas.openxmlformats.org/presentationml/2006/main" xmlns:r="http://schemas.openxmlformats.org/officeDocument/2006/relationships">
+  <p:cSld>
+    <p:bg>
+      <p:bgPr>
+        <a:solidFill>
+          <a:srgbClr val="FFFFFF"/>
+        </a:solidFill>
+        <a:effectLst/>
+      </p:bgPr>
+    </p:bg>
+    <p:spTree>
+      <p:nvGrpSpPr>
+        <p:cNvPr id="1" name=""/>
+        <p:cNvGrpSpPr/>
+        <p:nvPr/>
+      </p:nvGrpSpPr>
+      <p:grpSpPr/>
+      <p:sp>
+        <p:nvSpPr>
+          <p:cNvPr id="2" name="Rectangle 1"/>
+          <p:cNvSpPr/>
+          <p:nvPr/>
+        </p:nvSpPr>
+        <p:spPr>
+          <a:xfrm>
+            <a:off x="0" y="0"/>
+            <a:ext cx="12191695" cy="960120"/>
+          </a:xfrm>
+          <a:prstGeom prst="rect">
+            <a:avLst/>
+          </a:prstGeom>
+          <a:solidFill>
+            <a:srgbClr val="095292"/>
+          </a:solidFill>
+          <a:ln>
+            <a:noFill/>
+          </a:ln>
+        </p:spPr>
+        <p:style>
+          <a:lnRef idx="1">
+            <a:schemeClr val="accent1"/>
+          </a:lnRef>
+          <a:fillRef idx="3">
+            <a:schemeClr val="accent1"/>
+          </a:fillRef>
+          <a:effectRef idx="2">
+            <a:schemeClr val="accent1"/>
+          </a:effectRef>
+          <a:fontRef idx="minor">
+            <a:schemeClr val="lt1"/>
+          </a:fontRef>
+        </p:style>
+        <p:txBody>
+          <a:bodyPr rtlCol="0" anchor="ctr"/>
+          <a:lstStyle/>
+          <a:p>
+            <a:pPr algn="ctr"/>
+          </a:p>
+        </p:txBody>
+      </p:sp>
+      <p:sp>
+        <p:nvSpPr>
+          <p:cNvPr id="3" name="Rectangle 2"/>
+          <p:cNvSpPr/>
+          <p:nvPr/>
+        </p:nvSpPr>
+        <p:spPr>
+          <a:xfrm>
+            <a:off x="0" y="960120"/>
+            <a:ext cx="12191695" cy="41148"/>
+          </a:xfrm>
+          <a:prstGeom prst="rect">
+            <a:avLst/>
+          </a:prstGeom>
+          <a:solidFill>
+            <a:srgbClr val="FFD000"/>
+          </a:solidFill>
+          <a:ln>
+            <a:noFill/>
+          </a:ln>
+        </p:spPr>
+        <p:style>
+          <a:lnRef idx="1">
+            <a:schemeClr val="accent1"/>
+          </a:lnRef>
+          <a:fillRef idx="3">
+            <a:schemeClr val="accent1"/>
+          </a:fillRef>
+          <a:effectRef idx="2">
+            <a:schemeClr val="accent1"/>
+          </a:effectRef>
+          <a:fontRef idx="minor">
+            <a:schemeClr val="lt1"/>
+          </a:fontRef>
+        </p:style>
+        <p:txBody>
+          <a:bodyPr rtlCol="0" anchor="ctr"/>
+          <a:lstStyle/>
+          <a:p>
+            <a:pPr algn="ctr"/>
+          </a:p>
+        </p:txBody>
+      </p:sp>
+      <p:sp>
+        <p:nvSpPr>
+          <p:cNvPr id="4" name="TextBox 3"/>
+          <p:cNvSpPr txBox="1"/>
+          <p:nvPr/>
+        </p:nvSpPr>
+        <p:spPr>
+          <a:xfrm>
+            <a:off x="457200" y="164592"/>
+            <a:ext cx="11277295" cy="502920"/>
+          </a:xfrm>
+          <a:prstGeom prst="rect">
+            <a:avLst/>
+          </a:prstGeom>
+          <a:noFill/>
+        </p:spPr>
+        <p:txBody>
+          <a:bodyPr wrap="square">
+            <a:spAutoFit/>
+          </a:bodyPr>
+          <a:lstStyle/>
+          <a:p>
+            <a:r>
+              <a:rPr sz="2600" b="1" i="0">
+                <a:solidFill>
+                  <a:srgbClr val="FFFFFF"/>
+                </a:solidFill>
+                <a:latin typeface="Calibri"/>
+              </a:rPr>
+              <a:t>El método: cinco pasos y por qué el primero decide todo (2/2)</a:t>
+            </a:r>
+          </a:p>
+        </p:txBody>
+      </p:sp>
+      <p:sp>
+        <p:nvSpPr>
+          <p:cNvPr id="5" name="TextBox 4"/>
+          <p:cNvSpPr txBox="1"/>
+          <p:nvPr/>
+        </p:nvSpPr>
+        <p:spPr>
+          <a:xfrm>
+            <a:off x="457200" y="1170432"/>
+            <a:ext cx="11277295" cy="5230368"/>
+          </a:xfrm>
+          <a:prstGeom prst="rect">
+            <a:avLst/>
+          </a:prstGeom>
+          <a:noFill/>
+        </p:spPr>
+        <p:txBody>
+          <a:bodyPr wrap="square">
+            <a:spAutoFit/>
+          </a:bodyPr>
+          <a:lstStyle/>
+          <a:p>
+            <a:pPr>
+              <a:spcAft>
+                <a:spcPts val="800"/>
+              </a:spcAft>
+            </a:pPr>
+            <a:r>
+              <a:rPr sz="2000" b="0" i="0">
+                <a:solidFill>
+                  <a:srgbClr val="333333"/>
+                </a:solidFill>
+                <a:latin typeface="Calibri"/>
+              </a:rPr>
+              <a:t>–   Un equipo que tiene sus requisitos no funcionales escritos hace un prompt bueno sin esfuerzo; uno que no los tiene, no puede. </a:t>
+            </a:r>
+            <a:r>
+              <a:rPr sz="2000" b="1" i="0">
+                <a:solidFill>
+                  <a:srgbClr val="333333"/>
+                </a:solidFill>
+                <a:latin typeface="Calibri"/>
+              </a:rPr>
+              <a:t>Paso 4: corregir a mano y anotar qué se corrigió.</a:t>
+            </a:r>
+            <a:r>
+              <a:rPr sz="2000" b="0" i="0">
+                <a:solidFill>
+                  <a:srgbClr val="333333"/>
+                </a:solidFill>
+                <a:latin typeface="Calibri"/>
+              </a:rPr>
+              <a:t> Esa lista </a:t>
+            </a:r>
+            <a:r>
+              <a:rPr sz="2000" b="1" i="0">
+                <a:solidFill>
+                  <a:srgbClr val="333333"/>
+                </a:solidFill>
+                <a:latin typeface="Calibri"/>
+              </a:rPr>
+              <a:t>es el entregable</a:t>
+            </a:r>
+          </a:p>
+          <a:p>
+            <a:pPr>
+              <a:spcAft>
+                <a:spcPts val="800"/>
+              </a:spcAft>
+            </a:pPr>
+            <a:r>
+              <a:rPr sz="2000" b="0" i="0">
+                <a:solidFill>
+                  <a:srgbClr val="333333"/>
+                </a:solidFill>
+                <a:latin typeface="Calibri"/>
+              </a:rPr>
+              <a:t>–   Y hay que decirlo sin ambigüedad porque cambia cómo trabajan: es la prueba de que pensaron, y es lo que más pesa en la rúbrica de hoy —30 de 100—.</a:t>
+            </a:r>
+          </a:p>
+          <a:p>
+            <a:pPr>
+              <a:spcAft>
+                <a:spcPts val="800"/>
+              </a:spcAft>
+            </a:pPr>
+            <a:r>
+              <a:rPr sz="2000" b="0" i="0">
+                <a:solidFill>
+                  <a:srgbClr val="333333"/>
+                </a:solidFill>
+                <a:latin typeface="Calibri"/>
+              </a:rPr>
+              <a:t>–   Un equipo que no corrigió nada no usó el asistente: lo obedeció. </a:t>
+            </a:r>
+            <a:r>
+              <a:rPr sz="2000" b="1" i="0">
+                <a:solidFill>
+                  <a:srgbClr val="333333"/>
+                </a:solidFill>
+                <a:latin typeface="Calibri"/>
+              </a:rPr>
+              <a:t>Paso 5: declarar el uso.</a:t>
+            </a:r>
+            <a:r>
+              <a:rPr sz="2000" b="0" i="0">
+                <a:solidFill>
+                  <a:srgbClr val="333333"/>
+                </a:solidFill>
+                <a:latin typeface="Calibri"/>
+              </a:rPr>
+              <a:t> Qué asistente, para qué, qué se aceptó y qué se descartó.</a:t>
+            </a:r>
+          </a:p>
+          <a:p>
+            <a:pPr>
+              <a:spcAft>
+                <a:spcPts val="800"/>
+              </a:spcAft>
+            </a:pPr>
+            <a:r>
+              <a:rPr sz="2000" b="0" i="0">
+                <a:solidFill>
+                  <a:srgbClr val="333333"/>
+                </a:solidFill>
+                <a:latin typeface="Calibri"/>
+              </a:rPr>
+              <a:t>–   El encuadre correcto no es de sospecha sino de profesión: </a:t>
+            </a:r>
+            <a:r>
+              <a:rPr sz="2000" b="1" i="0">
+                <a:solidFill>
+                  <a:srgbClr val="333333"/>
+                </a:solidFill>
+                <a:latin typeface="Calibri"/>
+              </a:rPr>
+              <a:t>declarar el uso de una herramienta es lo normal en ingeniería</a:t>
+            </a:r>
+            <a:r>
+              <a:rPr sz="2000" b="0" i="0">
+                <a:solidFill>
+                  <a:srgbClr val="333333"/>
+                </a:solidFill>
+                <a:latin typeface="Calibri"/>
+              </a:rPr>
+              <a:t> —nadie esconde que usó una calculadora o una biblioteca de código—, y esconderlo es lo que constituye la falta.</a:t>
+            </a:r>
+          </a:p>
+          <a:p>
+            <a:pPr>
+              <a:spcAft>
+                <a:spcPts val="800"/>
+              </a:spcAft>
+            </a:pPr>
+            <a:r>
+              <a:rPr sz="2000" b="0" i="0">
+                <a:solidFill>
+                  <a:srgbClr val="333333"/>
+                </a:solidFill>
+                <a:latin typeface="Calibri"/>
+              </a:rPr>
+              <a:t>–   En la vida laboral esto ya es requisito en muchas organizaciones, y acostumbrarse ahora les ahorra un problema después.</a:t>
+            </a:r>
+          </a:p>
+        </p:txBody>
+      </p:sp>
+      <p:sp>
+        <p:nvSpPr>
+          <p:cNvPr id="6" name="TextBox 5"/>
+          <p:cNvSpPr txBox="1"/>
+          <p:nvPr/>
+        </p:nvSpPr>
+        <p:spPr>
+          <a:xfrm>
+            <a:off x="11185855" y="6473952"/>
+            <a:ext cx="640080" cy="274320"/>
+          </a:xfrm>
+          <a:prstGeom prst="rect">
+            <a:avLst/>
+          </a:prstGeom>
+          <a:noFill/>
+        </p:spPr>
+        <p:txBody>
+          <a:bodyPr wrap="square">
+            <a:spAutoFit/>
+          </a:bodyPr>
+          <a:lstStyle/>
+          <a:p>
+            <a:pPr algn="r"/>
+            <a:r>
+              <a:rPr sz="1100" b="0" i="0">
+                <a:solidFill>
+                  <a:srgbClr val="666666"/>
+                </a:solidFill>
+                <a:latin typeface="Calibri"/>
+              </a:rPr>
+              <a:t>14</a:t>
+            </a:r>
+          </a:p>
+        </p:txBody>
+      </p:sp>
+    </p:spTree>
+  </p:cSld>
+  <p:clrMapOvr>
+    <a:masterClrMapping/>
+  </p:clrMapOvr>
+</p:sld>
+</file>
+
+<file path=ppt/slides/slide15.xml><?xml version="1.0" encoding="utf-8"?>
+<p:sld xmlns:a="http://schemas.openxmlformats.org/drawingml/2006/main" xmlns:p="http://schemas.openxmlformats.org/presentationml/2006/main" xmlns:r="http://schemas.openxmlformats.org/officeDocument/2006/relationships">
+  <p:cSld>
+    <p:bg>
+      <p:bgPr>
+        <a:solidFill>
+          <a:srgbClr val="FFFFFF"/>
+        </a:solidFill>
+        <a:effectLst/>
+      </p:bgPr>
+    </p:bg>
+    <p:spTree>
+      <p:nvGrpSpPr>
+        <p:cNvPr id="1" name=""/>
+        <p:cNvGrpSpPr/>
+        <p:nvPr/>
+      </p:nvGrpSpPr>
+      <p:grpSpPr/>
+      <p:sp>
+        <p:nvSpPr>
+          <p:cNvPr id="2" name="Rectangle 1"/>
+          <p:cNvSpPr/>
+          <p:nvPr/>
+        </p:nvSpPr>
+        <p:spPr>
+          <a:xfrm>
+            <a:off x="0" y="0"/>
+            <a:ext cx="12191695" cy="960120"/>
+          </a:xfrm>
+          <a:prstGeom prst="rect">
+            <a:avLst/>
+          </a:prstGeom>
+          <a:solidFill>
+            <a:srgbClr val="095292"/>
+          </a:solidFill>
+          <a:ln>
+            <a:noFill/>
+          </a:ln>
+        </p:spPr>
+        <p:style>
+          <a:lnRef idx="1">
+            <a:schemeClr val="accent1"/>
+          </a:lnRef>
+          <a:fillRef idx="3">
+            <a:schemeClr val="accent1"/>
+          </a:fillRef>
+          <a:effectRef idx="2">
+            <a:schemeClr val="accent1"/>
+          </a:effectRef>
+          <a:fontRef idx="minor">
+            <a:schemeClr val="lt1"/>
+          </a:fontRef>
+        </p:style>
+        <p:txBody>
+          <a:bodyPr rtlCol="0" anchor="ctr"/>
+          <a:lstStyle/>
+          <a:p>
+            <a:pPr algn="ctr"/>
+          </a:p>
+        </p:txBody>
+      </p:sp>
+      <p:sp>
+        <p:nvSpPr>
+          <p:cNvPr id="3" name="Rectangle 2"/>
+          <p:cNvSpPr/>
+          <p:nvPr/>
+        </p:nvSpPr>
+        <p:spPr>
+          <a:xfrm>
+            <a:off x="0" y="960120"/>
+            <a:ext cx="12191695" cy="41148"/>
+          </a:xfrm>
+          <a:prstGeom prst="rect">
+            <a:avLst/>
+          </a:prstGeom>
+          <a:solidFill>
+            <a:srgbClr val="FFD000"/>
+          </a:solidFill>
+          <a:ln>
+            <a:noFill/>
+          </a:ln>
+        </p:spPr>
+        <p:style>
+          <a:lnRef idx="1">
+            <a:schemeClr val="accent1"/>
+          </a:lnRef>
+          <a:fillRef idx="3">
+            <a:schemeClr val="accent1"/>
+          </a:fillRef>
+          <a:effectRef idx="2">
+            <a:schemeClr val="accent1"/>
+          </a:effectRef>
+          <a:fontRef idx="minor">
+            <a:schemeClr val="lt1"/>
+          </a:fontRef>
+        </p:style>
+        <p:txBody>
+          <a:bodyPr rtlCol="0" anchor="ctr"/>
+          <a:lstStyle/>
+          <a:p>
+            <a:pPr algn="ctr"/>
+          </a:p>
+        </p:txBody>
+      </p:sp>
+      <p:sp>
+        <p:nvSpPr>
+          <p:cNvPr id="4" name="TextBox 3"/>
+          <p:cNvSpPr txBox="1"/>
+          <p:nvPr/>
+        </p:nvSpPr>
+        <p:spPr>
+          <a:xfrm>
+            <a:off x="457200" y="164592"/>
+            <a:ext cx="11277295" cy="502920"/>
+          </a:xfrm>
+          <a:prstGeom prst="rect">
+            <a:avLst/>
+          </a:prstGeom>
+          <a:noFill/>
+        </p:spPr>
+        <p:txBody>
+          <a:bodyPr wrap="square">
+            <a:spAutoFit/>
+          </a:bodyPr>
+          <a:lstStyle/>
+          <a:p>
+            <a:r>
+              <a:rPr sz="2600" b="1" i="0">
+                <a:solidFill>
+                  <a:srgbClr val="FFFFFF"/>
+                </a:solidFill>
+                <a:latin typeface="Calibri"/>
+              </a:rPr>
+              <a:t>El antes y después, y cómo cierra el corte (1/2)</a:t>
+            </a:r>
+          </a:p>
+        </p:txBody>
+      </p:sp>
+      <p:sp>
+        <p:nvSpPr>
+          <p:cNvPr id="5" name="TextBox 4"/>
+          <p:cNvSpPr txBox="1"/>
+          <p:nvPr/>
+        </p:nvSpPr>
+        <p:spPr>
+          <a:xfrm>
+            <a:off x="457200" y="1170432"/>
+            <a:ext cx="11277295" cy="5230368"/>
+          </a:xfrm>
+          <a:prstGeom prst="rect">
+            <a:avLst/>
+          </a:prstGeom>
+          <a:noFill/>
+        </p:spPr>
+        <p:txBody>
+          <a:bodyPr wrap="square">
+            <a:spAutoFit/>
+          </a:bodyPr>
+          <a:lstStyle/>
+          <a:p>
+            <a:pPr>
+              <a:spcAft>
+                <a:spcPts val="800"/>
+              </a:spcAft>
+            </a:pPr>
+            <a:r>
+              <a:rPr sz="2000" b="0" i="0">
+                <a:solidFill>
+                  <a:srgbClr val="333333"/>
+                </a:solidFill>
+                <a:latin typeface="Calibri"/>
+              </a:rPr>
+              <a:t>–   La diapositiva de antes y después es el corazón didáctico de la sesión, y hay que recorrerla con una insistencia: </a:t>
+            </a:r>
+            <a:r>
+              <a:rPr sz="2000" b="1" i="0">
+                <a:solidFill>
+                  <a:srgbClr val="333333"/>
+                </a:solidFill>
+                <a:latin typeface="Calibri"/>
+              </a:rPr>
+              <a:t>ninguna de las cinco propuestas del asistente era absurda</a:t>
+            </a:r>
+            <a:r>
+              <a:rPr sz="2000" b="0" i="0">
+                <a:solidFill>
+                  <a:srgbClr val="333333"/>
+                </a:solidFill>
+                <a:latin typeface="Calibri"/>
+              </a:rPr>
+              <a:t>.</a:t>
+            </a:r>
+          </a:p>
+          <a:p>
+            <a:pPr>
+              <a:spcAft>
+                <a:spcPts val="800"/>
+              </a:spcAft>
+            </a:pPr>
+            <a:r>
+              <a:rPr sz="2000" b="0" i="0">
+                <a:solidFill>
+                  <a:srgbClr val="333333"/>
+                </a:solidFill>
+                <a:latin typeface="Calibri"/>
+              </a:rPr>
+              <a:t>–   Cuentas de usuario, avisos por correo, reservas con historial, portadas, y un mensaje de error estándar: las cinco están en sistemas reales de bibliotecas en todo el mundo. </a:t>
+            </a:r>
+            <a:r>
+              <a:rPr sz="2000" b="1" i="0">
+                <a:solidFill>
+                  <a:srgbClr val="333333"/>
+                </a:solidFill>
+                <a:latin typeface="Calibri"/>
+              </a:rPr>
+              <a:t>Las cinco eran incorrectas para este proyecto</a:t>
+            </a:r>
+          </a:p>
+          <a:p>
+            <a:pPr>
+              <a:spcAft>
+                <a:spcPts val="800"/>
+              </a:spcAft>
+            </a:pPr>
+            <a:r>
+              <a:rPr sz="2000" b="0" i="0">
+                <a:solidFill>
+                  <a:srgbClr val="333333"/>
+                </a:solidFill>
+                <a:latin typeface="Calibri"/>
+              </a:rPr>
+              <a:t>–   Y cada una por una razón distinta que el equipo ya había escrito en una sesión anterior — el requisito «sin cuenta» de la sesión 7</a:t>
+            </a:r>
+          </a:p>
+          <a:p>
+            <a:pPr>
+              <a:spcAft>
+                <a:spcPts val="800"/>
+              </a:spcAft>
+            </a:pPr>
+            <a:r>
+              <a:rPr sz="2000" b="0" i="0">
+                <a:solidFill>
+                  <a:srgbClr val="333333"/>
+                </a:solidFill>
+                <a:latin typeface="Calibri"/>
+              </a:rPr>
+              <a:t>–   La Ley 1581 de la sesión 4, el alcance mínimo de la sesión 8, el límite de 200 KB de la sesión 5, y la regla de mensajes con salida de la sesión 10.</a:t>
+            </a:r>
+          </a:p>
+          <a:p>
+            <a:pPr>
+              <a:spcAft>
+                <a:spcPts val="800"/>
+              </a:spcAft>
+            </a:pPr>
+            <a:r>
+              <a:rPr sz="2000" b="0" i="0">
+                <a:solidFill>
+                  <a:srgbClr val="333333"/>
+                </a:solidFill>
+                <a:latin typeface="Calibri"/>
+              </a:rPr>
+              <a:t>–   Ese es el hallazgo que hay que dejar dicho en voz alta, porque justifica todo el corte: </a:t>
+            </a:r>
+            <a:r>
+              <a:rPr sz="2000" b="1" i="0">
+                <a:solidFill>
+                  <a:srgbClr val="333333"/>
+                </a:solidFill>
+                <a:latin typeface="Calibri"/>
+              </a:rPr>
+              <a:t>el equipo pudo corregir al asistente porque tenía sus decisiones escritas.</a:t>
+            </a:r>
+            <a:r>
+              <a:rPr sz="2000" b="0" i="0">
+                <a:solidFill>
+                  <a:srgbClr val="333333"/>
+                </a:solidFill>
+                <a:latin typeface="Calibri"/>
+              </a:rPr>
+              <a:t> Un equipo sin requisitos no funcionales</a:t>
+            </a:r>
+          </a:p>
+          <a:p>
+            <a:pPr>
+              <a:spcAft>
+                <a:spcPts val="800"/>
+              </a:spcAft>
+            </a:pPr>
+            <a:r>
+              <a:rPr sz="2000" b="0" i="0">
+                <a:solidFill>
+                  <a:srgbClr val="333333"/>
+                </a:solidFill>
+                <a:latin typeface="Calibri"/>
+              </a:rPr>
+              <a:t>–   Sin alcance definido y sin indicador ambiental no habría tenido con qué objetar, y habría aceptado las cinco.</a:t>
+            </a:r>
+          </a:p>
+        </p:txBody>
+      </p:sp>
+      <p:sp>
+        <p:nvSpPr>
+          <p:cNvPr id="6" name="TextBox 5"/>
+          <p:cNvSpPr txBox="1"/>
+          <p:nvPr/>
+        </p:nvSpPr>
+        <p:spPr>
+          <a:xfrm>
+            <a:off x="11185855" y="6473952"/>
+            <a:ext cx="640080" cy="274320"/>
+          </a:xfrm>
+          <a:prstGeom prst="rect">
+            <a:avLst/>
+          </a:prstGeom>
+          <a:noFill/>
+        </p:spPr>
+        <p:txBody>
+          <a:bodyPr wrap="square">
+            <a:spAutoFit/>
+          </a:bodyPr>
+          <a:lstStyle/>
+          <a:p>
+            <a:pPr algn="r"/>
+            <a:r>
+              <a:rPr sz="1100" b="0" i="0">
+                <a:solidFill>
+                  <a:srgbClr val="666666"/>
+                </a:solidFill>
+                <a:latin typeface="Calibri"/>
+              </a:rPr>
+              <a:t>15</a:t>
+            </a:r>
+          </a:p>
+        </p:txBody>
+      </p:sp>
+    </p:spTree>
+  </p:cSld>
+  <p:clrMapOvr>
+    <a:masterClrMapping/>
+  </p:clrMapOvr>
+</p:sld>
+</file>
+
+<file path=ppt/slides/slide16.xml><?xml version="1.0" encoding="utf-8"?>
+<p:sld xmlns:a="http://schemas.openxmlformats.org/drawingml/2006/main" xmlns:p="http://schemas.openxmlformats.org/presentationml/2006/main" xmlns:r="http://schemas.openxmlformats.org/officeDocument/2006/relationships">
+  <p:cSld>
+    <p:bg>
+      <p:bgPr>
+        <a:solidFill>
+          <a:srgbClr val="FFFFFF"/>
+        </a:solidFill>
+        <a:effectLst/>
+      </p:bgPr>
+    </p:bg>
+    <p:spTree>
+      <p:nvGrpSpPr>
+        <p:cNvPr id="1" name=""/>
+        <p:cNvGrpSpPr/>
+        <p:nvPr/>
+      </p:nvGrpSpPr>
+      <p:grpSpPr/>
+      <p:sp>
+        <p:nvSpPr>
+          <p:cNvPr id="2" name="Rectangle 1"/>
+          <p:cNvSpPr/>
+          <p:nvPr/>
+        </p:nvSpPr>
+        <p:spPr>
+          <a:xfrm>
+            <a:off x="0" y="0"/>
+            <a:ext cx="12191695" cy="960120"/>
+          </a:xfrm>
+          <a:prstGeom prst="rect">
+            <a:avLst/>
+          </a:prstGeom>
+          <a:solidFill>
+            <a:srgbClr val="095292"/>
+          </a:solidFill>
+          <a:ln>
+            <a:noFill/>
+          </a:ln>
+        </p:spPr>
+        <p:style>
+          <a:lnRef idx="1">
+            <a:schemeClr val="accent1"/>
+          </a:lnRef>
+          <a:fillRef idx="3">
+            <a:schemeClr val="accent1"/>
+          </a:fillRef>
+          <a:effectRef idx="2">
+            <a:schemeClr val="accent1"/>
+          </a:effectRef>
+          <a:fontRef idx="minor">
+            <a:schemeClr val="lt1"/>
+          </a:fontRef>
+        </p:style>
+        <p:txBody>
+          <a:bodyPr rtlCol="0" anchor="ctr"/>
+          <a:lstStyle/>
+          <a:p>
+            <a:pPr algn="ctr"/>
+          </a:p>
+        </p:txBody>
+      </p:sp>
+      <p:sp>
+        <p:nvSpPr>
+          <p:cNvPr id="3" name="Rectangle 2"/>
+          <p:cNvSpPr/>
+          <p:nvPr/>
+        </p:nvSpPr>
+        <p:spPr>
+          <a:xfrm>
+            <a:off x="0" y="960120"/>
+            <a:ext cx="12191695" cy="41148"/>
+          </a:xfrm>
+          <a:prstGeom prst="rect">
+            <a:avLst/>
+          </a:prstGeom>
+          <a:solidFill>
+            <a:srgbClr val="FFD000"/>
+          </a:solidFill>
+          <a:ln>
+            <a:noFill/>
+          </a:ln>
+        </p:spPr>
+        <p:style>
+          <a:lnRef idx="1">
+            <a:schemeClr val="accent1"/>
+          </a:lnRef>
+          <a:fillRef idx="3">
+            <a:schemeClr val="accent1"/>
+          </a:fillRef>
+          <a:effectRef idx="2">
+            <a:schemeClr val="accent1"/>
+          </a:effectRef>
+          <a:fontRef idx="minor">
+            <a:schemeClr val="lt1"/>
+          </a:fontRef>
+        </p:style>
+        <p:txBody>
+          <a:bodyPr rtlCol="0" anchor="ctr"/>
+          <a:lstStyle/>
+          <a:p>
+            <a:pPr algn="ctr"/>
+          </a:p>
+        </p:txBody>
+      </p:sp>
+      <p:sp>
+        <p:nvSpPr>
+          <p:cNvPr id="4" name="TextBox 3"/>
+          <p:cNvSpPr txBox="1"/>
+          <p:nvPr/>
+        </p:nvSpPr>
+        <p:spPr>
+          <a:xfrm>
+            <a:off x="457200" y="164592"/>
+            <a:ext cx="11277295" cy="502920"/>
+          </a:xfrm>
+          <a:prstGeom prst="rect">
+            <a:avLst/>
+          </a:prstGeom>
+          <a:noFill/>
+        </p:spPr>
+        <p:txBody>
+          <a:bodyPr wrap="square">
+            <a:spAutoFit/>
+          </a:bodyPr>
+          <a:lstStyle/>
+          <a:p>
+            <a:r>
+              <a:rPr sz="2600" b="1" i="0">
+                <a:solidFill>
+                  <a:srgbClr val="FFFFFF"/>
+                </a:solidFill>
+                <a:latin typeface="Calibri"/>
+              </a:rPr>
+              <a:t>El antes y después, y cómo cierra el corte (2/2)</a:t>
+            </a:r>
+          </a:p>
+        </p:txBody>
+      </p:sp>
+      <p:sp>
+        <p:nvSpPr>
+          <p:cNvPr id="5" name="TextBox 4"/>
+          <p:cNvSpPr txBox="1"/>
+          <p:nvPr/>
+        </p:nvSpPr>
+        <p:spPr>
+          <a:xfrm>
+            <a:off x="457200" y="1170432"/>
+            <a:ext cx="11277295" cy="5230368"/>
+          </a:xfrm>
+          <a:prstGeom prst="rect">
+            <a:avLst/>
+          </a:prstGeom>
+          <a:noFill/>
+        </p:spPr>
+        <p:txBody>
+          <a:bodyPr wrap="square">
+            <a:spAutoFit/>
+          </a:bodyPr>
+          <a:lstStyle/>
+          <a:p>
+            <a:pPr>
+              <a:spcAft>
+                <a:spcPts val="800"/>
+              </a:spcAft>
+            </a:pPr>
+            <a:r>
+              <a:rPr sz="2000" b="0" i="0">
+                <a:solidFill>
+                  <a:srgbClr val="333333"/>
+                </a:solidFill>
+                <a:latin typeface="Calibri"/>
+              </a:rPr>
+              <a:t>–   La documentación de las sesiones 6 a 10 no era burocracia académica: es lo que hoy les permite ejercer criterio frente a una herramienta que suena más segura que ellos. </a:t>
+            </a:r>
+            <a:r>
+              <a:rPr sz="2000" b="1" i="0">
+                <a:solidFill>
+                  <a:srgbClr val="333333"/>
+                </a:solidFill>
+                <a:latin typeface="Calibri"/>
+              </a:rPr>
+              <a:t>El cierre del corte.</a:t>
+            </a:r>
+            <a:r>
+              <a:rPr sz="2000" b="0" i="0">
+                <a:solidFill>
+                  <a:srgbClr val="333333"/>
+                </a:solidFill>
+                <a:latin typeface="Calibri"/>
+              </a:rPr>
+              <a:t> Los últimos 20 minutos son la evaluación del corte 2 en la plataforma del curso, individual y a libro abierto sobre sus propios documentos del equipo.</a:t>
+            </a:r>
+          </a:p>
+          <a:p>
+            <a:pPr>
+              <a:spcAft>
+                <a:spcPts val="800"/>
+              </a:spcAft>
+            </a:pPr>
+            <a:r>
+              <a:rPr sz="2000" b="0" i="0">
+                <a:solidFill>
+                  <a:srgbClr val="333333"/>
+                </a:solidFill>
+                <a:latin typeface="Calibri"/>
+              </a:rPr>
+              <a:t>–   Cubre las sesiones 7 a 11: fases y costo del cambio, requisitos y criterios de aceptación, matriz de decisión y alcance mínimo, calidad de fuentes, fidelidad de prototipos y uso responsable de IA.</a:t>
+            </a:r>
+          </a:p>
+          <a:p>
+            <a:pPr>
+              <a:spcAft>
+                <a:spcPts val="800"/>
+              </a:spcAft>
+            </a:pPr>
+            <a:r>
+              <a:rPr sz="2000" b="0" i="0">
+                <a:solidFill>
+                  <a:srgbClr val="333333"/>
+                </a:solidFill>
+                <a:latin typeface="Calibri"/>
+              </a:rPr>
+              <a:t>–   Que sea a libro abierto es deliberado y conviene explicarlo: </a:t>
+            </a:r>
+            <a:r>
+              <a:rPr sz="2000" b="1" i="0">
+                <a:solidFill>
+                  <a:srgbClr val="333333"/>
+                </a:solidFill>
+                <a:latin typeface="Calibri"/>
+              </a:rPr>
+              <a:t>premia al equipo que documentó</a:t>
+            </a:r>
+            <a:r>
+              <a:rPr sz="2000" b="0" i="0">
+                <a:solidFill>
+                  <a:srgbClr val="333333"/>
+                </a:solidFill>
+                <a:latin typeface="Calibri"/>
+              </a:rPr>
+              <a:t>, que es exactamente la conducta que el corte entero intentó enseñar.</a:t>
+            </a:r>
+          </a:p>
+          <a:p>
+            <a:pPr>
+              <a:spcAft>
+                <a:spcPts val="800"/>
+              </a:spcAft>
+            </a:pPr>
+            <a:r>
+              <a:rPr sz="2000" b="0" i="0">
+                <a:solidFill>
+                  <a:srgbClr val="333333"/>
+                </a:solidFill>
+                <a:latin typeface="Calibri"/>
+              </a:rPr>
+              <a:t>–   Y la advertencia final del taller, que hay que repetir aunque ya esté en la diapositiva: </a:t>
+            </a:r>
+            <a:r>
+              <a:rPr sz="2000" b="1" i="0">
+                <a:solidFill>
+                  <a:srgbClr val="333333"/>
+                </a:solidFill>
+                <a:latin typeface="Calibri"/>
+              </a:rPr>
+              <a:t>no se le pasan datos personales a un asistente</a:t>
+            </a:r>
+            <a:r>
+              <a:rPr sz="2000" b="0" i="0">
+                <a:solidFill>
+                  <a:srgbClr val="333333"/>
+                </a:solidFill>
+                <a:latin typeface="Calibri"/>
+              </a:rPr>
+              <a:t> —ni propios ni de terceros—, porque lo que se escribe ahí sale del computador y no vuelve.</a:t>
+            </a:r>
+          </a:p>
+        </p:txBody>
+      </p:sp>
+      <p:sp>
+        <p:nvSpPr>
+          <p:cNvPr id="6" name="TextBox 5"/>
+          <p:cNvSpPr txBox="1"/>
+          <p:nvPr/>
+        </p:nvSpPr>
+        <p:spPr>
+          <a:xfrm>
+            <a:off x="11185855" y="6473952"/>
+            <a:ext cx="640080" cy="274320"/>
+          </a:xfrm>
+          <a:prstGeom prst="rect">
+            <a:avLst/>
+          </a:prstGeom>
+          <a:noFill/>
+        </p:spPr>
+        <p:txBody>
+          <a:bodyPr wrap="square">
+            <a:spAutoFit/>
+          </a:bodyPr>
+          <a:lstStyle/>
+          <a:p>
+            <a:pPr algn="r"/>
+            <a:r>
+              <a:rPr sz="1100" b="0" i="0">
+                <a:solidFill>
+                  <a:srgbClr val="666666"/>
+                </a:solidFill>
+                <a:latin typeface="Calibri"/>
+              </a:rPr>
+              <a:t>16</a:t>
+            </a:r>
+          </a:p>
+        </p:txBody>
+      </p:sp>
+    </p:spTree>
+  </p:cSld>
+  <p:clrMapOvr>
+    <a:masterClrMapping/>
+  </p:clrMapOvr>
+</p:sld>
+</file>
+
+<file path=ppt/slides/slide17.xml><?xml version="1.0" encoding="utf-8"?>
+<p:sld xmlns:a="http://schemas.openxmlformats.org/drawingml/2006/main" xmlns:p="http://schemas.openxmlformats.org/presentationml/2006/main" xmlns:r="http://schemas.openxmlformats.org/officeDocument/2006/relationships">
+  <p:cSld>
+    <p:bg>
+      <p:bgPr>
+        <a:solidFill>
+          <a:srgbClr val="FFFFFF"/>
+        </a:solidFill>
+        <a:effectLst/>
+      </p:bgPr>
+    </p:bg>
+    <p:spTree>
+      <p:nvGrpSpPr>
+        <p:cNvPr id="1" name=""/>
+        <p:cNvGrpSpPr/>
+        <p:nvPr/>
+      </p:nvGrpSpPr>
+      <p:grpSpPr/>
+      <p:sp>
+        <p:nvSpPr>
+          <p:cNvPr id="2" name="Rectangle 1"/>
+          <p:cNvSpPr/>
+          <p:nvPr/>
+        </p:nvSpPr>
+        <p:spPr>
+          <a:xfrm>
+            <a:off x="0" y="0"/>
+            <a:ext cx="12191695" cy="1170432"/>
+          </a:xfrm>
+          <a:prstGeom prst="rect">
+            <a:avLst/>
+          </a:prstGeom>
+          <a:solidFill>
+            <a:srgbClr val="095292"/>
+          </a:solidFill>
+          <a:ln>
+            <a:noFill/>
+          </a:ln>
+        </p:spPr>
+        <p:style>
+          <a:lnRef idx="1">
+            <a:schemeClr val="accent1"/>
+          </a:lnRef>
+          <a:fillRef idx="3">
+            <a:schemeClr val="accent1"/>
+          </a:fillRef>
+          <a:effectRef idx="2">
+            <a:schemeClr val="accent1"/>
+          </a:effectRef>
+          <a:fontRef idx="minor">
+            <a:schemeClr val="lt1"/>
+          </a:fontRef>
+        </p:style>
+        <p:txBody>
+          <a:bodyPr rtlCol="0" anchor="ctr"/>
+          <a:lstStyle/>
+          <a:p>
+            <a:pPr algn="ctr"/>
+          </a:p>
+        </p:txBody>
+      </p:sp>
+      <p:sp>
+        <p:nvSpPr>
+          <p:cNvPr id="3" name="Rectangle 2"/>
+          <p:cNvSpPr/>
+          <p:nvPr/>
+        </p:nvSpPr>
+        <p:spPr>
+          <a:xfrm>
+            <a:off x="0" y="1170432"/>
+            <a:ext cx="12191695" cy="41148"/>
+          </a:xfrm>
+          <a:prstGeom prst="rect">
+            <a:avLst/>
+          </a:prstGeom>
+          <a:solidFill>
+            <a:srgbClr val="FFD000"/>
+          </a:solidFill>
+          <a:ln>
+            <a:noFill/>
+          </a:ln>
+        </p:spPr>
+        <p:style>
+          <a:lnRef idx="1">
+            <a:schemeClr val="accent1"/>
+          </a:lnRef>
+          <a:fillRef idx="3">
+            <a:schemeClr val="accent1"/>
+          </a:fillRef>
+          <a:effectRef idx="2">
+            <a:schemeClr val="accent1"/>
+          </a:effectRef>
+          <a:fontRef idx="minor">
+            <a:schemeClr val="lt1"/>
+          </a:fontRef>
+        </p:style>
+        <p:txBody>
+          <a:bodyPr rtlCol="0" anchor="ctr"/>
+          <a:lstStyle/>
+          <a:p>
+            <a:pPr algn="ctr"/>
+          </a:p>
+        </p:txBody>
+      </p:sp>
+      <p:sp>
+        <p:nvSpPr>
+          <p:cNvPr id="4" name="TextBox 3"/>
+          <p:cNvSpPr txBox="1"/>
+          <p:nvPr/>
+        </p:nvSpPr>
+        <p:spPr>
+          <a:xfrm>
+            <a:off x="457200" y="164592"/>
+            <a:ext cx="11277295" cy="384048"/>
+          </a:xfrm>
+          <a:prstGeom prst="rect">
+            <a:avLst/>
+          </a:prstGeom>
+          <a:noFill/>
+        </p:spPr>
+        <p:txBody>
+          <a:bodyPr wrap="square">
+            <a:spAutoFit/>
+          </a:bodyPr>
+          <a:lstStyle/>
+          <a:p>
+            <a:r>
+              <a:rPr sz="2600" b="1" i="0">
+                <a:solidFill>
+                  <a:srgbClr val="FFFFFF"/>
+                </a:solidFill>
+                <a:latin typeface="Calibri"/>
+              </a:rPr>
+              <a:t>Taller de hoy: Prototipo v2 con IA</a:t>
+            </a:r>
+          </a:p>
+        </p:txBody>
+      </p:sp>
+      <p:sp>
+        <p:nvSpPr>
+          <p:cNvPr id="5" name="TextBox 4"/>
+          <p:cNvSpPr txBox="1"/>
+          <p:nvPr/>
+        </p:nvSpPr>
+        <p:spPr>
+          <a:xfrm>
+            <a:off x="457200" y="566928"/>
+            <a:ext cx="11277295" cy="411480"/>
+          </a:xfrm>
+          <a:prstGeom prst="rect">
+            <a:avLst/>
+          </a:prstGeom>
+          <a:noFill/>
+        </p:spPr>
+        <p:txBody>
+          <a:bodyPr wrap="square">
+            <a:spAutoFit/>
+          </a:bodyPr>
+          <a:lstStyle/>
+          <a:p>
+            <a:r>
+              <a:rPr sz="1400" b="0" i="0">
+                <a:solidFill>
+                  <a:srgbClr val="B8D8EE"/>
+                </a:solidFill>
+                <a:latin typeface="Calibri"/>
+              </a:rPr>
+              <a:t>27 min en equipos · 27 min: prompt, variantes, elección, correcciones y registro · prototipo v2 + registro de prompt, variantes, correcciones y descartes</a:t>
+            </a:r>
+          </a:p>
+        </p:txBody>
+      </p:sp>
+      <p:sp>
+        <p:nvSpPr>
+          <p:cNvPr id="6" name="Rounded Rectangle 5"/>
+          <p:cNvSpPr/>
+          <p:nvPr/>
+        </p:nvSpPr>
+        <p:spPr>
+          <a:xfrm>
+            <a:off x="457200" y="1472184"/>
+            <a:ext cx="11277295" cy="566928"/>
+          </a:xfrm>
+          <a:prstGeom prst="roundRect">
+            <a:avLst>
+              <a:gd name="adj" fmla="val 12000"/>
+            </a:avLst>
+          </a:prstGeom>
+          <a:solidFill>
+            <a:srgbClr val="F2F2F2"/>
+          </a:solidFill>
+          <a:ln>
+            <a:noFill/>
+          </a:ln>
+        </p:spPr>
+        <p:style>
+          <a:lnRef idx="1">
+            <a:schemeClr val="accent1"/>
+          </a:lnRef>
+          <a:fillRef idx="3">
+            <a:schemeClr val="accent1"/>
+          </a:fillRef>
+          <a:effectRef idx="2">
+            <a:schemeClr val="accent1"/>
+          </a:effectRef>
+          <a:fontRef idx="minor">
+            <a:schemeClr val="lt1"/>
+          </a:fontRef>
+        </p:style>
+        <p:txBody>
+          <a:bodyPr rtlCol="0" anchor="ctr"/>
+          <a:lstStyle/>
+          <a:p>
+            <a:pPr algn="ctr"/>
+          </a:p>
+        </p:txBody>
+      </p:sp>
+      <p:sp>
+        <p:nvSpPr>
+          <p:cNvPr id="7" name="Rectangle 6"/>
+          <p:cNvSpPr/>
+          <p:nvPr/>
+        </p:nvSpPr>
+        <p:spPr>
+          <a:xfrm>
+            <a:off x="640080" y="1618487"/>
+            <a:ext cx="274320" cy="274320"/>
+          </a:xfrm>
+          <a:prstGeom prst="rect">
+            <a:avLst/>
+          </a:prstGeom>
+          <a:solidFill>
+            <a:srgbClr val="FFFFFF"/>
+          </a:solidFill>
+          <a:ln>
+            <a:solidFill>
+              <a:srgbClr val="333333"/>
+            </a:solidFill>
+          </a:ln>
+        </p:spPr>
+        <p:style>
+          <a:lnRef idx="1">
+            <a:schemeClr val="accent1"/>
+          </a:lnRef>
+          <a:fillRef idx="3">
+            <a:schemeClr val="accent1"/>
+          </a:fillRef>
+          <a:effectRef idx="2">
+            <a:schemeClr val="accent1"/>
+          </a:effectRef>
+          <a:fontRef idx="minor">
+            <a:schemeClr val="lt1"/>
+          </a:fontRef>
+        </p:style>
+        <p:txBody>
+          <a:bodyPr rtlCol="0" anchor="ctr"/>
+          <a:lstStyle/>
+          <a:p>
+            <a:pPr algn="ctr"/>
+          </a:p>
+        </p:txBody>
+      </p:sp>
+      <p:sp>
+        <p:nvSpPr>
+          <p:cNvPr id="8" name="Rectangle 7"/>
+          <p:cNvSpPr/>
+          <p:nvPr/>
+        </p:nvSpPr>
+        <p:spPr>
+          <a:xfrm>
+            <a:off x="640080" y="1618487"/>
+            <a:ext cx="73152" cy="274320"/>
           </a:xfrm>
           <a:prstGeom prst="rect">
             <a:avLst/>
@@ -5097,40 +6143,16 @@
           </a:p>
         </p:txBody>
       </p:sp>
-      <p:pic>
-        <p:nvPicPr>
-          <p:cNvPr id="3" name="Picture 2" descr="logo_uniajc_color.png"/>
-          <p:cNvPicPr>
-            <a:picLocks noChangeAspect="1"/>
-          </p:cNvPicPr>
-          <p:nvPr/>
-        </p:nvPicPr>
-        <p:blipFill>
-          <a:blip r:embed="rId2"/>
-          <a:stretch>
-            <a:fillRect/>
-          </a:stretch>
-        </p:blipFill>
-        <p:spPr>
-          <a:xfrm>
-            <a:off x="10271455" y="5998464"/>
-            <a:ext cx="1463040" cy="643233"/>
-          </a:xfrm>
-          <a:prstGeom prst="rect">
-            <a:avLst/>
-          </a:prstGeom>
-        </p:spPr>
-      </p:pic>
-      <p:sp>
-        <p:nvSpPr>
-          <p:cNvPr id="4" name="TextBox 3"/>
+      <p:sp>
+        <p:nvSpPr>
+          <p:cNvPr id="9" name="TextBox 8"/>
           <p:cNvSpPr txBox="1"/>
           <p:nvPr/>
         </p:nvSpPr>
         <p:spPr>
           <a:xfrm>
-            <a:off x="457200" y="1737360"/>
-            <a:ext cx="11277295" cy="1097280"/>
+            <a:off x="1097280" y="1563624"/>
+            <a:ext cx="10362895" cy="402336"/>
           </a:xfrm>
           <a:prstGeom prst="rect">
             <a:avLst/>
@@ -5141,29 +6163,805 @@
           <a:bodyPr wrap="square" anchor="ctr"/>
           <a:lstStyle/>
           <a:p>
+            <a:r>
+              <a:rPr sz="1500" b="1" i="0">
+                <a:solidFill>
+                  <a:srgbClr val="333333"/>
+                </a:solidFill>
+                <a:latin typeface="Calibri"/>
+              </a:rPr>
+              <a:t>EL PROMPT QUE USAMOS</a:t>
+            </a:r>
+            <a:r>
+              <a:rPr sz="1500" b="0" i="0">
+                <a:solidFill>
+                  <a:srgbClr val="333333"/>
+                </a:solidFill>
+                <a:latin typeface="Calibri"/>
+              </a:rPr>
+              <a:t> — El prompt completo, copiado tal cual. Tiene que incluir </a:t>
+            </a:r>
+            <a:r>
+              <a:rPr sz="1500" b="1" i="0">
+                <a:solidFill>
+                  <a:srgbClr val="333333"/>
+                </a:solidFill>
+                <a:latin typeface="Calibri"/>
+              </a:rPr>
+              <a:t>el problema en una frase, quién lo usa, las restricciones y lo que está prohibido proponer</a:t>
+            </a:r>
+            <a:r>
+              <a:rPr sz="1500" b="0" i="0">
+                <a:solidFill>
+                  <a:srgbClr val="333333"/>
+                </a:solidFill>
+                <a:latin typeface="Calibri"/>
+              </a:rPr>
+              <a:t>.</a:t>
+            </a:r>
+          </a:p>
+        </p:txBody>
+      </p:sp>
+      <p:sp>
+        <p:nvSpPr>
+          <p:cNvPr id="10" name="Rounded Rectangle 9"/>
+          <p:cNvSpPr/>
+          <p:nvPr/>
+        </p:nvSpPr>
+        <p:spPr>
+          <a:xfrm>
+            <a:off x="457200" y="2148839"/>
+            <a:ext cx="11277295" cy="566928"/>
+          </a:xfrm>
+          <a:prstGeom prst="roundRect">
+            <a:avLst>
+              <a:gd name="adj" fmla="val 12000"/>
+            </a:avLst>
+          </a:prstGeom>
+          <a:solidFill>
+            <a:srgbClr val="F2F2F2"/>
+          </a:solidFill>
+          <a:ln>
+            <a:noFill/>
+          </a:ln>
+        </p:spPr>
+        <p:style>
+          <a:lnRef idx="1">
+            <a:schemeClr val="accent1"/>
+          </a:lnRef>
+          <a:fillRef idx="3">
+            <a:schemeClr val="accent1"/>
+          </a:fillRef>
+          <a:effectRef idx="2">
+            <a:schemeClr val="accent1"/>
+          </a:effectRef>
+          <a:fontRef idx="minor">
+            <a:schemeClr val="lt1"/>
+          </a:fontRef>
+        </p:style>
+        <p:txBody>
+          <a:bodyPr rtlCol="0" anchor="ctr"/>
+          <a:lstStyle/>
+          <a:p>
             <a:pPr algn="ctr"/>
-            <a:r>
-              <a:rPr sz="3400" b="1" i="0">
-                <a:solidFill>
-                  <a:srgbClr val="095292"/>
-                </a:solidFill>
-                <a:latin typeface="Calibri"/>
-              </a:rPr>
-              <a:t>Cierra el corte 2 · Nos vemos en la Clase 12</a:t>
-            </a:r>
-          </a:p>
-        </p:txBody>
-      </p:sp>
-      <p:sp>
-        <p:nvSpPr>
-          <p:cNvPr id="5" name="TextBox 4"/>
+          </a:p>
+        </p:txBody>
+      </p:sp>
+      <p:sp>
+        <p:nvSpPr>
+          <p:cNvPr id="11" name="Rectangle 10"/>
+          <p:cNvSpPr/>
+          <p:nvPr/>
+        </p:nvSpPr>
+        <p:spPr>
+          <a:xfrm>
+            <a:off x="640080" y="2295144"/>
+            <a:ext cx="274320" cy="274320"/>
+          </a:xfrm>
+          <a:prstGeom prst="rect">
+            <a:avLst/>
+          </a:prstGeom>
+          <a:solidFill>
+            <a:srgbClr val="FFFFFF"/>
+          </a:solidFill>
+          <a:ln>
+            <a:solidFill>
+              <a:srgbClr val="333333"/>
+            </a:solidFill>
+          </a:ln>
+        </p:spPr>
+        <p:style>
+          <a:lnRef idx="1">
+            <a:schemeClr val="accent1"/>
+          </a:lnRef>
+          <a:fillRef idx="3">
+            <a:schemeClr val="accent1"/>
+          </a:fillRef>
+          <a:effectRef idx="2">
+            <a:schemeClr val="accent1"/>
+          </a:effectRef>
+          <a:fontRef idx="minor">
+            <a:schemeClr val="lt1"/>
+          </a:fontRef>
+        </p:style>
+        <p:txBody>
+          <a:bodyPr rtlCol="0" anchor="ctr"/>
+          <a:lstStyle/>
+          <a:p>
+            <a:pPr algn="ctr"/>
+          </a:p>
+        </p:txBody>
+      </p:sp>
+      <p:sp>
+        <p:nvSpPr>
+          <p:cNvPr id="12" name="Rectangle 11"/>
+          <p:cNvSpPr/>
+          <p:nvPr/>
+        </p:nvSpPr>
+        <p:spPr>
+          <a:xfrm>
+            <a:off x="640080" y="2295144"/>
+            <a:ext cx="73152" cy="274320"/>
+          </a:xfrm>
+          <a:prstGeom prst="rect">
+            <a:avLst/>
+          </a:prstGeom>
+          <a:solidFill>
+            <a:srgbClr val="269CCB"/>
+          </a:solidFill>
+          <a:ln>
+            <a:noFill/>
+          </a:ln>
+        </p:spPr>
+        <p:style>
+          <a:lnRef idx="1">
+            <a:schemeClr val="accent1"/>
+          </a:lnRef>
+          <a:fillRef idx="3">
+            <a:schemeClr val="accent1"/>
+          </a:fillRef>
+          <a:effectRef idx="2">
+            <a:schemeClr val="accent1"/>
+          </a:effectRef>
+          <a:fontRef idx="minor">
+            <a:schemeClr val="lt1"/>
+          </a:fontRef>
+        </p:style>
+        <p:txBody>
+          <a:bodyPr rtlCol="0" anchor="ctr"/>
+          <a:lstStyle/>
+          <a:p>
+            <a:pPr algn="ctr"/>
+          </a:p>
+        </p:txBody>
+      </p:sp>
+      <p:sp>
+        <p:nvSpPr>
+          <p:cNvPr id="13" name="TextBox 12"/>
           <p:cNvSpPr txBox="1"/>
           <p:nvPr/>
         </p:nvSpPr>
         <p:spPr>
           <a:xfrm>
-            <a:off x="457200" y="3017520"/>
-            <a:ext cx="11277295" cy="1645920"/>
+            <a:off x="1097280" y="2240279"/>
+            <a:ext cx="10362895" cy="402336"/>
+          </a:xfrm>
+          <a:prstGeom prst="rect">
+            <a:avLst/>
+          </a:prstGeom>
+          <a:noFill/>
+        </p:spPr>
+        <p:txBody>
+          <a:bodyPr wrap="square" anchor="ctr"/>
+          <a:lstStyle/>
+          <a:p>
+            <a:r>
+              <a:rPr sz="1500" b="1" i="0">
+                <a:solidFill>
+                  <a:srgbClr val="333333"/>
+                </a:solidFill>
+                <a:latin typeface="Calibri"/>
+              </a:rPr>
+              <a:t>LAS TRES VARIANTES</a:t>
+            </a:r>
+            <a:r>
+              <a:rPr sz="1500" b="0" i="0">
+                <a:solidFill>
+                  <a:srgbClr val="333333"/>
+                </a:solidFill>
+                <a:latin typeface="Calibri"/>
+              </a:rPr>
+              <a:t> — Las tres opciones que devolvió, resumidas en dos o tres líneas cada una. </a:t>
+            </a:r>
+            <a:r>
+              <a:rPr sz="1500" b="1" i="0">
+                <a:solidFill>
+                  <a:srgbClr val="333333"/>
+                </a:solidFill>
+                <a:latin typeface="Calibri"/>
+              </a:rPr>
+              <a:t>No una sola respuesta</a:t>
+            </a:r>
+            <a:r>
+              <a:rPr sz="1500" b="0" i="0">
+                <a:solidFill>
+                  <a:srgbClr val="333333"/>
+                </a:solidFill>
+                <a:latin typeface="Calibri"/>
+              </a:rPr>
+              <a:t>: tres.</a:t>
+            </a:r>
+          </a:p>
+        </p:txBody>
+      </p:sp>
+      <p:sp>
+        <p:nvSpPr>
+          <p:cNvPr id="14" name="Rounded Rectangle 13"/>
+          <p:cNvSpPr/>
+          <p:nvPr/>
+        </p:nvSpPr>
+        <p:spPr>
+          <a:xfrm>
+            <a:off x="457200" y="2825496"/>
+            <a:ext cx="11277295" cy="566928"/>
+          </a:xfrm>
+          <a:prstGeom prst="roundRect">
+            <a:avLst>
+              <a:gd name="adj" fmla="val 12000"/>
+            </a:avLst>
+          </a:prstGeom>
+          <a:solidFill>
+            <a:srgbClr val="F2F2F2"/>
+          </a:solidFill>
+          <a:ln>
+            <a:noFill/>
+          </a:ln>
+        </p:spPr>
+        <p:style>
+          <a:lnRef idx="1">
+            <a:schemeClr val="accent1"/>
+          </a:lnRef>
+          <a:fillRef idx="3">
+            <a:schemeClr val="accent1"/>
+          </a:fillRef>
+          <a:effectRef idx="2">
+            <a:schemeClr val="accent1"/>
+          </a:effectRef>
+          <a:fontRef idx="minor">
+            <a:schemeClr val="lt1"/>
+          </a:fontRef>
+        </p:style>
+        <p:txBody>
+          <a:bodyPr rtlCol="0" anchor="ctr"/>
+          <a:lstStyle/>
+          <a:p>
+            <a:pPr algn="ctr"/>
+          </a:p>
+        </p:txBody>
+      </p:sp>
+      <p:sp>
+        <p:nvSpPr>
+          <p:cNvPr id="15" name="Rectangle 14"/>
+          <p:cNvSpPr/>
+          <p:nvPr/>
+        </p:nvSpPr>
+        <p:spPr>
+          <a:xfrm>
+            <a:off x="640080" y="2971800"/>
+            <a:ext cx="274320" cy="274320"/>
+          </a:xfrm>
+          <a:prstGeom prst="rect">
+            <a:avLst/>
+          </a:prstGeom>
+          <a:solidFill>
+            <a:srgbClr val="FFFFFF"/>
+          </a:solidFill>
+          <a:ln>
+            <a:solidFill>
+              <a:srgbClr val="333333"/>
+            </a:solidFill>
+          </a:ln>
+        </p:spPr>
+        <p:style>
+          <a:lnRef idx="1">
+            <a:schemeClr val="accent1"/>
+          </a:lnRef>
+          <a:fillRef idx="3">
+            <a:schemeClr val="accent1"/>
+          </a:fillRef>
+          <a:effectRef idx="2">
+            <a:schemeClr val="accent1"/>
+          </a:effectRef>
+          <a:fontRef idx="minor">
+            <a:schemeClr val="lt1"/>
+          </a:fontRef>
+        </p:style>
+        <p:txBody>
+          <a:bodyPr rtlCol="0" anchor="ctr"/>
+          <a:lstStyle/>
+          <a:p>
+            <a:pPr algn="ctr"/>
+          </a:p>
+        </p:txBody>
+      </p:sp>
+      <p:sp>
+        <p:nvSpPr>
+          <p:cNvPr id="16" name="Rectangle 15"/>
+          <p:cNvSpPr/>
+          <p:nvPr/>
+        </p:nvSpPr>
+        <p:spPr>
+          <a:xfrm>
+            <a:off x="640080" y="2971800"/>
+            <a:ext cx="73152" cy="274320"/>
+          </a:xfrm>
+          <a:prstGeom prst="rect">
+            <a:avLst/>
+          </a:prstGeom>
+          <a:solidFill>
+            <a:srgbClr val="269CCB"/>
+          </a:solidFill>
+          <a:ln>
+            <a:noFill/>
+          </a:ln>
+        </p:spPr>
+        <p:style>
+          <a:lnRef idx="1">
+            <a:schemeClr val="accent1"/>
+          </a:lnRef>
+          <a:fillRef idx="3">
+            <a:schemeClr val="accent1"/>
+          </a:fillRef>
+          <a:effectRef idx="2">
+            <a:schemeClr val="accent1"/>
+          </a:effectRef>
+          <a:fontRef idx="minor">
+            <a:schemeClr val="lt1"/>
+          </a:fontRef>
+        </p:style>
+        <p:txBody>
+          <a:bodyPr rtlCol="0" anchor="ctr"/>
+          <a:lstStyle/>
+          <a:p>
+            <a:pPr algn="ctr"/>
+          </a:p>
+        </p:txBody>
+      </p:sp>
+      <p:sp>
+        <p:nvSpPr>
+          <p:cNvPr id="17" name="TextBox 16"/>
+          <p:cNvSpPr txBox="1"/>
+          <p:nvPr/>
+        </p:nvSpPr>
+        <p:spPr>
+          <a:xfrm>
+            <a:off x="1097280" y="2916936"/>
+            <a:ext cx="10362895" cy="402336"/>
+          </a:xfrm>
+          <a:prstGeom prst="rect">
+            <a:avLst/>
+          </a:prstGeom>
+          <a:noFill/>
+        </p:spPr>
+        <p:txBody>
+          <a:bodyPr wrap="square" anchor="ctr"/>
+          <a:lstStyle/>
+          <a:p>
+            <a:r>
+              <a:rPr sz="1500" b="1" i="0">
+                <a:solidFill>
+                  <a:srgbClr val="333333"/>
+                </a:solidFill>
+                <a:latin typeface="Calibri"/>
+              </a:rPr>
+              <a:t>LA QUE ELEGIMOS Y POR QUÉ</a:t>
+            </a:r>
+            <a:r>
+              <a:rPr sz="1500" b="0" i="0">
+                <a:solidFill>
+                  <a:srgbClr val="333333"/>
+                </a:solidFill>
+                <a:latin typeface="Calibri"/>
+              </a:rPr>
+              <a:t> — Cuál eligieron y el criterio, apoyado en sus </a:t>
+            </a:r>
+            <a:r>
+              <a:rPr sz="1500" b="1" i="0">
+                <a:solidFill>
+                  <a:srgbClr val="333333"/>
+                </a:solidFill>
+                <a:latin typeface="Calibri"/>
+              </a:rPr>
+              <a:t>requisitos y restricciones</a:t>
+            </a:r>
+            <a:r>
+              <a:rPr sz="1500" b="0" i="0">
+                <a:solidFill>
+                  <a:srgbClr val="333333"/>
+                </a:solidFill>
+                <a:latin typeface="Calibri"/>
+              </a:rPr>
+              <a:t> — no en «nos gustó más».</a:t>
+            </a:r>
+          </a:p>
+        </p:txBody>
+      </p:sp>
+      <p:sp>
+        <p:nvSpPr>
+          <p:cNvPr id="18" name="Rounded Rectangle 17"/>
+          <p:cNvSpPr/>
+          <p:nvPr/>
+        </p:nvSpPr>
+        <p:spPr>
+          <a:xfrm>
+            <a:off x="457200" y="3502152"/>
+            <a:ext cx="11277295" cy="566928"/>
+          </a:xfrm>
+          <a:prstGeom prst="roundRect">
+            <a:avLst>
+              <a:gd name="adj" fmla="val 12000"/>
+            </a:avLst>
+          </a:prstGeom>
+          <a:solidFill>
+            <a:srgbClr val="F2F2F2"/>
+          </a:solidFill>
+          <a:ln>
+            <a:noFill/>
+          </a:ln>
+        </p:spPr>
+        <p:style>
+          <a:lnRef idx="1">
+            <a:schemeClr val="accent1"/>
+          </a:lnRef>
+          <a:fillRef idx="3">
+            <a:schemeClr val="accent1"/>
+          </a:fillRef>
+          <a:effectRef idx="2">
+            <a:schemeClr val="accent1"/>
+          </a:effectRef>
+          <a:fontRef idx="minor">
+            <a:schemeClr val="lt1"/>
+          </a:fontRef>
+        </p:style>
+        <p:txBody>
+          <a:bodyPr rtlCol="0" anchor="ctr"/>
+          <a:lstStyle/>
+          <a:p>
+            <a:pPr algn="ctr"/>
+          </a:p>
+        </p:txBody>
+      </p:sp>
+      <p:sp>
+        <p:nvSpPr>
+          <p:cNvPr id="19" name="Rectangle 18"/>
+          <p:cNvSpPr/>
+          <p:nvPr/>
+        </p:nvSpPr>
+        <p:spPr>
+          <a:xfrm>
+            <a:off x="640080" y="3648456"/>
+            <a:ext cx="274320" cy="274320"/>
+          </a:xfrm>
+          <a:prstGeom prst="rect">
+            <a:avLst/>
+          </a:prstGeom>
+          <a:solidFill>
+            <a:srgbClr val="FFFFFF"/>
+          </a:solidFill>
+          <a:ln>
+            <a:solidFill>
+              <a:srgbClr val="333333"/>
+            </a:solidFill>
+          </a:ln>
+        </p:spPr>
+        <p:style>
+          <a:lnRef idx="1">
+            <a:schemeClr val="accent1"/>
+          </a:lnRef>
+          <a:fillRef idx="3">
+            <a:schemeClr val="accent1"/>
+          </a:fillRef>
+          <a:effectRef idx="2">
+            <a:schemeClr val="accent1"/>
+          </a:effectRef>
+          <a:fontRef idx="minor">
+            <a:schemeClr val="lt1"/>
+          </a:fontRef>
+        </p:style>
+        <p:txBody>
+          <a:bodyPr rtlCol="0" anchor="ctr"/>
+          <a:lstStyle/>
+          <a:p>
+            <a:pPr algn="ctr"/>
+          </a:p>
+        </p:txBody>
+      </p:sp>
+      <p:sp>
+        <p:nvSpPr>
+          <p:cNvPr id="20" name="Rectangle 19"/>
+          <p:cNvSpPr/>
+          <p:nvPr/>
+        </p:nvSpPr>
+        <p:spPr>
+          <a:xfrm>
+            <a:off x="640080" y="3648456"/>
+            <a:ext cx="73152" cy="274320"/>
+          </a:xfrm>
+          <a:prstGeom prst="rect">
+            <a:avLst/>
+          </a:prstGeom>
+          <a:solidFill>
+            <a:srgbClr val="269CCB"/>
+          </a:solidFill>
+          <a:ln>
+            <a:noFill/>
+          </a:ln>
+        </p:spPr>
+        <p:style>
+          <a:lnRef idx="1">
+            <a:schemeClr val="accent1"/>
+          </a:lnRef>
+          <a:fillRef idx="3">
+            <a:schemeClr val="accent1"/>
+          </a:fillRef>
+          <a:effectRef idx="2">
+            <a:schemeClr val="accent1"/>
+          </a:effectRef>
+          <a:fontRef idx="minor">
+            <a:schemeClr val="lt1"/>
+          </a:fontRef>
+        </p:style>
+        <p:txBody>
+          <a:bodyPr rtlCol="0" anchor="ctr"/>
+          <a:lstStyle/>
+          <a:p>
+            <a:pPr algn="ctr"/>
+          </a:p>
+        </p:txBody>
+      </p:sp>
+      <p:sp>
+        <p:nvSpPr>
+          <p:cNvPr id="21" name="TextBox 20"/>
+          <p:cNvSpPr txBox="1"/>
+          <p:nvPr/>
+        </p:nvSpPr>
+        <p:spPr>
+          <a:xfrm>
+            <a:off x="1097280" y="3593592"/>
+            <a:ext cx="10362895" cy="402336"/>
+          </a:xfrm>
+          <a:prstGeom prst="rect">
+            <a:avLst/>
+          </a:prstGeom>
+          <a:noFill/>
+        </p:spPr>
+        <p:txBody>
+          <a:bodyPr wrap="square" anchor="ctr"/>
+          <a:lstStyle/>
+          <a:p>
+            <a:r>
+              <a:rPr sz="1500" b="1" i="0">
+                <a:solidFill>
+                  <a:srgbClr val="333333"/>
+                </a:solidFill>
+                <a:latin typeface="Calibri"/>
+              </a:rPr>
+              <a:t>LO QUE CORREGIMOS A MANO</a:t>
+            </a:r>
+            <a:r>
+              <a:rPr sz="1500" b="0" i="0">
+                <a:solidFill>
+                  <a:srgbClr val="333333"/>
+                </a:solidFill>
+                <a:latin typeface="Calibri"/>
+              </a:rPr>
+              <a:t> — Cada corrección con </a:t>
+            </a:r>
+            <a:r>
+              <a:rPr sz="1500" b="1" i="0">
+                <a:solidFill>
+                  <a:srgbClr val="333333"/>
+                </a:solidFill>
+                <a:latin typeface="Calibri"/>
+              </a:rPr>
+              <a:t>la razón y la sesión de donde sale</a:t>
+            </a:r>
+            <a:r>
+              <a:rPr sz="1500" b="0" i="0">
+                <a:solidFill>
+                  <a:srgbClr val="333333"/>
+                </a:solidFill>
+                <a:latin typeface="Calibri"/>
+              </a:rPr>
+              <a:t>: qué proponía la IA, qué quedó, y por qué. Es el bloque que más pesa.</a:t>
+            </a:r>
+          </a:p>
+        </p:txBody>
+      </p:sp>
+      <p:sp>
+        <p:nvSpPr>
+          <p:cNvPr id="22" name="Rounded Rectangle 21"/>
+          <p:cNvSpPr/>
+          <p:nvPr/>
+        </p:nvSpPr>
+        <p:spPr>
+          <a:xfrm>
+            <a:off x="457200" y="4178808"/>
+            <a:ext cx="11277295" cy="566928"/>
+          </a:xfrm>
+          <a:prstGeom prst="roundRect">
+            <a:avLst>
+              <a:gd name="adj" fmla="val 12000"/>
+            </a:avLst>
+          </a:prstGeom>
+          <a:solidFill>
+            <a:srgbClr val="F2F2F2"/>
+          </a:solidFill>
+          <a:ln>
+            <a:noFill/>
+          </a:ln>
+        </p:spPr>
+        <p:style>
+          <a:lnRef idx="1">
+            <a:schemeClr val="accent1"/>
+          </a:lnRef>
+          <a:fillRef idx="3">
+            <a:schemeClr val="accent1"/>
+          </a:fillRef>
+          <a:effectRef idx="2">
+            <a:schemeClr val="accent1"/>
+          </a:effectRef>
+          <a:fontRef idx="minor">
+            <a:schemeClr val="lt1"/>
+          </a:fontRef>
+        </p:style>
+        <p:txBody>
+          <a:bodyPr rtlCol="0" anchor="ctr"/>
+          <a:lstStyle/>
+          <a:p>
+            <a:pPr algn="ctr"/>
+          </a:p>
+        </p:txBody>
+      </p:sp>
+      <p:sp>
+        <p:nvSpPr>
+          <p:cNvPr id="23" name="Rectangle 22"/>
+          <p:cNvSpPr/>
+          <p:nvPr/>
+        </p:nvSpPr>
+        <p:spPr>
+          <a:xfrm>
+            <a:off x="640080" y="4325112"/>
+            <a:ext cx="274320" cy="274320"/>
+          </a:xfrm>
+          <a:prstGeom prst="rect">
+            <a:avLst/>
+          </a:prstGeom>
+          <a:solidFill>
+            <a:srgbClr val="FFFFFF"/>
+          </a:solidFill>
+          <a:ln>
+            <a:solidFill>
+              <a:srgbClr val="333333"/>
+            </a:solidFill>
+          </a:ln>
+        </p:spPr>
+        <p:style>
+          <a:lnRef idx="1">
+            <a:schemeClr val="accent1"/>
+          </a:lnRef>
+          <a:fillRef idx="3">
+            <a:schemeClr val="accent1"/>
+          </a:fillRef>
+          <a:effectRef idx="2">
+            <a:schemeClr val="accent1"/>
+          </a:effectRef>
+          <a:fontRef idx="minor">
+            <a:schemeClr val="lt1"/>
+          </a:fontRef>
+        </p:style>
+        <p:txBody>
+          <a:bodyPr rtlCol="0" anchor="ctr"/>
+          <a:lstStyle/>
+          <a:p>
+            <a:pPr algn="ctr"/>
+          </a:p>
+        </p:txBody>
+      </p:sp>
+      <p:sp>
+        <p:nvSpPr>
+          <p:cNvPr id="24" name="Rectangle 23"/>
+          <p:cNvSpPr/>
+          <p:nvPr/>
+        </p:nvSpPr>
+        <p:spPr>
+          <a:xfrm>
+            <a:off x="640080" y="4325112"/>
+            <a:ext cx="73152" cy="274320"/>
+          </a:xfrm>
+          <a:prstGeom prst="rect">
+            <a:avLst/>
+          </a:prstGeom>
+          <a:solidFill>
+            <a:srgbClr val="269CCB"/>
+          </a:solidFill>
+          <a:ln>
+            <a:noFill/>
+          </a:ln>
+        </p:spPr>
+        <p:style>
+          <a:lnRef idx="1">
+            <a:schemeClr val="accent1"/>
+          </a:lnRef>
+          <a:fillRef idx="3">
+            <a:schemeClr val="accent1"/>
+          </a:fillRef>
+          <a:effectRef idx="2">
+            <a:schemeClr val="accent1"/>
+          </a:effectRef>
+          <a:fontRef idx="minor">
+            <a:schemeClr val="lt1"/>
+          </a:fontRef>
+        </p:style>
+        <p:txBody>
+          <a:bodyPr rtlCol="0" anchor="ctr"/>
+          <a:lstStyle/>
+          <a:p>
+            <a:pPr algn="ctr"/>
+          </a:p>
+        </p:txBody>
+      </p:sp>
+      <p:sp>
+        <p:nvSpPr>
+          <p:cNvPr id="25" name="TextBox 24"/>
+          <p:cNvSpPr txBox="1"/>
+          <p:nvPr/>
+        </p:nvSpPr>
+        <p:spPr>
+          <a:xfrm>
+            <a:off x="1097280" y="4270248"/>
+            <a:ext cx="10362895" cy="402336"/>
+          </a:xfrm>
+          <a:prstGeom prst="rect">
+            <a:avLst/>
+          </a:prstGeom>
+          <a:noFill/>
+        </p:spPr>
+        <p:txBody>
+          <a:bodyPr wrap="square" anchor="ctr"/>
+          <a:lstStyle/>
+          <a:p>
+            <a:r>
+              <a:rPr sz="1500" b="1" i="0">
+                <a:solidFill>
+                  <a:srgbClr val="333333"/>
+                </a:solidFill>
+                <a:latin typeface="Calibri"/>
+              </a:rPr>
+              <a:t>LO QUE DESCARTAMOS Y POR QUÉ</a:t>
+            </a:r>
+            <a:r>
+              <a:rPr sz="1500" b="0" i="0">
+                <a:solidFill>
+                  <a:srgbClr val="333333"/>
+                </a:solidFill>
+                <a:latin typeface="Calibri"/>
+              </a:rPr>
+              <a:t> — Las propuestas que se rechazaron completas, y el motivo: fuera del alcance, viola una restricción, viola la ley, o consume demasiado.</a:t>
+            </a:r>
+          </a:p>
+        </p:txBody>
+      </p:sp>
+      <p:sp>
+        <p:nvSpPr>
+          <p:cNvPr id="26" name="TextBox 25"/>
+          <p:cNvSpPr txBox="1"/>
+          <p:nvPr/>
+        </p:nvSpPr>
+        <p:spPr>
+          <a:xfrm>
+            <a:off x="11185855" y="6473952"/>
+            <a:ext cx="640080" cy="274320"/>
           </a:xfrm>
           <a:prstGeom prst="rect">
             <a:avLst/>
@@ -5176,49 +6974,141 @@
           </a:bodyPr>
           <a:lstStyle/>
           <a:p>
-            <a:pPr algn="ctr">
-              <a:spcAft>
-                <a:spcPts val="600"/>
-              </a:spcAft>
-            </a:pPr>
-            <a:r>
-              <a:rPr sz="1600" b="0" i="0">
-                <a:solidFill>
-                  <a:srgbClr val="333333"/>
-                </a:solidFill>
-                <a:latin typeface="Calibri"/>
-              </a:rPr>
-              <a:t>Taller de prototipado inicial con IA · Clase 11</a:t>
-            </a:r>
-          </a:p>
-          <a:p>
-            <a:pPr algn="ctr">
-              <a:spcAft>
-                <a:spcPts val="600"/>
-              </a:spcAft>
-            </a:pPr>
-            <a:r>
-              <a:rPr sz="1600" b="0" i="0">
-                <a:solidFill>
-                  <a:srgbClr val="333333"/>
-                </a:solidFill>
-                <a:latin typeface="Calibri"/>
-              </a:rPr>
-              <a:t>FI300101 · UNIAJC · Ingeniería de Sistemas</a:t>
-            </a:r>
-          </a:p>
-        </p:txBody>
-      </p:sp>
-      <p:sp>
-        <p:nvSpPr>
-          <p:cNvPr id="6" name="TextBox 5"/>
+            <a:pPr algn="r"/>
+            <a:r>
+              <a:rPr sz="1100" b="0" i="0">
+                <a:solidFill>
+                  <a:srgbClr val="666666"/>
+                </a:solidFill>
+                <a:latin typeface="Calibri"/>
+              </a:rPr>
+              <a:t>17</a:t>
+            </a:r>
+          </a:p>
+        </p:txBody>
+      </p:sp>
+    </p:spTree>
+  </p:cSld>
+  <p:clrMapOvr>
+    <a:masterClrMapping/>
+  </p:clrMapOvr>
+</p:sld>
+</file>
+
+<file path=ppt/slides/slide18.xml><?xml version="1.0" encoding="utf-8"?>
+<p:sld xmlns:a="http://schemas.openxmlformats.org/drawingml/2006/main" xmlns:p="http://schemas.openxmlformats.org/presentationml/2006/main" xmlns:r="http://schemas.openxmlformats.org/officeDocument/2006/relationships">
+  <p:cSld>
+    <p:bg>
+      <p:bgPr>
+        <a:solidFill>
+          <a:srgbClr val="FFFFFF"/>
+        </a:solidFill>
+        <a:effectLst/>
+      </p:bgPr>
+    </p:bg>
+    <p:spTree>
+      <p:nvGrpSpPr>
+        <p:cNvPr id="1" name=""/>
+        <p:cNvGrpSpPr/>
+        <p:nvPr/>
+      </p:nvGrpSpPr>
+      <p:grpSpPr/>
+      <p:sp>
+        <p:nvSpPr>
+          <p:cNvPr id="2" name="Rectangle 1"/>
+          <p:cNvSpPr/>
+          <p:nvPr/>
+        </p:nvSpPr>
+        <p:spPr>
+          <a:xfrm>
+            <a:off x="0" y="0"/>
+            <a:ext cx="12191695" cy="1170432"/>
+          </a:xfrm>
+          <a:prstGeom prst="rect">
+            <a:avLst/>
+          </a:prstGeom>
+          <a:solidFill>
+            <a:srgbClr val="095292"/>
+          </a:solidFill>
+          <a:ln>
+            <a:noFill/>
+          </a:ln>
+        </p:spPr>
+        <p:style>
+          <a:lnRef idx="1">
+            <a:schemeClr val="accent1"/>
+          </a:lnRef>
+          <a:fillRef idx="3">
+            <a:schemeClr val="accent1"/>
+          </a:fillRef>
+          <a:effectRef idx="2">
+            <a:schemeClr val="accent1"/>
+          </a:effectRef>
+          <a:fontRef idx="minor">
+            <a:schemeClr val="lt1"/>
+          </a:fontRef>
+        </p:style>
+        <p:txBody>
+          <a:bodyPr rtlCol="0" anchor="ctr"/>
+          <a:lstStyle/>
+          <a:p>
+            <a:pPr algn="ctr"/>
+          </a:p>
+        </p:txBody>
+      </p:sp>
+      <p:sp>
+        <p:nvSpPr>
+          <p:cNvPr id="3" name="Rectangle 2"/>
+          <p:cNvSpPr/>
+          <p:nvPr/>
+        </p:nvSpPr>
+        <p:spPr>
+          <a:xfrm>
+            <a:off x="0" y="1170432"/>
+            <a:ext cx="12191695" cy="41148"/>
+          </a:xfrm>
+          <a:prstGeom prst="rect">
+            <a:avLst/>
+          </a:prstGeom>
+          <a:solidFill>
+            <a:srgbClr val="FFD000"/>
+          </a:solidFill>
+          <a:ln>
+            <a:noFill/>
+          </a:ln>
+        </p:spPr>
+        <p:style>
+          <a:lnRef idx="1">
+            <a:schemeClr val="accent1"/>
+          </a:lnRef>
+          <a:fillRef idx="3">
+            <a:schemeClr val="accent1"/>
+          </a:fillRef>
+          <a:effectRef idx="2">
+            <a:schemeClr val="accent1"/>
+          </a:effectRef>
+          <a:fontRef idx="minor">
+            <a:schemeClr val="lt1"/>
+          </a:fontRef>
+        </p:style>
+        <p:txBody>
+          <a:bodyPr rtlCol="0" anchor="ctr"/>
+          <a:lstStyle/>
+          <a:p>
+            <a:pPr algn="ctr"/>
+          </a:p>
+        </p:txBody>
+      </p:sp>
+      <p:sp>
+        <p:nvSpPr>
+          <p:cNvPr id="4" name="TextBox 3"/>
           <p:cNvSpPr txBox="1"/>
           <p:nvPr/>
         </p:nvSpPr>
         <p:spPr>
           <a:xfrm>
-            <a:off x="457200" y="4754880"/>
-            <a:ext cx="11277295" cy="640080"/>
+            <a:off x="457200" y="164592"/>
+            <a:ext cx="11277295" cy="384048"/>
           </a:xfrm>
           <a:prstGeom prst="rect">
             <a:avLst/>
@@ -5231,15 +7121,1420 @@
           </a:bodyPr>
           <a:lstStyle/>
           <a:p>
+            <a:r>
+              <a:rPr sz="2600" b="1" i="0">
+                <a:solidFill>
+                  <a:srgbClr val="FFFFFF"/>
+                </a:solidFill>
+                <a:latin typeface="Calibri"/>
+              </a:rPr>
+              <a:t>Cómo se expone en 3 minutos</a:t>
+            </a:r>
+          </a:p>
+        </p:txBody>
+      </p:sp>
+      <p:sp>
+        <p:nvSpPr>
+          <p:cNvPr id="5" name="TextBox 4"/>
+          <p:cNvSpPr txBox="1"/>
+          <p:nvPr/>
+        </p:nvSpPr>
+        <p:spPr>
+          <a:xfrm>
+            <a:off x="457200" y="566928"/>
+            <a:ext cx="11277295" cy="411480"/>
+          </a:xfrm>
+          <a:prstGeom prst="rect">
+            <a:avLst/>
+          </a:prstGeom>
+          <a:noFill/>
+        </p:spPr>
+        <p:txBody>
+          <a:bodyPr wrap="square">
+            <a:spAutoFit/>
+          </a:bodyPr>
+          <a:lstStyle/>
+          <a:p>
+            <a:r>
+              <a:rPr sz="1400" b="0" i="0">
+                <a:solidFill>
+                  <a:srgbClr val="B8D8EE"/>
+                </a:solidFill>
+                <a:latin typeface="Calibri"/>
+              </a:rPr>
+              <a:t>Habla el vocero con la pantalla ya compartida · cronómetro en pantalla · se corta al llegar a cero</a:t>
+            </a:r>
+          </a:p>
+        </p:txBody>
+      </p:sp>
+      <p:sp>
+        <p:nvSpPr>
+          <p:cNvPr id="6" name="Rounded Rectangle 5"/>
+          <p:cNvSpPr/>
+          <p:nvPr/>
+        </p:nvSpPr>
+        <p:spPr>
+          <a:xfrm>
+            <a:off x="457200" y="1444752"/>
+            <a:ext cx="11277295" cy="908913"/>
+          </a:xfrm>
+          <a:prstGeom prst="roundRect">
+            <a:avLst>
+              <a:gd name="adj" fmla="val 12000"/>
+            </a:avLst>
+          </a:prstGeom>
+          <a:solidFill>
+            <a:srgbClr val="F2F2F2"/>
+          </a:solidFill>
+          <a:ln>
+            <a:noFill/>
+          </a:ln>
+        </p:spPr>
+        <p:style>
+          <a:lnRef idx="1">
+            <a:schemeClr val="accent1"/>
+          </a:lnRef>
+          <a:fillRef idx="3">
+            <a:schemeClr val="accent1"/>
+          </a:fillRef>
+          <a:effectRef idx="2">
+            <a:schemeClr val="accent1"/>
+          </a:effectRef>
+          <a:fontRef idx="minor">
+            <a:schemeClr val="lt1"/>
+          </a:fontRef>
+        </p:style>
+        <p:txBody>
+          <a:bodyPr rtlCol="0" anchor="ctr"/>
+          <a:lstStyle/>
+          <a:p>
             <a:pPr algn="ctr"/>
+          </a:p>
+        </p:txBody>
+      </p:sp>
+      <p:sp>
+        <p:nvSpPr>
+          <p:cNvPr id="7" name="Rounded Rectangle 6"/>
+          <p:cNvSpPr/>
+          <p:nvPr/>
+        </p:nvSpPr>
+        <p:spPr>
+          <a:xfrm>
+            <a:off x="594360" y="1679752"/>
+            <a:ext cx="438912" cy="438912"/>
+          </a:xfrm>
+          <a:prstGeom prst="roundRect">
+            <a:avLst>
+              <a:gd name="adj" fmla="val 12000"/>
+            </a:avLst>
+          </a:prstGeom>
+          <a:solidFill>
+            <a:srgbClr val="095292"/>
+          </a:solidFill>
+          <a:ln>
+            <a:noFill/>
+          </a:ln>
+        </p:spPr>
+        <p:style>
+          <a:lnRef idx="1">
+            <a:schemeClr val="accent1"/>
+          </a:lnRef>
+          <a:fillRef idx="3">
+            <a:schemeClr val="accent1"/>
+          </a:fillRef>
+          <a:effectRef idx="2">
+            <a:schemeClr val="accent1"/>
+          </a:effectRef>
+          <a:fontRef idx="minor">
+            <a:schemeClr val="lt1"/>
+          </a:fontRef>
+        </p:style>
+        <p:txBody>
+          <a:bodyPr rtlCol="0" anchor="ctr"/>
+          <a:lstStyle/>
+          <a:p>
+            <a:pPr algn="ctr"/>
+          </a:p>
+        </p:txBody>
+      </p:sp>
+      <p:sp>
+        <p:nvSpPr>
+          <p:cNvPr id="8" name="TextBox 7"/>
+          <p:cNvSpPr txBox="1"/>
+          <p:nvPr/>
+        </p:nvSpPr>
+        <p:spPr>
+          <a:xfrm>
+            <a:off x="594360" y="1679752"/>
+            <a:ext cx="438912" cy="438912"/>
+          </a:xfrm>
+          <a:prstGeom prst="rect">
+            <a:avLst/>
+          </a:prstGeom>
+          <a:noFill/>
+        </p:spPr>
+        <p:txBody>
+          <a:bodyPr wrap="square" anchor="ctr"/>
+          <a:lstStyle/>
+          <a:p>
+            <a:pPr algn="ctr"/>
+            <a:r>
+              <a:rPr sz="1600" b="1" i="0">
+                <a:solidFill>
+                  <a:srgbClr val="FFFFFF"/>
+                </a:solidFill>
+                <a:latin typeface="Calibri"/>
+              </a:rPr>
+              <a:t>1</a:t>
+            </a:r>
+          </a:p>
+        </p:txBody>
+      </p:sp>
+      <p:sp>
+        <p:nvSpPr>
+          <p:cNvPr id="9" name="TextBox 8"/>
+          <p:cNvSpPr txBox="1"/>
+          <p:nvPr/>
+        </p:nvSpPr>
+        <p:spPr>
+          <a:xfrm>
+            <a:off x="1188720" y="1536192"/>
+            <a:ext cx="10271455" cy="744321"/>
+          </a:xfrm>
+          <a:prstGeom prst="rect">
+            <a:avLst/>
+          </a:prstGeom>
+          <a:noFill/>
+        </p:spPr>
+        <p:txBody>
+          <a:bodyPr wrap="square" anchor="ctr"/>
+          <a:lstStyle/>
+          <a:p>
+            <a:r>
+              <a:rPr sz="1500" b="1" i="0">
+                <a:solidFill>
+                  <a:srgbClr val="095292"/>
+                </a:solidFill>
+                <a:latin typeface="Calibri"/>
+              </a:rPr>
+              <a:t>25 s · El prompt</a:t>
+            </a:r>
+          </a:p>
+          <a:p>
+            <a:pPr>
+              <a:spcBef>
+                <a:spcPts val="200"/>
+              </a:spcBef>
+            </a:pPr>
+            <a:r>
+              <a:rPr sz="1300" b="0" i="0">
+                <a:solidFill>
+                  <a:srgbClr val="333333"/>
+                </a:solidFill>
+                <a:latin typeface="Calibri"/>
+              </a:rPr>
+              <a:t>Lean las restricciones que pusieron. Solo esa parte.</a:t>
+            </a:r>
+          </a:p>
+        </p:txBody>
+      </p:sp>
+      <p:sp>
+        <p:nvSpPr>
+          <p:cNvPr id="10" name="Rounded Rectangle 9"/>
+          <p:cNvSpPr/>
+          <p:nvPr/>
+        </p:nvSpPr>
+        <p:spPr>
+          <a:xfrm>
+            <a:off x="457200" y="2445105"/>
+            <a:ext cx="11277295" cy="908913"/>
+          </a:xfrm>
+          <a:prstGeom prst="roundRect">
+            <a:avLst>
+              <a:gd name="adj" fmla="val 12000"/>
+            </a:avLst>
+          </a:prstGeom>
+          <a:solidFill>
+            <a:srgbClr val="E8F4FA"/>
+          </a:solidFill>
+          <a:ln>
+            <a:noFill/>
+          </a:ln>
+        </p:spPr>
+        <p:style>
+          <a:lnRef idx="1">
+            <a:schemeClr val="accent1"/>
+          </a:lnRef>
+          <a:fillRef idx="3">
+            <a:schemeClr val="accent1"/>
+          </a:fillRef>
+          <a:effectRef idx="2">
+            <a:schemeClr val="accent1"/>
+          </a:effectRef>
+          <a:fontRef idx="minor">
+            <a:schemeClr val="lt1"/>
+          </a:fontRef>
+        </p:style>
+        <p:txBody>
+          <a:bodyPr rtlCol="0" anchor="ctr"/>
+          <a:lstStyle/>
+          <a:p>
+            <a:pPr algn="ctr"/>
+          </a:p>
+        </p:txBody>
+      </p:sp>
+      <p:sp>
+        <p:nvSpPr>
+          <p:cNvPr id="11" name="Rounded Rectangle 10"/>
+          <p:cNvSpPr/>
+          <p:nvPr/>
+        </p:nvSpPr>
+        <p:spPr>
+          <a:xfrm>
+            <a:off x="594360" y="2680106"/>
+            <a:ext cx="438912" cy="438912"/>
+          </a:xfrm>
+          <a:prstGeom prst="roundRect">
+            <a:avLst>
+              <a:gd name="adj" fmla="val 12000"/>
+            </a:avLst>
+          </a:prstGeom>
+          <a:solidFill>
+            <a:srgbClr val="095292"/>
+          </a:solidFill>
+          <a:ln>
+            <a:noFill/>
+          </a:ln>
+        </p:spPr>
+        <p:style>
+          <a:lnRef idx="1">
+            <a:schemeClr val="accent1"/>
+          </a:lnRef>
+          <a:fillRef idx="3">
+            <a:schemeClr val="accent1"/>
+          </a:fillRef>
+          <a:effectRef idx="2">
+            <a:schemeClr val="accent1"/>
+          </a:effectRef>
+          <a:fontRef idx="minor">
+            <a:schemeClr val="lt1"/>
+          </a:fontRef>
+        </p:style>
+        <p:txBody>
+          <a:bodyPr rtlCol="0" anchor="ctr"/>
+          <a:lstStyle/>
+          <a:p>
+            <a:pPr algn="ctr"/>
+          </a:p>
+        </p:txBody>
+      </p:sp>
+      <p:sp>
+        <p:nvSpPr>
+          <p:cNvPr id="12" name="TextBox 11"/>
+          <p:cNvSpPr txBox="1"/>
+          <p:nvPr/>
+        </p:nvSpPr>
+        <p:spPr>
+          <a:xfrm>
+            <a:off x="594360" y="2680106"/>
+            <a:ext cx="438912" cy="438912"/>
+          </a:xfrm>
+          <a:prstGeom prst="rect">
+            <a:avLst/>
+          </a:prstGeom>
+          <a:noFill/>
+        </p:spPr>
+        <p:txBody>
+          <a:bodyPr wrap="square" anchor="ctr"/>
+          <a:lstStyle/>
+          <a:p>
+            <a:pPr algn="ctr"/>
+            <a:r>
+              <a:rPr sz="1600" b="1" i="0">
+                <a:solidFill>
+                  <a:srgbClr val="FFFFFF"/>
+                </a:solidFill>
+                <a:latin typeface="Calibri"/>
+              </a:rPr>
+              <a:t>2</a:t>
+            </a:r>
+          </a:p>
+        </p:txBody>
+      </p:sp>
+      <p:sp>
+        <p:nvSpPr>
+          <p:cNvPr id="13" name="TextBox 12"/>
+          <p:cNvSpPr txBox="1"/>
+          <p:nvPr/>
+        </p:nvSpPr>
+        <p:spPr>
+          <a:xfrm>
+            <a:off x="1188720" y="2536545"/>
+            <a:ext cx="10271455" cy="744321"/>
+          </a:xfrm>
+          <a:prstGeom prst="rect">
+            <a:avLst/>
+          </a:prstGeom>
+          <a:noFill/>
+        </p:spPr>
+        <p:txBody>
+          <a:bodyPr wrap="square" anchor="ctr"/>
+          <a:lstStyle/>
+          <a:p>
+            <a:r>
+              <a:rPr sz="1500" b="1" i="0">
+                <a:solidFill>
+                  <a:srgbClr val="095292"/>
+                </a:solidFill>
+                <a:latin typeface="Calibri"/>
+              </a:rPr>
+              <a:t>30 s · Las tres variantes</a:t>
+            </a:r>
+          </a:p>
+          <a:p>
+            <a:pPr>
+              <a:spcBef>
+                <a:spcPts val="200"/>
+              </a:spcBef>
+            </a:pPr>
+            <a:r>
+              <a:rPr sz="1300" b="0" i="0">
+                <a:solidFill>
+                  <a:srgbClr val="333333"/>
+                </a:solidFill>
+                <a:latin typeface="Calibri"/>
+              </a:rPr>
+              <a:t>En una frase cada una.</a:t>
+            </a:r>
+          </a:p>
+        </p:txBody>
+      </p:sp>
+      <p:sp>
+        <p:nvSpPr>
+          <p:cNvPr id="14" name="Rounded Rectangle 13"/>
+          <p:cNvSpPr/>
+          <p:nvPr/>
+        </p:nvSpPr>
+        <p:spPr>
+          <a:xfrm>
+            <a:off x="457200" y="3445459"/>
+            <a:ext cx="11277295" cy="908913"/>
+          </a:xfrm>
+          <a:prstGeom prst="roundRect">
+            <a:avLst>
+              <a:gd name="adj" fmla="val 12000"/>
+            </a:avLst>
+          </a:prstGeom>
+          <a:solidFill>
+            <a:srgbClr val="F2F2F2"/>
+          </a:solidFill>
+          <a:ln>
+            <a:noFill/>
+          </a:ln>
+        </p:spPr>
+        <p:style>
+          <a:lnRef idx="1">
+            <a:schemeClr val="accent1"/>
+          </a:lnRef>
+          <a:fillRef idx="3">
+            <a:schemeClr val="accent1"/>
+          </a:fillRef>
+          <a:effectRef idx="2">
+            <a:schemeClr val="accent1"/>
+          </a:effectRef>
+          <a:fontRef idx="minor">
+            <a:schemeClr val="lt1"/>
+          </a:fontRef>
+        </p:style>
+        <p:txBody>
+          <a:bodyPr rtlCol="0" anchor="ctr"/>
+          <a:lstStyle/>
+          <a:p>
+            <a:pPr algn="ctr"/>
+          </a:p>
+        </p:txBody>
+      </p:sp>
+      <p:sp>
+        <p:nvSpPr>
+          <p:cNvPr id="15" name="Rounded Rectangle 14"/>
+          <p:cNvSpPr/>
+          <p:nvPr/>
+        </p:nvSpPr>
+        <p:spPr>
+          <a:xfrm>
+            <a:off x="594360" y="3680460"/>
+            <a:ext cx="438912" cy="438912"/>
+          </a:xfrm>
+          <a:prstGeom prst="roundRect">
+            <a:avLst>
+              <a:gd name="adj" fmla="val 12000"/>
+            </a:avLst>
+          </a:prstGeom>
+          <a:solidFill>
+            <a:srgbClr val="095292"/>
+          </a:solidFill>
+          <a:ln>
+            <a:noFill/>
+          </a:ln>
+        </p:spPr>
+        <p:style>
+          <a:lnRef idx="1">
+            <a:schemeClr val="accent1"/>
+          </a:lnRef>
+          <a:fillRef idx="3">
+            <a:schemeClr val="accent1"/>
+          </a:fillRef>
+          <a:effectRef idx="2">
+            <a:schemeClr val="accent1"/>
+          </a:effectRef>
+          <a:fontRef idx="minor">
+            <a:schemeClr val="lt1"/>
+          </a:fontRef>
+        </p:style>
+        <p:txBody>
+          <a:bodyPr rtlCol="0" anchor="ctr"/>
+          <a:lstStyle/>
+          <a:p>
+            <a:pPr algn="ctr"/>
+          </a:p>
+        </p:txBody>
+      </p:sp>
+      <p:sp>
+        <p:nvSpPr>
+          <p:cNvPr id="16" name="TextBox 15"/>
+          <p:cNvSpPr txBox="1"/>
+          <p:nvPr/>
+        </p:nvSpPr>
+        <p:spPr>
+          <a:xfrm>
+            <a:off x="594360" y="3680460"/>
+            <a:ext cx="438912" cy="438912"/>
+          </a:xfrm>
+          <a:prstGeom prst="rect">
+            <a:avLst/>
+          </a:prstGeom>
+          <a:noFill/>
+        </p:spPr>
+        <p:txBody>
+          <a:bodyPr wrap="square" anchor="ctr"/>
+          <a:lstStyle/>
+          <a:p>
+            <a:pPr algn="ctr"/>
+            <a:r>
+              <a:rPr sz="1600" b="1" i="0">
+                <a:solidFill>
+                  <a:srgbClr val="FFFFFF"/>
+                </a:solidFill>
+                <a:latin typeface="Calibri"/>
+              </a:rPr>
+              <a:t>3</a:t>
+            </a:r>
+          </a:p>
+        </p:txBody>
+      </p:sp>
+      <p:sp>
+        <p:nvSpPr>
+          <p:cNvPr id="17" name="TextBox 16"/>
+          <p:cNvSpPr txBox="1"/>
+          <p:nvPr/>
+        </p:nvSpPr>
+        <p:spPr>
+          <a:xfrm>
+            <a:off x="1188720" y="3536899"/>
+            <a:ext cx="10271455" cy="744321"/>
+          </a:xfrm>
+          <a:prstGeom prst="rect">
+            <a:avLst/>
+          </a:prstGeom>
+          <a:noFill/>
+        </p:spPr>
+        <p:txBody>
+          <a:bodyPr wrap="square" anchor="ctr"/>
+          <a:lstStyle/>
+          <a:p>
+            <a:r>
+              <a:rPr sz="1500" b="1" i="0">
+                <a:solidFill>
+                  <a:srgbClr val="095292"/>
+                </a:solidFill>
+                <a:latin typeface="Calibri"/>
+              </a:rPr>
+              <a:t>30 s · La que eligieron</a:t>
+            </a:r>
+          </a:p>
+          <a:p>
+            <a:pPr>
+              <a:spcBef>
+                <a:spcPts val="200"/>
+              </a:spcBef>
+            </a:pPr>
+            <a:r>
+              <a:rPr sz="1300" b="0" i="0">
+                <a:solidFill>
+                  <a:srgbClr val="333333"/>
+                </a:solidFill>
+                <a:latin typeface="Calibri"/>
+              </a:rPr>
+              <a:t>Y el requisito en el que se apoyaron.</a:t>
+            </a:r>
+          </a:p>
+        </p:txBody>
+      </p:sp>
+      <p:sp>
+        <p:nvSpPr>
+          <p:cNvPr id="18" name="Rounded Rectangle 17"/>
+          <p:cNvSpPr/>
+          <p:nvPr/>
+        </p:nvSpPr>
+        <p:spPr>
+          <a:xfrm>
+            <a:off x="457200" y="4445812"/>
+            <a:ext cx="11277295" cy="908913"/>
+          </a:xfrm>
+          <a:prstGeom prst="roundRect">
+            <a:avLst>
+              <a:gd name="adj" fmla="val 12000"/>
+            </a:avLst>
+          </a:prstGeom>
+          <a:solidFill>
+            <a:srgbClr val="E8F4FA"/>
+          </a:solidFill>
+          <a:ln>
+            <a:noFill/>
+          </a:ln>
+        </p:spPr>
+        <p:style>
+          <a:lnRef idx="1">
+            <a:schemeClr val="accent1"/>
+          </a:lnRef>
+          <a:fillRef idx="3">
+            <a:schemeClr val="accent1"/>
+          </a:fillRef>
+          <a:effectRef idx="2">
+            <a:schemeClr val="accent1"/>
+          </a:effectRef>
+          <a:fontRef idx="minor">
+            <a:schemeClr val="lt1"/>
+          </a:fontRef>
+        </p:style>
+        <p:txBody>
+          <a:bodyPr rtlCol="0" anchor="ctr"/>
+          <a:lstStyle/>
+          <a:p>
+            <a:pPr algn="ctr"/>
+          </a:p>
+        </p:txBody>
+      </p:sp>
+      <p:sp>
+        <p:nvSpPr>
+          <p:cNvPr id="19" name="Rounded Rectangle 18"/>
+          <p:cNvSpPr/>
+          <p:nvPr/>
+        </p:nvSpPr>
+        <p:spPr>
+          <a:xfrm>
+            <a:off x="594360" y="4680813"/>
+            <a:ext cx="438912" cy="438912"/>
+          </a:xfrm>
+          <a:prstGeom prst="roundRect">
+            <a:avLst>
+              <a:gd name="adj" fmla="val 12000"/>
+            </a:avLst>
+          </a:prstGeom>
+          <a:solidFill>
+            <a:srgbClr val="095292"/>
+          </a:solidFill>
+          <a:ln>
+            <a:noFill/>
+          </a:ln>
+        </p:spPr>
+        <p:style>
+          <a:lnRef idx="1">
+            <a:schemeClr val="accent1"/>
+          </a:lnRef>
+          <a:fillRef idx="3">
+            <a:schemeClr val="accent1"/>
+          </a:fillRef>
+          <a:effectRef idx="2">
+            <a:schemeClr val="accent1"/>
+          </a:effectRef>
+          <a:fontRef idx="minor">
+            <a:schemeClr val="lt1"/>
+          </a:fontRef>
+        </p:style>
+        <p:txBody>
+          <a:bodyPr rtlCol="0" anchor="ctr"/>
+          <a:lstStyle/>
+          <a:p>
+            <a:pPr algn="ctr"/>
+          </a:p>
+        </p:txBody>
+      </p:sp>
+      <p:sp>
+        <p:nvSpPr>
+          <p:cNvPr id="20" name="TextBox 19"/>
+          <p:cNvSpPr txBox="1"/>
+          <p:nvPr/>
+        </p:nvSpPr>
+        <p:spPr>
+          <a:xfrm>
+            <a:off x="594360" y="4680813"/>
+            <a:ext cx="438912" cy="438912"/>
+          </a:xfrm>
+          <a:prstGeom prst="rect">
+            <a:avLst/>
+          </a:prstGeom>
+          <a:noFill/>
+        </p:spPr>
+        <p:txBody>
+          <a:bodyPr wrap="square" anchor="ctr"/>
+          <a:lstStyle/>
+          <a:p>
+            <a:pPr algn="ctr"/>
+            <a:r>
+              <a:rPr sz="1600" b="1" i="0">
+                <a:solidFill>
+                  <a:srgbClr val="FFFFFF"/>
+                </a:solidFill>
+                <a:latin typeface="Calibri"/>
+              </a:rPr>
+              <a:t>4</a:t>
+            </a:r>
+          </a:p>
+        </p:txBody>
+      </p:sp>
+      <p:sp>
+        <p:nvSpPr>
+          <p:cNvPr id="21" name="TextBox 20"/>
+          <p:cNvSpPr txBox="1"/>
+          <p:nvPr/>
+        </p:nvSpPr>
+        <p:spPr>
+          <a:xfrm>
+            <a:off x="1188720" y="4537252"/>
+            <a:ext cx="10271455" cy="744321"/>
+          </a:xfrm>
+          <a:prstGeom prst="rect">
+            <a:avLst/>
+          </a:prstGeom>
+          <a:noFill/>
+        </p:spPr>
+        <p:txBody>
+          <a:bodyPr wrap="square" anchor="ctr"/>
+          <a:lstStyle/>
+          <a:p>
+            <a:r>
+              <a:rPr sz="1500" b="1" i="0">
+                <a:solidFill>
+                  <a:srgbClr val="095292"/>
+                </a:solidFill>
+                <a:latin typeface="Calibri"/>
+              </a:rPr>
+              <a:t>70 s · Lo que corrigieron</a:t>
+            </a:r>
+          </a:p>
+          <a:p>
+            <a:pPr>
+              <a:spcBef>
+                <a:spcPts val="200"/>
+              </a:spcBef>
+            </a:pPr>
+            <a:r>
+              <a:rPr sz="1300" b="0" i="0">
+                <a:solidFill>
+                  <a:srgbClr val="333333"/>
+                </a:solidFill>
+                <a:latin typeface="Calibri"/>
+              </a:rPr>
+              <a:t>Dos correcciones con su razón y </a:t>
+            </a:r>
+            <a:r>
+              <a:rPr sz="1300" b="1" i="0">
+                <a:solidFill>
+                  <a:srgbClr val="333333"/>
+                </a:solidFill>
+                <a:latin typeface="Calibri"/>
+              </a:rPr>
+              <a:t>de qué sesión sale cada una</a:t>
+            </a:r>
+            <a:r>
+              <a:rPr sz="1300" b="0" i="0">
+                <a:solidFill>
+                  <a:srgbClr val="333333"/>
+                </a:solidFill>
+                <a:latin typeface="Calibri"/>
+              </a:rPr>
+              <a:t>. Es el minuto obligatorio.</a:t>
+            </a:r>
+          </a:p>
+        </p:txBody>
+      </p:sp>
+      <p:sp>
+        <p:nvSpPr>
+          <p:cNvPr id="22" name="Rounded Rectangle 21"/>
+          <p:cNvSpPr/>
+          <p:nvPr/>
+        </p:nvSpPr>
+        <p:spPr>
+          <a:xfrm>
+            <a:off x="457200" y="5446166"/>
+            <a:ext cx="11277295" cy="908913"/>
+          </a:xfrm>
+          <a:prstGeom prst="roundRect">
+            <a:avLst>
+              <a:gd name="adj" fmla="val 12000"/>
+            </a:avLst>
+          </a:prstGeom>
+          <a:solidFill>
+            <a:srgbClr val="F2F2F2"/>
+          </a:solidFill>
+          <a:ln>
+            <a:noFill/>
+          </a:ln>
+        </p:spPr>
+        <p:style>
+          <a:lnRef idx="1">
+            <a:schemeClr val="accent1"/>
+          </a:lnRef>
+          <a:fillRef idx="3">
+            <a:schemeClr val="accent1"/>
+          </a:fillRef>
+          <a:effectRef idx="2">
+            <a:schemeClr val="accent1"/>
+          </a:effectRef>
+          <a:fontRef idx="minor">
+            <a:schemeClr val="lt1"/>
+          </a:fontRef>
+        </p:style>
+        <p:txBody>
+          <a:bodyPr rtlCol="0" anchor="ctr"/>
+          <a:lstStyle/>
+          <a:p>
+            <a:pPr algn="ctr"/>
+          </a:p>
+        </p:txBody>
+      </p:sp>
+      <p:sp>
+        <p:nvSpPr>
+          <p:cNvPr id="23" name="Rounded Rectangle 22"/>
+          <p:cNvSpPr/>
+          <p:nvPr/>
+        </p:nvSpPr>
+        <p:spPr>
+          <a:xfrm>
+            <a:off x="594360" y="5681167"/>
+            <a:ext cx="438912" cy="438912"/>
+          </a:xfrm>
+          <a:prstGeom prst="roundRect">
+            <a:avLst>
+              <a:gd name="adj" fmla="val 12000"/>
+            </a:avLst>
+          </a:prstGeom>
+          <a:solidFill>
+            <a:srgbClr val="095292"/>
+          </a:solidFill>
+          <a:ln>
+            <a:noFill/>
+          </a:ln>
+        </p:spPr>
+        <p:style>
+          <a:lnRef idx="1">
+            <a:schemeClr val="accent1"/>
+          </a:lnRef>
+          <a:fillRef idx="3">
+            <a:schemeClr val="accent1"/>
+          </a:fillRef>
+          <a:effectRef idx="2">
+            <a:schemeClr val="accent1"/>
+          </a:effectRef>
+          <a:fontRef idx="minor">
+            <a:schemeClr val="lt1"/>
+          </a:fontRef>
+        </p:style>
+        <p:txBody>
+          <a:bodyPr rtlCol="0" anchor="ctr"/>
+          <a:lstStyle/>
+          <a:p>
+            <a:pPr algn="ctr"/>
+          </a:p>
+        </p:txBody>
+      </p:sp>
+      <p:sp>
+        <p:nvSpPr>
+          <p:cNvPr id="24" name="TextBox 23"/>
+          <p:cNvSpPr txBox="1"/>
+          <p:nvPr/>
+        </p:nvSpPr>
+        <p:spPr>
+          <a:xfrm>
+            <a:off x="594360" y="5681167"/>
+            <a:ext cx="438912" cy="438912"/>
+          </a:xfrm>
+          <a:prstGeom prst="rect">
+            <a:avLst/>
+          </a:prstGeom>
+          <a:noFill/>
+        </p:spPr>
+        <p:txBody>
+          <a:bodyPr wrap="square" anchor="ctr"/>
+          <a:lstStyle/>
+          <a:p>
+            <a:pPr algn="ctr"/>
+            <a:r>
+              <a:rPr sz="1600" b="1" i="0">
+                <a:solidFill>
+                  <a:srgbClr val="FFFFFF"/>
+                </a:solidFill>
+                <a:latin typeface="Calibri"/>
+              </a:rPr>
+              <a:t>5</a:t>
+            </a:r>
+          </a:p>
+        </p:txBody>
+      </p:sp>
+      <p:sp>
+        <p:nvSpPr>
+          <p:cNvPr id="25" name="TextBox 24"/>
+          <p:cNvSpPr txBox="1"/>
+          <p:nvPr/>
+        </p:nvSpPr>
+        <p:spPr>
+          <a:xfrm>
+            <a:off x="1188720" y="5537606"/>
+            <a:ext cx="10271455" cy="744321"/>
+          </a:xfrm>
+          <a:prstGeom prst="rect">
+            <a:avLst/>
+          </a:prstGeom>
+          <a:noFill/>
+        </p:spPr>
+        <p:txBody>
+          <a:bodyPr wrap="square" anchor="ctr"/>
+          <a:lstStyle/>
+          <a:p>
+            <a:r>
+              <a:rPr sz="1500" b="1" i="0">
+                <a:solidFill>
+                  <a:srgbClr val="095292"/>
+                </a:solidFill>
+                <a:latin typeface="Calibri"/>
+              </a:rPr>
+              <a:t>25 s · Lo que descartaron</a:t>
+            </a:r>
+          </a:p>
+          <a:p>
+            <a:pPr>
+              <a:spcBef>
+                <a:spcPts val="200"/>
+              </a:spcBef>
+            </a:pPr>
+            <a:r>
+              <a:rPr sz="1300" b="0" i="0">
+                <a:solidFill>
+                  <a:srgbClr val="333333"/>
+                </a:solidFill>
+                <a:latin typeface="Calibri"/>
+              </a:rPr>
+              <a:t>Una propuesta rechazada y el motivo.</a:t>
+            </a:r>
+          </a:p>
+        </p:txBody>
+      </p:sp>
+      <p:sp>
+        <p:nvSpPr>
+          <p:cNvPr id="26" name="TextBox 25"/>
+          <p:cNvSpPr txBox="1"/>
+          <p:nvPr/>
+        </p:nvSpPr>
+        <p:spPr>
+          <a:xfrm>
+            <a:off x="11185855" y="6473952"/>
+            <a:ext cx="640080" cy="274320"/>
+          </a:xfrm>
+          <a:prstGeom prst="rect">
+            <a:avLst/>
+          </a:prstGeom>
+          <a:noFill/>
+        </p:spPr>
+        <p:txBody>
+          <a:bodyPr wrap="square">
+            <a:spAutoFit/>
+          </a:bodyPr>
+          <a:lstStyle/>
+          <a:p>
+            <a:pPr algn="r"/>
+            <a:r>
+              <a:rPr sz="1100" b="0" i="0">
+                <a:solidFill>
+                  <a:srgbClr val="666666"/>
+                </a:solidFill>
+                <a:latin typeface="Calibri"/>
+              </a:rPr>
+              <a:t>18</a:t>
+            </a:r>
+          </a:p>
+        </p:txBody>
+      </p:sp>
+    </p:spTree>
+  </p:cSld>
+  <p:clrMapOvr>
+    <a:masterClrMapping/>
+  </p:clrMapOvr>
+</p:sld>
+</file>
+
+<file path=ppt/slides/slide19.xml><?xml version="1.0" encoding="utf-8"?>
+<p:sld xmlns:a="http://schemas.openxmlformats.org/drawingml/2006/main" xmlns:p="http://schemas.openxmlformats.org/presentationml/2006/main" xmlns:r="http://schemas.openxmlformats.org/officeDocument/2006/relationships">
+  <p:cSld>
+    <p:bg>
+      <p:bgPr>
+        <a:solidFill>
+          <a:srgbClr val="FFFFFF"/>
+        </a:solidFill>
+        <a:effectLst/>
+      </p:bgPr>
+    </p:bg>
+    <p:spTree>
+      <p:nvGrpSpPr>
+        <p:cNvPr id="1" name=""/>
+        <p:cNvGrpSpPr/>
+        <p:nvPr/>
+      </p:nvGrpSpPr>
+      <p:grpSpPr/>
+      <p:sp>
+        <p:nvSpPr>
+          <p:cNvPr id="2" name="Rectangle 1"/>
+          <p:cNvSpPr/>
+          <p:nvPr/>
+        </p:nvSpPr>
+        <p:spPr>
+          <a:xfrm>
+            <a:off x="0" y="0"/>
+            <a:ext cx="12191695" cy="960120"/>
+          </a:xfrm>
+          <a:prstGeom prst="rect">
+            <a:avLst/>
+          </a:prstGeom>
+          <a:solidFill>
+            <a:srgbClr val="095292"/>
+          </a:solidFill>
+          <a:ln>
+            <a:noFill/>
+          </a:ln>
+        </p:spPr>
+        <p:style>
+          <a:lnRef idx="1">
+            <a:schemeClr val="accent1"/>
+          </a:lnRef>
+          <a:fillRef idx="3">
+            <a:schemeClr val="accent1"/>
+          </a:fillRef>
+          <a:effectRef idx="2">
+            <a:schemeClr val="accent1"/>
+          </a:effectRef>
+          <a:fontRef idx="minor">
+            <a:schemeClr val="lt1"/>
+          </a:fontRef>
+        </p:style>
+        <p:txBody>
+          <a:bodyPr rtlCol="0" anchor="ctr"/>
+          <a:lstStyle/>
+          <a:p>
+            <a:pPr algn="ctr"/>
+          </a:p>
+        </p:txBody>
+      </p:sp>
+      <p:sp>
+        <p:nvSpPr>
+          <p:cNvPr id="3" name="Rectangle 2"/>
+          <p:cNvSpPr/>
+          <p:nvPr/>
+        </p:nvSpPr>
+        <p:spPr>
+          <a:xfrm>
+            <a:off x="0" y="960120"/>
+            <a:ext cx="12191695" cy="41148"/>
+          </a:xfrm>
+          <a:prstGeom prst="rect">
+            <a:avLst/>
+          </a:prstGeom>
+          <a:solidFill>
+            <a:srgbClr val="FFD000"/>
+          </a:solidFill>
+          <a:ln>
+            <a:noFill/>
+          </a:ln>
+        </p:spPr>
+        <p:style>
+          <a:lnRef idx="1">
+            <a:schemeClr val="accent1"/>
+          </a:lnRef>
+          <a:fillRef idx="3">
+            <a:schemeClr val="accent1"/>
+          </a:fillRef>
+          <a:effectRef idx="2">
+            <a:schemeClr val="accent1"/>
+          </a:effectRef>
+          <a:fontRef idx="minor">
+            <a:schemeClr val="lt1"/>
+          </a:fontRef>
+        </p:style>
+        <p:txBody>
+          <a:bodyPr rtlCol="0" anchor="ctr"/>
+          <a:lstStyle/>
+          <a:p>
+            <a:pPr algn="ctr"/>
+          </a:p>
+        </p:txBody>
+      </p:sp>
+      <p:sp>
+        <p:nvSpPr>
+          <p:cNvPr id="4" name="TextBox 3"/>
+          <p:cNvSpPr txBox="1"/>
+          <p:nvPr/>
+        </p:nvSpPr>
+        <p:spPr>
+          <a:xfrm>
+            <a:off x="457200" y="164592"/>
+            <a:ext cx="11277295" cy="502920"/>
+          </a:xfrm>
+          <a:prstGeom prst="rect">
+            <a:avLst/>
+          </a:prstGeom>
+          <a:noFill/>
+        </p:spPr>
+        <p:txBody>
+          <a:bodyPr wrap="square">
+            <a:spAutoFit/>
+          </a:bodyPr>
+          <a:lstStyle/>
+          <a:p>
+            <a:r>
+              <a:rPr sz="2600" b="1" i="0">
+                <a:solidFill>
+                  <a:srgbClr val="FFFFFF"/>
+                </a:solidFill>
+                <a:latin typeface="Calibri"/>
+              </a:rPr>
+              <a:t>Para la Clase 12</a:t>
+            </a:r>
+          </a:p>
+        </p:txBody>
+      </p:sp>
+      <p:sp>
+        <p:nvSpPr>
+          <p:cNvPr id="5" name="TextBox 4"/>
+          <p:cNvSpPr txBox="1"/>
+          <p:nvPr/>
+        </p:nvSpPr>
+        <p:spPr>
+          <a:xfrm>
+            <a:off x="457200" y="1170432"/>
+            <a:ext cx="11277295" cy="5230368"/>
+          </a:xfrm>
+          <a:prstGeom prst="rect">
+            <a:avLst/>
+          </a:prstGeom>
+          <a:noFill/>
+        </p:spPr>
+        <p:txBody>
+          <a:bodyPr wrap="square">
+            <a:spAutoFit/>
+          </a:bodyPr>
+          <a:lstStyle/>
+          <a:p>
+            <a:pPr>
+              <a:spcAft>
+                <a:spcPts val="800"/>
+              </a:spcAft>
+            </a:pPr>
+            <a:r>
+              <a:rPr sz="2000" b="0" i="0">
+                <a:solidFill>
+                  <a:srgbClr val="333333"/>
+                </a:solidFill>
+                <a:latin typeface="Calibri"/>
+              </a:rPr>
+              <a:t>–   </a:t>
+            </a:r>
             <a:r>
               <a:rPr sz="2000" b="1" i="0">
                 <a:solidFill>
-                  <a:srgbClr val="269CCB"/>
-                </a:solidFill>
-                <a:latin typeface="Calibri"/>
-              </a:rPr>
-              <a:t>Pudieron corregir al asistente porque tenían sus decisiones escritas</a:t>
+                  <a:srgbClr val="333333"/>
+                </a:solidFill>
+                <a:latin typeface="Calibri"/>
+              </a:rPr>
+              <a:t>Trabajo dirigido:</a:t>
+            </a:r>
+            <a:r>
+              <a:rPr sz="2000" b="0" i="0">
+                <a:solidFill>
+                  <a:srgbClr val="333333"/>
+                </a:solidFill>
+                <a:latin typeface="Calibri"/>
+              </a:rPr>
+              <a:t> Uso de IA para generación de ideas — completar el registro del taller (prompt, variantes, elección, correcciones con su origen, descartes y declaración del uso) en el documento del equipo.</a:t>
+            </a:r>
+          </a:p>
+          <a:p>
+            <a:pPr>
+              <a:spcAft>
+                <a:spcPts val="800"/>
+              </a:spcAft>
+            </a:pPr>
+            <a:r>
+              <a:rPr sz="2000" b="0" i="0">
+                <a:solidFill>
+                  <a:srgbClr val="333333"/>
+                </a:solidFill>
+                <a:latin typeface="Calibri"/>
+              </a:rPr>
+              <a:t>–   </a:t>
+            </a:r>
+            <a:r>
+              <a:rPr sz="2000" b="1" i="0">
+                <a:solidFill>
+                  <a:srgbClr val="333333"/>
+                </a:solidFill>
+                <a:latin typeface="Calibri"/>
+              </a:rPr>
+              <a:t>Trabajo independiente:</a:t>
+            </a:r>
+            <a:r>
+              <a:rPr sz="2000" b="0" i="0">
+                <a:solidFill>
+                  <a:srgbClr val="333333"/>
+                </a:solidFill>
+                <a:latin typeface="Calibri"/>
+              </a:rPr>
+              <a:t> Corrección del prototipo: dejar el </a:t>
+            </a:r>
+            <a:r>
+              <a:rPr sz="2000" b="1" i="0">
+                <a:solidFill>
+                  <a:srgbClr val="333333"/>
+                </a:solidFill>
+                <a:latin typeface="Calibri"/>
+              </a:rPr>
+              <a:t>v2 navegable</a:t>
+            </a:r>
+            <a:r>
+              <a:rPr sz="2000" b="0" i="0">
+                <a:solidFill>
+                  <a:srgbClr val="333333"/>
+                </a:solidFill>
+                <a:latin typeface="Calibri"/>
+              </a:rPr>
+              <a:t> en la carpeta del equipo, con todas las correcciones aplicadas, y </a:t>
+            </a:r>
+            <a:r>
+              <a:rPr sz="2000" b="1" i="0">
+                <a:solidFill>
+                  <a:srgbClr val="333333"/>
+                </a:solidFill>
+                <a:latin typeface="Calibri"/>
+              </a:rPr>
+              <a:t>conseguir a la persona ajena</a:t>
+            </a:r>
+            <a:r>
+              <a:rPr sz="2000" b="0" i="0">
+                <a:solidFill>
+                  <a:srgbClr val="333333"/>
+                </a:solidFill>
+                <a:latin typeface="Calibri"/>
+              </a:rPr>
+              <a:t> que va a probarlo — solo el rol, no el nombre.</a:t>
+            </a:r>
+          </a:p>
+          <a:p>
+            <a:pPr>
+              <a:spcAft>
+                <a:spcPts val="800"/>
+              </a:spcAft>
+            </a:pPr>
+            <a:r>
+              <a:rPr sz="2000" b="0" i="0">
+                <a:solidFill>
+                  <a:srgbClr val="333333"/>
+                </a:solidFill>
+                <a:latin typeface="Calibri"/>
+              </a:rPr>
+              <a:t>–   </a:t>
+            </a:r>
+            <a:r>
+              <a:rPr sz="2000" b="1" i="0">
+                <a:solidFill>
+                  <a:srgbClr val="333333"/>
+                </a:solidFill>
+                <a:latin typeface="Calibri"/>
+              </a:rPr>
+              <a:t>Clase 12 · Presentación de avances de proyectos</a:t>
+            </a:r>
+            <a:r>
+              <a:rPr sz="2000" b="0" i="0">
+                <a:solidFill>
+                  <a:srgbClr val="333333"/>
+                </a:solidFill>
+                <a:latin typeface="Calibri"/>
+              </a:rPr>
+              <a:t> — arranca el </a:t>
+            </a:r>
+            <a:r>
+              <a:rPr sz="2000" b="1" i="0">
+                <a:solidFill>
+                  <a:srgbClr val="333333"/>
+                </a:solidFill>
+                <a:latin typeface="Calibri"/>
+              </a:rPr>
+              <a:t>corte 3</a:t>
+            </a:r>
+            <a:r>
+              <a:rPr sz="2000" b="0" i="0">
+                <a:solidFill>
+                  <a:srgbClr val="333333"/>
+                </a:solidFill>
+                <a:latin typeface="Calibri"/>
+              </a:rPr>
+              <a:t> con la </a:t>
+            </a:r>
+            <a:r>
+              <a:rPr sz="2000" b="1" i="0">
+                <a:solidFill>
+                  <a:srgbClr val="333333"/>
+                </a:solidFill>
+                <a:latin typeface="Calibri"/>
+              </a:rPr>
+              <a:t>presentación de avances</a:t>
+            </a:r>
+            <a:r>
+              <a:rPr sz="2000" b="0" i="0">
+                <a:solidFill>
+                  <a:srgbClr val="333333"/>
+                </a:solidFill>
+                <a:latin typeface="Calibri"/>
+              </a:rPr>
+              <a:t>: el prototipo se prueba con una persona ajena al equipo y se recibe retroalimentación entre pares.</a:t>
+            </a:r>
+          </a:p>
+          <a:p>
+            <a:pPr>
+              <a:spcAft>
+                <a:spcPts val="800"/>
+              </a:spcAft>
+            </a:pPr>
+            <a:r>
+              <a:rPr sz="2000" b="0" i="0">
+                <a:solidFill>
+                  <a:srgbClr val="333333"/>
+                </a:solidFill>
+                <a:latin typeface="Calibri"/>
+              </a:rPr>
+              <a:t>–   </a:t>
+            </a:r>
+            <a:r>
+              <a:rPr sz="2000" b="1" i="0">
+                <a:solidFill>
+                  <a:srgbClr val="333333"/>
+                </a:solidFill>
+                <a:latin typeface="Calibri"/>
+              </a:rPr>
+              <a:t>Aviso:</a:t>
+            </a:r>
+            <a:r>
+              <a:rPr sz="2000" b="0" i="0">
+                <a:solidFill>
+                  <a:srgbClr val="333333"/>
+                </a:solidFill>
+                <a:latin typeface="Calibri"/>
+              </a:rPr>
+              <a:t> Para la Clase 12 traigan el prototipo v2 navegable </a:t>
+            </a:r>
+            <a:r>
+              <a:rPr sz="2000" b="1" i="0">
+                <a:solidFill>
+                  <a:srgbClr val="333333"/>
+                </a:solidFill>
+                <a:latin typeface="Calibri"/>
+              </a:rPr>
+              <a:t>y la prueba ya hecha con una persona ajena al equipo</a:t>
+            </a:r>
+            <a:r>
+              <a:rPr sz="2000" b="0" i="0">
+                <a:solidFill>
+                  <a:srgbClr val="333333"/>
+                </a:solidFill>
+                <a:latin typeface="Calibri"/>
+              </a:rPr>
+              <a:t>, con la lista de lo que falló. Sin esa lista no hay nada que presentar: la Clase 12 es sobre lo que salió mal, no sobre lo que se planeó.</a:t>
+            </a:r>
+          </a:p>
+          <a:p>
+            <a:pPr>
+              <a:spcAft>
+                <a:spcPts val="800"/>
+              </a:spcAft>
+            </a:pPr>
+            <a:r>
+              <a:rPr sz="2000" b="0" i="0">
+                <a:solidFill>
+                  <a:srgbClr val="333333"/>
+                </a:solidFill>
+                <a:latin typeface="Calibri"/>
+              </a:rPr>
+              <a:t>–   </a:t>
+            </a:r>
+            <a:r>
+              <a:rPr sz="2000" b="1" i="0">
+                <a:solidFill>
+                  <a:srgbClr val="333333"/>
+                </a:solidFill>
+                <a:latin typeface="Calibri"/>
+              </a:rPr>
+              <a:t>Antes de salir:</a:t>
+            </a:r>
+            <a:r>
+              <a:rPr sz="2000" b="0" i="0">
+                <a:solidFill>
+                  <a:srgbClr val="333333"/>
+                </a:solidFill>
+                <a:latin typeface="Calibri"/>
+              </a:rPr>
+              <a:t> el enlace del documento del equipo en el chat, con permiso de lectura para el docente, y el nombre del vocero de hoy.</a:t>
+            </a:r>
+          </a:p>
+        </p:txBody>
+      </p:sp>
+      <p:sp>
+        <p:nvSpPr>
+          <p:cNvPr id="6" name="TextBox 5"/>
+          <p:cNvSpPr txBox="1"/>
+          <p:nvPr/>
+        </p:nvSpPr>
+        <p:spPr>
+          <a:xfrm>
+            <a:off x="11185855" y="6473952"/>
+            <a:ext cx="640080" cy="274320"/>
+          </a:xfrm>
+          <a:prstGeom prst="rect">
+            <a:avLst/>
+          </a:prstGeom>
+          <a:noFill/>
+        </p:spPr>
+        <p:txBody>
+          <a:bodyPr wrap="square">
+            <a:spAutoFit/>
+          </a:bodyPr>
+          <a:lstStyle/>
+          <a:p>
+            <a:pPr algn="r"/>
+            <a:r>
+              <a:rPr sz="1100" b="0" i="0">
+                <a:solidFill>
+                  <a:srgbClr val="666666"/>
+                </a:solidFill>
+                <a:latin typeface="Calibri"/>
+              </a:rPr>
+              <a:t>19</a:t>
             </a:r>
           </a:p>
         </p:txBody>
@@ -6280,6 +9575,222 @@
 </p:sld>
 </file>
 
+<file path=ppt/slides/slide20.xml><?xml version="1.0" encoding="utf-8"?>
+<p:sld xmlns:a="http://schemas.openxmlformats.org/drawingml/2006/main" xmlns:p="http://schemas.openxmlformats.org/presentationml/2006/main" xmlns:r="http://schemas.openxmlformats.org/officeDocument/2006/relationships">
+  <p:cSld>
+    <p:bg>
+      <p:bgPr>
+        <a:solidFill>
+          <a:srgbClr val="FFFFFF"/>
+        </a:solidFill>
+        <a:effectLst/>
+      </p:bgPr>
+    </p:bg>
+    <p:spTree>
+      <p:nvGrpSpPr>
+        <p:cNvPr id="1" name=""/>
+        <p:cNvGrpSpPr/>
+        <p:nvPr/>
+      </p:nvGrpSpPr>
+      <p:grpSpPr/>
+      <p:sp>
+        <p:nvSpPr>
+          <p:cNvPr id="2" name="Rectangle 1"/>
+          <p:cNvSpPr/>
+          <p:nvPr/>
+        </p:nvSpPr>
+        <p:spPr>
+          <a:xfrm>
+            <a:off x="0" y="0"/>
+            <a:ext cx="12191695" cy="164592"/>
+          </a:xfrm>
+          <a:prstGeom prst="rect">
+            <a:avLst/>
+          </a:prstGeom>
+          <a:solidFill>
+            <a:srgbClr val="269CCB"/>
+          </a:solidFill>
+          <a:ln>
+            <a:noFill/>
+          </a:ln>
+        </p:spPr>
+        <p:style>
+          <a:lnRef idx="1">
+            <a:schemeClr val="accent1"/>
+          </a:lnRef>
+          <a:fillRef idx="3">
+            <a:schemeClr val="accent1"/>
+          </a:fillRef>
+          <a:effectRef idx="2">
+            <a:schemeClr val="accent1"/>
+          </a:effectRef>
+          <a:fontRef idx="minor">
+            <a:schemeClr val="lt1"/>
+          </a:fontRef>
+        </p:style>
+        <p:txBody>
+          <a:bodyPr rtlCol="0" anchor="ctr"/>
+          <a:lstStyle/>
+          <a:p>
+            <a:pPr algn="ctr"/>
+          </a:p>
+        </p:txBody>
+      </p:sp>
+      <p:pic>
+        <p:nvPicPr>
+          <p:cNvPr id="3" name="Picture 2" descr="logo_uniajc_color.png"/>
+          <p:cNvPicPr>
+            <a:picLocks noChangeAspect="1"/>
+          </p:cNvPicPr>
+          <p:nvPr/>
+        </p:nvPicPr>
+        <p:blipFill>
+          <a:blip r:embed="rId2"/>
+          <a:stretch>
+            <a:fillRect/>
+          </a:stretch>
+        </p:blipFill>
+        <p:spPr>
+          <a:xfrm>
+            <a:off x="10271455" y="5998464"/>
+            <a:ext cx="1463040" cy="643233"/>
+          </a:xfrm>
+          <a:prstGeom prst="rect">
+            <a:avLst/>
+          </a:prstGeom>
+        </p:spPr>
+      </p:pic>
+      <p:sp>
+        <p:nvSpPr>
+          <p:cNvPr id="4" name="TextBox 3"/>
+          <p:cNvSpPr txBox="1"/>
+          <p:nvPr/>
+        </p:nvSpPr>
+        <p:spPr>
+          <a:xfrm>
+            <a:off x="457200" y="1737360"/>
+            <a:ext cx="11277295" cy="1097280"/>
+          </a:xfrm>
+          <a:prstGeom prst="rect">
+            <a:avLst/>
+          </a:prstGeom>
+          <a:noFill/>
+        </p:spPr>
+        <p:txBody>
+          <a:bodyPr wrap="square" anchor="ctr"/>
+          <a:lstStyle/>
+          <a:p>
+            <a:pPr algn="ctr"/>
+            <a:r>
+              <a:rPr sz="3400" b="1" i="0">
+                <a:solidFill>
+                  <a:srgbClr val="095292"/>
+                </a:solidFill>
+                <a:latin typeface="Calibri"/>
+              </a:rPr>
+              <a:t>Cierra el corte 2 · Nos vemos en la Clase 12</a:t>
+            </a:r>
+          </a:p>
+        </p:txBody>
+      </p:sp>
+      <p:sp>
+        <p:nvSpPr>
+          <p:cNvPr id="5" name="TextBox 4"/>
+          <p:cNvSpPr txBox="1"/>
+          <p:nvPr/>
+        </p:nvSpPr>
+        <p:spPr>
+          <a:xfrm>
+            <a:off x="457200" y="3017520"/>
+            <a:ext cx="11277295" cy="1645920"/>
+          </a:xfrm>
+          <a:prstGeom prst="rect">
+            <a:avLst/>
+          </a:prstGeom>
+          <a:noFill/>
+        </p:spPr>
+        <p:txBody>
+          <a:bodyPr wrap="square">
+            <a:spAutoFit/>
+          </a:bodyPr>
+          <a:lstStyle/>
+          <a:p>
+            <a:pPr algn="ctr">
+              <a:spcAft>
+                <a:spcPts val="600"/>
+              </a:spcAft>
+            </a:pPr>
+            <a:r>
+              <a:rPr sz="1600" b="0" i="0">
+                <a:solidFill>
+                  <a:srgbClr val="333333"/>
+                </a:solidFill>
+                <a:latin typeface="Calibri"/>
+              </a:rPr>
+              <a:t>Taller de prototipado inicial con IA · Clase 11</a:t>
+            </a:r>
+          </a:p>
+          <a:p>
+            <a:pPr algn="ctr">
+              <a:spcAft>
+                <a:spcPts val="600"/>
+              </a:spcAft>
+            </a:pPr>
+            <a:r>
+              <a:rPr sz="1600" b="0" i="0">
+                <a:solidFill>
+                  <a:srgbClr val="333333"/>
+                </a:solidFill>
+                <a:latin typeface="Calibri"/>
+              </a:rPr>
+              <a:t>FI300101 · UNIAJC · Ingeniería de Sistemas</a:t>
+            </a:r>
+          </a:p>
+        </p:txBody>
+      </p:sp>
+      <p:sp>
+        <p:nvSpPr>
+          <p:cNvPr id="6" name="TextBox 5"/>
+          <p:cNvSpPr txBox="1"/>
+          <p:nvPr/>
+        </p:nvSpPr>
+        <p:spPr>
+          <a:xfrm>
+            <a:off x="457200" y="4754880"/>
+            <a:ext cx="11277295" cy="640080"/>
+          </a:xfrm>
+          <a:prstGeom prst="rect">
+            <a:avLst/>
+          </a:prstGeom>
+          <a:noFill/>
+        </p:spPr>
+        <p:txBody>
+          <a:bodyPr wrap="square">
+            <a:spAutoFit/>
+          </a:bodyPr>
+          <a:lstStyle/>
+          <a:p>
+            <a:pPr algn="ctr"/>
+            <a:r>
+              <a:rPr sz="2000" b="1" i="0">
+                <a:solidFill>
+                  <a:srgbClr val="269CCB"/>
+                </a:solidFill>
+                <a:latin typeface="Calibri"/>
+              </a:rPr>
+              <a:t>Pudieron corregir al asistente porque tenían sus decisiones escritas</a:t>
+            </a:r>
+          </a:p>
+        </p:txBody>
+      </p:sp>
+    </p:spTree>
+  </p:cSld>
+  <p:clrMapOvr>
+    <a:masterClrMapping/>
+  </p:clrMapOvr>
+</p:sld>
+</file>
+
 <file path=ppt/slides/slide3.xml><?xml version="1.0" encoding="utf-8"?>
 <p:sld xmlns:a="http://schemas.openxmlformats.org/drawingml/2006/main" xmlns:p="http://schemas.openxmlformats.org/presentationml/2006/main" xmlns:r="http://schemas.openxmlformats.org/officeDocument/2006/relationships">
   <p:cSld>
@@ -10407,7 +13918,7 @@
         <p:spPr>
           <a:xfrm>
             <a:off x="0" y="0"/>
-            <a:ext cx="12191695" cy="1170432"/>
+            <a:ext cx="12191695" cy="960120"/>
           </a:xfrm>
           <a:prstGeom prst="rect">
             <a:avLst/>
@@ -10449,7 +13960,7 @@
         </p:nvSpPr>
         <p:spPr>
           <a:xfrm>
-            <a:off x="0" y="1170432"/>
+            <a:off x="0" y="960120"/>
             <a:ext cx="12191695" cy="41148"/>
           </a:xfrm>
           <a:prstGeom prst="rect">
@@ -10493,7 +14004,7 @@
         <p:spPr>
           <a:xfrm>
             <a:off x="457200" y="164592"/>
-            <a:ext cx="11277295" cy="384048"/>
+            <a:ext cx="11277295" cy="502920"/>
           </a:xfrm>
           <a:prstGeom prst="rect">
             <a:avLst/>
@@ -10513,7 +14024,7 @@
                 </a:solidFill>
                 <a:latin typeface="Calibri"/>
               </a:rPr>
-              <a:t>Taller de hoy: Prototipo v2 con IA</a:t>
+              <a:t>La pregunta de entrada: mejor y además ilegal (1/2)</a:t>
             </a:r>
           </a:p>
         </p:txBody>
@@ -10526,8 +14037,8 @@
         </p:nvSpPr>
         <p:spPr>
           <a:xfrm>
-            <a:off x="457200" y="566928"/>
-            <a:ext cx="11277295" cy="411480"/>
+            <a:off x="457200" y="1170432"/>
+            <a:ext cx="11277295" cy="5230368"/>
           </a:xfrm>
           <a:prstGeom prst="rect">
             <a:avLst/>
@@ -10540,200 +14051,47 @@
           </a:bodyPr>
           <a:lstStyle/>
           <a:p>
-            <a:r>
-              <a:rPr sz="1400" b="0" i="0">
-                <a:solidFill>
-                  <a:srgbClr val="B8D8EE"/>
-                </a:solidFill>
-                <a:latin typeface="Calibri"/>
-              </a:rPr>
-              <a:t>27 min en equipos · 27 min: prompt, variantes, elección, correcciones y registro · prototipo v2 + registro de prompt, variantes, correcciones y descartes</a:t>
-            </a:r>
-          </a:p>
-        </p:txBody>
-      </p:sp>
-      <p:sp>
-        <p:nvSpPr>
-          <p:cNvPr id="6" name="Rounded Rectangle 5"/>
-          <p:cNvSpPr/>
-          <p:nvPr/>
-        </p:nvSpPr>
-        <p:spPr>
-          <a:xfrm>
-            <a:off x="457200" y="1472184"/>
-            <a:ext cx="11277295" cy="566928"/>
-          </a:xfrm>
-          <a:prstGeom prst="roundRect">
-            <a:avLst>
-              <a:gd name="adj" fmla="val 12000"/>
-            </a:avLst>
-          </a:prstGeom>
-          <a:solidFill>
-            <a:srgbClr val="F2F2F2"/>
-          </a:solidFill>
-          <a:ln>
-            <a:noFill/>
-          </a:ln>
-        </p:spPr>
-        <p:style>
-          <a:lnRef idx="1">
-            <a:schemeClr val="accent1"/>
-          </a:lnRef>
-          <a:fillRef idx="3">
-            <a:schemeClr val="accent1"/>
-          </a:fillRef>
-          <a:effectRef idx="2">
-            <a:schemeClr val="accent1"/>
-          </a:effectRef>
-          <a:fontRef idx="minor">
-            <a:schemeClr val="lt1"/>
-          </a:fontRef>
-        </p:style>
-        <p:txBody>
-          <a:bodyPr rtlCol="0" anchor="ctr"/>
-          <a:lstStyle/>
-          <a:p>
-            <a:pPr algn="ctr"/>
-          </a:p>
-        </p:txBody>
-      </p:sp>
-      <p:sp>
-        <p:nvSpPr>
-          <p:cNvPr id="7" name="Rectangle 6"/>
-          <p:cNvSpPr/>
-          <p:nvPr/>
-        </p:nvSpPr>
-        <p:spPr>
-          <a:xfrm>
-            <a:off x="640080" y="1618487"/>
-            <a:ext cx="274320" cy="274320"/>
-          </a:xfrm>
-          <a:prstGeom prst="rect">
-            <a:avLst/>
-          </a:prstGeom>
-          <a:solidFill>
-            <a:srgbClr val="FFFFFF"/>
-          </a:solidFill>
-          <a:ln>
-            <a:solidFill>
-              <a:srgbClr val="333333"/>
-            </a:solidFill>
-          </a:ln>
-        </p:spPr>
-        <p:style>
-          <a:lnRef idx="1">
-            <a:schemeClr val="accent1"/>
-          </a:lnRef>
-          <a:fillRef idx="3">
-            <a:schemeClr val="accent1"/>
-          </a:fillRef>
-          <a:effectRef idx="2">
-            <a:schemeClr val="accent1"/>
-          </a:effectRef>
-          <a:fontRef idx="minor">
-            <a:schemeClr val="lt1"/>
-          </a:fontRef>
-        </p:style>
-        <p:txBody>
-          <a:bodyPr rtlCol="0" anchor="ctr"/>
-          <a:lstStyle/>
-          <a:p>
-            <a:pPr algn="ctr"/>
-          </a:p>
-        </p:txBody>
-      </p:sp>
-      <p:sp>
-        <p:nvSpPr>
-          <p:cNvPr id="8" name="Rectangle 7"/>
-          <p:cNvSpPr/>
-          <p:nvPr/>
-        </p:nvSpPr>
-        <p:spPr>
-          <a:xfrm>
-            <a:off x="640080" y="1618487"/>
-            <a:ext cx="73152" cy="274320"/>
-          </a:xfrm>
-          <a:prstGeom prst="rect">
-            <a:avLst/>
-          </a:prstGeom>
-          <a:solidFill>
-            <a:srgbClr val="269CCB"/>
-          </a:solidFill>
-          <a:ln>
-            <a:noFill/>
-          </a:ln>
-        </p:spPr>
-        <p:style>
-          <a:lnRef idx="1">
-            <a:schemeClr val="accent1"/>
-          </a:lnRef>
-          <a:fillRef idx="3">
-            <a:schemeClr val="accent1"/>
-          </a:fillRef>
-          <a:effectRef idx="2">
-            <a:schemeClr val="accent1"/>
-          </a:effectRef>
-          <a:fontRef idx="minor">
-            <a:schemeClr val="lt1"/>
-          </a:fontRef>
-        </p:style>
-        <p:txBody>
-          <a:bodyPr rtlCol="0" anchor="ctr"/>
-          <a:lstStyle/>
-          <a:p>
-            <a:pPr algn="ctr"/>
-          </a:p>
-        </p:txBody>
-      </p:sp>
-      <p:sp>
-        <p:nvSpPr>
-          <p:cNvPr id="9" name="TextBox 8"/>
-          <p:cNvSpPr txBox="1"/>
-          <p:nvPr/>
-        </p:nvSpPr>
-        <p:spPr>
-          <a:xfrm>
-            <a:off x="1097280" y="1563624"/>
-            <a:ext cx="10362895" cy="402336"/>
-          </a:xfrm>
-          <a:prstGeom prst="rect">
-            <a:avLst/>
-          </a:prstGeom>
-          <a:noFill/>
-        </p:spPr>
-        <p:txBody>
-          <a:bodyPr wrap="square" anchor="ctr"/>
-          <a:lstStyle/>
-          <a:p>
-            <a:r>
-              <a:rPr sz="1500" b="1" i="0">
-                <a:solidFill>
-                  <a:srgbClr val="333333"/>
-                </a:solidFill>
-                <a:latin typeface="Calibri"/>
-              </a:rPr>
-              <a:t>EL PROMPT QUE USAMOS</a:t>
-            </a:r>
-            <a:r>
-              <a:rPr sz="1500" b="0" i="0">
-                <a:solidFill>
-                  <a:srgbClr val="333333"/>
-                </a:solidFill>
-                <a:latin typeface="Calibri"/>
-              </a:rPr>
-              <a:t> — El prompt completo, copiado tal cual. Tiene que incluir </a:t>
-            </a:r>
-            <a:r>
-              <a:rPr sz="1500" b="1" i="0">
-                <a:solidFill>
-                  <a:srgbClr val="333333"/>
-                </a:solidFill>
-                <a:latin typeface="Calibri"/>
-              </a:rPr>
-              <a:t>el problema en una frase, quién lo usa, las restricciones y lo que está prohibido proponer</a:t>
-            </a:r>
-            <a:r>
-              <a:rPr sz="1500" b="0" i="0">
+            <a:pPr>
+              <a:spcAft>
+                <a:spcPts val="800"/>
+              </a:spcAft>
+            </a:pPr>
+            <a:r>
+              <a:rPr sz="2000" b="0" i="0">
+                <a:solidFill>
+                  <a:srgbClr val="333333"/>
+                </a:solidFill>
+                <a:latin typeface="Calibri"/>
+              </a:rPr>
+              <a:t>–   El gancho de hoy es un hecho concreto y reproducible, no una hipótesis: si se le pide a un asistente que mejore un prototipo de consulta de disponibilidad de libros</a:t>
+            </a:r>
+          </a:p>
+          <a:p>
+            <a:pPr>
+              <a:spcAft>
+                <a:spcPts val="800"/>
+              </a:spcAft>
+            </a:pPr>
+            <a:r>
+              <a:rPr sz="2000" b="0" i="0">
+                <a:solidFill>
+                  <a:srgbClr val="333333"/>
+                </a:solidFill>
+                <a:latin typeface="Calibri"/>
+              </a:rPr>
+              <a:t>–   </a:t>
+            </a:r>
+            <a:r>
+              <a:rPr sz="2000" b="1" i="0">
+                <a:solidFill>
+                  <a:srgbClr val="333333"/>
+                </a:solidFill>
+                <a:latin typeface="Calibri"/>
+              </a:rPr>
+              <a:t>con altísima probabilidad va a proponer cuentas de usuario con correo y contraseña, y avisos automáticos por correo cuando el libro esté disponible</a:t>
+            </a:r>
+            <a:r>
+              <a:rPr sz="2000" b="0" i="0">
                 <a:solidFill>
                   <a:srgbClr val="333333"/>
                 </a:solidFill>
@@ -10742,761 +14100,75 @@
               <a:t>.</a:t>
             </a:r>
           </a:p>
-        </p:txBody>
-      </p:sp>
-      <p:sp>
-        <p:nvSpPr>
-          <p:cNvPr id="10" name="Rounded Rectangle 9"/>
-          <p:cNvSpPr/>
-          <p:nvPr/>
-        </p:nvSpPr>
-        <p:spPr>
-          <a:xfrm>
-            <a:off x="457200" y="2148839"/>
-            <a:ext cx="11277295" cy="566928"/>
-          </a:xfrm>
-          <a:prstGeom prst="roundRect">
-            <a:avLst>
-              <a:gd name="adj" fmla="val 12000"/>
-            </a:avLst>
-          </a:prstGeom>
-          <a:solidFill>
-            <a:srgbClr val="F2F2F2"/>
-          </a:solidFill>
-          <a:ln>
-            <a:noFill/>
-          </a:ln>
-        </p:spPr>
-        <p:style>
-          <a:lnRef idx="1">
-            <a:schemeClr val="accent1"/>
-          </a:lnRef>
-          <a:fillRef idx="3">
-            <a:schemeClr val="accent1"/>
-          </a:fillRef>
-          <a:effectRef idx="2">
-            <a:schemeClr val="accent1"/>
-          </a:effectRef>
-          <a:fontRef idx="minor">
-            <a:schemeClr val="lt1"/>
-          </a:fontRef>
-        </p:style>
-        <p:txBody>
-          <a:bodyPr rtlCol="0" anchor="ctr"/>
-          <a:lstStyle/>
-          <a:p>
-            <a:pPr algn="ctr"/>
-          </a:p>
-        </p:txBody>
-      </p:sp>
-      <p:sp>
-        <p:nvSpPr>
-          <p:cNvPr id="11" name="Rectangle 10"/>
-          <p:cNvSpPr/>
-          <p:nvPr/>
-        </p:nvSpPr>
-        <p:spPr>
-          <a:xfrm>
-            <a:off x="640080" y="2295144"/>
-            <a:ext cx="274320" cy="274320"/>
-          </a:xfrm>
-          <a:prstGeom prst="rect">
-            <a:avLst/>
-          </a:prstGeom>
-          <a:solidFill>
-            <a:srgbClr val="FFFFFF"/>
-          </a:solidFill>
-          <a:ln>
-            <a:solidFill>
-              <a:srgbClr val="333333"/>
-            </a:solidFill>
-          </a:ln>
-        </p:spPr>
-        <p:style>
-          <a:lnRef idx="1">
-            <a:schemeClr val="accent1"/>
-          </a:lnRef>
-          <a:fillRef idx="3">
-            <a:schemeClr val="accent1"/>
-          </a:fillRef>
-          <a:effectRef idx="2">
-            <a:schemeClr val="accent1"/>
-          </a:effectRef>
-          <a:fontRef idx="minor">
-            <a:schemeClr val="lt1"/>
-          </a:fontRef>
-        </p:style>
-        <p:txBody>
-          <a:bodyPr rtlCol="0" anchor="ctr"/>
-          <a:lstStyle/>
-          <a:p>
-            <a:pPr algn="ctr"/>
-          </a:p>
-        </p:txBody>
-      </p:sp>
-      <p:sp>
-        <p:nvSpPr>
-          <p:cNvPr id="12" name="Rectangle 11"/>
-          <p:cNvSpPr/>
-          <p:nvPr/>
-        </p:nvSpPr>
-        <p:spPr>
-          <a:xfrm>
-            <a:off x="640080" y="2295144"/>
-            <a:ext cx="73152" cy="274320"/>
-          </a:xfrm>
-          <a:prstGeom prst="rect">
-            <a:avLst/>
-          </a:prstGeom>
-          <a:solidFill>
-            <a:srgbClr val="269CCB"/>
-          </a:solidFill>
-          <a:ln>
-            <a:noFill/>
-          </a:ln>
-        </p:spPr>
-        <p:style>
-          <a:lnRef idx="1">
-            <a:schemeClr val="accent1"/>
-          </a:lnRef>
-          <a:fillRef idx="3">
-            <a:schemeClr val="accent1"/>
-          </a:fillRef>
-          <a:effectRef idx="2">
-            <a:schemeClr val="accent1"/>
-          </a:effectRef>
-          <a:fontRef idx="minor">
-            <a:schemeClr val="lt1"/>
-          </a:fontRef>
-        </p:style>
-        <p:txBody>
-          <a:bodyPr rtlCol="0" anchor="ctr"/>
-          <a:lstStyle/>
-          <a:p>
-            <a:pPr algn="ctr"/>
-          </a:p>
-        </p:txBody>
-      </p:sp>
-      <p:sp>
-        <p:nvSpPr>
-          <p:cNvPr id="13" name="TextBox 12"/>
-          <p:cNvSpPr txBox="1"/>
-          <p:nvPr/>
-        </p:nvSpPr>
-        <p:spPr>
-          <a:xfrm>
-            <a:off x="1097280" y="2240279"/>
-            <a:ext cx="10362895" cy="402336"/>
-          </a:xfrm>
-          <a:prstGeom prst="rect">
-            <a:avLst/>
-          </a:prstGeom>
-          <a:noFill/>
-        </p:spPr>
-        <p:txBody>
-          <a:bodyPr wrap="square" anchor="ctr"/>
-          <a:lstStyle/>
-          <a:p>
-            <a:r>
-              <a:rPr sz="1500" b="1" i="0">
-                <a:solidFill>
-                  <a:srgbClr val="333333"/>
-                </a:solidFill>
-                <a:latin typeface="Calibri"/>
-              </a:rPr>
-              <a:t>LAS TRES VARIANTES</a:t>
-            </a:r>
-            <a:r>
-              <a:rPr sz="1500" b="0" i="0">
-                <a:solidFill>
-                  <a:srgbClr val="333333"/>
-                </a:solidFill>
-                <a:latin typeface="Calibri"/>
-              </a:rPr>
-              <a:t> — Las tres opciones que devolvió, resumidas en dos o tres líneas cada una. </a:t>
-            </a:r>
-            <a:r>
-              <a:rPr sz="1500" b="1" i="0">
-                <a:solidFill>
-                  <a:srgbClr val="333333"/>
-                </a:solidFill>
-                <a:latin typeface="Calibri"/>
-              </a:rPr>
-              <a:t>No una sola respuesta</a:t>
-            </a:r>
-            <a:r>
-              <a:rPr sz="1500" b="0" i="0">
-                <a:solidFill>
-                  <a:srgbClr val="333333"/>
-                </a:solidFill>
-                <a:latin typeface="Calibri"/>
-              </a:rPr>
-              <a:t>: tres.</a:t>
-            </a:r>
-          </a:p>
-        </p:txBody>
-      </p:sp>
-      <p:sp>
-        <p:nvSpPr>
-          <p:cNvPr id="14" name="Rounded Rectangle 13"/>
-          <p:cNvSpPr/>
-          <p:nvPr/>
-        </p:nvSpPr>
-        <p:spPr>
-          <a:xfrm>
-            <a:off x="457200" y="2825496"/>
-            <a:ext cx="11277295" cy="566928"/>
-          </a:xfrm>
-          <a:prstGeom prst="roundRect">
-            <a:avLst>
-              <a:gd name="adj" fmla="val 12000"/>
-            </a:avLst>
-          </a:prstGeom>
-          <a:solidFill>
-            <a:srgbClr val="F2F2F2"/>
-          </a:solidFill>
-          <a:ln>
-            <a:noFill/>
-          </a:ln>
-        </p:spPr>
-        <p:style>
-          <a:lnRef idx="1">
-            <a:schemeClr val="accent1"/>
-          </a:lnRef>
-          <a:fillRef idx="3">
-            <a:schemeClr val="accent1"/>
-          </a:fillRef>
-          <a:effectRef idx="2">
-            <a:schemeClr val="accent1"/>
-          </a:effectRef>
-          <a:fontRef idx="minor">
-            <a:schemeClr val="lt1"/>
-          </a:fontRef>
-        </p:style>
-        <p:txBody>
-          <a:bodyPr rtlCol="0" anchor="ctr"/>
-          <a:lstStyle/>
-          <a:p>
-            <a:pPr algn="ctr"/>
-          </a:p>
-        </p:txBody>
-      </p:sp>
-      <p:sp>
-        <p:nvSpPr>
-          <p:cNvPr id="15" name="Rectangle 14"/>
-          <p:cNvSpPr/>
-          <p:nvPr/>
-        </p:nvSpPr>
-        <p:spPr>
-          <a:xfrm>
-            <a:off x="640080" y="2971800"/>
-            <a:ext cx="274320" cy="274320"/>
-          </a:xfrm>
-          <a:prstGeom prst="rect">
-            <a:avLst/>
-          </a:prstGeom>
-          <a:solidFill>
-            <a:srgbClr val="FFFFFF"/>
-          </a:solidFill>
-          <a:ln>
-            <a:solidFill>
-              <a:srgbClr val="333333"/>
-            </a:solidFill>
-          </a:ln>
-        </p:spPr>
-        <p:style>
-          <a:lnRef idx="1">
-            <a:schemeClr val="accent1"/>
-          </a:lnRef>
-          <a:fillRef idx="3">
-            <a:schemeClr val="accent1"/>
-          </a:fillRef>
-          <a:effectRef idx="2">
-            <a:schemeClr val="accent1"/>
-          </a:effectRef>
-          <a:fontRef idx="minor">
-            <a:schemeClr val="lt1"/>
-          </a:fontRef>
-        </p:style>
-        <p:txBody>
-          <a:bodyPr rtlCol="0" anchor="ctr"/>
-          <a:lstStyle/>
-          <a:p>
-            <a:pPr algn="ctr"/>
-          </a:p>
-        </p:txBody>
-      </p:sp>
-      <p:sp>
-        <p:nvSpPr>
-          <p:cNvPr id="16" name="Rectangle 15"/>
-          <p:cNvSpPr/>
-          <p:nvPr/>
-        </p:nvSpPr>
-        <p:spPr>
-          <a:xfrm>
-            <a:off x="640080" y="2971800"/>
-            <a:ext cx="73152" cy="274320"/>
-          </a:xfrm>
-          <a:prstGeom prst="rect">
-            <a:avLst/>
-          </a:prstGeom>
-          <a:solidFill>
-            <a:srgbClr val="269CCB"/>
-          </a:solidFill>
-          <a:ln>
-            <a:noFill/>
-          </a:ln>
-        </p:spPr>
-        <p:style>
-          <a:lnRef idx="1">
-            <a:schemeClr val="accent1"/>
-          </a:lnRef>
-          <a:fillRef idx="3">
-            <a:schemeClr val="accent1"/>
-          </a:fillRef>
-          <a:effectRef idx="2">
-            <a:schemeClr val="accent1"/>
-          </a:effectRef>
-          <a:fontRef idx="minor">
-            <a:schemeClr val="lt1"/>
-          </a:fontRef>
-        </p:style>
-        <p:txBody>
-          <a:bodyPr rtlCol="0" anchor="ctr"/>
-          <a:lstStyle/>
-          <a:p>
-            <a:pPr algn="ctr"/>
-          </a:p>
-        </p:txBody>
-      </p:sp>
-      <p:sp>
-        <p:nvSpPr>
-          <p:cNvPr id="17" name="TextBox 16"/>
-          <p:cNvSpPr txBox="1"/>
-          <p:nvPr/>
-        </p:nvSpPr>
-        <p:spPr>
-          <a:xfrm>
-            <a:off x="1097280" y="2916936"/>
-            <a:ext cx="10362895" cy="402336"/>
-          </a:xfrm>
-          <a:prstGeom prst="rect">
-            <a:avLst/>
-          </a:prstGeom>
-          <a:noFill/>
-        </p:spPr>
-        <p:txBody>
-          <a:bodyPr wrap="square" anchor="ctr"/>
-          <a:lstStyle/>
-          <a:p>
-            <a:r>
-              <a:rPr sz="1500" b="1" i="0">
-                <a:solidFill>
-                  <a:srgbClr val="333333"/>
-                </a:solidFill>
-                <a:latin typeface="Calibri"/>
-              </a:rPr>
-              <a:t>LA QUE ELEGIMOS Y POR QUÉ</a:t>
-            </a:r>
-            <a:r>
-              <a:rPr sz="1500" b="0" i="0">
-                <a:solidFill>
-                  <a:srgbClr val="333333"/>
-                </a:solidFill>
-                <a:latin typeface="Calibri"/>
-              </a:rPr>
-              <a:t> — Cuál eligieron y el criterio, apoyado en sus </a:t>
-            </a:r>
-            <a:r>
-              <a:rPr sz="1500" b="1" i="0">
-                <a:solidFill>
-                  <a:srgbClr val="333333"/>
-                </a:solidFill>
-                <a:latin typeface="Calibri"/>
-              </a:rPr>
-              <a:t>requisitos y restricciones</a:t>
-            </a:r>
-            <a:r>
-              <a:rPr sz="1500" b="0" i="0">
-                <a:solidFill>
-                  <a:srgbClr val="333333"/>
-                </a:solidFill>
-                <a:latin typeface="Calibri"/>
-              </a:rPr>
-              <a:t> — no en «nos gustó más».</a:t>
-            </a:r>
-          </a:p>
-        </p:txBody>
-      </p:sp>
-      <p:sp>
-        <p:nvSpPr>
-          <p:cNvPr id="18" name="Rounded Rectangle 17"/>
-          <p:cNvSpPr/>
-          <p:nvPr/>
-        </p:nvSpPr>
-        <p:spPr>
-          <a:xfrm>
-            <a:off x="457200" y="3502152"/>
-            <a:ext cx="11277295" cy="566928"/>
-          </a:xfrm>
-          <a:prstGeom prst="roundRect">
-            <a:avLst>
-              <a:gd name="adj" fmla="val 12000"/>
-            </a:avLst>
-          </a:prstGeom>
-          <a:solidFill>
-            <a:srgbClr val="F2F2F2"/>
-          </a:solidFill>
-          <a:ln>
-            <a:noFill/>
-          </a:ln>
-        </p:spPr>
-        <p:style>
-          <a:lnRef idx="1">
-            <a:schemeClr val="accent1"/>
-          </a:lnRef>
-          <a:fillRef idx="3">
-            <a:schemeClr val="accent1"/>
-          </a:fillRef>
-          <a:effectRef idx="2">
-            <a:schemeClr val="accent1"/>
-          </a:effectRef>
-          <a:fontRef idx="minor">
-            <a:schemeClr val="lt1"/>
-          </a:fontRef>
-        </p:style>
-        <p:txBody>
-          <a:bodyPr rtlCol="0" anchor="ctr"/>
-          <a:lstStyle/>
-          <a:p>
-            <a:pPr algn="ctr"/>
-          </a:p>
-        </p:txBody>
-      </p:sp>
-      <p:sp>
-        <p:nvSpPr>
-          <p:cNvPr id="19" name="Rectangle 18"/>
-          <p:cNvSpPr/>
-          <p:nvPr/>
-        </p:nvSpPr>
-        <p:spPr>
-          <a:xfrm>
-            <a:off x="640080" y="3648456"/>
-            <a:ext cx="274320" cy="274320"/>
-          </a:xfrm>
-          <a:prstGeom prst="rect">
-            <a:avLst/>
-          </a:prstGeom>
-          <a:solidFill>
-            <a:srgbClr val="FFFFFF"/>
-          </a:solidFill>
-          <a:ln>
-            <a:solidFill>
-              <a:srgbClr val="333333"/>
-            </a:solidFill>
-          </a:ln>
-        </p:spPr>
-        <p:style>
-          <a:lnRef idx="1">
-            <a:schemeClr val="accent1"/>
-          </a:lnRef>
-          <a:fillRef idx="3">
-            <a:schemeClr val="accent1"/>
-          </a:fillRef>
-          <a:effectRef idx="2">
-            <a:schemeClr val="accent1"/>
-          </a:effectRef>
-          <a:fontRef idx="minor">
-            <a:schemeClr val="lt1"/>
-          </a:fontRef>
-        </p:style>
-        <p:txBody>
-          <a:bodyPr rtlCol="0" anchor="ctr"/>
-          <a:lstStyle/>
-          <a:p>
-            <a:pPr algn="ctr"/>
-          </a:p>
-        </p:txBody>
-      </p:sp>
-      <p:sp>
-        <p:nvSpPr>
-          <p:cNvPr id="20" name="Rectangle 19"/>
-          <p:cNvSpPr/>
-          <p:nvPr/>
-        </p:nvSpPr>
-        <p:spPr>
-          <a:xfrm>
-            <a:off x="640080" y="3648456"/>
-            <a:ext cx="73152" cy="274320"/>
-          </a:xfrm>
-          <a:prstGeom prst="rect">
-            <a:avLst/>
-          </a:prstGeom>
-          <a:solidFill>
-            <a:srgbClr val="269CCB"/>
-          </a:solidFill>
-          <a:ln>
-            <a:noFill/>
-          </a:ln>
-        </p:spPr>
-        <p:style>
-          <a:lnRef idx="1">
-            <a:schemeClr val="accent1"/>
-          </a:lnRef>
-          <a:fillRef idx="3">
-            <a:schemeClr val="accent1"/>
-          </a:fillRef>
-          <a:effectRef idx="2">
-            <a:schemeClr val="accent1"/>
-          </a:effectRef>
-          <a:fontRef idx="minor">
-            <a:schemeClr val="lt1"/>
-          </a:fontRef>
-        </p:style>
-        <p:txBody>
-          <a:bodyPr rtlCol="0" anchor="ctr"/>
-          <a:lstStyle/>
-          <a:p>
-            <a:pPr algn="ctr"/>
-          </a:p>
-        </p:txBody>
-      </p:sp>
-      <p:sp>
-        <p:nvSpPr>
-          <p:cNvPr id="21" name="TextBox 20"/>
-          <p:cNvSpPr txBox="1"/>
-          <p:nvPr/>
-        </p:nvSpPr>
-        <p:spPr>
-          <a:xfrm>
-            <a:off x="1097280" y="3593592"/>
-            <a:ext cx="10362895" cy="402336"/>
-          </a:xfrm>
-          <a:prstGeom prst="rect">
-            <a:avLst/>
-          </a:prstGeom>
-          <a:noFill/>
-        </p:spPr>
-        <p:txBody>
-          <a:bodyPr wrap="square" anchor="ctr"/>
-          <a:lstStyle/>
-          <a:p>
-            <a:r>
-              <a:rPr sz="1500" b="1" i="0">
-                <a:solidFill>
-                  <a:srgbClr val="333333"/>
-                </a:solidFill>
-                <a:latin typeface="Calibri"/>
-              </a:rPr>
-              <a:t>LO QUE CORREGIMOS A MANO</a:t>
-            </a:r>
-            <a:r>
-              <a:rPr sz="1500" b="0" i="0">
-                <a:solidFill>
-                  <a:srgbClr val="333333"/>
-                </a:solidFill>
-                <a:latin typeface="Calibri"/>
-              </a:rPr>
-              <a:t> — Cada corrección con </a:t>
-            </a:r>
-            <a:r>
-              <a:rPr sz="1500" b="1" i="0">
-                <a:solidFill>
-                  <a:srgbClr val="333333"/>
-                </a:solidFill>
-                <a:latin typeface="Calibri"/>
-              </a:rPr>
-              <a:t>la razón y la sesión de donde sale</a:t>
-            </a:r>
-            <a:r>
-              <a:rPr sz="1500" b="0" i="0">
-                <a:solidFill>
-                  <a:srgbClr val="333333"/>
-                </a:solidFill>
-                <a:latin typeface="Calibri"/>
-              </a:rPr>
-              <a:t>: qué proponía la IA, qué quedó, y por qué. Es el bloque que más pesa.</a:t>
-            </a:r>
-          </a:p>
-        </p:txBody>
-      </p:sp>
-      <p:sp>
-        <p:nvSpPr>
-          <p:cNvPr id="22" name="Rounded Rectangle 21"/>
-          <p:cNvSpPr/>
-          <p:nvPr/>
-        </p:nvSpPr>
-        <p:spPr>
-          <a:xfrm>
-            <a:off x="457200" y="4178808"/>
-            <a:ext cx="11277295" cy="566928"/>
-          </a:xfrm>
-          <a:prstGeom prst="roundRect">
-            <a:avLst>
-              <a:gd name="adj" fmla="val 12000"/>
-            </a:avLst>
-          </a:prstGeom>
-          <a:solidFill>
-            <a:srgbClr val="F2F2F2"/>
-          </a:solidFill>
-          <a:ln>
-            <a:noFill/>
-          </a:ln>
-        </p:spPr>
-        <p:style>
-          <a:lnRef idx="1">
-            <a:schemeClr val="accent1"/>
-          </a:lnRef>
-          <a:fillRef idx="3">
-            <a:schemeClr val="accent1"/>
-          </a:fillRef>
-          <a:effectRef idx="2">
-            <a:schemeClr val="accent1"/>
-          </a:effectRef>
-          <a:fontRef idx="minor">
-            <a:schemeClr val="lt1"/>
-          </a:fontRef>
-        </p:style>
-        <p:txBody>
-          <a:bodyPr rtlCol="0" anchor="ctr"/>
-          <a:lstStyle/>
-          <a:p>
-            <a:pPr algn="ctr"/>
-          </a:p>
-        </p:txBody>
-      </p:sp>
-      <p:sp>
-        <p:nvSpPr>
-          <p:cNvPr id="23" name="Rectangle 22"/>
-          <p:cNvSpPr/>
-          <p:nvPr/>
-        </p:nvSpPr>
-        <p:spPr>
-          <a:xfrm>
-            <a:off x="640080" y="4325112"/>
-            <a:ext cx="274320" cy="274320"/>
-          </a:xfrm>
-          <a:prstGeom prst="rect">
-            <a:avLst/>
-          </a:prstGeom>
-          <a:solidFill>
-            <a:srgbClr val="FFFFFF"/>
-          </a:solidFill>
-          <a:ln>
-            <a:solidFill>
-              <a:srgbClr val="333333"/>
-            </a:solidFill>
-          </a:ln>
-        </p:spPr>
-        <p:style>
-          <a:lnRef idx="1">
-            <a:schemeClr val="accent1"/>
-          </a:lnRef>
-          <a:fillRef idx="3">
-            <a:schemeClr val="accent1"/>
-          </a:fillRef>
-          <a:effectRef idx="2">
-            <a:schemeClr val="accent1"/>
-          </a:effectRef>
-          <a:fontRef idx="minor">
-            <a:schemeClr val="lt1"/>
-          </a:fontRef>
-        </p:style>
-        <p:txBody>
-          <a:bodyPr rtlCol="0" anchor="ctr"/>
-          <a:lstStyle/>
-          <a:p>
-            <a:pPr algn="ctr"/>
-          </a:p>
-        </p:txBody>
-      </p:sp>
-      <p:sp>
-        <p:nvSpPr>
-          <p:cNvPr id="24" name="Rectangle 23"/>
-          <p:cNvSpPr/>
-          <p:nvPr/>
-        </p:nvSpPr>
-        <p:spPr>
-          <a:xfrm>
-            <a:off x="640080" y="4325112"/>
-            <a:ext cx="73152" cy="274320"/>
-          </a:xfrm>
-          <a:prstGeom prst="rect">
-            <a:avLst/>
-          </a:prstGeom>
-          <a:solidFill>
-            <a:srgbClr val="269CCB"/>
-          </a:solidFill>
-          <a:ln>
-            <a:noFill/>
-          </a:ln>
-        </p:spPr>
-        <p:style>
-          <a:lnRef idx="1">
-            <a:schemeClr val="accent1"/>
-          </a:lnRef>
-          <a:fillRef idx="3">
-            <a:schemeClr val="accent1"/>
-          </a:fillRef>
-          <a:effectRef idx="2">
-            <a:schemeClr val="accent1"/>
-          </a:effectRef>
-          <a:fontRef idx="minor">
-            <a:schemeClr val="lt1"/>
-          </a:fontRef>
-        </p:style>
-        <p:txBody>
-          <a:bodyPr rtlCol="0" anchor="ctr"/>
-          <a:lstStyle/>
-          <a:p>
-            <a:pPr algn="ctr"/>
-          </a:p>
-        </p:txBody>
-      </p:sp>
-      <p:sp>
-        <p:nvSpPr>
-          <p:cNvPr id="25" name="TextBox 24"/>
-          <p:cNvSpPr txBox="1"/>
-          <p:nvPr/>
-        </p:nvSpPr>
-        <p:spPr>
-          <a:xfrm>
-            <a:off x="1097280" y="4270248"/>
-            <a:ext cx="10362895" cy="402336"/>
-          </a:xfrm>
-          <a:prstGeom prst="rect">
-            <a:avLst/>
-          </a:prstGeom>
-          <a:noFill/>
-        </p:spPr>
-        <p:txBody>
-          <a:bodyPr wrap="square" anchor="ctr"/>
-          <a:lstStyle/>
-          <a:p>
-            <a:r>
-              <a:rPr sz="1500" b="1" i="0">
-                <a:solidFill>
-                  <a:srgbClr val="333333"/>
-                </a:solidFill>
-                <a:latin typeface="Calibri"/>
-              </a:rPr>
-              <a:t>LO QUE DESCARTAMOS Y POR QUÉ</a:t>
-            </a:r>
-            <a:r>
-              <a:rPr sz="1500" b="0" i="0">
-                <a:solidFill>
-                  <a:srgbClr val="333333"/>
-                </a:solidFill>
-                <a:latin typeface="Calibri"/>
-              </a:rPr>
-              <a:t> — Las propuestas que se rechazaron completas, y el motivo: fuera del alcance, viola una restricción, viola la ley, o consume demasiado.</a:t>
-            </a:r>
-          </a:p>
-        </p:txBody>
-      </p:sp>
-      <p:sp>
-        <p:nvSpPr>
-          <p:cNvPr id="26" name="TextBox 25"/>
+          <a:p>
+            <a:pPr>
+              <a:spcAft>
+                <a:spcPts val="800"/>
+              </a:spcAft>
+            </a:pPr>
+            <a:r>
+              <a:rPr sz="2000" b="0" i="0">
+                <a:solidFill>
+                  <a:srgbClr val="333333"/>
+                </a:solidFill>
+                <a:latin typeface="Calibri"/>
+              </a:rPr>
+              <a:t>–   Las dos propuestas son razonables en abstracto, están en casi todos los sistemas parecidos del mundo</a:t>
+            </a:r>
+          </a:p>
+          <a:p>
+            <a:pPr>
+              <a:spcAft>
+                <a:spcPts val="800"/>
+              </a:spcAft>
+            </a:pPr>
+            <a:r>
+              <a:rPr sz="2000" b="0" i="0">
+                <a:solidFill>
+                  <a:srgbClr val="333333"/>
+                </a:solidFill>
+                <a:latin typeface="Calibri"/>
+              </a:rPr>
+              <a:t>–   Y las dos son incorrectas para este proyecto: violan el requisito no funcional «sin crear cuenta» de la sesión 7 y convierten al equipo en responsable del tratamiento de datos personales bajo la Ley 1581 de 2012, que vieron en la sesión 4.</a:t>
+            </a:r>
+          </a:p>
+          <a:p>
+            <a:pPr>
+              <a:spcAft>
+                <a:spcPts val="800"/>
+              </a:spcAft>
+            </a:pPr>
+            <a:r>
+              <a:rPr sz="2000" b="0" i="0">
+                <a:solidFill>
+                  <a:srgbClr val="333333"/>
+                </a:solidFill>
+                <a:latin typeface="Calibri"/>
+              </a:rPr>
+              <a:t>–   El punto que hay que hacer explícito, y que es el eje de toda la sesión: **el asistente no se equivocó por ser malo.</a:t>
+            </a:r>
+          </a:p>
+          <a:p>
+            <a:pPr>
+              <a:spcAft>
+                <a:spcPts val="800"/>
+              </a:spcAft>
+            </a:pPr>
+            <a:r>
+              <a:rPr sz="2000" b="0" i="0">
+                <a:solidFill>
+                  <a:srgbClr val="333333"/>
+                </a:solidFill>
+                <a:latin typeface="Calibri"/>
+              </a:rPr>
+              <a:t>–   Se equivocó porque nadie le dijo las restricciones.** Propuso la solución promedio de internet, que es exactamente lo que hace bien; el problema es que la solución promedio no es la solución de un proyecto con restricciones locales duras.</a:t>
+            </a:r>
+          </a:p>
+        </p:txBody>
+      </p:sp>
+      <p:sp>
+        <p:nvSpPr>
+          <p:cNvPr id="6" name="TextBox 5"/>
           <p:cNvSpPr txBox="1"/>
           <p:nvPr/>
         </p:nvSpPr>

--- a/Introduccion a la Ingenieria/Clases/Clase 11 - Taller de prototipado inicial con IA/Presentacion.pptx
+++ b/Introduccion a la Ingenieria/Clases/Clase 11 - Taller de prototipado inicial con IA/Presentacion.pptx
@@ -25,6 +25,8 @@
     <p:sldId id="273" r:id="rId24"/>
     <p:sldId id="274" r:id="rId25"/>
     <p:sldId id="275" r:id="rId26"/>
+    <p:sldId id="276" r:id="rId27"/>
+    <p:sldId id="277" r:id="rId28"/>
   </p:sldIdLst>
   <p:sldSz cx="12191695" cy="6858000" type="screen4x3"/>
   <p:notesSz cx="6858000" cy="9144000"/>
@@ -3664,25 +3666,7 @@
                 </a:solidFill>
                 <a:latin typeface="Calibri"/>
               </a:rPr>
-              <a:t>–   Y lo hizo </a:t>
-            </a:r>
-            <a:r>
-              <a:rPr sz="2000" b="1" i="0">
-                <a:solidFill>
-                  <a:srgbClr val="333333"/>
-                </a:solidFill>
-                <a:latin typeface="Calibri"/>
-              </a:rPr>
-              <a:t>con total seguridad</a:t>
-            </a:r>
-            <a:r>
-              <a:rPr sz="2000" b="0" i="0">
-                <a:solidFill>
-                  <a:srgbClr val="333333"/>
-                </a:solidFill>
-                <a:latin typeface="Calibri"/>
-              </a:rPr>
-              <a:t>, sin ninguna señal de advertencia, que es la parte peligrosa.</a:t>
+              <a:t>–   Se equivocó porque nadie le dijo las restricciones.** Propuso la solución promedio de internet, que es exactamente lo que hace bien; el problema es que la solución promedio no es la solución de un proyecto con restricciones locales duras.</a:t>
             </a:r>
           </a:p>
           <a:p>
@@ -3698,7 +3682,25 @@
                 </a:solidFill>
                 <a:latin typeface="Calibri"/>
               </a:rPr>
-              <a:t>–   Vale la pena hacerlo en vivo si el tiempo alcanza —dos minutos de pantalla compartida con un prompt sin restricciones—, porque verlo proponer la cuenta de usuario delante de todos vale más que la diapositiva.</a:t>
+              <a:t>–   Y lo hizo </a:t>
+            </a:r>
+            <a:r>
+              <a:rPr sz="2000" b="1" i="0">
+                <a:solidFill>
+                  <a:srgbClr val="333333"/>
+                </a:solidFill>
+                <a:latin typeface="Calibri"/>
+              </a:rPr>
+              <a:t>con total seguridad</a:t>
+            </a:r>
+            <a:r>
+              <a:rPr sz="2000" b="0" i="0">
+                <a:solidFill>
+                  <a:srgbClr val="333333"/>
+                </a:solidFill>
+                <a:latin typeface="Calibri"/>
+              </a:rPr>
+              <a:t>, sin ninguna señal de advertencia, que es la parte peligrosa.</a:t>
             </a:r>
           </a:p>
           <a:p>
@@ -4053,40 +4055,6 @@
               <a:t>–   Aquí la IA es genuinamente superior a un equipo de primer semestre, porque enumerar casos es exactamente lo que hace bien.</a:t>
             </a:r>
           </a:p>
-          <a:p>
-            <a:pPr>
-              <a:spcAft>
-                <a:spcPts val="800"/>
-              </a:spcAft>
-            </a:pPr>
-            <a:r>
-              <a:rPr sz="2000" b="0" i="0">
-                <a:solidFill>
-                  <a:srgbClr val="333333"/>
-                </a:solidFill>
-                <a:latin typeface="Calibri"/>
-              </a:rPr>
-              <a:t>–   Vale la pena decírselo, porque es el uso que más les va a servir en la Clase 12. </a:t>
-            </a:r>
-            <a:r>
-              <a:rPr sz="2000" b="1" i="0">
-                <a:solidFill>
-                  <a:srgbClr val="333333"/>
-                </a:solidFill>
-                <a:latin typeface="Calibri"/>
-              </a:rPr>
-              <a:t>Hace mal: el contexto local.</a:t>
-            </a:r>
-            <a:r>
-              <a:rPr sz="2000" b="0" i="0">
-                <a:solidFill>
-                  <a:srgbClr val="333333"/>
-                </a:solidFill>
-                <a:latin typeface="Calibri"/>
-              </a:rPr>
-              <a:t> No sabe que no hay computador en el mostrador, que las voluntarias rotan, que el presupuesto es cero, que la conexión es intermitente.</a:t>
-            </a:r>
-          </a:p>
         </p:txBody>
       </p:sp>
       <p:sp>
@@ -4372,22 +4340,6 @@
                 </a:solidFill>
                 <a:latin typeface="Calibri"/>
               </a:rPr>
-              <a:t>–   Va a proponer funciones que violan las restricciones del equipo y a veces la ley, con el mismo tono seguro con el que propone las buenas.</a:t>
-            </a:r>
-          </a:p>
-          <a:p>
-            <a:pPr>
-              <a:spcAft>
-                <a:spcPts val="800"/>
-              </a:spcAft>
-            </a:pPr>
-            <a:r>
-              <a:rPr sz="2000" b="0" i="0">
-                <a:solidFill>
-                  <a:srgbClr val="333333"/>
-                </a:solidFill>
-                <a:latin typeface="Calibri"/>
-              </a:rPr>
               <a:t>–   No hay una alarma; la alarma son ustedes.</a:t>
             </a:r>
           </a:p>
@@ -4569,7 +4521,7 @@
                 </a:solidFill>
                 <a:latin typeface="Calibri"/>
               </a:rPr>
-              <a:t>El método: cinco pasos y por qué el primero decide todo (1/2)</a:t>
+              <a:t>El método: cinco pasos y por qué el primero decide todo (1/3)</a:t>
             </a:r>
           </a:p>
         </p:txBody>
@@ -4602,7 +4554,7 @@
               </a:spcAft>
             </a:pPr>
             <a:r>
-              <a:rPr sz="1900" b="0" i="0">
+              <a:rPr sz="2000" b="0" i="0">
                 <a:solidFill>
                   <a:srgbClr val="333333"/>
                 </a:solidFill>
@@ -4611,7 +4563,7 @@
               <a:t>–   </a:t>
             </a:r>
             <a:r>
-              <a:rPr sz="1900" b="1" i="0">
+              <a:rPr sz="2000" b="1" i="0">
                 <a:solidFill>
                   <a:srgbClr val="333333"/>
                 </a:solidFill>
@@ -4620,7 +4572,7 @@
               <a:t>Paso 1: dar el contexto que no puede saber</a:t>
             </a:r>
             <a:r>
-              <a:rPr sz="1900" b="0" i="0">
+              <a:rPr sz="2000" b="0" i="0">
                 <a:solidFill>
                   <a:srgbClr val="333333"/>
                 </a:solidFill>
@@ -4636,7 +4588,7 @@
               </a:spcAft>
             </a:pPr>
             <a:r>
-              <a:rPr sz="1900" b="0" i="0">
+              <a:rPr sz="2000" b="0" i="0">
                 <a:solidFill>
                   <a:srgbClr val="333333"/>
                 </a:solidFill>
@@ -4652,31 +4604,13 @@
               </a:spcAft>
             </a:pPr>
             <a:r>
-              <a:rPr sz="1900" b="0" i="0">
-                <a:solidFill>
-                  <a:srgbClr val="333333"/>
-                </a:solidFill>
-                <a:latin typeface="Calibri"/>
-              </a:rPr>
-              <a:t>–   La diferencia entre «mejora esta pantalla de biblioteca» y un prompt de diez líneas con las cuatro restricciones escritas no es de grado: es la diferencia entre recibir la solución promedio de internet y recibir tres opciones aplicables. </a:t>
-            </a:r>
-            <a:r>
-              <a:rPr sz="1900" b="1" i="0">
-                <a:solidFill>
-                  <a:srgbClr val="333333"/>
-                </a:solidFill>
-                <a:latin typeface="Calibri"/>
-              </a:rPr>
-              <a:t>Paso 2: pedir variantes, no una respuesta.</a:t>
-            </a:r>
-            <a:r>
-              <a:rPr sz="1900" b="0" i="0">
-                <a:solidFill>
-                  <a:srgbClr val="333333"/>
-                </a:solidFill>
-                <a:latin typeface="Calibri"/>
-              </a:rPr>
-              <a:t> «Dame tres maneras distintas de…».</a:t>
+              <a:rPr sz="2000" b="0" i="0">
+                <a:solidFill>
+                  <a:srgbClr val="333333"/>
+                </a:solidFill>
+                <a:latin typeface="Calibri"/>
+              </a:rPr>
+              <a:t>–   El argumento es psicológico y hay que decirlo: una sola respuesta invita a aceptarla —está ahí, está completa, está bien escrita—; tres obligan a comparar, y comparar es donde ellos aportan.</a:t>
             </a:r>
           </a:p>
           <a:p>
@@ -4686,13 +4620,31 @@
               </a:spcAft>
             </a:pPr>
             <a:r>
-              <a:rPr sz="1900" b="0" i="0">
-                <a:solidFill>
-                  <a:srgbClr val="333333"/>
-                </a:solidFill>
-                <a:latin typeface="Calibri"/>
-              </a:rPr>
-              <a:t>–   El argumento es psicológico y hay que decirlo: una sola respuesta invita a aceptarla —está ahí, está completa, está bien escrita—; tres obligan a comparar, y comparar es donde ellos aportan.</a:t>
+              <a:rPr sz="2000" b="0" i="0">
+                <a:solidFill>
+                  <a:srgbClr val="333333"/>
+                </a:solidFill>
+                <a:latin typeface="Calibri"/>
+              </a:rPr>
+              <a:t>–   Es la matriz de decisión de la sesión 8 aplicada a lo que devuelve un asistente. </a:t>
+            </a:r>
+            <a:r>
+              <a:rPr sz="2000" b="1" i="0">
+                <a:solidFill>
+                  <a:srgbClr val="333333"/>
+                </a:solidFill>
+                <a:latin typeface="Calibri"/>
+              </a:rPr>
+              <a:t>Paso 3: prohibir explícitamente lo prohibido.</a:t>
+            </a:r>
+            <a:r>
+              <a:rPr sz="2000" b="0" i="0">
+                <a:solidFill>
+                  <a:srgbClr val="333333"/>
+                </a:solidFill>
+                <a:latin typeface="Calibri"/>
+              </a:rPr>
+              <a:t> «Sin crear cuentas de usuario</a:t>
             </a:r>
           </a:p>
           <a:p>
@@ -4702,41 +4654,7 @@
               </a:spcAft>
             </a:pPr>
             <a:r>
-              <a:rPr sz="1900" b="0" i="0">
-                <a:solidFill>
-                  <a:srgbClr val="333333"/>
-                </a:solidFill>
-                <a:latin typeface="Calibri"/>
-              </a:rPr>
-              <a:t>–   Es la matriz de decisión de la sesión 8 aplicada a lo que devuelve un asistente. </a:t>
-            </a:r>
-            <a:r>
-              <a:rPr sz="1900" b="1" i="0">
-                <a:solidFill>
-                  <a:srgbClr val="333333"/>
-                </a:solidFill>
-                <a:latin typeface="Calibri"/>
-              </a:rPr>
-              <a:t>Paso 3: prohibir explícitamente lo prohibido.</a:t>
-            </a:r>
-            <a:r>
-              <a:rPr sz="1900" b="0" i="0">
-                <a:solidFill>
-                  <a:srgbClr val="333333"/>
-                </a:solidFill>
-                <a:latin typeface="Calibri"/>
-              </a:rPr>
-              <a:t> «Sin crear cuentas de usuario</a:t>
-            </a:r>
-          </a:p>
-          <a:p>
-            <a:pPr>
-              <a:spcAft>
-                <a:spcPts val="800"/>
-              </a:spcAft>
-            </a:pPr>
-            <a:r>
-              <a:rPr sz="1900" b="0" i="0">
+              <a:rPr sz="2000" b="0" i="0">
                 <a:solidFill>
                   <a:srgbClr val="333333"/>
                 </a:solidFill>
@@ -4745,7 +4663,7 @@
               <a:t>–   Sin pedir datos personales, sin instalar nada, sin imágenes.» La regla en cuatro palabras: </a:t>
             </a:r>
             <a:r>
-              <a:rPr sz="1900" b="1" i="0">
+              <a:rPr sz="2000" b="1" i="0">
                 <a:solidFill>
                   <a:srgbClr val="333333"/>
                 </a:solidFill>
@@ -4754,29 +4672,13 @@
               <a:t>si no lo dice, lo va a proponer</a:t>
             </a:r>
             <a:r>
-              <a:rPr sz="1900" b="0" i="0">
+              <a:rPr sz="2000" b="0" i="0">
                 <a:solidFill>
                   <a:srgbClr val="333333"/>
                 </a:solidFill>
                 <a:latin typeface="Calibri"/>
               </a:rPr>
               <a:t>.</a:t>
-            </a:r>
-          </a:p>
-          <a:p>
-            <a:pPr>
-              <a:spcAft>
-                <a:spcPts val="800"/>
-              </a:spcAft>
-            </a:pPr>
-            <a:r>
-              <a:rPr sz="1900" b="0" i="0">
-                <a:solidFill>
-                  <a:srgbClr val="333333"/>
-                </a:solidFill>
-                <a:latin typeface="Calibri"/>
-              </a:rPr>
-              <a:t>–   Y aquí hay una lección de ingeniería más general que vale la pena señalar: los requisitos no funcionales que escribieron en la sesión 7 son precisamente lo que hay que poner en el prompt, porque son lo que el mundo no adivina.</a:t>
             </a:r>
           </a:p>
         </p:txBody>
@@ -4957,7 +4859,7 @@
                 </a:solidFill>
                 <a:latin typeface="Calibri"/>
               </a:rPr>
-              <a:t>El método: cinco pasos y por qué el primero decide todo (2/2)</a:t>
+              <a:t>El método: cinco pasos y por qué el primero decide todo (2/3)</a:t>
             </a:r>
           </a:p>
         </p:txBody>
@@ -4996,34 +4898,7 @@
                 </a:solidFill>
                 <a:latin typeface="Calibri"/>
               </a:rPr>
-              <a:t>–   Un equipo que tiene sus requisitos no funcionales escritos hace un prompt bueno sin esfuerzo; uno que no los tiene, no puede. </a:t>
-            </a:r>
-            <a:r>
-              <a:rPr sz="2000" b="1" i="0">
-                <a:solidFill>
-                  <a:srgbClr val="333333"/>
-                </a:solidFill>
-                <a:latin typeface="Calibri"/>
-              </a:rPr>
-              <a:t>Paso 4: corregir a mano y anotar qué se corrigió.</a:t>
-            </a:r>
-            <a:r>
-              <a:rPr sz="2000" b="0" i="0">
-                <a:solidFill>
-                  <a:srgbClr val="333333"/>
-                </a:solidFill>
-                <a:latin typeface="Calibri"/>
-              </a:rPr>
-              <a:t> Esa lista </a:t>
-            </a:r>
-            <a:r>
-              <a:rPr sz="2000" b="1" i="0">
-                <a:solidFill>
-                  <a:srgbClr val="333333"/>
-                </a:solidFill>
-                <a:latin typeface="Calibri"/>
-              </a:rPr>
-              <a:t>es el entregable</a:t>
+              <a:t>–   Y aquí hay una lección de ingeniería más general que vale la pena señalar: los requisitos no funcionales que escribieron en la sesión 7 son precisamente lo que hay que poner en el prompt, porque son lo que el mundo no adivina.</a:t>
             </a:r>
           </a:p>
           <a:p>
@@ -5039,7 +4914,34 @@
                 </a:solidFill>
                 <a:latin typeface="Calibri"/>
               </a:rPr>
-              <a:t>–   Y hay que decirlo sin ambigüedad porque cambia cómo trabajan: es la prueba de que pensaron, y es lo que más pesa en la rúbrica de hoy —30 de 100—.</a:t>
+              <a:t>–   Un equipo que tiene sus requisitos no funcionales escritos hace un prompt bueno sin esfuerzo; uno que no los tiene, no puede. </a:t>
+            </a:r>
+            <a:r>
+              <a:rPr sz="2000" b="1" i="0">
+                <a:solidFill>
+                  <a:srgbClr val="333333"/>
+                </a:solidFill>
+                <a:latin typeface="Calibri"/>
+              </a:rPr>
+              <a:t>Paso 4: corregir a mano y anotar qué se corrigió.</a:t>
+            </a:r>
+            <a:r>
+              <a:rPr sz="2000" b="0" i="0">
+                <a:solidFill>
+                  <a:srgbClr val="333333"/>
+                </a:solidFill>
+                <a:latin typeface="Calibri"/>
+              </a:rPr>
+              <a:t> Esa lista </a:t>
+            </a:r>
+            <a:r>
+              <a:rPr sz="2000" b="1" i="0">
+                <a:solidFill>
+                  <a:srgbClr val="333333"/>
+                </a:solidFill>
+                <a:latin typeface="Calibri"/>
+              </a:rPr>
+              <a:t>es el entregable</a:t>
             </a:r>
           </a:p>
           <a:p>
@@ -5055,25 +4957,7 @@
                 </a:solidFill>
                 <a:latin typeface="Calibri"/>
               </a:rPr>
-              <a:t>–   Un equipo que no corrigió nada no usó el asistente: lo obedeció. </a:t>
-            </a:r>
-            <a:r>
-              <a:rPr sz="2000" b="1" i="0">
-                <a:solidFill>
-                  <a:srgbClr val="333333"/>
-                </a:solidFill>
-                <a:latin typeface="Calibri"/>
-              </a:rPr>
-              <a:t>Paso 5: declarar el uso.</a:t>
-            </a:r>
-            <a:r>
-              <a:rPr sz="2000" b="0" i="0">
-                <a:solidFill>
-                  <a:srgbClr val="333333"/>
-                </a:solidFill>
-                <a:latin typeface="Calibri"/>
-              </a:rPr>
-              <a:t> Qué asistente, para qué, qué se aceptó y qué se descartó.</a:t>
+              <a:t>–   Y hay que decirlo sin ambigüedad porque cambia cómo trabajan: es la prueba de que pensaron, y es lo que más pesa en la rúbrica de hoy —30 de 100—.</a:t>
             </a:r>
           </a:p>
           <a:p>
@@ -5089,7 +4973,7 @@
                 </a:solidFill>
                 <a:latin typeface="Calibri"/>
               </a:rPr>
-              <a:t>–   El encuadre correcto no es de sospecha sino de profesión: </a:t>
+              <a:t>–   Un equipo que no corrigió nada no usó el asistente: lo obedeció. </a:t>
             </a:r>
             <a:r>
               <a:rPr sz="2000" b="1" i="0">
@@ -5098,7 +4982,7 @@
                 </a:solidFill>
                 <a:latin typeface="Calibri"/>
               </a:rPr>
-              <a:t>declarar el uso de una herramienta es lo normal en ingeniería</a:t>
+              <a:t>Paso 5: declarar el uso.</a:t>
             </a:r>
             <a:r>
               <a:rPr sz="2000" b="0" i="0">
@@ -5107,23 +4991,7 @@
                 </a:solidFill>
                 <a:latin typeface="Calibri"/>
               </a:rPr>
-              <a:t> —nadie esconde que usó una calculadora o una biblioteca de código—, y esconderlo es lo que constituye la falta.</a:t>
-            </a:r>
-          </a:p>
-          <a:p>
-            <a:pPr>
-              <a:spcAft>
-                <a:spcPts val="800"/>
-              </a:spcAft>
-            </a:pPr>
-            <a:r>
-              <a:rPr sz="2000" b="0" i="0">
-                <a:solidFill>
-                  <a:srgbClr val="333333"/>
-                </a:solidFill>
-                <a:latin typeface="Calibri"/>
-              </a:rPr>
-              <a:t>–   En la vida laboral esto ya es requisito en muchas organizaciones, y acostumbrarse ahora les ahorra un problema después.</a:t>
+              <a:t> Qué asistente, para qué, qué se aceptó y qué se descartó.</a:t>
             </a:r>
           </a:p>
         </p:txBody>
@@ -5304,7 +5172,7 @@
                 </a:solidFill>
                 <a:latin typeface="Calibri"/>
               </a:rPr>
-              <a:t>El antes y después, y cómo cierra el corte (1/2)</a:t>
+              <a:t>El método: cinco pasos y por qué el primero decide todo (3/3)</a:t>
             </a:r>
           </a:p>
         </p:txBody>
@@ -5343,7 +5211,7 @@
                 </a:solidFill>
                 <a:latin typeface="Calibri"/>
               </a:rPr>
-              <a:t>–   La diapositiva de antes y después es el corazón didáctico de la sesión, y hay que recorrerla con una insistencia: </a:t>
+              <a:t>–   El encuadre correcto no es de sospecha sino de profesión: </a:t>
             </a:r>
             <a:r>
               <a:rPr sz="2000" b="1" i="0">
@@ -5352,7 +5220,7 @@
                 </a:solidFill>
                 <a:latin typeface="Calibri"/>
               </a:rPr>
-              <a:t>ninguna de las cinco propuestas del asistente era absurda</a:t>
+              <a:t>declarar el uso de una herramienta es lo normal en ingeniería</a:t>
             </a:r>
             <a:r>
               <a:rPr sz="2000" b="0" i="0">
@@ -5361,7 +5229,7 @@
                 </a:solidFill>
                 <a:latin typeface="Calibri"/>
               </a:rPr>
-              <a:t>.</a:t>
+              <a:t> —nadie esconde que usó una calculadora o una biblioteca de código—, y esconderlo es lo que constituye la falta.</a:t>
             </a:r>
           </a:p>
           <a:p>
@@ -5377,98 +5245,7 @@
                 </a:solidFill>
                 <a:latin typeface="Calibri"/>
               </a:rPr>
-              <a:t>–   Cuentas de usuario, avisos por correo, reservas con historial, portadas, y un mensaje de error estándar: las cinco están en sistemas reales de bibliotecas en todo el mundo. </a:t>
-            </a:r>
-            <a:r>
-              <a:rPr sz="2000" b="1" i="0">
-                <a:solidFill>
-                  <a:srgbClr val="333333"/>
-                </a:solidFill>
-                <a:latin typeface="Calibri"/>
-              </a:rPr>
-              <a:t>Las cinco eran incorrectas para este proyecto</a:t>
-            </a:r>
-          </a:p>
-          <a:p>
-            <a:pPr>
-              <a:spcAft>
-                <a:spcPts val="800"/>
-              </a:spcAft>
-            </a:pPr>
-            <a:r>
-              <a:rPr sz="2000" b="0" i="0">
-                <a:solidFill>
-                  <a:srgbClr val="333333"/>
-                </a:solidFill>
-                <a:latin typeface="Calibri"/>
-              </a:rPr>
-              <a:t>–   Y cada una por una razón distinta que el equipo ya había escrito en una sesión anterior — el requisito «sin cuenta» de la sesión 7</a:t>
-            </a:r>
-          </a:p>
-          <a:p>
-            <a:pPr>
-              <a:spcAft>
-                <a:spcPts val="800"/>
-              </a:spcAft>
-            </a:pPr>
-            <a:r>
-              <a:rPr sz="2000" b="0" i="0">
-                <a:solidFill>
-                  <a:srgbClr val="333333"/>
-                </a:solidFill>
-                <a:latin typeface="Calibri"/>
-              </a:rPr>
-              <a:t>–   La Ley 1581 de la sesión 4, el alcance mínimo de la sesión 8, el límite de 200 KB de la sesión 5, y la regla de mensajes con salida de la sesión 10.</a:t>
-            </a:r>
-          </a:p>
-          <a:p>
-            <a:pPr>
-              <a:spcAft>
-                <a:spcPts val="800"/>
-              </a:spcAft>
-            </a:pPr>
-            <a:r>
-              <a:rPr sz="2000" b="0" i="0">
-                <a:solidFill>
-                  <a:srgbClr val="333333"/>
-                </a:solidFill>
-                <a:latin typeface="Calibri"/>
-              </a:rPr>
-              <a:t>–   Ese es el hallazgo que hay que dejar dicho en voz alta, porque justifica todo el corte: </a:t>
-            </a:r>
-            <a:r>
-              <a:rPr sz="2000" b="1" i="0">
-                <a:solidFill>
-                  <a:srgbClr val="333333"/>
-                </a:solidFill>
-                <a:latin typeface="Calibri"/>
-              </a:rPr>
-              <a:t>el equipo pudo corregir al asistente porque tenía sus decisiones escritas.</a:t>
-            </a:r>
-            <a:r>
-              <a:rPr sz="2000" b="0" i="0">
-                <a:solidFill>
-                  <a:srgbClr val="333333"/>
-                </a:solidFill>
-                <a:latin typeface="Calibri"/>
-              </a:rPr>
-              <a:t> Un equipo sin requisitos no funcionales</a:t>
-            </a:r>
-          </a:p>
-          <a:p>
-            <a:pPr>
-              <a:spcAft>
-                <a:spcPts val="800"/>
-              </a:spcAft>
-            </a:pPr>
-            <a:r>
-              <a:rPr sz="2000" b="0" i="0">
-                <a:solidFill>
-                  <a:srgbClr val="333333"/>
-                </a:solidFill>
-                <a:latin typeface="Calibri"/>
-              </a:rPr>
-              <a:t>–   Sin alcance definido y sin indicador ambiental no habría tenido con qué objetar, y habría aceptado las cinco.</a:t>
+              <a:t>–   En la vida laboral esto ya es requisito en muchas organizaciones, y acostumbrarse ahora les ahorra un problema después.</a:t>
             </a:r>
           </a:p>
         </p:txBody>
@@ -5649,7 +5426,7 @@
                 </a:solidFill>
                 <a:latin typeface="Calibri"/>
               </a:rPr>
-              <a:t>El antes y después, y cómo cierra el corte (2/2)</a:t>
+              <a:t>El antes y después, y cómo cierra el corte (1/3)</a:t>
             </a:r>
           </a:p>
         </p:txBody>
@@ -5688,7 +5465,7 @@
                 </a:solidFill>
                 <a:latin typeface="Calibri"/>
               </a:rPr>
-              <a:t>–   La documentación de las sesiones 6 a 10 no era burocracia académica: es lo que hoy les permite ejercer criterio frente a una herramienta que suena más segura que ellos. </a:t>
+              <a:t>–   La diapositiva de antes y después es el corazón didáctico de la sesión, y hay que recorrerla con una insistencia: </a:t>
             </a:r>
             <a:r>
               <a:rPr sz="2000" b="1" i="0">
@@ -5697,7 +5474,7 @@
                 </a:solidFill>
                 <a:latin typeface="Calibri"/>
               </a:rPr>
-              <a:t>El cierre del corte.</a:t>
+              <a:t>ninguna de las cinco propuestas del asistente era absurda</a:t>
             </a:r>
             <a:r>
               <a:rPr sz="2000" b="0" i="0">
@@ -5706,7 +5483,7 @@
                 </a:solidFill>
                 <a:latin typeface="Calibri"/>
               </a:rPr>
-              <a:t> Los últimos 20 minutos son la evaluación del corte 2 en la plataforma del curso, individual y a libro abierto sobre sus propios documentos del equipo.</a:t>
+              <a:t>.</a:t>
             </a:r>
           </a:p>
           <a:p>
@@ -5722,7 +5499,16 @@
                 </a:solidFill>
                 <a:latin typeface="Calibri"/>
               </a:rPr>
-              <a:t>–   Cubre las sesiones 7 a 11: fases y costo del cambio, requisitos y criterios de aceptación, matriz de decisión y alcance mínimo, calidad de fuentes, fidelidad de prototipos y uso responsable de IA.</a:t>
+              <a:t>–   Cuentas de usuario, avisos por correo, reservas con historial, portadas, y un mensaje de error estándar: las cinco están en sistemas reales de bibliotecas en todo el mundo. </a:t>
+            </a:r>
+            <a:r>
+              <a:rPr sz="2000" b="1" i="0">
+                <a:solidFill>
+                  <a:srgbClr val="333333"/>
+                </a:solidFill>
+                <a:latin typeface="Calibri"/>
+              </a:rPr>
+              <a:t>Las cinco eran incorrectas para este proyecto</a:t>
             </a:r>
           </a:p>
           <a:p>
@@ -5738,25 +5524,7 @@
                 </a:solidFill>
                 <a:latin typeface="Calibri"/>
               </a:rPr>
-              <a:t>–   Que sea a libro abierto es deliberado y conviene explicarlo: </a:t>
-            </a:r>
-            <a:r>
-              <a:rPr sz="2000" b="1" i="0">
-                <a:solidFill>
-                  <a:srgbClr val="333333"/>
-                </a:solidFill>
-                <a:latin typeface="Calibri"/>
-              </a:rPr>
-              <a:t>premia al equipo que documentó</a:t>
-            </a:r>
-            <a:r>
-              <a:rPr sz="2000" b="0" i="0">
-                <a:solidFill>
-                  <a:srgbClr val="333333"/>
-                </a:solidFill>
-                <a:latin typeface="Calibri"/>
-              </a:rPr>
-              <a:t>, que es exactamente la conducta que el corte entero intentó enseñar.</a:t>
+              <a:t>–   Y cada una por una razón distinta que el equipo ya había escrito en una sesión anterior — el requisito «sin cuenta» de la sesión 7</a:t>
             </a:r>
           </a:p>
           <a:p>
@@ -5772,25 +5540,7 @@
                 </a:solidFill>
                 <a:latin typeface="Calibri"/>
               </a:rPr>
-              <a:t>–   Y la advertencia final del taller, que hay que repetir aunque ya esté en la diapositiva: </a:t>
-            </a:r>
-            <a:r>
-              <a:rPr sz="2000" b="1" i="0">
-                <a:solidFill>
-                  <a:srgbClr val="333333"/>
-                </a:solidFill>
-                <a:latin typeface="Calibri"/>
-              </a:rPr>
-              <a:t>no se le pasan datos personales a un asistente</a:t>
-            </a:r>
-            <a:r>
-              <a:rPr sz="2000" b="0" i="0">
-                <a:solidFill>
-                  <a:srgbClr val="333333"/>
-                </a:solidFill>
-                <a:latin typeface="Calibri"/>
-              </a:rPr>
-              <a:t> —ni propios ni de terceros—, porque lo que se escribe ahí sale del computador y no vuelve.</a:t>
+              <a:t>–   La Ley 1581 de la sesión 4, el alcance mínimo de la sesión 8, el límite de 200 KB de la sesión 5, y la regla de mensajes con salida de la sesión 10.</a:t>
             </a:r>
           </a:p>
         </p:txBody>
@@ -5865,7 +5615,7 @@
         <p:spPr>
           <a:xfrm>
             <a:off x="0" y="0"/>
-            <a:ext cx="12191695" cy="1170432"/>
+            <a:ext cx="12191695" cy="960120"/>
           </a:xfrm>
           <a:prstGeom prst="rect">
             <a:avLst/>
@@ -5907,7 +5657,7 @@
         </p:nvSpPr>
         <p:spPr>
           <a:xfrm>
-            <a:off x="0" y="1170432"/>
+            <a:off x="0" y="960120"/>
             <a:ext cx="12191695" cy="41148"/>
           </a:xfrm>
           <a:prstGeom prst="rect">
@@ -5951,7 +5701,7 @@
         <p:spPr>
           <a:xfrm>
             <a:off x="457200" y="164592"/>
-            <a:ext cx="11277295" cy="384048"/>
+            <a:ext cx="11277295" cy="502920"/>
           </a:xfrm>
           <a:prstGeom prst="rect">
             <a:avLst/>
@@ -5971,7 +5721,7 @@
                 </a:solidFill>
                 <a:latin typeface="Calibri"/>
               </a:rPr>
-              <a:t>Taller de hoy: Prototipo v2 con IA</a:t>
+              <a:t>El antes y después, y cómo cierra el corte (2/3)</a:t>
             </a:r>
           </a:p>
         </p:txBody>
@@ -5984,8 +5734,8 @@
         </p:nvSpPr>
         <p:spPr>
           <a:xfrm>
-            <a:off x="457200" y="566928"/>
-            <a:ext cx="11277295" cy="411480"/>
+            <a:off x="457200" y="1170432"/>
+            <a:ext cx="11277295" cy="5230368"/>
           </a:xfrm>
           <a:prstGeom prst="rect">
             <a:avLst/>
@@ -5998,963 +5748,94 @@
           </a:bodyPr>
           <a:lstStyle/>
           <a:p>
-            <a:r>
-              <a:rPr sz="1400" b="0" i="0">
-                <a:solidFill>
-                  <a:srgbClr val="B8D8EE"/>
-                </a:solidFill>
-                <a:latin typeface="Calibri"/>
-              </a:rPr>
-              <a:t>27 min en equipos · 27 min: prompt, variantes, elección, correcciones y registro · prototipo v2 + registro de prompt, variantes, correcciones y descartes</a:t>
-            </a:r>
-          </a:p>
-        </p:txBody>
-      </p:sp>
-      <p:sp>
-        <p:nvSpPr>
-          <p:cNvPr id="6" name="Rounded Rectangle 5"/>
-          <p:cNvSpPr/>
-          <p:nvPr/>
-        </p:nvSpPr>
-        <p:spPr>
-          <a:xfrm>
-            <a:off x="457200" y="1472184"/>
-            <a:ext cx="11277295" cy="566928"/>
-          </a:xfrm>
-          <a:prstGeom prst="roundRect">
-            <a:avLst>
-              <a:gd name="adj" fmla="val 12000"/>
-            </a:avLst>
-          </a:prstGeom>
-          <a:solidFill>
-            <a:srgbClr val="F2F2F2"/>
-          </a:solidFill>
-          <a:ln>
-            <a:noFill/>
-          </a:ln>
-        </p:spPr>
-        <p:style>
-          <a:lnRef idx="1">
-            <a:schemeClr val="accent1"/>
-          </a:lnRef>
-          <a:fillRef idx="3">
-            <a:schemeClr val="accent1"/>
-          </a:fillRef>
-          <a:effectRef idx="2">
-            <a:schemeClr val="accent1"/>
-          </a:effectRef>
-          <a:fontRef idx="minor">
-            <a:schemeClr val="lt1"/>
-          </a:fontRef>
-        </p:style>
-        <p:txBody>
-          <a:bodyPr rtlCol="0" anchor="ctr"/>
-          <a:lstStyle/>
-          <a:p>
-            <a:pPr algn="ctr"/>
-          </a:p>
-        </p:txBody>
-      </p:sp>
-      <p:sp>
-        <p:nvSpPr>
-          <p:cNvPr id="7" name="Rectangle 6"/>
-          <p:cNvSpPr/>
-          <p:nvPr/>
-        </p:nvSpPr>
-        <p:spPr>
-          <a:xfrm>
-            <a:off x="640080" y="1618487"/>
-            <a:ext cx="274320" cy="274320"/>
-          </a:xfrm>
-          <a:prstGeom prst="rect">
-            <a:avLst/>
-          </a:prstGeom>
-          <a:solidFill>
-            <a:srgbClr val="FFFFFF"/>
-          </a:solidFill>
-          <a:ln>
-            <a:solidFill>
-              <a:srgbClr val="333333"/>
-            </a:solidFill>
-          </a:ln>
-        </p:spPr>
-        <p:style>
-          <a:lnRef idx="1">
-            <a:schemeClr val="accent1"/>
-          </a:lnRef>
-          <a:fillRef idx="3">
-            <a:schemeClr val="accent1"/>
-          </a:fillRef>
-          <a:effectRef idx="2">
-            <a:schemeClr val="accent1"/>
-          </a:effectRef>
-          <a:fontRef idx="minor">
-            <a:schemeClr val="lt1"/>
-          </a:fontRef>
-        </p:style>
-        <p:txBody>
-          <a:bodyPr rtlCol="0" anchor="ctr"/>
-          <a:lstStyle/>
-          <a:p>
-            <a:pPr algn="ctr"/>
-          </a:p>
-        </p:txBody>
-      </p:sp>
-      <p:sp>
-        <p:nvSpPr>
-          <p:cNvPr id="8" name="Rectangle 7"/>
-          <p:cNvSpPr/>
-          <p:nvPr/>
-        </p:nvSpPr>
-        <p:spPr>
-          <a:xfrm>
-            <a:off x="640080" y="1618487"/>
-            <a:ext cx="73152" cy="274320"/>
-          </a:xfrm>
-          <a:prstGeom prst="rect">
-            <a:avLst/>
-          </a:prstGeom>
-          <a:solidFill>
-            <a:srgbClr val="269CCB"/>
-          </a:solidFill>
-          <a:ln>
-            <a:noFill/>
-          </a:ln>
-        </p:spPr>
-        <p:style>
-          <a:lnRef idx="1">
-            <a:schemeClr val="accent1"/>
-          </a:lnRef>
-          <a:fillRef idx="3">
-            <a:schemeClr val="accent1"/>
-          </a:fillRef>
-          <a:effectRef idx="2">
-            <a:schemeClr val="accent1"/>
-          </a:effectRef>
-          <a:fontRef idx="minor">
-            <a:schemeClr val="lt1"/>
-          </a:fontRef>
-        </p:style>
-        <p:txBody>
-          <a:bodyPr rtlCol="0" anchor="ctr"/>
-          <a:lstStyle/>
-          <a:p>
-            <a:pPr algn="ctr"/>
-          </a:p>
-        </p:txBody>
-      </p:sp>
-      <p:sp>
-        <p:nvSpPr>
-          <p:cNvPr id="9" name="TextBox 8"/>
-          <p:cNvSpPr txBox="1"/>
-          <p:nvPr/>
-        </p:nvSpPr>
-        <p:spPr>
-          <a:xfrm>
-            <a:off x="1097280" y="1563624"/>
-            <a:ext cx="10362895" cy="402336"/>
-          </a:xfrm>
-          <a:prstGeom prst="rect">
-            <a:avLst/>
-          </a:prstGeom>
-          <a:noFill/>
-        </p:spPr>
-        <p:txBody>
-          <a:bodyPr wrap="square" anchor="ctr"/>
-          <a:lstStyle/>
-          <a:p>
-            <a:r>
-              <a:rPr sz="1500" b="1" i="0">
-                <a:solidFill>
-                  <a:srgbClr val="333333"/>
-                </a:solidFill>
-                <a:latin typeface="Calibri"/>
-              </a:rPr>
-              <a:t>EL PROMPT QUE USAMOS</a:t>
-            </a:r>
-            <a:r>
-              <a:rPr sz="1500" b="0" i="0">
-                <a:solidFill>
-                  <a:srgbClr val="333333"/>
-                </a:solidFill>
-                <a:latin typeface="Calibri"/>
-              </a:rPr>
-              <a:t> — El prompt completo, copiado tal cual. Tiene que incluir </a:t>
-            </a:r>
-            <a:r>
-              <a:rPr sz="1500" b="1" i="0">
-                <a:solidFill>
-                  <a:srgbClr val="333333"/>
-                </a:solidFill>
-                <a:latin typeface="Calibri"/>
-              </a:rPr>
-              <a:t>el problema en una frase, quién lo usa, las restricciones y lo que está prohibido proponer</a:t>
-            </a:r>
-            <a:r>
-              <a:rPr sz="1500" b="0" i="0">
-                <a:solidFill>
-                  <a:srgbClr val="333333"/>
-                </a:solidFill>
-                <a:latin typeface="Calibri"/>
-              </a:rPr>
-              <a:t>.</a:t>
-            </a:r>
-          </a:p>
-        </p:txBody>
-      </p:sp>
-      <p:sp>
-        <p:nvSpPr>
-          <p:cNvPr id="10" name="Rounded Rectangle 9"/>
-          <p:cNvSpPr/>
-          <p:nvPr/>
-        </p:nvSpPr>
-        <p:spPr>
-          <a:xfrm>
-            <a:off x="457200" y="2148839"/>
-            <a:ext cx="11277295" cy="566928"/>
-          </a:xfrm>
-          <a:prstGeom prst="roundRect">
-            <a:avLst>
-              <a:gd name="adj" fmla="val 12000"/>
-            </a:avLst>
-          </a:prstGeom>
-          <a:solidFill>
-            <a:srgbClr val="F2F2F2"/>
-          </a:solidFill>
-          <a:ln>
-            <a:noFill/>
-          </a:ln>
-        </p:spPr>
-        <p:style>
-          <a:lnRef idx="1">
-            <a:schemeClr val="accent1"/>
-          </a:lnRef>
-          <a:fillRef idx="3">
-            <a:schemeClr val="accent1"/>
-          </a:fillRef>
-          <a:effectRef idx="2">
-            <a:schemeClr val="accent1"/>
-          </a:effectRef>
-          <a:fontRef idx="minor">
-            <a:schemeClr val="lt1"/>
-          </a:fontRef>
-        </p:style>
-        <p:txBody>
-          <a:bodyPr rtlCol="0" anchor="ctr"/>
-          <a:lstStyle/>
-          <a:p>
-            <a:pPr algn="ctr"/>
-          </a:p>
-        </p:txBody>
-      </p:sp>
-      <p:sp>
-        <p:nvSpPr>
-          <p:cNvPr id="11" name="Rectangle 10"/>
-          <p:cNvSpPr/>
-          <p:nvPr/>
-        </p:nvSpPr>
-        <p:spPr>
-          <a:xfrm>
-            <a:off x="640080" y="2295144"/>
-            <a:ext cx="274320" cy="274320"/>
-          </a:xfrm>
-          <a:prstGeom prst="rect">
-            <a:avLst/>
-          </a:prstGeom>
-          <a:solidFill>
-            <a:srgbClr val="FFFFFF"/>
-          </a:solidFill>
-          <a:ln>
-            <a:solidFill>
-              <a:srgbClr val="333333"/>
-            </a:solidFill>
-          </a:ln>
-        </p:spPr>
-        <p:style>
-          <a:lnRef idx="1">
-            <a:schemeClr val="accent1"/>
-          </a:lnRef>
-          <a:fillRef idx="3">
-            <a:schemeClr val="accent1"/>
-          </a:fillRef>
-          <a:effectRef idx="2">
-            <a:schemeClr val="accent1"/>
-          </a:effectRef>
-          <a:fontRef idx="minor">
-            <a:schemeClr val="lt1"/>
-          </a:fontRef>
-        </p:style>
-        <p:txBody>
-          <a:bodyPr rtlCol="0" anchor="ctr"/>
-          <a:lstStyle/>
-          <a:p>
-            <a:pPr algn="ctr"/>
-          </a:p>
-        </p:txBody>
-      </p:sp>
-      <p:sp>
-        <p:nvSpPr>
-          <p:cNvPr id="12" name="Rectangle 11"/>
-          <p:cNvSpPr/>
-          <p:nvPr/>
-        </p:nvSpPr>
-        <p:spPr>
-          <a:xfrm>
-            <a:off x="640080" y="2295144"/>
-            <a:ext cx="73152" cy="274320"/>
-          </a:xfrm>
-          <a:prstGeom prst="rect">
-            <a:avLst/>
-          </a:prstGeom>
-          <a:solidFill>
-            <a:srgbClr val="269CCB"/>
-          </a:solidFill>
-          <a:ln>
-            <a:noFill/>
-          </a:ln>
-        </p:spPr>
-        <p:style>
-          <a:lnRef idx="1">
-            <a:schemeClr val="accent1"/>
-          </a:lnRef>
-          <a:fillRef idx="3">
-            <a:schemeClr val="accent1"/>
-          </a:fillRef>
-          <a:effectRef idx="2">
-            <a:schemeClr val="accent1"/>
-          </a:effectRef>
-          <a:fontRef idx="minor">
-            <a:schemeClr val="lt1"/>
-          </a:fontRef>
-        </p:style>
-        <p:txBody>
-          <a:bodyPr rtlCol="0" anchor="ctr"/>
-          <a:lstStyle/>
-          <a:p>
-            <a:pPr algn="ctr"/>
-          </a:p>
-        </p:txBody>
-      </p:sp>
-      <p:sp>
-        <p:nvSpPr>
-          <p:cNvPr id="13" name="TextBox 12"/>
-          <p:cNvSpPr txBox="1"/>
-          <p:nvPr/>
-        </p:nvSpPr>
-        <p:spPr>
-          <a:xfrm>
-            <a:off x="1097280" y="2240279"/>
-            <a:ext cx="10362895" cy="402336"/>
-          </a:xfrm>
-          <a:prstGeom prst="rect">
-            <a:avLst/>
-          </a:prstGeom>
-          <a:noFill/>
-        </p:spPr>
-        <p:txBody>
-          <a:bodyPr wrap="square" anchor="ctr"/>
-          <a:lstStyle/>
-          <a:p>
-            <a:r>
-              <a:rPr sz="1500" b="1" i="0">
-                <a:solidFill>
-                  <a:srgbClr val="333333"/>
-                </a:solidFill>
-                <a:latin typeface="Calibri"/>
-              </a:rPr>
-              <a:t>LAS TRES VARIANTES</a:t>
-            </a:r>
-            <a:r>
-              <a:rPr sz="1500" b="0" i="0">
-                <a:solidFill>
-                  <a:srgbClr val="333333"/>
-                </a:solidFill>
-                <a:latin typeface="Calibri"/>
-              </a:rPr>
-              <a:t> — Las tres opciones que devolvió, resumidas en dos o tres líneas cada una. </a:t>
-            </a:r>
-            <a:r>
-              <a:rPr sz="1500" b="1" i="0">
-                <a:solidFill>
-                  <a:srgbClr val="333333"/>
-                </a:solidFill>
-                <a:latin typeface="Calibri"/>
-              </a:rPr>
-              <a:t>No una sola respuesta</a:t>
-            </a:r>
-            <a:r>
-              <a:rPr sz="1500" b="0" i="0">
-                <a:solidFill>
-                  <a:srgbClr val="333333"/>
-                </a:solidFill>
-                <a:latin typeface="Calibri"/>
-              </a:rPr>
-              <a:t>: tres.</a:t>
-            </a:r>
-          </a:p>
-        </p:txBody>
-      </p:sp>
-      <p:sp>
-        <p:nvSpPr>
-          <p:cNvPr id="14" name="Rounded Rectangle 13"/>
-          <p:cNvSpPr/>
-          <p:nvPr/>
-        </p:nvSpPr>
-        <p:spPr>
-          <a:xfrm>
-            <a:off x="457200" y="2825496"/>
-            <a:ext cx="11277295" cy="566928"/>
-          </a:xfrm>
-          <a:prstGeom prst="roundRect">
-            <a:avLst>
-              <a:gd name="adj" fmla="val 12000"/>
-            </a:avLst>
-          </a:prstGeom>
-          <a:solidFill>
-            <a:srgbClr val="F2F2F2"/>
-          </a:solidFill>
-          <a:ln>
-            <a:noFill/>
-          </a:ln>
-        </p:spPr>
-        <p:style>
-          <a:lnRef idx="1">
-            <a:schemeClr val="accent1"/>
-          </a:lnRef>
-          <a:fillRef idx="3">
-            <a:schemeClr val="accent1"/>
-          </a:fillRef>
-          <a:effectRef idx="2">
-            <a:schemeClr val="accent1"/>
-          </a:effectRef>
-          <a:fontRef idx="minor">
-            <a:schemeClr val="lt1"/>
-          </a:fontRef>
-        </p:style>
-        <p:txBody>
-          <a:bodyPr rtlCol="0" anchor="ctr"/>
-          <a:lstStyle/>
-          <a:p>
-            <a:pPr algn="ctr"/>
-          </a:p>
-        </p:txBody>
-      </p:sp>
-      <p:sp>
-        <p:nvSpPr>
-          <p:cNvPr id="15" name="Rectangle 14"/>
-          <p:cNvSpPr/>
-          <p:nvPr/>
-        </p:nvSpPr>
-        <p:spPr>
-          <a:xfrm>
-            <a:off x="640080" y="2971800"/>
-            <a:ext cx="274320" cy="274320"/>
-          </a:xfrm>
-          <a:prstGeom prst="rect">
-            <a:avLst/>
-          </a:prstGeom>
-          <a:solidFill>
-            <a:srgbClr val="FFFFFF"/>
-          </a:solidFill>
-          <a:ln>
-            <a:solidFill>
-              <a:srgbClr val="333333"/>
-            </a:solidFill>
-          </a:ln>
-        </p:spPr>
-        <p:style>
-          <a:lnRef idx="1">
-            <a:schemeClr val="accent1"/>
-          </a:lnRef>
-          <a:fillRef idx="3">
-            <a:schemeClr val="accent1"/>
-          </a:fillRef>
-          <a:effectRef idx="2">
-            <a:schemeClr val="accent1"/>
-          </a:effectRef>
-          <a:fontRef idx="minor">
-            <a:schemeClr val="lt1"/>
-          </a:fontRef>
-        </p:style>
-        <p:txBody>
-          <a:bodyPr rtlCol="0" anchor="ctr"/>
-          <a:lstStyle/>
-          <a:p>
-            <a:pPr algn="ctr"/>
-          </a:p>
-        </p:txBody>
-      </p:sp>
-      <p:sp>
-        <p:nvSpPr>
-          <p:cNvPr id="16" name="Rectangle 15"/>
-          <p:cNvSpPr/>
-          <p:nvPr/>
-        </p:nvSpPr>
-        <p:spPr>
-          <a:xfrm>
-            <a:off x="640080" y="2971800"/>
-            <a:ext cx="73152" cy="274320"/>
-          </a:xfrm>
-          <a:prstGeom prst="rect">
-            <a:avLst/>
-          </a:prstGeom>
-          <a:solidFill>
-            <a:srgbClr val="269CCB"/>
-          </a:solidFill>
-          <a:ln>
-            <a:noFill/>
-          </a:ln>
-        </p:spPr>
-        <p:style>
-          <a:lnRef idx="1">
-            <a:schemeClr val="accent1"/>
-          </a:lnRef>
-          <a:fillRef idx="3">
-            <a:schemeClr val="accent1"/>
-          </a:fillRef>
-          <a:effectRef idx="2">
-            <a:schemeClr val="accent1"/>
-          </a:effectRef>
-          <a:fontRef idx="minor">
-            <a:schemeClr val="lt1"/>
-          </a:fontRef>
-        </p:style>
-        <p:txBody>
-          <a:bodyPr rtlCol="0" anchor="ctr"/>
-          <a:lstStyle/>
-          <a:p>
-            <a:pPr algn="ctr"/>
-          </a:p>
-        </p:txBody>
-      </p:sp>
-      <p:sp>
-        <p:nvSpPr>
-          <p:cNvPr id="17" name="TextBox 16"/>
-          <p:cNvSpPr txBox="1"/>
-          <p:nvPr/>
-        </p:nvSpPr>
-        <p:spPr>
-          <a:xfrm>
-            <a:off x="1097280" y="2916936"/>
-            <a:ext cx="10362895" cy="402336"/>
-          </a:xfrm>
-          <a:prstGeom prst="rect">
-            <a:avLst/>
-          </a:prstGeom>
-          <a:noFill/>
-        </p:spPr>
-        <p:txBody>
-          <a:bodyPr wrap="square" anchor="ctr"/>
-          <a:lstStyle/>
-          <a:p>
-            <a:r>
-              <a:rPr sz="1500" b="1" i="0">
-                <a:solidFill>
-                  <a:srgbClr val="333333"/>
-                </a:solidFill>
-                <a:latin typeface="Calibri"/>
-              </a:rPr>
-              <a:t>LA QUE ELEGIMOS Y POR QUÉ</a:t>
-            </a:r>
-            <a:r>
-              <a:rPr sz="1500" b="0" i="0">
-                <a:solidFill>
-                  <a:srgbClr val="333333"/>
-                </a:solidFill>
-                <a:latin typeface="Calibri"/>
-              </a:rPr>
-              <a:t> — Cuál eligieron y el criterio, apoyado en sus </a:t>
-            </a:r>
-            <a:r>
-              <a:rPr sz="1500" b="1" i="0">
-                <a:solidFill>
-                  <a:srgbClr val="333333"/>
-                </a:solidFill>
-                <a:latin typeface="Calibri"/>
-              </a:rPr>
-              <a:t>requisitos y restricciones</a:t>
-            </a:r>
-            <a:r>
-              <a:rPr sz="1500" b="0" i="0">
-                <a:solidFill>
-                  <a:srgbClr val="333333"/>
-                </a:solidFill>
-                <a:latin typeface="Calibri"/>
-              </a:rPr>
-              <a:t> — no en «nos gustó más».</a:t>
-            </a:r>
-          </a:p>
-        </p:txBody>
-      </p:sp>
-      <p:sp>
-        <p:nvSpPr>
-          <p:cNvPr id="18" name="Rounded Rectangle 17"/>
-          <p:cNvSpPr/>
-          <p:nvPr/>
-        </p:nvSpPr>
-        <p:spPr>
-          <a:xfrm>
-            <a:off x="457200" y="3502152"/>
-            <a:ext cx="11277295" cy="566928"/>
-          </a:xfrm>
-          <a:prstGeom prst="roundRect">
-            <a:avLst>
-              <a:gd name="adj" fmla="val 12000"/>
-            </a:avLst>
-          </a:prstGeom>
-          <a:solidFill>
-            <a:srgbClr val="F2F2F2"/>
-          </a:solidFill>
-          <a:ln>
-            <a:noFill/>
-          </a:ln>
-        </p:spPr>
-        <p:style>
-          <a:lnRef idx="1">
-            <a:schemeClr val="accent1"/>
-          </a:lnRef>
-          <a:fillRef idx="3">
-            <a:schemeClr val="accent1"/>
-          </a:fillRef>
-          <a:effectRef idx="2">
-            <a:schemeClr val="accent1"/>
-          </a:effectRef>
-          <a:fontRef idx="minor">
-            <a:schemeClr val="lt1"/>
-          </a:fontRef>
-        </p:style>
-        <p:txBody>
-          <a:bodyPr rtlCol="0" anchor="ctr"/>
-          <a:lstStyle/>
-          <a:p>
-            <a:pPr algn="ctr"/>
-          </a:p>
-        </p:txBody>
-      </p:sp>
-      <p:sp>
-        <p:nvSpPr>
-          <p:cNvPr id="19" name="Rectangle 18"/>
-          <p:cNvSpPr/>
-          <p:nvPr/>
-        </p:nvSpPr>
-        <p:spPr>
-          <a:xfrm>
-            <a:off x="640080" y="3648456"/>
-            <a:ext cx="274320" cy="274320"/>
-          </a:xfrm>
-          <a:prstGeom prst="rect">
-            <a:avLst/>
-          </a:prstGeom>
-          <a:solidFill>
-            <a:srgbClr val="FFFFFF"/>
-          </a:solidFill>
-          <a:ln>
-            <a:solidFill>
-              <a:srgbClr val="333333"/>
-            </a:solidFill>
-          </a:ln>
-        </p:spPr>
-        <p:style>
-          <a:lnRef idx="1">
-            <a:schemeClr val="accent1"/>
-          </a:lnRef>
-          <a:fillRef idx="3">
-            <a:schemeClr val="accent1"/>
-          </a:fillRef>
-          <a:effectRef idx="2">
-            <a:schemeClr val="accent1"/>
-          </a:effectRef>
-          <a:fontRef idx="minor">
-            <a:schemeClr val="lt1"/>
-          </a:fontRef>
-        </p:style>
-        <p:txBody>
-          <a:bodyPr rtlCol="0" anchor="ctr"/>
-          <a:lstStyle/>
-          <a:p>
-            <a:pPr algn="ctr"/>
-          </a:p>
-        </p:txBody>
-      </p:sp>
-      <p:sp>
-        <p:nvSpPr>
-          <p:cNvPr id="20" name="Rectangle 19"/>
-          <p:cNvSpPr/>
-          <p:nvPr/>
-        </p:nvSpPr>
-        <p:spPr>
-          <a:xfrm>
-            <a:off x="640080" y="3648456"/>
-            <a:ext cx="73152" cy="274320"/>
-          </a:xfrm>
-          <a:prstGeom prst="rect">
-            <a:avLst/>
-          </a:prstGeom>
-          <a:solidFill>
-            <a:srgbClr val="269CCB"/>
-          </a:solidFill>
-          <a:ln>
-            <a:noFill/>
-          </a:ln>
-        </p:spPr>
-        <p:style>
-          <a:lnRef idx="1">
-            <a:schemeClr val="accent1"/>
-          </a:lnRef>
-          <a:fillRef idx="3">
-            <a:schemeClr val="accent1"/>
-          </a:fillRef>
-          <a:effectRef idx="2">
-            <a:schemeClr val="accent1"/>
-          </a:effectRef>
-          <a:fontRef idx="minor">
-            <a:schemeClr val="lt1"/>
-          </a:fontRef>
-        </p:style>
-        <p:txBody>
-          <a:bodyPr rtlCol="0" anchor="ctr"/>
-          <a:lstStyle/>
-          <a:p>
-            <a:pPr algn="ctr"/>
-          </a:p>
-        </p:txBody>
-      </p:sp>
-      <p:sp>
-        <p:nvSpPr>
-          <p:cNvPr id="21" name="TextBox 20"/>
-          <p:cNvSpPr txBox="1"/>
-          <p:nvPr/>
-        </p:nvSpPr>
-        <p:spPr>
-          <a:xfrm>
-            <a:off x="1097280" y="3593592"/>
-            <a:ext cx="10362895" cy="402336"/>
-          </a:xfrm>
-          <a:prstGeom prst="rect">
-            <a:avLst/>
-          </a:prstGeom>
-          <a:noFill/>
-        </p:spPr>
-        <p:txBody>
-          <a:bodyPr wrap="square" anchor="ctr"/>
-          <a:lstStyle/>
-          <a:p>
-            <a:r>
-              <a:rPr sz="1500" b="1" i="0">
-                <a:solidFill>
-                  <a:srgbClr val="333333"/>
-                </a:solidFill>
-                <a:latin typeface="Calibri"/>
-              </a:rPr>
-              <a:t>LO QUE CORREGIMOS A MANO</a:t>
-            </a:r>
-            <a:r>
-              <a:rPr sz="1500" b="0" i="0">
-                <a:solidFill>
-                  <a:srgbClr val="333333"/>
-                </a:solidFill>
-                <a:latin typeface="Calibri"/>
-              </a:rPr>
-              <a:t> — Cada corrección con </a:t>
-            </a:r>
-            <a:r>
-              <a:rPr sz="1500" b="1" i="0">
-                <a:solidFill>
-                  <a:srgbClr val="333333"/>
-                </a:solidFill>
-                <a:latin typeface="Calibri"/>
-              </a:rPr>
-              <a:t>la razón y la sesión de donde sale</a:t>
-            </a:r>
-            <a:r>
-              <a:rPr sz="1500" b="0" i="0">
-                <a:solidFill>
-                  <a:srgbClr val="333333"/>
-                </a:solidFill>
-                <a:latin typeface="Calibri"/>
-              </a:rPr>
-              <a:t>: qué proponía la IA, qué quedó, y por qué. Es el bloque que más pesa.</a:t>
-            </a:r>
-          </a:p>
-        </p:txBody>
-      </p:sp>
-      <p:sp>
-        <p:nvSpPr>
-          <p:cNvPr id="22" name="Rounded Rectangle 21"/>
-          <p:cNvSpPr/>
-          <p:nvPr/>
-        </p:nvSpPr>
-        <p:spPr>
-          <a:xfrm>
-            <a:off x="457200" y="4178808"/>
-            <a:ext cx="11277295" cy="566928"/>
-          </a:xfrm>
-          <a:prstGeom prst="roundRect">
-            <a:avLst>
-              <a:gd name="adj" fmla="val 12000"/>
-            </a:avLst>
-          </a:prstGeom>
-          <a:solidFill>
-            <a:srgbClr val="F2F2F2"/>
-          </a:solidFill>
-          <a:ln>
-            <a:noFill/>
-          </a:ln>
-        </p:spPr>
-        <p:style>
-          <a:lnRef idx="1">
-            <a:schemeClr val="accent1"/>
-          </a:lnRef>
-          <a:fillRef idx="3">
-            <a:schemeClr val="accent1"/>
-          </a:fillRef>
-          <a:effectRef idx="2">
-            <a:schemeClr val="accent1"/>
-          </a:effectRef>
-          <a:fontRef idx="minor">
-            <a:schemeClr val="lt1"/>
-          </a:fontRef>
-        </p:style>
-        <p:txBody>
-          <a:bodyPr rtlCol="0" anchor="ctr"/>
-          <a:lstStyle/>
-          <a:p>
-            <a:pPr algn="ctr"/>
-          </a:p>
-        </p:txBody>
-      </p:sp>
-      <p:sp>
-        <p:nvSpPr>
-          <p:cNvPr id="23" name="Rectangle 22"/>
-          <p:cNvSpPr/>
-          <p:nvPr/>
-        </p:nvSpPr>
-        <p:spPr>
-          <a:xfrm>
-            <a:off x="640080" y="4325112"/>
-            <a:ext cx="274320" cy="274320"/>
-          </a:xfrm>
-          <a:prstGeom prst="rect">
-            <a:avLst/>
-          </a:prstGeom>
-          <a:solidFill>
-            <a:srgbClr val="FFFFFF"/>
-          </a:solidFill>
-          <a:ln>
-            <a:solidFill>
-              <a:srgbClr val="333333"/>
-            </a:solidFill>
-          </a:ln>
-        </p:spPr>
-        <p:style>
-          <a:lnRef idx="1">
-            <a:schemeClr val="accent1"/>
-          </a:lnRef>
-          <a:fillRef idx="3">
-            <a:schemeClr val="accent1"/>
-          </a:fillRef>
-          <a:effectRef idx="2">
-            <a:schemeClr val="accent1"/>
-          </a:effectRef>
-          <a:fontRef idx="minor">
-            <a:schemeClr val="lt1"/>
-          </a:fontRef>
-        </p:style>
-        <p:txBody>
-          <a:bodyPr rtlCol="0" anchor="ctr"/>
-          <a:lstStyle/>
-          <a:p>
-            <a:pPr algn="ctr"/>
-          </a:p>
-        </p:txBody>
-      </p:sp>
-      <p:sp>
-        <p:nvSpPr>
-          <p:cNvPr id="24" name="Rectangle 23"/>
-          <p:cNvSpPr/>
-          <p:nvPr/>
-        </p:nvSpPr>
-        <p:spPr>
-          <a:xfrm>
-            <a:off x="640080" y="4325112"/>
-            <a:ext cx="73152" cy="274320"/>
-          </a:xfrm>
-          <a:prstGeom prst="rect">
-            <a:avLst/>
-          </a:prstGeom>
-          <a:solidFill>
-            <a:srgbClr val="269CCB"/>
-          </a:solidFill>
-          <a:ln>
-            <a:noFill/>
-          </a:ln>
-        </p:spPr>
-        <p:style>
-          <a:lnRef idx="1">
-            <a:schemeClr val="accent1"/>
-          </a:lnRef>
-          <a:fillRef idx="3">
-            <a:schemeClr val="accent1"/>
-          </a:fillRef>
-          <a:effectRef idx="2">
-            <a:schemeClr val="accent1"/>
-          </a:effectRef>
-          <a:fontRef idx="minor">
-            <a:schemeClr val="lt1"/>
-          </a:fontRef>
-        </p:style>
-        <p:txBody>
-          <a:bodyPr rtlCol="0" anchor="ctr"/>
-          <a:lstStyle/>
-          <a:p>
-            <a:pPr algn="ctr"/>
-          </a:p>
-        </p:txBody>
-      </p:sp>
-      <p:sp>
-        <p:nvSpPr>
-          <p:cNvPr id="25" name="TextBox 24"/>
-          <p:cNvSpPr txBox="1"/>
-          <p:nvPr/>
-        </p:nvSpPr>
-        <p:spPr>
-          <a:xfrm>
-            <a:off x="1097280" y="4270248"/>
-            <a:ext cx="10362895" cy="402336"/>
-          </a:xfrm>
-          <a:prstGeom prst="rect">
-            <a:avLst/>
-          </a:prstGeom>
-          <a:noFill/>
-        </p:spPr>
-        <p:txBody>
-          <a:bodyPr wrap="square" anchor="ctr"/>
-          <a:lstStyle/>
-          <a:p>
-            <a:r>
-              <a:rPr sz="1500" b="1" i="0">
-                <a:solidFill>
-                  <a:srgbClr val="333333"/>
-                </a:solidFill>
-                <a:latin typeface="Calibri"/>
-              </a:rPr>
-              <a:t>LO QUE DESCARTAMOS Y POR QUÉ</a:t>
-            </a:r>
-            <a:r>
-              <a:rPr sz="1500" b="0" i="0">
-                <a:solidFill>
-                  <a:srgbClr val="333333"/>
-                </a:solidFill>
-                <a:latin typeface="Calibri"/>
-              </a:rPr>
-              <a:t> — Las propuestas que se rechazaron completas, y el motivo: fuera del alcance, viola una restricción, viola la ley, o consume demasiado.</a:t>
-            </a:r>
-          </a:p>
-        </p:txBody>
-      </p:sp>
-      <p:sp>
-        <p:nvSpPr>
-          <p:cNvPr id="26" name="TextBox 25"/>
+            <a:pPr>
+              <a:spcAft>
+                <a:spcPts val="800"/>
+              </a:spcAft>
+            </a:pPr>
+            <a:r>
+              <a:rPr sz="2000" b="0" i="0">
+                <a:solidFill>
+                  <a:srgbClr val="333333"/>
+                </a:solidFill>
+                <a:latin typeface="Calibri"/>
+              </a:rPr>
+              <a:t>–   Ese es el hallazgo que hay que dejar dicho en voz alta, porque justifica todo el corte: </a:t>
+            </a:r>
+            <a:r>
+              <a:rPr sz="2000" b="1" i="0">
+                <a:solidFill>
+                  <a:srgbClr val="333333"/>
+                </a:solidFill>
+                <a:latin typeface="Calibri"/>
+              </a:rPr>
+              <a:t>el equipo pudo corregir al asistente porque tenía sus decisiones escritas.</a:t>
+            </a:r>
+            <a:r>
+              <a:rPr sz="2000" b="0" i="0">
+                <a:solidFill>
+                  <a:srgbClr val="333333"/>
+                </a:solidFill>
+                <a:latin typeface="Calibri"/>
+              </a:rPr>
+              <a:t> Un equipo sin requisitos no funcionales</a:t>
+            </a:r>
+          </a:p>
+          <a:p>
+            <a:pPr>
+              <a:spcAft>
+                <a:spcPts val="800"/>
+              </a:spcAft>
+            </a:pPr>
+            <a:r>
+              <a:rPr sz="2000" b="0" i="0">
+                <a:solidFill>
+                  <a:srgbClr val="333333"/>
+                </a:solidFill>
+                <a:latin typeface="Calibri"/>
+              </a:rPr>
+              <a:t>–   Sin alcance definido y sin indicador ambiental no habría tenido con qué objetar, y habría aceptado las cinco.</a:t>
+            </a:r>
+          </a:p>
+          <a:p>
+            <a:pPr>
+              <a:spcAft>
+                <a:spcPts val="800"/>
+              </a:spcAft>
+            </a:pPr>
+            <a:r>
+              <a:rPr sz="2000" b="0" i="0">
+                <a:solidFill>
+                  <a:srgbClr val="333333"/>
+                </a:solidFill>
+                <a:latin typeface="Calibri"/>
+              </a:rPr>
+              <a:t>–   La documentación de las sesiones 6 a 10 no era burocracia académica: es lo que hoy les permite ejercer criterio frente a una herramienta que suena más segura que ellos. </a:t>
+            </a:r>
+            <a:r>
+              <a:rPr sz="2000" b="1" i="0">
+                <a:solidFill>
+                  <a:srgbClr val="333333"/>
+                </a:solidFill>
+                <a:latin typeface="Calibri"/>
+              </a:rPr>
+              <a:t>El cierre del corte.</a:t>
+            </a:r>
+            <a:r>
+              <a:rPr sz="2000" b="0" i="0">
+                <a:solidFill>
+                  <a:srgbClr val="333333"/>
+                </a:solidFill>
+                <a:latin typeface="Calibri"/>
+              </a:rPr>
+              <a:t> Los últimos 20 minutos son la evaluación del corte 2 en la plataforma del curso, individual y a libro abierto sobre sus propios documentos del equipo.</a:t>
+            </a:r>
+          </a:p>
+        </p:txBody>
+      </p:sp>
+      <p:sp>
+        <p:nvSpPr>
+          <p:cNvPr id="6" name="TextBox 5"/>
           <p:cNvSpPr txBox="1"/>
           <p:nvPr/>
         </p:nvSpPr>
@@ -7022,7 +5903,7 @@
         <p:spPr>
           <a:xfrm>
             <a:off x="0" y="0"/>
-            <a:ext cx="12191695" cy="1170432"/>
+            <a:ext cx="12191695" cy="960120"/>
           </a:xfrm>
           <a:prstGeom prst="rect">
             <a:avLst/>
@@ -7064,7 +5945,7 @@
         </p:nvSpPr>
         <p:spPr>
           <a:xfrm>
-            <a:off x="0" y="1170432"/>
+            <a:off x="0" y="960120"/>
             <a:ext cx="12191695" cy="41148"/>
           </a:xfrm>
           <a:prstGeom prst="rect">
@@ -7108,7 +5989,7 @@
         <p:spPr>
           <a:xfrm>
             <a:off x="457200" y="164592"/>
-            <a:ext cx="11277295" cy="384048"/>
+            <a:ext cx="11277295" cy="502920"/>
           </a:xfrm>
           <a:prstGeom prst="rect">
             <a:avLst/>
@@ -7128,7 +6009,7 @@
                 </a:solidFill>
                 <a:latin typeface="Calibri"/>
               </a:rPr>
-              <a:t>Cómo se expone en 3 minutos</a:t>
+              <a:t>El antes y después, y cómo cierra el corte (3/3)</a:t>
             </a:r>
           </a:p>
         </p:txBody>
@@ -7141,8 +6022,8 @@
         </p:nvSpPr>
         <p:spPr>
           <a:xfrm>
-            <a:off x="457200" y="566928"/>
-            <a:ext cx="11277295" cy="411480"/>
+            <a:off x="457200" y="1170432"/>
+            <a:ext cx="11277295" cy="5230368"/>
           </a:xfrm>
           <a:prstGeom prst="rect">
             <a:avLst/>
@@ -7155,894 +6036,94 @@
           </a:bodyPr>
           <a:lstStyle/>
           <a:p>
-            <a:r>
-              <a:rPr sz="1400" b="0" i="0">
-                <a:solidFill>
-                  <a:srgbClr val="B8D8EE"/>
-                </a:solidFill>
-                <a:latin typeface="Calibri"/>
-              </a:rPr>
-              <a:t>Habla el vocero con la pantalla ya compartida · cronómetro en pantalla · se corta al llegar a cero</a:t>
-            </a:r>
-          </a:p>
-        </p:txBody>
-      </p:sp>
-      <p:sp>
-        <p:nvSpPr>
-          <p:cNvPr id="6" name="Rounded Rectangle 5"/>
-          <p:cNvSpPr/>
-          <p:nvPr/>
-        </p:nvSpPr>
-        <p:spPr>
-          <a:xfrm>
-            <a:off x="457200" y="1444752"/>
-            <a:ext cx="11277295" cy="908913"/>
-          </a:xfrm>
-          <a:prstGeom prst="roundRect">
-            <a:avLst>
-              <a:gd name="adj" fmla="val 12000"/>
-            </a:avLst>
-          </a:prstGeom>
-          <a:solidFill>
-            <a:srgbClr val="F2F2F2"/>
-          </a:solidFill>
-          <a:ln>
-            <a:noFill/>
-          </a:ln>
-        </p:spPr>
-        <p:style>
-          <a:lnRef idx="1">
-            <a:schemeClr val="accent1"/>
-          </a:lnRef>
-          <a:fillRef idx="3">
-            <a:schemeClr val="accent1"/>
-          </a:fillRef>
-          <a:effectRef idx="2">
-            <a:schemeClr val="accent1"/>
-          </a:effectRef>
-          <a:fontRef idx="minor">
-            <a:schemeClr val="lt1"/>
-          </a:fontRef>
-        </p:style>
-        <p:txBody>
-          <a:bodyPr rtlCol="0" anchor="ctr"/>
-          <a:lstStyle/>
-          <a:p>
-            <a:pPr algn="ctr"/>
-          </a:p>
-        </p:txBody>
-      </p:sp>
-      <p:sp>
-        <p:nvSpPr>
-          <p:cNvPr id="7" name="Rounded Rectangle 6"/>
-          <p:cNvSpPr/>
-          <p:nvPr/>
-        </p:nvSpPr>
-        <p:spPr>
-          <a:xfrm>
-            <a:off x="594360" y="1679752"/>
-            <a:ext cx="438912" cy="438912"/>
-          </a:xfrm>
-          <a:prstGeom prst="roundRect">
-            <a:avLst>
-              <a:gd name="adj" fmla="val 12000"/>
-            </a:avLst>
-          </a:prstGeom>
-          <a:solidFill>
-            <a:srgbClr val="095292"/>
-          </a:solidFill>
-          <a:ln>
-            <a:noFill/>
-          </a:ln>
-        </p:spPr>
-        <p:style>
-          <a:lnRef idx="1">
-            <a:schemeClr val="accent1"/>
-          </a:lnRef>
-          <a:fillRef idx="3">
-            <a:schemeClr val="accent1"/>
-          </a:fillRef>
-          <a:effectRef idx="2">
-            <a:schemeClr val="accent1"/>
-          </a:effectRef>
-          <a:fontRef idx="minor">
-            <a:schemeClr val="lt1"/>
-          </a:fontRef>
-        </p:style>
-        <p:txBody>
-          <a:bodyPr rtlCol="0" anchor="ctr"/>
-          <a:lstStyle/>
-          <a:p>
-            <a:pPr algn="ctr"/>
-          </a:p>
-        </p:txBody>
-      </p:sp>
-      <p:sp>
-        <p:nvSpPr>
-          <p:cNvPr id="8" name="TextBox 7"/>
-          <p:cNvSpPr txBox="1"/>
-          <p:nvPr/>
-        </p:nvSpPr>
-        <p:spPr>
-          <a:xfrm>
-            <a:off x="594360" y="1679752"/>
-            <a:ext cx="438912" cy="438912"/>
-          </a:xfrm>
-          <a:prstGeom prst="rect">
-            <a:avLst/>
-          </a:prstGeom>
-          <a:noFill/>
-        </p:spPr>
-        <p:txBody>
-          <a:bodyPr wrap="square" anchor="ctr"/>
-          <a:lstStyle/>
-          <a:p>
-            <a:pPr algn="ctr"/>
-            <a:r>
-              <a:rPr sz="1600" b="1" i="0">
-                <a:solidFill>
-                  <a:srgbClr val="FFFFFF"/>
-                </a:solidFill>
-                <a:latin typeface="Calibri"/>
-              </a:rPr>
-              <a:t>1</a:t>
-            </a:r>
-          </a:p>
-        </p:txBody>
-      </p:sp>
-      <p:sp>
-        <p:nvSpPr>
-          <p:cNvPr id="9" name="TextBox 8"/>
-          <p:cNvSpPr txBox="1"/>
-          <p:nvPr/>
-        </p:nvSpPr>
-        <p:spPr>
-          <a:xfrm>
-            <a:off x="1188720" y="1536192"/>
-            <a:ext cx="10271455" cy="744321"/>
-          </a:xfrm>
-          <a:prstGeom prst="rect">
-            <a:avLst/>
-          </a:prstGeom>
-          <a:noFill/>
-        </p:spPr>
-        <p:txBody>
-          <a:bodyPr wrap="square" anchor="ctr"/>
-          <a:lstStyle/>
-          <a:p>
-            <a:r>
-              <a:rPr sz="1500" b="1" i="0">
-                <a:solidFill>
-                  <a:srgbClr val="095292"/>
-                </a:solidFill>
-                <a:latin typeface="Calibri"/>
-              </a:rPr>
-              <a:t>25 s · El prompt</a:t>
-            </a:r>
-          </a:p>
-          <a:p>
             <a:pPr>
-              <a:spcBef>
-                <a:spcPts val="200"/>
-              </a:spcBef>
+              <a:spcAft>
+                <a:spcPts val="800"/>
+              </a:spcAft>
             </a:pPr>
             <a:r>
-              <a:rPr sz="1300" b="0" i="0">
-                <a:solidFill>
-                  <a:srgbClr val="333333"/>
-                </a:solidFill>
-                <a:latin typeface="Calibri"/>
-              </a:rPr>
-              <a:t>Lean las restricciones que pusieron. Solo esa parte.</a:t>
-            </a:r>
-          </a:p>
-        </p:txBody>
-      </p:sp>
-      <p:sp>
-        <p:nvSpPr>
-          <p:cNvPr id="10" name="Rounded Rectangle 9"/>
-          <p:cNvSpPr/>
-          <p:nvPr/>
-        </p:nvSpPr>
-        <p:spPr>
-          <a:xfrm>
-            <a:off x="457200" y="2445105"/>
-            <a:ext cx="11277295" cy="908913"/>
-          </a:xfrm>
-          <a:prstGeom prst="roundRect">
-            <a:avLst>
-              <a:gd name="adj" fmla="val 12000"/>
-            </a:avLst>
-          </a:prstGeom>
-          <a:solidFill>
-            <a:srgbClr val="E8F4FA"/>
-          </a:solidFill>
-          <a:ln>
-            <a:noFill/>
-          </a:ln>
-        </p:spPr>
-        <p:style>
-          <a:lnRef idx="1">
-            <a:schemeClr val="accent1"/>
-          </a:lnRef>
-          <a:fillRef idx="3">
-            <a:schemeClr val="accent1"/>
-          </a:fillRef>
-          <a:effectRef idx="2">
-            <a:schemeClr val="accent1"/>
-          </a:effectRef>
-          <a:fontRef idx="minor">
-            <a:schemeClr val="lt1"/>
-          </a:fontRef>
-        </p:style>
-        <p:txBody>
-          <a:bodyPr rtlCol="0" anchor="ctr"/>
-          <a:lstStyle/>
-          <a:p>
-            <a:pPr algn="ctr"/>
-          </a:p>
-        </p:txBody>
-      </p:sp>
-      <p:sp>
-        <p:nvSpPr>
-          <p:cNvPr id="11" name="Rounded Rectangle 10"/>
-          <p:cNvSpPr/>
-          <p:nvPr/>
-        </p:nvSpPr>
-        <p:spPr>
-          <a:xfrm>
-            <a:off x="594360" y="2680106"/>
-            <a:ext cx="438912" cy="438912"/>
-          </a:xfrm>
-          <a:prstGeom prst="roundRect">
-            <a:avLst>
-              <a:gd name="adj" fmla="val 12000"/>
-            </a:avLst>
-          </a:prstGeom>
-          <a:solidFill>
-            <a:srgbClr val="095292"/>
-          </a:solidFill>
-          <a:ln>
-            <a:noFill/>
-          </a:ln>
-        </p:spPr>
-        <p:style>
-          <a:lnRef idx="1">
-            <a:schemeClr val="accent1"/>
-          </a:lnRef>
-          <a:fillRef idx="3">
-            <a:schemeClr val="accent1"/>
-          </a:fillRef>
-          <a:effectRef idx="2">
-            <a:schemeClr val="accent1"/>
-          </a:effectRef>
-          <a:fontRef idx="minor">
-            <a:schemeClr val="lt1"/>
-          </a:fontRef>
-        </p:style>
-        <p:txBody>
-          <a:bodyPr rtlCol="0" anchor="ctr"/>
-          <a:lstStyle/>
-          <a:p>
-            <a:pPr algn="ctr"/>
-          </a:p>
-        </p:txBody>
-      </p:sp>
-      <p:sp>
-        <p:nvSpPr>
-          <p:cNvPr id="12" name="TextBox 11"/>
-          <p:cNvSpPr txBox="1"/>
-          <p:nvPr/>
-        </p:nvSpPr>
-        <p:spPr>
-          <a:xfrm>
-            <a:off x="594360" y="2680106"/>
-            <a:ext cx="438912" cy="438912"/>
-          </a:xfrm>
-          <a:prstGeom prst="rect">
-            <a:avLst/>
-          </a:prstGeom>
-          <a:noFill/>
-        </p:spPr>
-        <p:txBody>
-          <a:bodyPr wrap="square" anchor="ctr"/>
-          <a:lstStyle/>
-          <a:p>
-            <a:pPr algn="ctr"/>
-            <a:r>
-              <a:rPr sz="1600" b="1" i="0">
-                <a:solidFill>
-                  <a:srgbClr val="FFFFFF"/>
-                </a:solidFill>
-                <a:latin typeface="Calibri"/>
-              </a:rPr>
-              <a:t>2</a:t>
-            </a:r>
-          </a:p>
-        </p:txBody>
-      </p:sp>
-      <p:sp>
-        <p:nvSpPr>
-          <p:cNvPr id="13" name="TextBox 12"/>
-          <p:cNvSpPr txBox="1"/>
-          <p:nvPr/>
-        </p:nvSpPr>
-        <p:spPr>
-          <a:xfrm>
-            <a:off x="1188720" y="2536545"/>
-            <a:ext cx="10271455" cy="744321"/>
-          </a:xfrm>
-          <a:prstGeom prst="rect">
-            <a:avLst/>
-          </a:prstGeom>
-          <a:noFill/>
-        </p:spPr>
-        <p:txBody>
-          <a:bodyPr wrap="square" anchor="ctr"/>
-          <a:lstStyle/>
-          <a:p>
-            <a:r>
-              <a:rPr sz="1500" b="1" i="0">
-                <a:solidFill>
-                  <a:srgbClr val="095292"/>
-                </a:solidFill>
-                <a:latin typeface="Calibri"/>
-              </a:rPr>
-              <a:t>30 s · Las tres variantes</a:t>
+              <a:rPr sz="2000" b="0" i="0">
+                <a:solidFill>
+                  <a:srgbClr val="333333"/>
+                </a:solidFill>
+                <a:latin typeface="Calibri"/>
+              </a:rPr>
+              <a:t>–   Cubre las sesiones 7 a 11: fases y costo del cambio, requisitos y criterios de aceptación, matriz de decisión y alcance mínimo, calidad de fuentes, fidelidad de prototipos y uso responsable de IA.</a:t>
             </a:r>
           </a:p>
           <a:p>
             <a:pPr>
-              <a:spcBef>
-                <a:spcPts val="200"/>
-              </a:spcBef>
+              <a:spcAft>
+                <a:spcPts val="800"/>
+              </a:spcAft>
             </a:pPr>
             <a:r>
-              <a:rPr sz="1300" b="0" i="0">
-                <a:solidFill>
-                  <a:srgbClr val="333333"/>
-                </a:solidFill>
-                <a:latin typeface="Calibri"/>
-              </a:rPr>
-              <a:t>En una frase cada una.</a:t>
-            </a:r>
-          </a:p>
-        </p:txBody>
-      </p:sp>
-      <p:sp>
-        <p:nvSpPr>
-          <p:cNvPr id="14" name="Rounded Rectangle 13"/>
-          <p:cNvSpPr/>
-          <p:nvPr/>
-        </p:nvSpPr>
-        <p:spPr>
-          <a:xfrm>
-            <a:off x="457200" y="3445459"/>
-            <a:ext cx="11277295" cy="908913"/>
-          </a:xfrm>
-          <a:prstGeom prst="roundRect">
-            <a:avLst>
-              <a:gd name="adj" fmla="val 12000"/>
-            </a:avLst>
-          </a:prstGeom>
-          <a:solidFill>
-            <a:srgbClr val="F2F2F2"/>
-          </a:solidFill>
-          <a:ln>
-            <a:noFill/>
-          </a:ln>
-        </p:spPr>
-        <p:style>
-          <a:lnRef idx="1">
-            <a:schemeClr val="accent1"/>
-          </a:lnRef>
-          <a:fillRef idx="3">
-            <a:schemeClr val="accent1"/>
-          </a:fillRef>
-          <a:effectRef idx="2">
-            <a:schemeClr val="accent1"/>
-          </a:effectRef>
-          <a:fontRef idx="minor">
-            <a:schemeClr val="lt1"/>
-          </a:fontRef>
-        </p:style>
-        <p:txBody>
-          <a:bodyPr rtlCol="0" anchor="ctr"/>
-          <a:lstStyle/>
-          <a:p>
-            <a:pPr algn="ctr"/>
-          </a:p>
-        </p:txBody>
-      </p:sp>
-      <p:sp>
-        <p:nvSpPr>
-          <p:cNvPr id="15" name="Rounded Rectangle 14"/>
-          <p:cNvSpPr/>
-          <p:nvPr/>
-        </p:nvSpPr>
-        <p:spPr>
-          <a:xfrm>
-            <a:off x="594360" y="3680460"/>
-            <a:ext cx="438912" cy="438912"/>
-          </a:xfrm>
-          <a:prstGeom prst="roundRect">
-            <a:avLst>
-              <a:gd name="adj" fmla="val 12000"/>
-            </a:avLst>
-          </a:prstGeom>
-          <a:solidFill>
-            <a:srgbClr val="095292"/>
-          </a:solidFill>
-          <a:ln>
-            <a:noFill/>
-          </a:ln>
-        </p:spPr>
-        <p:style>
-          <a:lnRef idx="1">
-            <a:schemeClr val="accent1"/>
-          </a:lnRef>
-          <a:fillRef idx="3">
-            <a:schemeClr val="accent1"/>
-          </a:fillRef>
-          <a:effectRef idx="2">
-            <a:schemeClr val="accent1"/>
-          </a:effectRef>
-          <a:fontRef idx="minor">
-            <a:schemeClr val="lt1"/>
-          </a:fontRef>
-        </p:style>
-        <p:txBody>
-          <a:bodyPr rtlCol="0" anchor="ctr"/>
-          <a:lstStyle/>
-          <a:p>
-            <a:pPr algn="ctr"/>
-          </a:p>
-        </p:txBody>
-      </p:sp>
-      <p:sp>
-        <p:nvSpPr>
-          <p:cNvPr id="16" name="TextBox 15"/>
-          <p:cNvSpPr txBox="1"/>
-          <p:nvPr/>
-        </p:nvSpPr>
-        <p:spPr>
-          <a:xfrm>
-            <a:off x="594360" y="3680460"/>
-            <a:ext cx="438912" cy="438912"/>
-          </a:xfrm>
-          <a:prstGeom prst="rect">
-            <a:avLst/>
-          </a:prstGeom>
-          <a:noFill/>
-        </p:spPr>
-        <p:txBody>
-          <a:bodyPr wrap="square" anchor="ctr"/>
-          <a:lstStyle/>
-          <a:p>
-            <a:pPr algn="ctr"/>
-            <a:r>
-              <a:rPr sz="1600" b="1" i="0">
-                <a:solidFill>
-                  <a:srgbClr val="FFFFFF"/>
-                </a:solidFill>
-                <a:latin typeface="Calibri"/>
-              </a:rPr>
-              <a:t>3</a:t>
-            </a:r>
-          </a:p>
-        </p:txBody>
-      </p:sp>
-      <p:sp>
-        <p:nvSpPr>
-          <p:cNvPr id="17" name="TextBox 16"/>
-          <p:cNvSpPr txBox="1"/>
-          <p:nvPr/>
-        </p:nvSpPr>
-        <p:spPr>
-          <a:xfrm>
-            <a:off x="1188720" y="3536899"/>
-            <a:ext cx="10271455" cy="744321"/>
-          </a:xfrm>
-          <a:prstGeom prst="rect">
-            <a:avLst/>
-          </a:prstGeom>
-          <a:noFill/>
-        </p:spPr>
-        <p:txBody>
-          <a:bodyPr wrap="square" anchor="ctr"/>
-          <a:lstStyle/>
-          <a:p>
-            <a:r>
-              <a:rPr sz="1500" b="1" i="0">
-                <a:solidFill>
-                  <a:srgbClr val="095292"/>
-                </a:solidFill>
-                <a:latin typeface="Calibri"/>
-              </a:rPr>
-              <a:t>30 s · La que eligieron</a:t>
+              <a:rPr sz="2000" b="0" i="0">
+                <a:solidFill>
+                  <a:srgbClr val="333333"/>
+                </a:solidFill>
+                <a:latin typeface="Calibri"/>
+              </a:rPr>
+              <a:t>–   Que sea a libro abierto es deliberado y conviene explicarlo: </a:t>
+            </a:r>
+            <a:r>
+              <a:rPr sz="2000" b="1" i="0">
+                <a:solidFill>
+                  <a:srgbClr val="333333"/>
+                </a:solidFill>
+                <a:latin typeface="Calibri"/>
+              </a:rPr>
+              <a:t>premia al equipo que documentó</a:t>
+            </a:r>
+            <a:r>
+              <a:rPr sz="2000" b="0" i="0">
+                <a:solidFill>
+                  <a:srgbClr val="333333"/>
+                </a:solidFill>
+                <a:latin typeface="Calibri"/>
+              </a:rPr>
+              <a:t>, que es exactamente la conducta que el corte entero intentó enseñar.</a:t>
             </a:r>
           </a:p>
           <a:p>
             <a:pPr>
-              <a:spcBef>
-                <a:spcPts val="200"/>
-              </a:spcBef>
+              <a:spcAft>
+                <a:spcPts val="800"/>
+              </a:spcAft>
             </a:pPr>
             <a:r>
-              <a:rPr sz="1300" b="0" i="0">
-                <a:solidFill>
-                  <a:srgbClr val="333333"/>
-                </a:solidFill>
-                <a:latin typeface="Calibri"/>
-              </a:rPr>
-              <a:t>Y el requisito en el que se apoyaron.</a:t>
-            </a:r>
-          </a:p>
-        </p:txBody>
-      </p:sp>
-      <p:sp>
-        <p:nvSpPr>
-          <p:cNvPr id="18" name="Rounded Rectangle 17"/>
-          <p:cNvSpPr/>
-          <p:nvPr/>
-        </p:nvSpPr>
-        <p:spPr>
-          <a:xfrm>
-            <a:off x="457200" y="4445812"/>
-            <a:ext cx="11277295" cy="908913"/>
-          </a:xfrm>
-          <a:prstGeom prst="roundRect">
-            <a:avLst>
-              <a:gd name="adj" fmla="val 12000"/>
-            </a:avLst>
-          </a:prstGeom>
-          <a:solidFill>
-            <a:srgbClr val="E8F4FA"/>
-          </a:solidFill>
-          <a:ln>
-            <a:noFill/>
-          </a:ln>
-        </p:spPr>
-        <p:style>
-          <a:lnRef idx="1">
-            <a:schemeClr val="accent1"/>
-          </a:lnRef>
-          <a:fillRef idx="3">
-            <a:schemeClr val="accent1"/>
-          </a:fillRef>
-          <a:effectRef idx="2">
-            <a:schemeClr val="accent1"/>
-          </a:effectRef>
-          <a:fontRef idx="minor">
-            <a:schemeClr val="lt1"/>
-          </a:fontRef>
-        </p:style>
-        <p:txBody>
-          <a:bodyPr rtlCol="0" anchor="ctr"/>
-          <a:lstStyle/>
-          <a:p>
-            <a:pPr algn="ctr"/>
-          </a:p>
-        </p:txBody>
-      </p:sp>
-      <p:sp>
-        <p:nvSpPr>
-          <p:cNvPr id="19" name="Rounded Rectangle 18"/>
-          <p:cNvSpPr/>
-          <p:nvPr/>
-        </p:nvSpPr>
-        <p:spPr>
-          <a:xfrm>
-            <a:off x="594360" y="4680813"/>
-            <a:ext cx="438912" cy="438912"/>
-          </a:xfrm>
-          <a:prstGeom prst="roundRect">
-            <a:avLst>
-              <a:gd name="adj" fmla="val 12000"/>
-            </a:avLst>
-          </a:prstGeom>
-          <a:solidFill>
-            <a:srgbClr val="095292"/>
-          </a:solidFill>
-          <a:ln>
-            <a:noFill/>
-          </a:ln>
-        </p:spPr>
-        <p:style>
-          <a:lnRef idx="1">
-            <a:schemeClr val="accent1"/>
-          </a:lnRef>
-          <a:fillRef idx="3">
-            <a:schemeClr val="accent1"/>
-          </a:fillRef>
-          <a:effectRef idx="2">
-            <a:schemeClr val="accent1"/>
-          </a:effectRef>
-          <a:fontRef idx="minor">
-            <a:schemeClr val="lt1"/>
-          </a:fontRef>
-        </p:style>
-        <p:txBody>
-          <a:bodyPr rtlCol="0" anchor="ctr"/>
-          <a:lstStyle/>
-          <a:p>
-            <a:pPr algn="ctr"/>
-          </a:p>
-        </p:txBody>
-      </p:sp>
-      <p:sp>
-        <p:nvSpPr>
-          <p:cNvPr id="20" name="TextBox 19"/>
-          <p:cNvSpPr txBox="1"/>
-          <p:nvPr/>
-        </p:nvSpPr>
-        <p:spPr>
-          <a:xfrm>
-            <a:off x="594360" y="4680813"/>
-            <a:ext cx="438912" cy="438912"/>
-          </a:xfrm>
-          <a:prstGeom prst="rect">
-            <a:avLst/>
-          </a:prstGeom>
-          <a:noFill/>
-        </p:spPr>
-        <p:txBody>
-          <a:bodyPr wrap="square" anchor="ctr"/>
-          <a:lstStyle/>
-          <a:p>
-            <a:pPr algn="ctr"/>
-            <a:r>
-              <a:rPr sz="1600" b="1" i="0">
-                <a:solidFill>
-                  <a:srgbClr val="FFFFFF"/>
-                </a:solidFill>
-                <a:latin typeface="Calibri"/>
-              </a:rPr>
-              <a:t>4</a:t>
-            </a:r>
-          </a:p>
-        </p:txBody>
-      </p:sp>
-      <p:sp>
-        <p:nvSpPr>
-          <p:cNvPr id="21" name="TextBox 20"/>
-          <p:cNvSpPr txBox="1"/>
-          <p:nvPr/>
-        </p:nvSpPr>
-        <p:spPr>
-          <a:xfrm>
-            <a:off x="1188720" y="4537252"/>
-            <a:ext cx="10271455" cy="744321"/>
-          </a:xfrm>
-          <a:prstGeom prst="rect">
-            <a:avLst/>
-          </a:prstGeom>
-          <a:noFill/>
-        </p:spPr>
-        <p:txBody>
-          <a:bodyPr wrap="square" anchor="ctr"/>
-          <a:lstStyle/>
-          <a:p>
-            <a:r>
-              <a:rPr sz="1500" b="1" i="0">
-                <a:solidFill>
-                  <a:srgbClr val="095292"/>
-                </a:solidFill>
-                <a:latin typeface="Calibri"/>
-              </a:rPr>
-              <a:t>70 s · Lo que corrigieron</a:t>
-            </a:r>
-          </a:p>
-          <a:p>
-            <a:pPr>
-              <a:spcBef>
-                <a:spcPts val="200"/>
-              </a:spcBef>
-            </a:pPr>
-            <a:r>
-              <a:rPr sz="1300" b="0" i="0">
-                <a:solidFill>
-                  <a:srgbClr val="333333"/>
-                </a:solidFill>
-                <a:latin typeface="Calibri"/>
-              </a:rPr>
-              <a:t>Dos correcciones con su razón y </a:t>
-            </a:r>
-            <a:r>
-              <a:rPr sz="1300" b="1" i="0">
-                <a:solidFill>
-                  <a:srgbClr val="333333"/>
-                </a:solidFill>
-                <a:latin typeface="Calibri"/>
-              </a:rPr>
-              <a:t>de qué sesión sale cada una</a:t>
-            </a:r>
-            <a:r>
-              <a:rPr sz="1300" b="0" i="0">
-                <a:solidFill>
-                  <a:srgbClr val="333333"/>
-                </a:solidFill>
-                <a:latin typeface="Calibri"/>
-              </a:rPr>
-              <a:t>. Es el minuto obligatorio.</a:t>
-            </a:r>
-          </a:p>
-        </p:txBody>
-      </p:sp>
-      <p:sp>
-        <p:nvSpPr>
-          <p:cNvPr id="22" name="Rounded Rectangle 21"/>
-          <p:cNvSpPr/>
-          <p:nvPr/>
-        </p:nvSpPr>
-        <p:spPr>
-          <a:xfrm>
-            <a:off x="457200" y="5446166"/>
-            <a:ext cx="11277295" cy="908913"/>
-          </a:xfrm>
-          <a:prstGeom prst="roundRect">
-            <a:avLst>
-              <a:gd name="adj" fmla="val 12000"/>
-            </a:avLst>
-          </a:prstGeom>
-          <a:solidFill>
-            <a:srgbClr val="F2F2F2"/>
-          </a:solidFill>
-          <a:ln>
-            <a:noFill/>
-          </a:ln>
-        </p:spPr>
-        <p:style>
-          <a:lnRef idx="1">
-            <a:schemeClr val="accent1"/>
-          </a:lnRef>
-          <a:fillRef idx="3">
-            <a:schemeClr val="accent1"/>
-          </a:fillRef>
-          <a:effectRef idx="2">
-            <a:schemeClr val="accent1"/>
-          </a:effectRef>
-          <a:fontRef idx="minor">
-            <a:schemeClr val="lt1"/>
-          </a:fontRef>
-        </p:style>
-        <p:txBody>
-          <a:bodyPr rtlCol="0" anchor="ctr"/>
-          <a:lstStyle/>
-          <a:p>
-            <a:pPr algn="ctr"/>
-          </a:p>
-        </p:txBody>
-      </p:sp>
-      <p:sp>
-        <p:nvSpPr>
-          <p:cNvPr id="23" name="Rounded Rectangle 22"/>
-          <p:cNvSpPr/>
-          <p:nvPr/>
-        </p:nvSpPr>
-        <p:spPr>
-          <a:xfrm>
-            <a:off x="594360" y="5681167"/>
-            <a:ext cx="438912" cy="438912"/>
-          </a:xfrm>
-          <a:prstGeom prst="roundRect">
-            <a:avLst>
-              <a:gd name="adj" fmla="val 12000"/>
-            </a:avLst>
-          </a:prstGeom>
-          <a:solidFill>
-            <a:srgbClr val="095292"/>
-          </a:solidFill>
-          <a:ln>
-            <a:noFill/>
-          </a:ln>
-        </p:spPr>
-        <p:style>
-          <a:lnRef idx="1">
-            <a:schemeClr val="accent1"/>
-          </a:lnRef>
-          <a:fillRef idx="3">
-            <a:schemeClr val="accent1"/>
-          </a:fillRef>
-          <a:effectRef idx="2">
-            <a:schemeClr val="accent1"/>
-          </a:effectRef>
-          <a:fontRef idx="minor">
-            <a:schemeClr val="lt1"/>
-          </a:fontRef>
-        </p:style>
-        <p:txBody>
-          <a:bodyPr rtlCol="0" anchor="ctr"/>
-          <a:lstStyle/>
-          <a:p>
-            <a:pPr algn="ctr"/>
-          </a:p>
-        </p:txBody>
-      </p:sp>
-      <p:sp>
-        <p:nvSpPr>
-          <p:cNvPr id="24" name="TextBox 23"/>
-          <p:cNvSpPr txBox="1"/>
-          <p:nvPr/>
-        </p:nvSpPr>
-        <p:spPr>
-          <a:xfrm>
-            <a:off x="594360" y="5681167"/>
-            <a:ext cx="438912" cy="438912"/>
-          </a:xfrm>
-          <a:prstGeom prst="rect">
-            <a:avLst/>
-          </a:prstGeom>
-          <a:noFill/>
-        </p:spPr>
-        <p:txBody>
-          <a:bodyPr wrap="square" anchor="ctr"/>
-          <a:lstStyle/>
-          <a:p>
-            <a:pPr algn="ctr"/>
-            <a:r>
-              <a:rPr sz="1600" b="1" i="0">
-                <a:solidFill>
-                  <a:srgbClr val="FFFFFF"/>
-                </a:solidFill>
-                <a:latin typeface="Calibri"/>
-              </a:rPr>
-              <a:t>5</a:t>
-            </a:r>
-          </a:p>
-        </p:txBody>
-      </p:sp>
-      <p:sp>
-        <p:nvSpPr>
-          <p:cNvPr id="25" name="TextBox 24"/>
-          <p:cNvSpPr txBox="1"/>
-          <p:nvPr/>
-        </p:nvSpPr>
-        <p:spPr>
-          <a:xfrm>
-            <a:off x="1188720" y="5537606"/>
-            <a:ext cx="10271455" cy="744321"/>
-          </a:xfrm>
-          <a:prstGeom prst="rect">
-            <a:avLst/>
-          </a:prstGeom>
-          <a:noFill/>
-        </p:spPr>
-        <p:txBody>
-          <a:bodyPr wrap="square" anchor="ctr"/>
-          <a:lstStyle/>
-          <a:p>
-            <a:r>
-              <a:rPr sz="1500" b="1" i="0">
-                <a:solidFill>
-                  <a:srgbClr val="095292"/>
-                </a:solidFill>
-                <a:latin typeface="Calibri"/>
-              </a:rPr>
-              <a:t>25 s · Lo que descartaron</a:t>
-            </a:r>
-          </a:p>
-          <a:p>
-            <a:pPr>
-              <a:spcBef>
-                <a:spcPts val="200"/>
-              </a:spcBef>
-            </a:pPr>
-            <a:r>
-              <a:rPr sz="1300" b="0" i="0">
-                <a:solidFill>
-                  <a:srgbClr val="333333"/>
-                </a:solidFill>
-                <a:latin typeface="Calibri"/>
-              </a:rPr>
-              <a:t>Una propuesta rechazada y el motivo.</a:t>
-            </a:r>
-          </a:p>
-        </p:txBody>
-      </p:sp>
-      <p:sp>
-        <p:nvSpPr>
-          <p:cNvPr id="26" name="TextBox 25"/>
+              <a:rPr sz="2000" b="0" i="0">
+                <a:solidFill>
+                  <a:srgbClr val="333333"/>
+                </a:solidFill>
+                <a:latin typeface="Calibri"/>
+              </a:rPr>
+              <a:t>–   Y la advertencia final del taller, que hay que repetir aunque ya esté en la diapositiva: </a:t>
+            </a:r>
+            <a:r>
+              <a:rPr sz="2000" b="1" i="0">
+                <a:solidFill>
+                  <a:srgbClr val="333333"/>
+                </a:solidFill>
+                <a:latin typeface="Calibri"/>
+              </a:rPr>
+              <a:t>no se le pasan datos personales a un asistente</a:t>
+            </a:r>
+            <a:r>
+              <a:rPr sz="2000" b="0" i="0">
+                <a:solidFill>
+                  <a:srgbClr val="333333"/>
+                </a:solidFill>
+                <a:latin typeface="Calibri"/>
+              </a:rPr>
+              <a:t> —ni propios ni de terceros—, porque lo que se escribe ahí sale del computador y no vuelve.</a:t>
+            </a:r>
+          </a:p>
+        </p:txBody>
+      </p:sp>
+      <p:sp>
+        <p:nvSpPr>
+          <p:cNvPr id="6" name="TextBox 5"/>
           <p:cNvSpPr txBox="1"/>
           <p:nvPr/>
         </p:nvSpPr>
@@ -8110,7 +6191,7 @@
         <p:spPr>
           <a:xfrm>
             <a:off x="0" y="0"/>
-            <a:ext cx="12191695" cy="960120"/>
+            <a:ext cx="12191695" cy="1170432"/>
           </a:xfrm>
           <a:prstGeom prst="rect">
             <a:avLst/>
@@ -8152,7 +6233,7 @@
         </p:nvSpPr>
         <p:spPr>
           <a:xfrm>
-            <a:off x="0" y="960120"/>
+            <a:off x="0" y="1170432"/>
             <a:ext cx="12191695" cy="41148"/>
           </a:xfrm>
           <a:prstGeom prst="rect">
@@ -8196,7 +6277,7 @@
         <p:spPr>
           <a:xfrm>
             <a:off x="457200" y="164592"/>
-            <a:ext cx="11277295" cy="502920"/>
+            <a:ext cx="11277295" cy="384048"/>
           </a:xfrm>
           <a:prstGeom prst="rect">
             <a:avLst/>
@@ -8216,7 +6297,7 @@
                 </a:solidFill>
                 <a:latin typeface="Calibri"/>
               </a:rPr>
-              <a:t>Para la Clase 12</a:t>
+              <a:t>Taller de hoy: Prototipo v2 con IA</a:t>
             </a:r>
           </a:p>
         </p:txBody>
@@ -8229,8 +6310,8 @@
         </p:nvSpPr>
         <p:spPr>
           <a:xfrm>
-            <a:off x="457200" y="1170432"/>
-            <a:ext cx="11277295" cy="5230368"/>
+            <a:off x="457200" y="566928"/>
+            <a:ext cx="11277295" cy="411480"/>
           </a:xfrm>
           <a:prstGeom prst="rect">
             <a:avLst/>
@@ -8243,270 +6324,963 @@
           </a:bodyPr>
           <a:lstStyle/>
           <a:p>
-            <a:pPr>
-              <a:spcAft>
-                <a:spcPts val="800"/>
-              </a:spcAft>
-            </a:pPr>
-            <a:r>
-              <a:rPr sz="2000" b="0" i="0">
-                <a:solidFill>
-                  <a:srgbClr val="333333"/>
-                </a:solidFill>
-                <a:latin typeface="Calibri"/>
-              </a:rPr>
-              <a:t>–   </a:t>
-            </a:r>
-            <a:r>
-              <a:rPr sz="2000" b="1" i="0">
-                <a:solidFill>
-                  <a:srgbClr val="333333"/>
-                </a:solidFill>
-                <a:latin typeface="Calibri"/>
-              </a:rPr>
-              <a:t>Trabajo dirigido:</a:t>
-            </a:r>
-            <a:r>
-              <a:rPr sz="2000" b="0" i="0">
-                <a:solidFill>
-                  <a:srgbClr val="333333"/>
-                </a:solidFill>
-                <a:latin typeface="Calibri"/>
-              </a:rPr>
-              <a:t> Uso de IA para generación de ideas — completar el registro del taller (prompt, variantes, elección, correcciones con su origen, descartes y declaración del uso) en el documento del equipo.</a:t>
-            </a:r>
-          </a:p>
-          <a:p>
-            <a:pPr>
-              <a:spcAft>
-                <a:spcPts val="800"/>
-              </a:spcAft>
-            </a:pPr>
-            <a:r>
-              <a:rPr sz="2000" b="0" i="0">
-                <a:solidFill>
-                  <a:srgbClr val="333333"/>
-                </a:solidFill>
-                <a:latin typeface="Calibri"/>
-              </a:rPr>
-              <a:t>–   </a:t>
-            </a:r>
-            <a:r>
-              <a:rPr sz="2000" b="1" i="0">
-                <a:solidFill>
-                  <a:srgbClr val="333333"/>
-                </a:solidFill>
-                <a:latin typeface="Calibri"/>
-              </a:rPr>
-              <a:t>Trabajo independiente:</a:t>
-            </a:r>
-            <a:r>
-              <a:rPr sz="2000" b="0" i="0">
-                <a:solidFill>
-                  <a:srgbClr val="333333"/>
-                </a:solidFill>
-                <a:latin typeface="Calibri"/>
-              </a:rPr>
-              <a:t> Corrección del prototipo: dejar el </a:t>
-            </a:r>
-            <a:r>
-              <a:rPr sz="2000" b="1" i="0">
-                <a:solidFill>
-                  <a:srgbClr val="333333"/>
-                </a:solidFill>
-                <a:latin typeface="Calibri"/>
-              </a:rPr>
-              <a:t>v2 navegable</a:t>
-            </a:r>
-            <a:r>
-              <a:rPr sz="2000" b="0" i="0">
-                <a:solidFill>
-                  <a:srgbClr val="333333"/>
-                </a:solidFill>
-                <a:latin typeface="Calibri"/>
-              </a:rPr>
-              <a:t> en la carpeta del equipo, con todas las correcciones aplicadas, y </a:t>
-            </a:r>
-            <a:r>
-              <a:rPr sz="2000" b="1" i="0">
-                <a:solidFill>
-                  <a:srgbClr val="333333"/>
-                </a:solidFill>
-                <a:latin typeface="Calibri"/>
-              </a:rPr>
-              <a:t>conseguir a la persona ajena</a:t>
-            </a:r>
-            <a:r>
-              <a:rPr sz="2000" b="0" i="0">
-                <a:solidFill>
-                  <a:srgbClr val="333333"/>
-                </a:solidFill>
-                <a:latin typeface="Calibri"/>
-              </a:rPr>
-              <a:t> que va a probarlo — solo el rol, no el nombre.</a:t>
-            </a:r>
-          </a:p>
-          <a:p>
-            <a:pPr>
-              <a:spcAft>
-                <a:spcPts val="800"/>
-              </a:spcAft>
-            </a:pPr>
-            <a:r>
-              <a:rPr sz="2000" b="0" i="0">
-                <a:solidFill>
-                  <a:srgbClr val="333333"/>
-                </a:solidFill>
-                <a:latin typeface="Calibri"/>
-              </a:rPr>
-              <a:t>–   </a:t>
-            </a:r>
-            <a:r>
-              <a:rPr sz="2000" b="1" i="0">
-                <a:solidFill>
-                  <a:srgbClr val="333333"/>
-                </a:solidFill>
-                <a:latin typeface="Calibri"/>
-              </a:rPr>
-              <a:t>Clase 12 · Presentación de avances de proyectos</a:t>
-            </a:r>
-            <a:r>
-              <a:rPr sz="2000" b="0" i="0">
-                <a:solidFill>
-                  <a:srgbClr val="333333"/>
-                </a:solidFill>
-                <a:latin typeface="Calibri"/>
-              </a:rPr>
-              <a:t> — arranca el </a:t>
-            </a:r>
-            <a:r>
-              <a:rPr sz="2000" b="1" i="0">
-                <a:solidFill>
-                  <a:srgbClr val="333333"/>
-                </a:solidFill>
-                <a:latin typeface="Calibri"/>
-              </a:rPr>
-              <a:t>corte 3</a:t>
-            </a:r>
-            <a:r>
-              <a:rPr sz="2000" b="0" i="0">
-                <a:solidFill>
-                  <a:srgbClr val="333333"/>
-                </a:solidFill>
-                <a:latin typeface="Calibri"/>
-              </a:rPr>
-              <a:t> con la </a:t>
-            </a:r>
-            <a:r>
-              <a:rPr sz="2000" b="1" i="0">
-                <a:solidFill>
-                  <a:srgbClr val="333333"/>
-                </a:solidFill>
-                <a:latin typeface="Calibri"/>
-              </a:rPr>
-              <a:t>presentación de avances</a:t>
-            </a:r>
-            <a:r>
-              <a:rPr sz="2000" b="0" i="0">
-                <a:solidFill>
-                  <a:srgbClr val="333333"/>
-                </a:solidFill>
-                <a:latin typeface="Calibri"/>
-              </a:rPr>
-              <a:t>: el prototipo se prueba con una persona ajena al equipo y se recibe retroalimentación entre pares.</a:t>
-            </a:r>
-          </a:p>
-          <a:p>
-            <a:pPr>
-              <a:spcAft>
-                <a:spcPts val="800"/>
-              </a:spcAft>
-            </a:pPr>
-            <a:r>
-              <a:rPr sz="2000" b="0" i="0">
-                <a:solidFill>
-                  <a:srgbClr val="333333"/>
-                </a:solidFill>
-                <a:latin typeface="Calibri"/>
-              </a:rPr>
-              <a:t>–   </a:t>
-            </a:r>
-            <a:r>
-              <a:rPr sz="2000" b="1" i="0">
-                <a:solidFill>
-                  <a:srgbClr val="333333"/>
-                </a:solidFill>
-                <a:latin typeface="Calibri"/>
-              </a:rPr>
-              <a:t>Aviso:</a:t>
-            </a:r>
-            <a:r>
-              <a:rPr sz="2000" b="0" i="0">
-                <a:solidFill>
-                  <a:srgbClr val="333333"/>
-                </a:solidFill>
-                <a:latin typeface="Calibri"/>
-              </a:rPr>
-              <a:t> Para la Clase 12 traigan el prototipo v2 navegable </a:t>
-            </a:r>
-            <a:r>
-              <a:rPr sz="2000" b="1" i="0">
-                <a:solidFill>
-                  <a:srgbClr val="333333"/>
-                </a:solidFill>
-                <a:latin typeface="Calibri"/>
-              </a:rPr>
-              <a:t>y la prueba ya hecha con una persona ajena al equipo</a:t>
-            </a:r>
-            <a:r>
-              <a:rPr sz="2000" b="0" i="0">
-                <a:solidFill>
-                  <a:srgbClr val="333333"/>
-                </a:solidFill>
-                <a:latin typeface="Calibri"/>
-              </a:rPr>
-              <a:t>, con la lista de lo que falló. Sin esa lista no hay nada que presentar: la Clase 12 es sobre lo que salió mal, no sobre lo que se planeó.</a:t>
-            </a:r>
-          </a:p>
-          <a:p>
-            <a:pPr>
-              <a:spcAft>
-                <a:spcPts val="800"/>
-              </a:spcAft>
-            </a:pPr>
-            <a:r>
-              <a:rPr sz="2000" b="0" i="0">
-                <a:solidFill>
-                  <a:srgbClr val="333333"/>
-                </a:solidFill>
-                <a:latin typeface="Calibri"/>
-              </a:rPr>
-              <a:t>–   </a:t>
-            </a:r>
-            <a:r>
-              <a:rPr sz="2000" b="1" i="0">
-                <a:solidFill>
-                  <a:srgbClr val="333333"/>
-                </a:solidFill>
-                <a:latin typeface="Calibri"/>
-              </a:rPr>
-              <a:t>Antes de salir:</a:t>
-            </a:r>
-            <a:r>
-              <a:rPr sz="2000" b="0" i="0">
-                <a:solidFill>
-                  <a:srgbClr val="333333"/>
-                </a:solidFill>
-                <a:latin typeface="Calibri"/>
-              </a:rPr>
-              <a:t> el enlace del documento del equipo en el chat, con permiso de lectura para el docente, y el nombre del vocero de hoy.</a:t>
-            </a:r>
-          </a:p>
-        </p:txBody>
-      </p:sp>
-      <p:sp>
-        <p:nvSpPr>
-          <p:cNvPr id="6" name="TextBox 5"/>
+            <a:r>
+              <a:rPr sz="1400" b="0" i="0">
+                <a:solidFill>
+                  <a:srgbClr val="B8D8EE"/>
+                </a:solidFill>
+                <a:latin typeface="Calibri"/>
+              </a:rPr>
+              <a:t>27 min en equipos · 27 min: prompt, variantes, elección, correcciones y registro · prototipo v2 + registro de prompt, variantes, correcciones y descartes</a:t>
+            </a:r>
+          </a:p>
+        </p:txBody>
+      </p:sp>
+      <p:sp>
+        <p:nvSpPr>
+          <p:cNvPr id="6" name="Rounded Rectangle 5"/>
+          <p:cNvSpPr/>
+          <p:nvPr/>
+        </p:nvSpPr>
+        <p:spPr>
+          <a:xfrm>
+            <a:off x="457200" y="1472184"/>
+            <a:ext cx="11277295" cy="566928"/>
+          </a:xfrm>
+          <a:prstGeom prst="roundRect">
+            <a:avLst>
+              <a:gd name="adj" fmla="val 12000"/>
+            </a:avLst>
+          </a:prstGeom>
+          <a:solidFill>
+            <a:srgbClr val="F2F2F2"/>
+          </a:solidFill>
+          <a:ln>
+            <a:noFill/>
+          </a:ln>
+        </p:spPr>
+        <p:style>
+          <a:lnRef idx="1">
+            <a:schemeClr val="accent1"/>
+          </a:lnRef>
+          <a:fillRef idx="3">
+            <a:schemeClr val="accent1"/>
+          </a:fillRef>
+          <a:effectRef idx="2">
+            <a:schemeClr val="accent1"/>
+          </a:effectRef>
+          <a:fontRef idx="minor">
+            <a:schemeClr val="lt1"/>
+          </a:fontRef>
+        </p:style>
+        <p:txBody>
+          <a:bodyPr rtlCol="0" anchor="ctr"/>
+          <a:lstStyle/>
+          <a:p>
+            <a:pPr algn="ctr"/>
+          </a:p>
+        </p:txBody>
+      </p:sp>
+      <p:sp>
+        <p:nvSpPr>
+          <p:cNvPr id="7" name="Rectangle 6"/>
+          <p:cNvSpPr/>
+          <p:nvPr/>
+        </p:nvSpPr>
+        <p:spPr>
+          <a:xfrm>
+            <a:off x="640080" y="1618487"/>
+            <a:ext cx="274320" cy="274320"/>
+          </a:xfrm>
+          <a:prstGeom prst="rect">
+            <a:avLst/>
+          </a:prstGeom>
+          <a:solidFill>
+            <a:srgbClr val="FFFFFF"/>
+          </a:solidFill>
+          <a:ln>
+            <a:solidFill>
+              <a:srgbClr val="333333"/>
+            </a:solidFill>
+          </a:ln>
+        </p:spPr>
+        <p:style>
+          <a:lnRef idx="1">
+            <a:schemeClr val="accent1"/>
+          </a:lnRef>
+          <a:fillRef idx="3">
+            <a:schemeClr val="accent1"/>
+          </a:fillRef>
+          <a:effectRef idx="2">
+            <a:schemeClr val="accent1"/>
+          </a:effectRef>
+          <a:fontRef idx="minor">
+            <a:schemeClr val="lt1"/>
+          </a:fontRef>
+        </p:style>
+        <p:txBody>
+          <a:bodyPr rtlCol="0" anchor="ctr"/>
+          <a:lstStyle/>
+          <a:p>
+            <a:pPr algn="ctr"/>
+          </a:p>
+        </p:txBody>
+      </p:sp>
+      <p:sp>
+        <p:nvSpPr>
+          <p:cNvPr id="8" name="Rectangle 7"/>
+          <p:cNvSpPr/>
+          <p:nvPr/>
+        </p:nvSpPr>
+        <p:spPr>
+          <a:xfrm>
+            <a:off x="640080" y="1618487"/>
+            <a:ext cx="73152" cy="274320"/>
+          </a:xfrm>
+          <a:prstGeom prst="rect">
+            <a:avLst/>
+          </a:prstGeom>
+          <a:solidFill>
+            <a:srgbClr val="269CCB"/>
+          </a:solidFill>
+          <a:ln>
+            <a:noFill/>
+          </a:ln>
+        </p:spPr>
+        <p:style>
+          <a:lnRef idx="1">
+            <a:schemeClr val="accent1"/>
+          </a:lnRef>
+          <a:fillRef idx="3">
+            <a:schemeClr val="accent1"/>
+          </a:fillRef>
+          <a:effectRef idx="2">
+            <a:schemeClr val="accent1"/>
+          </a:effectRef>
+          <a:fontRef idx="minor">
+            <a:schemeClr val="lt1"/>
+          </a:fontRef>
+        </p:style>
+        <p:txBody>
+          <a:bodyPr rtlCol="0" anchor="ctr"/>
+          <a:lstStyle/>
+          <a:p>
+            <a:pPr algn="ctr"/>
+          </a:p>
+        </p:txBody>
+      </p:sp>
+      <p:sp>
+        <p:nvSpPr>
+          <p:cNvPr id="9" name="TextBox 8"/>
+          <p:cNvSpPr txBox="1"/>
+          <p:nvPr/>
+        </p:nvSpPr>
+        <p:spPr>
+          <a:xfrm>
+            <a:off x="1097280" y="1563624"/>
+            <a:ext cx="10362895" cy="402336"/>
+          </a:xfrm>
+          <a:prstGeom prst="rect">
+            <a:avLst/>
+          </a:prstGeom>
+          <a:noFill/>
+        </p:spPr>
+        <p:txBody>
+          <a:bodyPr wrap="square" anchor="ctr"/>
+          <a:lstStyle/>
+          <a:p>
+            <a:r>
+              <a:rPr sz="1500" b="1" i="0">
+                <a:solidFill>
+                  <a:srgbClr val="333333"/>
+                </a:solidFill>
+                <a:latin typeface="Calibri"/>
+              </a:rPr>
+              <a:t>EL PROMPT QUE USAMOS</a:t>
+            </a:r>
+            <a:r>
+              <a:rPr sz="1500" b="0" i="0">
+                <a:solidFill>
+                  <a:srgbClr val="333333"/>
+                </a:solidFill>
+                <a:latin typeface="Calibri"/>
+              </a:rPr>
+              <a:t> — El prompt completo, copiado tal cual. Tiene que incluir </a:t>
+            </a:r>
+            <a:r>
+              <a:rPr sz="1500" b="1" i="0">
+                <a:solidFill>
+                  <a:srgbClr val="333333"/>
+                </a:solidFill>
+                <a:latin typeface="Calibri"/>
+              </a:rPr>
+              <a:t>el problema en una frase, quién lo usa, las restricciones y lo que está prohibido proponer</a:t>
+            </a:r>
+            <a:r>
+              <a:rPr sz="1500" b="0" i="0">
+                <a:solidFill>
+                  <a:srgbClr val="333333"/>
+                </a:solidFill>
+                <a:latin typeface="Calibri"/>
+              </a:rPr>
+              <a:t>.</a:t>
+            </a:r>
+          </a:p>
+        </p:txBody>
+      </p:sp>
+      <p:sp>
+        <p:nvSpPr>
+          <p:cNvPr id="10" name="Rounded Rectangle 9"/>
+          <p:cNvSpPr/>
+          <p:nvPr/>
+        </p:nvSpPr>
+        <p:spPr>
+          <a:xfrm>
+            <a:off x="457200" y="2148839"/>
+            <a:ext cx="11277295" cy="566928"/>
+          </a:xfrm>
+          <a:prstGeom prst="roundRect">
+            <a:avLst>
+              <a:gd name="adj" fmla="val 12000"/>
+            </a:avLst>
+          </a:prstGeom>
+          <a:solidFill>
+            <a:srgbClr val="F2F2F2"/>
+          </a:solidFill>
+          <a:ln>
+            <a:noFill/>
+          </a:ln>
+        </p:spPr>
+        <p:style>
+          <a:lnRef idx="1">
+            <a:schemeClr val="accent1"/>
+          </a:lnRef>
+          <a:fillRef idx="3">
+            <a:schemeClr val="accent1"/>
+          </a:fillRef>
+          <a:effectRef idx="2">
+            <a:schemeClr val="accent1"/>
+          </a:effectRef>
+          <a:fontRef idx="minor">
+            <a:schemeClr val="lt1"/>
+          </a:fontRef>
+        </p:style>
+        <p:txBody>
+          <a:bodyPr rtlCol="0" anchor="ctr"/>
+          <a:lstStyle/>
+          <a:p>
+            <a:pPr algn="ctr"/>
+          </a:p>
+        </p:txBody>
+      </p:sp>
+      <p:sp>
+        <p:nvSpPr>
+          <p:cNvPr id="11" name="Rectangle 10"/>
+          <p:cNvSpPr/>
+          <p:nvPr/>
+        </p:nvSpPr>
+        <p:spPr>
+          <a:xfrm>
+            <a:off x="640080" y="2295144"/>
+            <a:ext cx="274320" cy="274320"/>
+          </a:xfrm>
+          <a:prstGeom prst="rect">
+            <a:avLst/>
+          </a:prstGeom>
+          <a:solidFill>
+            <a:srgbClr val="FFFFFF"/>
+          </a:solidFill>
+          <a:ln>
+            <a:solidFill>
+              <a:srgbClr val="333333"/>
+            </a:solidFill>
+          </a:ln>
+        </p:spPr>
+        <p:style>
+          <a:lnRef idx="1">
+            <a:schemeClr val="accent1"/>
+          </a:lnRef>
+          <a:fillRef idx="3">
+            <a:schemeClr val="accent1"/>
+          </a:fillRef>
+          <a:effectRef idx="2">
+            <a:schemeClr val="accent1"/>
+          </a:effectRef>
+          <a:fontRef idx="minor">
+            <a:schemeClr val="lt1"/>
+          </a:fontRef>
+        </p:style>
+        <p:txBody>
+          <a:bodyPr rtlCol="0" anchor="ctr"/>
+          <a:lstStyle/>
+          <a:p>
+            <a:pPr algn="ctr"/>
+          </a:p>
+        </p:txBody>
+      </p:sp>
+      <p:sp>
+        <p:nvSpPr>
+          <p:cNvPr id="12" name="Rectangle 11"/>
+          <p:cNvSpPr/>
+          <p:nvPr/>
+        </p:nvSpPr>
+        <p:spPr>
+          <a:xfrm>
+            <a:off x="640080" y="2295144"/>
+            <a:ext cx="73152" cy="274320"/>
+          </a:xfrm>
+          <a:prstGeom prst="rect">
+            <a:avLst/>
+          </a:prstGeom>
+          <a:solidFill>
+            <a:srgbClr val="269CCB"/>
+          </a:solidFill>
+          <a:ln>
+            <a:noFill/>
+          </a:ln>
+        </p:spPr>
+        <p:style>
+          <a:lnRef idx="1">
+            <a:schemeClr val="accent1"/>
+          </a:lnRef>
+          <a:fillRef idx="3">
+            <a:schemeClr val="accent1"/>
+          </a:fillRef>
+          <a:effectRef idx="2">
+            <a:schemeClr val="accent1"/>
+          </a:effectRef>
+          <a:fontRef idx="minor">
+            <a:schemeClr val="lt1"/>
+          </a:fontRef>
+        </p:style>
+        <p:txBody>
+          <a:bodyPr rtlCol="0" anchor="ctr"/>
+          <a:lstStyle/>
+          <a:p>
+            <a:pPr algn="ctr"/>
+          </a:p>
+        </p:txBody>
+      </p:sp>
+      <p:sp>
+        <p:nvSpPr>
+          <p:cNvPr id="13" name="TextBox 12"/>
+          <p:cNvSpPr txBox="1"/>
+          <p:nvPr/>
+        </p:nvSpPr>
+        <p:spPr>
+          <a:xfrm>
+            <a:off x="1097280" y="2240279"/>
+            <a:ext cx="10362895" cy="402336"/>
+          </a:xfrm>
+          <a:prstGeom prst="rect">
+            <a:avLst/>
+          </a:prstGeom>
+          <a:noFill/>
+        </p:spPr>
+        <p:txBody>
+          <a:bodyPr wrap="square" anchor="ctr"/>
+          <a:lstStyle/>
+          <a:p>
+            <a:r>
+              <a:rPr sz="1500" b="1" i="0">
+                <a:solidFill>
+                  <a:srgbClr val="333333"/>
+                </a:solidFill>
+                <a:latin typeface="Calibri"/>
+              </a:rPr>
+              <a:t>LAS TRES VARIANTES</a:t>
+            </a:r>
+            <a:r>
+              <a:rPr sz="1500" b="0" i="0">
+                <a:solidFill>
+                  <a:srgbClr val="333333"/>
+                </a:solidFill>
+                <a:latin typeface="Calibri"/>
+              </a:rPr>
+              <a:t> — Las tres opciones que devolvió, resumidas en dos o tres líneas cada una. </a:t>
+            </a:r>
+            <a:r>
+              <a:rPr sz="1500" b="1" i="0">
+                <a:solidFill>
+                  <a:srgbClr val="333333"/>
+                </a:solidFill>
+                <a:latin typeface="Calibri"/>
+              </a:rPr>
+              <a:t>No una sola respuesta</a:t>
+            </a:r>
+            <a:r>
+              <a:rPr sz="1500" b="0" i="0">
+                <a:solidFill>
+                  <a:srgbClr val="333333"/>
+                </a:solidFill>
+                <a:latin typeface="Calibri"/>
+              </a:rPr>
+              <a:t>: tres.</a:t>
+            </a:r>
+          </a:p>
+        </p:txBody>
+      </p:sp>
+      <p:sp>
+        <p:nvSpPr>
+          <p:cNvPr id="14" name="Rounded Rectangle 13"/>
+          <p:cNvSpPr/>
+          <p:nvPr/>
+        </p:nvSpPr>
+        <p:spPr>
+          <a:xfrm>
+            <a:off x="457200" y="2825496"/>
+            <a:ext cx="11277295" cy="566928"/>
+          </a:xfrm>
+          <a:prstGeom prst="roundRect">
+            <a:avLst>
+              <a:gd name="adj" fmla="val 12000"/>
+            </a:avLst>
+          </a:prstGeom>
+          <a:solidFill>
+            <a:srgbClr val="F2F2F2"/>
+          </a:solidFill>
+          <a:ln>
+            <a:noFill/>
+          </a:ln>
+        </p:spPr>
+        <p:style>
+          <a:lnRef idx="1">
+            <a:schemeClr val="accent1"/>
+          </a:lnRef>
+          <a:fillRef idx="3">
+            <a:schemeClr val="accent1"/>
+          </a:fillRef>
+          <a:effectRef idx="2">
+            <a:schemeClr val="accent1"/>
+          </a:effectRef>
+          <a:fontRef idx="minor">
+            <a:schemeClr val="lt1"/>
+          </a:fontRef>
+        </p:style>
+        <p:txBody>
+          <a:bodyPr rtlCol="0" anchor="ctr"/>
+          <a:lstStyle/>
+          <a:p>
+            <a:pPr algn="ctr"/>
+          </a:p>
+        </p:txBody>
+      </p:sp>
+      <p:sp>
+        <p:nvSpPr>
+          <p:cNvPr id="15" name="Rectangle 14"/>
+          <p:cNvSpPr/>
+          <p:nvPr/>
+        </p:nvSpPr>
+        <p:spPr>
+          <a:xfrm>
+            <a:off x="640080" y="2971800"/>
+            <a:ext cx="274320" cy="274320"/>
+          </a:xfrm>
+          <a:prstGeom prst="rect">
+            <a:avLst/>
+          </a:prstGeom>
+          <a:solidFill>
+            <a:srgbClr val="FFFFFF"/>
+          </a:solidFill>
+          <a:ln>
+            <a:solidFill>
+              <a:srgbClr val="333333"/>
+            </a:solidFill>
+          </a:ln>
+        </p:spPr>
+        <p:style>
+          <a:lnRef idx="1">
+            <a:schemeClr val="accent1"/>
+          </a:lnRef>
+          <a:fillRef idx="3">
+            <a:schemeClr val="accent1"/>
+          </a:fillRef>
+          <a:effectRef idx="2">
+            <a:schemeClr val="accent1"/>
+          </a:effectRef>
+          <a:fontRef idx="minor">
+            <a:schemeClr val="lt1"/>
+          </a:fontRef>
+        </p:style>
+        <p:txBody>
+          <a:bodyPr rtlCol="0" anchor="ctr"/>
+          <a:lstStyle/>
+          <a:p>
+            <a:pPr algn="ctr"/>
+          </a:p>
+        </p:txBody>
+      </p:sp>
+      <p:sp>
+        <p:nvSpPr>
+          <p:cNvPr id="16" name="Rectangle 15"/>
+          <p:cNvSpPr/>
+          <p:nvPr/>
+        </p:nvSpPr>
+        <p:spPr>
+          <a:xfrm>
+            <a:off x="640080" y="2971800"/>
+            <a:ext cx="73152" cy="274320"/>
+          </a:xfrm>
+          <a:prstGeom prst="rect">
+            <a:avLst/>
+          </a:prstGeom>
+          <a:solidFill>
+            <a:srgbClr val="269CCB"/>
+          </a:solidFill>
+          <a:ln>
+            <a:noFill/>
+          </a:ln>
+        </p:spPr>
+        <p:style>
+          <a:lnRef idx="1">
+            <a:schemeClr val="accent1"/>
+          </a:lnRef>
+          <a:fillRef idx="3">
+            <a:schemeClr val="accent1"/>
+          </a:fillRef>
+          <a:effectRef idx="2">
+            <a:schemeClr val="accent1"/>
+          </a:effectRef>
+          <a:fontRef idx="minor">
+            <a:schemeClr val="lt1"/>
+          </a:fontRef>
+        </p:style>
+        <p:txBody>
+          <a:bodyPr rtlCol="0" anchor="ctr"/>
+          <a:lstStyle/>
+          <a:p>
+            <a:pPr algn="ctr"/>
+          </a:p>
+        </p:txBody>
+      </p:sp>
+      <p:sp>
+        <p:nvSpPr>
+          <p:cNvPr id="17" name="TextBox 16"/>
+          <p:cNvSpPr txBox="1"/>
+          <p:nvPr/>
+        </p:nvSpPr>
+        <p:spPr>
+          <a:xfrm>
+            <a:off x="1097280" y="2916936"/>
+            <a:ext cx="10362895" cy="402336"/>
+          </a:xfrm>
+          <a:prstGeom prst="rect">
+            <a:avLst/>
+          </a:prstGeom>
+          <a:noFill/>
+        </p:spPr>
+        <p:txBody>
+          <a:bodyPr wrap="square" anchor="ctr"/>
+          <a:lstStyle/>
+          <a:p>
+            <a:r>
+              <a:rPr sz="1500" b="1" i="0">
+                <a:solidFill>
+                  <a:srgbClr val="333333"/>
+                </a:solidFill>
+                <a:latin typeface="Calibri"/>
+              </a:rPr>
+              <a:t>LA QUE ELEGIMOS Y POR QUÉ</a:t>
+            </a:r>
+            <a:r>
+              <a:rPr sz="1500" b="0" i="0">
+                <a:solidFill>
+                  <a:srgbClr val="333333"/>
+                </a:solidFill>
+                <a:latin typeface="Calibri"/>
+              </a:rPr>
+              <a:t> — Cuál eligieron y el criterio, apoyado en sus </a:t>
+            </a:r>
+            <a:r>
+              <a:rPr sz="1500" b="1" i="0">
+                <a:solidFill>
+                  <a:srgbClr val="333333"/>
+                </a:solidFill>
+                <a:latin typeface="Calibri"/>
+              </a:rPr>
+              <a:t>requisitos y restricciones</a:t>
+            </a:r>
+            <a:r>
+              <a:rPr sz="1500" b="0" i="0">
+                <a:solidFill>
+                  <a:srgbClr val="333333"/>
+                </a:solidFill>
+                <a:latin typeface="Calibri"/>
+              </a:rPr>
+              <a:t> — no en «nos gustó más».</a:t>
+            </a:r>
+          </a:p>
+        </p:txBody>
+      </p:sp>
+      <p:sp>
+        <p:nvSpPr>
+          <p:cNvPr id="18" name="Rounded Rectangle 17"/>
+          <p:cNvSpPr/>
+          <p:nvPr/>
+        </p:nvSpPr>
+        <p:spPr>
+          <a:xfrm>
+            <a:off x="457200" y="3502152"/>
+            <a:ext cx="11277295" cy="566928"/>
+          </a:xfrm>
+          <a:prstGeom prst="roundRect">
+            <a:avLst>
+              <a:gd name="adj" fmla="val 12000"/>
+            </a:avLst>
+          </a:prstGeom>
+          <a:solidFill>
+            <a:srgbClr val="F2F2F2"/>
+          </a:solidFill>
+          <a:ln>
+            <a:noFill/>
+          </a:ln>
+        </p:spPr>
+        <p:style>
+          <a:lnRef idx="1">
+            <a:schemeClr val="accent1"/>
+          </a:lnRef>
+          <a:fillRef idx="3">
+            <a:schemeClr val="accent1"/>
+          </a:fillRef>
+          <a:effectRef idx="2">
+            <a:schemeClr val="accent1"/>
+          </a:effectRef>
+          <a:fontRef idx="minor">
+            <a:schemeClr val="lt1"/>
+          </a:fontRef>
+        </p:style>
+        <p:txBody>
+          <a:bodyPr rtlCol="0" anchor="ctr"/>
+          <a:lstStyle/>
+          <a:p>
+            <a:pPr algn="ctr"/>
+          </a:p>
+        </p:txBody>
+      </p:sp>
+      <p:sp>
+        <p:nvSpPr>
+          <p:cNvPr id="19" name="Rectangle 18"/>
+          <p:cNvSpPr/>
+          <p:nvPr/>
+        </p:nvSpPr>
+        <p:spPr>
+          <a:xfrm>
+            <a:off x="640080" y="3648456"/>
+            <a:ext cx="274320" cy="274320"/>
+          </a:xfrm>
+          <a:prstGeom prst="rect">
+            <a:avLst/>
+          </a:prstGeom>
+          <a:solidFill>
+            <a:srgbClr val="FFFFFF"/>
+          </a:solidFill>
+          <a:ln>
+            <a:solidFill>
+              <a:srgbClr val="333333"/>
+            </a:solidFill>
+          </a:ln>
+        </p:spPr>
+        <p:style>
+          <a:lnRef idx="1">
+            <a:schemeClr val="accent1"/>
+          </a:lnRef>
+          <a:fillRef idx="3">
+            <a:schemeClr val="accent1"/>
+          </a:fillRef>
+          <a:effectRef idx="2">
+            <a:schemeClr val="accent1"/>
+          </a:effectRef>
+          <a:fontRef idx="minor">
+            <a:schemeClr val="lt1"/>
+          </a:fontRef>
+        </p:style>
+        <p:txBody>
+          <a:bodyPr rtlCol="0" anchor="ctr"/>
+          <a:lstStyle/>
+          <a:p>
+            <a:pPr algn="ctr"/>
+          </a:p>
+        </p:txBody>
+      </p:sp>
+      <p:sp>
+        <p:nvSpPr>
+          <p:cNvPr id="20" name="Rectangle 19"/>
+          <p:cNvSpPr/>
+          <p:nvPr/>
+        </p:nvSpPr>
+        <p:spPr>
+          <a:xfrm>
+            <a:off x="640080" y="3648456"/>
+            <a:ext cx="73152" cy="274320"/>
+          </a:xfrm>
+          <a:prstGeom prst="rect">
+            <a:avLst/>
+          </a:prstGeom>
+          <a:solidFill>
+            <a:srgbClr val="269CCB"/>
+          </a:solidFill>
+          <a:ln>
+            <a:noFill/>
+          </a:ln>
+        </p:spPr>
+        <p:style>
+          <a:lnRef idx="1">
+            <a:schemeClr val="accent1"/>
+          </a:lnRef>
+          <a:fillRef idx="3">
+            <a:schemeClr val="accent1"/>
+          </a:fillRef>
+          <a:effectRef idx="2">
+            <a:schemeClr val="accent1"/>
+          </a:effectRef>
+          <a:fontRef idx="minor">
+            <a:schemeClr val="lt1"/>
+          </a:fontRef>
+        </p:style>
+        <p:txBody>
+          <a:bodyPr rtlCol="0" anchor="ctr"/>
+          <a:lstStyle/>
+          <a:p>
+            <a:pPr algn="ctr"/>
+          </a:p>
+        </p:txBody>
+      </p:sp>
+      <p:sp>
+        <p:nvSpPr>
+          <p:cNvPr id="21" name="TextBox 20"/>
+          <p:cNvSpPr txBox="1"/>
+          <p:nvPr/>
+        </p:nvSpPr>
+        <p:spPr>
+          <a:xfrm>
+            <a:off x="1097280" y="3593592"/>
+            <a:ext cx="10362895" cy="402336"/>
+          </a:xfrm>
+          <a:prstGeom prst="rect">
+            <a:avLst/>
+          </a:prstGeom>
+          <a:noFill/>
+        </p:spPr>
+        <p:txBody>
+          <a:bodyPr wrap="square" anchor="ctr"/>
+          <a:lstStyle/>
+          <a:p>
+            <a:r>
+              <a:rPr sz="1500" b="1" i="0">
+                <a:solidFill>
+                  <a:srgbClr val="333333"/>
+                </a:solidFill>
+                <a:latin typeface="Calibri"/>
+              </a:rPr>
+              <a:t>LO QUE CORREGIMOS A MANO</a:t>
+            </a:r>
+            <a:r>
+              <a:rPr sz="1500" b="0" i="0">
+                <a:solidFill>
+                  <a:srgbClr val="333333"/>
+                </a:solidFill>
+                <a:latin typeface="Calibri"/>
+              </a:rPr>
+              <a:t> — Cada corrección con </a:t>
+            </a:r>
+            <a:r>
+              <a:rPr sz="1500" b="1" i="0">
+                <a:solidFill>
+                  <a:srgbClr val="333333"/>
+                </a:solidFill>
+                <a:latin typeface="Calibri"/>
+              </a:rPr>
+              <a:t>la razón y la sesión de donde sale</a:t>
+            </a:r>
+            <a:r>
+              <a:rPr sz="1500" b="0" i="0">
+                <a:solidFill>
+                  <a:srgbClr val="333333"/>
+                </a:solidFill>
+                <a:latin typeface="Calibri"/>
+              </a:rPr>
+              <a:t>: qué proponía la IA, qué quedó, y por qué. Es el bloque que más pesa.</a:t>
+            </a:r>
+          </a:p>
+        </p:txBody>
+      </p:sp>
+      <p:sp>
+        <p:nvSpPr>
+          <p:cNvPr id="22" name="Rounded Rectangle 21"/>
+          <p:cNvSpPr/>
+          <p:nvPr/>
+        </p:nvSpPr>
+        <p:spPr>
+          <a:xfrm>
+            <a:off x="457200" y="4178808"/>
+            <a:ext cx="11277295" cy="566928"/>
+          </a:xfrm>
+          <a:prstGeom prst="roundRect">
+            <a:avLst>
+              <a:gd name="adj" fmla="val 12000"/>
+            </a:avLst>
+          </a:prstGeom>
+          <a:solidFill>
+            <a:srgbClr val="F2F2F2"/>
+          </a:solidFill>
+          <a:ln>
+            <a:noFill/>
+          </a:ln>
+        </p:spPr>
+        <p:style>
+          <a:lnRef idx="1">
+            <a:schemeClr val="accent1"/>
+          </a:lnRef>
+          <a:fillRef idx="3">
+            <a:schemeClr val="accent1"/>
+          </a:fillRef>
+          <a:effectRef idx="2">
+            <a:schemeClr val="accent1"/>
+          </a:effectRef>
+          <a:fontRef idx="minor">
+            <a:schemeClr val="lt1"/>
+          </a:fontRef>
+        </p:style>
+        <p:txBody>
+          <a:bodyPr rtlCol="0" anchor="ctr"/>
+          <a:lstStyle/>
+          <a:p>
+            <a:pPr algn="ctr"/>
+          </a:p>
+        </p:txBody>
+      </p:sp>
+      <p:sp>
+        <p:nvSpPr>
+          <p:cNvPr id="23" name="Rectangle 22"/>
+          <p:cNvSpPr/>
+          <p:nvPr/>
+        </p:nvSpPr>
+        <p:spPr>
+          <a:xfrm>
+            <a:off x="640080" y="4325112"/>
+            <a:ext cx="274320" cy="274320"/>
+          </a:xfrm>
+          <a:prstGeom prst="rect">
+            <a:avLst/>
+          </a:prstGeom>
+          <a:solidFill>
+            <a:srgbClr val="FFFFFF"/>
+          </a:solidFill>
+          <a:ln>
+            <a:solidFill>
+              <a:srgbClr val="333333"/>
+            </a:solidFill>
+          </a:ln>
+        </p:spPr>
+        <p:style>
+          <a:lnRef idx="1">
+            <a:schemeClr val="accent1"/>
+          </a:lnRef>
+          <a:fillRef idx="3">
+            <a:schemeClr val="accent1"/>
+          </a:fillRef>
+          <a:effectRef idx="2">
+            <a:schemeClr val="accent1"/>
+          </a:effectRef>
+          <a:fontRef idx="minor">
+            <a:schemeClr val="lt1"/>
+          </a:fontRef>
+        </p:style>
+        <p:txBody>
+          <a:bodyPr rtlCol="0" anchor="ctr"/>
+          <a:lstStyle/>
+          <a:p>
+            <a:pPr algn="ctr"/>
+          </a:p>
+        </p:txBody>
+      </p:sp>
+      <p:sp>
+        <p:nvSpPr>
+          <p:cNvPr id="24" name="Rectangle 23"/>
+          <p:cNvSpPr/>
+          <p:nvPr/>
+        </p:nvSpPr>
+        <p:spPr>
+          <a:xfrm>
+            <a:off x="640080" y="4325112"/>
+            <a:ext cx="73152" cy="274320"/>
+          </a:xfrm>
+          <a:prstGeom prst="rect">
+            <a:avLst/>
+          </a:prstGeom>
+          <a:solidFill>
+            <a:srgbClr val="269CCB"/>
+          </a:solidFill>
+          <a:ln>
+            <a:noFill/>
+          </a:ln>
+        </p:spPr>
+        <p:style>
+          <a:lnRef idx="1">
+            <a:schemeClr val="accent1"/>
+          </a:lnRef>
+          <a:fillRef idx="3">
+            <a:schemeClr val="accent1"/>
+          </a:fillRef>
+          <a:effectRef idx="2">
+            <a:schemeClr val="accent1"/>
+          </a:effectRef>
+          <a:fontRef idx="minor">
+            <a:schemeClr val="lt1"/>
+          </a:fontRef>
+        </p:style>
+        <p:txBody>
+          <a:bodyPr rtlCol="0" anchor="ctr"/>
+          <a:lstStyle/>
+          <a:p>
+            <a:pPr algn="ctr"/>
+          </a:p>
+        </p:txBody>
+      </p:sp>
+      <p:sp>
+        <p:nvSpPr>
+          <p:cNvPr id="25" name="TextBox 24"/>
+          <p:cNvSpPr txBox="1"/>
+          <p:nvPr/>
+        </p:nvSpPr>
+        <p:spPr>
+          <a:xfrm>
+            <a:off x="1097280" y="4270248"/>
+            <a:ext cx="10362895" cy="402336"/>
+          </a:xfrm>
+          <a:prstGeom prst="rect">
+            <a:avLst/>
+          </a:prstGeom>
+          <a:noFill/>
+        </p:spPr>
+        <p:txBody>
+          <a:bodyPr wrap="square" anchor="ctr"/>
+          <a:lstStyle/>
+          <a:p>
+            <a:r>
+              <a:rPr sz="1500" b="1" i="0">
+                <a:solidFill>
+                  <a:srgbClr val="333333"/>
+                </a:solidFill>
+                <a:latin typeface="Calibri"/>
+              </a:rPr>
+              <a:t>LO QUE DESCARTAMOS Y POR QUÉ</a:t>
+            </a:r>
+            <a:r>
+              <a:rPr sz="1500" b="0" i="0">
+                <a:solidFill>
+                  <a:srgbClr val="333333"/>
+                </a:solidFill>
+                <a:latin typeface="Calibri"/>
+              </a:rPr>
+              <a:t> — Las propuestas que se rechazaron completas, y el motivo: fuera del alcance, viola una restricción, viola la ley, o consume demasiado.</a:t>
+            </a:r>
+          </a:p>
+        </p:txBody>
+      </p:sp>
+      <p:sp>
+        <p:nvSpPr>
+          <p:cNvPr id="26" name="TextBox 25"/>
           <p:cNvSpPr txBox="1"/>
           <p:nvPr/>
         </p:nvSpPr>
@@ -9602,6 +8376,1558 @@
         <p:spPr>
           <a:xfrm>
             <a:off x="0" y="0"/>
+            <a:ext cx="12191695" cy="1170432"/>
+          </a:xfrm>
+          <a:prstGeom prst="rect">
+            <a:avLst/>
+          </a:prstGeom>
+          <a:solidFill>
+            <a:srgbClr val="095292"/>
+          </a:solidFill>
+          <a:ln>
+            <a:noFill/>
+          </a:ln>
+        </p:spPr>
+        <p:style>
+          <a:lnRef idx="1">
+            <a:schemeClr val="accent1"/>
+          </a:lnRef>
+          <a:fillRef idx="3">
+            <a:schemeClr val="accent1"/>
+          </a:fillRef>
+          <a:effectRef idx="2">
+            <a:schemeClr val="accent1"/>
+          </a:effectRef>
+          <a:fontRef idx="minor">
+            <a:schemeClr val="lt1"/>
+          </a:fontRef>
+        </p:style>
+        <p:txBody>
+          <a:bodyPr rtlCol="0" anchor="ctr"/>
+          <a:lstStyle/>
+          <a:p>
+            <a:pPr algn="ctr"/>
+          </a:p>
+        </p:txBody>
+      </p:sp>
+      <p:sp>
+        <p:nvSpPr>
+          <p:cNvPr id="3" name="Rectangle 2"/>
+          <p:cNvSpPr/>
+          <p:nvPr/>
+        </p:nvSpPr>
+        <p:spPr>
+          <a:xfrm>
+            <a:off x="0" y="1170432"/>
+            <a:ext cx="12191695" cy="41148"/>
+          </a:xfrm>
+          <a:prstGeom prst="rect">
+            <a:avLst/>
+          </a:prstGeom>
+          <a:solidFill>
+            <a:srgbClr val="FFD000"/>
+          </a:solidFill>
+          <a:ln>
+            <a:noFill/>
+          </a:ln>
+        </p:spPr>
+        <p:style>
+          <a:lnRef idx="1">
+            <a:schemeClr val="accent1"/>
+          </a:lnRef>
+          <a:fillRef idx="3">
+            <a:schemeClr val="accent1"/>
+          </a:fillRef>
+          <a:effectRef idx="2">
+            <a:schemeClr val="accent1"/>
+          </a:effectRef>
+          <a:fontRef idx="minor">
+            <a:schemeClr val="lt1"/>
+          </a:fontRef>
+        </p:style>
+        <p:txBody>
+          <a:bodyPr rtlCol="0" anchor="ctr"/>
+          <a:lstStyle/>
+          <a:p>
+            <a:pPr algn="ctr"/>
+          </a:p>
+        </p:txBody>
+      </p:sp>
+      <p:sp>
+        <p:nvSpPr>
+          <p:cNvPr id="4" name="TextBox 3"/>
+          <p:cNvSpPr txBox="1"/>
+          <p:nvPr/>
+        </p:nvSpPr>
+        <p:spPr>
+          <a:xfrm>
+            <a:off x="457200" y="164592"/>
+            <a:ext cx="11277295" cy="384048"/>
+          </a:xfrm>
+          <a:prstGeom prst="rect">
+            <a:avLst/>
+          </a:prstGeom>
+          <a:noFill/>
+        </p:spPr>
+        <p:txBody>
+          <a:bodyPr wrap="square">
+            <a:spAutoFit/>
+          </a:bodyPr>
+          <a:lstStyle/>
+          <a:p>
+            <a:r>
+              <a:rPr sz="2600" b="1" i="0">
+                <a:solidFill>
+                  <a:srgbClr val="FFFFFF"/>
+                </a:solidFill>
+                <a:latin typeface="Calibri"/>
+              </a:rPr>
+              <a:t>Cómo se expone en 3 minutos</a:t>
+            </a:r>
+          </a:p>
+        </p:txBody>
+      </p:sp>
+      <p:sp>
+        <p:nvSpPr>
+          <p:cNvPr id="5" name="TextBox 4"/>
+          <p:cNvSpPr txBox="1"/>
+          <p:nvPr/>
+        </p:nvSpPr>
+        <p:spPr>
+          <a:xfrm>
+            <a:off x="457200" y="566928"/>
+            <a:ext cx="11277295" cy="411480"/>
+          </a:xfrm>
+          <a:prstGeom prst="rect">
+            <a:avLst/>
+          </a:prstGeom>
+          <a:noFill/>
+        </p:spPr>
+        <p:txBody>
+          <a:bodyPr wrap="square">
+            <a:spAutoFit/>
+          </a:bodyPr>
+          <a:lstStyle/>
+          <a:p>
+            <a:r>
+              <a:rPr sz="1400" b="0" i="0">
+                <a:solidFill>
+                  <a:srgbClr val="B8D8EE"/>
+                </a:solidFill>
+                <a:latin typeface="Calibri"/>
+              </a:rPr>
+              <a:t>Habla el vocero con la pantalla ya compartida · cronómetro en pantalla · se corta al llegar a cero</a:t>
+            </a:r>
+          </a:p>
+        </p:txBody>
+      </p:sp>
+      <p:sp>
+        <p:nvSpPr>
+          <p:cNvPr id="6" name="Rounded Rectangle 5"/>
+          <p:cNvSpPr/>
+          <p:nvPr/>
+        </p:nvSpPr>
+        <p:spPr>
+          <a:xfrm>
+            <a:off x="457200" y="1444752"/>
+            <a:ext cx="11277295" cy="908913"/>
+          </a:xfrm>
+          <a:prstGeom prst="roundRect">
+            <a:avLst>
+              <a:gd name="adj" fmla="val 12000"/>
+            </a:avLst>
+          </a:prstGeom>
+          <a:solidFill>
+            <a:srgbClr val="F2F2F2"/>
+          </a:solidFill>
+          <a:ln>
+            <a:noFill/>
+          </a:ln>
+        </p:spPr>
+        <p:style>
+          <a:lnRef idx="1">
+            <a:schemeClr val="accent1"/>
+          </a:lnRef>
+          <a:fillRef idx="3">
+            <a:schemeClr val="accent1"/>
+          </a:fillRef>
+          <a:effectRef idx="2">
+            <a:schemeClr val="accent1"/>
+          </a:effectRef>
+          <a:fontRef idx="minor">
+            <a:schemeClr val="lt1"/>
+          </a:fontRef>
+        </p:style>
+        <p:txBody>
+          <a:bodyPr rtlCol="0" anchor="ctr"/>
+          <a:lstStyle/>
+          <a:p>
+            <a:pPr algn="ctr"/>
+          </a:p>
+        </p:txBody>
+      </p:sp>
+      <p:sp>
+        <p:nvSpPr>
+          <p:cNvPr id="7" name="Rounded Rectangle 6"/>
+          <p:cNvSpPr/>
+          <p:nvPr/>
+        </p:nvSpPr>
+        <p:spPr>
+          <a:xfrm>
+            <a:off x="594360" y="1679752"/>
+            <a:ext cx="438912" cy="438912"/>
+          </a:xfrm>
+          <a:prstGeom prst="roundRect">
+            <a:avLst>
+              <a:gd name="adj" fmla="val 12000"/>
+            </a:avLst>
+          </a:prstGeom>
+          <a:solidFill>
+            <a:srgbClr val="095292"/>
+          </a:solidFill>
+          <a:ln>
+            <a:noFill/>
+          </a:ln>
+        </p:spPr>
+        <p:style>
+          <a:lnRef idx="1">
+            <a:schemeClr val="accent1"/>
+          </a:lnRef>
+          <a:fillRef idx="3">
+            <a:schemeClr val="accent1"/>
+          </a:fillRef>
+          <a:effectRef idx="2">
+            <a:schemeClr val="accent1"/>
+          </a:effectRef>
+          <a:fontRef idx="minor">
+            <a:schemeClr val="lt1"/>
+          </a:fontRef>
+        </p:style>
+        <p:txBody>
+          <a:bodyPr rtlCol="0" anchor="ctr"/>
+          <a:lstStyle/>
+          <a:p>
+            <a:pPr algn="ctr"/>
+          </a:p>
+        </p:txBody>
+      </p:sp>
+      <p:sp>
+        <p:nvSpPr>
+          <p:cNvPr id="8" name="TextBox 7"/>
+          <p:cNvSpPr txBox="1"/>
+          <p:nvPr/>
+        </p:nvSpPr>
+        <p:spPr>
+          <a:xfrm>
+            <a:off x="594360" y="1679752"/>
+            <a:ext cx="438912" cy="438912"/>
+          </a:xfrm>
+          <a:prstGeom prst="rect">
+            <a:avLst/>
+          </a:prstGeom>
+          <a:noFill/>
+        </p:spPr>
+        <p:txBody>
+          <a:bodyPr wrap="square" anchor="ctr"/>
+          <a:lstStyle/>
+          <a:p>
+            <a:pPr algn="ctr"/>
+            <a:r>
+              <a:rPr sz="1600" b="1" i="0">
+                <a:solidFill>
+                  <a:srgbClr val="FFFFFF"/>
+                </a:solidFill>
+                <a:latin typeface="Calibri"/>
+              </a:rPr>
+              <a:t>1</a:t>
+            </a:r>
+          </a:p>
+        </p:txBody>
+      </p:sp>
+      <p:sp>
+        <p:nvSpPr>
+          <p:cNvPr id="9" name="TextBox 8"/>
+          <p:cNvSpPr txBox="1"/>
+          <p:nvPr/>
+        </p:nvSpPr>
+        <p:spPr>
+          <a:xfrm>
+            <a:off x="1188720" y="1536192"/>
+            <a:ext cx="10271455" cy="744321"/>
+          </a:xfrm>
+          <a:prstGeom prst="rect">
+            <a:avLst/>
+          </a:prstGeom>
+          <a:noFill/>
+        </p:spPr>
+        <p:txBody>
+          <a:bodyPr wrap="square" anchor="ctr"/>
+          <a:lstStyle/>
+          <a:p>
+            <a:r>
+              <a:rPr sz="1500" b="1" i="0">
+                <a:solidFill>
+                  <a:srgbClr val="095292"/>
+                </a:solidFill>
+                <a:latin typeface="Calibri"/>
+              </a:rPr>
+              <a:t>25 s · El prompt</a:t>
+            </a:r>
+          </a:p>
+          <a:p>
+            <a:pPr>
+              <a:spcBef>
+                <a:spcPts val="200"/>
+              </a:spcBef>
+            </a:pPr>
+            <a:r>
+              <a:rPr sz="1300" b="0" i="0">
+                <a:solidFill>
+                  <a:srgbClr val="333333"/>
+                </a:solidFill>
+                <a:latin typeface="Calibri"/>
+              </a:rPr>
+              <a:t>Lean las restricciones que pusieron. Solo esa parte.</a:t>
+            </a:r>
+          </a:p>
+        </p:txBody>
+      </p:sp>
+      <p:sp>
+        <p:nvSpPr>
+          <p:cNvPr id="10" name="Rounded Rectangle 9"/>
+          <p:cNvSpPr/>
+          <p:nvPr/>
+        </p:nvSpPr>
+        <p:spPr>
+          <a:xfrm>
+            <a:off x="457200" y="2445105"/>
+            <a:ext cx="11277295" cy="908913"/>
+          </a:xfrm>
+          <a:prstGeom prst="roundRect">
+            <a:avLst>
+              <a:gd name="adj" fmla="val 12000"/>
+            </a:avLst>
+          </a:prstGeom>
+          <a:solidFill>
+            <a:srgbClr val="E8F4FA"/>
+          </a:solidFill>
+          <a:ln>
+            <a:noFill/>
+          </a:ln>
+        </p:spPr>
+        <p:style>
+          <a:lnRef idx="1">
+            <a:schemeClr val="accent1"/>
+          </a:lnRef>
+          <a:fillRef idx="3">
+            <a:schemeClr val="accent1"/>
+          </a:fillRef>
+          <a:effectRef idx="2">
+            <a:schemeClr val="accent1"/>
+          </a:effectRef>
+          <a:fontRef idx="minor">
+            <a:schemeClr val="lt1"/>
+          </a:fontRef>
+        </p:style>
+        <p:txBody>
+          <a:bodyPr rtlCol="0" anchor="ctr"/>
+          <a:lstStyle/>
+          <a:p>
+            <a:pPr algn="ctr"/>
+          </a:p>
+        </p:txBody>
+      </p:sp>
+      <p:sp>
+        <p:nvSpPr>
+          <p:cNvPr id="11" name="Rounded Rectangle 10"/>
+          <p:cNvSpPr/>
+          <p:nvPr/>
+        </p:nvSpPr>
+        <p:spPr>
+          <a:xfrm>
+            <a:off x="594360" y="2680106"/>
+            <a:ext cx="438912" cy="438912"/>
+          </a:xfrm>
+          <a:prstGeom prst="roundRect">
+            <a:avLst>
+              <a:gd name="adj" fmla="val 12000"/>
+            </a:avLst>
+          </a:prstGeom>
+          <a:solidFill>
+            <a:srgbClr val="095292"/>
+          </a:solidFill>
+          <a:ln>
+            <a:noFill/>
+          </a:ln>
+        </p:spPr>
+        <p:style>
+          <a:lnRef idx="1">
+            <a:schemeClr val="accent1"/>
+          </a:lnRef>
+          <a:fillRef idx="3">
+            <a:schemeClr val="accent1"/>
+          </a:fillRef>
+          <a:effectRef idx="2">
+            <a:schemeClr val="accent1"/>
+          </a:effectRef>
+          <a:fontRef idx="minor">
+            <a:schemeClr val="lt1"/>
+          </a:fontRef>
+        </p:style>
+        <p:txBody>
+          <a:bodyPr rtlCol="0" anchor="ctr"/>
+          <a:lstStyle/>
+          <a:p>
+            <a:pPr algn="ctr"/>
+          </a:p>
+        </p:txBody>
+      </p:sp>
+      <p:sp>
+        <p:nvSpPr>
+          <p:cNvPr id="12" name="TextBox 11"/>
+          <p:cNvSpPr txBox="1"/>
+          <p:nvPr/>
+        </p:nvSpPr>
+        <p:spPr>
+          <a:xfrm>
+            <a:off x="594360" y="2680106"/>
+            <a:ext cx="438912" cy="438912"/>
+          </a:xfrm>
+          <a:prstGeom prst="rect">
+            <a:avLst/>
+          </a:prstGeom>
+          <a:noFill/>
+        </p:spPr>
+        <p:txBody>
+          <a:bodyPr wrap="square" anchor="ctr"/>
+          <a:lstStyle/>
+          <a:p>
+            <a:pPr algn="ctr"/>
+            <a:r>
+              <a:rPr sz="1600" b="1" i="0">
+                <a:solidFill>
+                  <a:srgbClr val="FFFFFF"/>
+                </a:solidFill>
+                <a:latin typeface="Calibri"/>
+              </a:rPr>
+              <a:t>2</a:t>
+            </a:r>
+          </a:p>
+        </p:txBody>
+      </p:sp>
+      <p:sp>
+        <p:nvSpPr>
+          <p:cNvPr id="13" name="TextBox 12"/>
+          <p:cNvSpPr txBox="1"/>
+          <p:nvPr/>
+        </p:nvSpPr>
+        <p:spPr>
+          <a:xfrm>
+            <a:off x="1188720" y="2536545"/>
+            <a:ext cx="10271455" cy="744321"/>
+          </a:xfrm>
+          <a:prstGeom prst="rect">
+            <a:avLst/>
+          </a:prstGeom>
+          <a:noFill/>
+        </p:spPr>
+        <p:txBody>
+          <a:bodyPr wrap="square" anchor="ctr"/>
+          <a:lstStyle/>
+          <a:p>
+            <a:r>
+              <a:rPr sz="1500" b="1" i="0">
+                <a:solidFill>
+                  <a:srgbClr val="095292"/>
+                </a:solidFill>
+                <a:latin typeface="Calibri"/>
+              </a:rPr>
+              <a:t>30 s · Las tres variantes</a:t>
+            </a:r>
+          </a:p>
+          <a:p>
+            <a:pPr>
+              <a:spcBef>
+                <a:spcPts val="200"/>
+              </a:spcBef>
+            </a:pPr>
+            <a:r>
+              <a:rPr sz="1300" b="0" i="0">
+                <a:solidFill>
+                  <a:srgbClr val="333333"/>
+                </a:solidFill>
+                <a:latin typeface="Calibri"/>
+              </a:rPr>
+              <a:t>En una frase cada una.</a:t>
+            </a:r>
+          </a:p>
+        </p:txBody>
+      </p:sp>
+      <p:sp>
+        <p:nvSpPr>
+          <p:cNvPr id="14" name="Rounded Rectangle 13"/>
+          <p:cNvSpPr/>
+          <p:nvPr/>
+        </p:nvSpPr>
+        <p:spPr>
+          <a:xfrm>
+            <a:off x="457200" y="3445459"/>
+            <a:ext cx="11277295" cy="908913"/>
+          </a:xfrm>
+          <a:prstGeom prst="roundRect">
+            <a:avLst>
+              <a:gd name="adj" fmla="val 12000"/>
+            </a:avLst>
+          </a:prstGeom>
+          <a:solidFill>
+            <a:srgbClr val="F2F2F2"/>
+          </a:solidFill>
+          <a:ln>
+            <a:noFill/>
+          </a:ln>
+        </p:spPr>
+        <p:style>
+          <a:lnRef idx="1">
+            <a:schemeClr val="accent1"/>
+          </a:lnRef>
+          <a:fillRef idx="3">
+            <a:schemeClr val="accent1"/>
+          </a:fillRef>
+          <a:effectRef idx="2">
+            <a:schemeClr val="accent1"/>
+          </a:effectRef>
+          <a:fontRef idx="minor">
+            <a:schemeClr val="lt1"/>
+          </a:fontRef>
+        </p:style>
+        <p:txBody>
+          <a:bodyPr rtlCol="0" anchor="ctr"/>
+          <a:lstStyle/>
+          <a:p>
+            <a:pPr algn="ctr"/>
+          </a:p>
+        </p:txBody>
+      </p:sp>
+      <p:sp>
+        <p:nvSpPr>
+          <p:cNvPr id="15" name="Rounded Rectangle 14"/>
+          <p:cNvSpPr/>
+          <p:nvPr/>
+        </p:nvSpPr>
+        <p:spPr>
+          <a:xfrm>
+            <a:off x="594360" y="3680460"/>
+            <a:ext cx="438912" cy="438912"/>
+          </a:xfrm>
+          <a:prstGeom prst="roundRect">
+            <a:avLst>
+              <a:gd name="adj" fmla="val 12000"/>
+            </a:avLst>
+          </a:prstGeom>
+          <a:solidFill>
+            <a:srgbClr val="095292"/>
+          </a:solidFill>
+          <a:ln>
+            <a:noFill/>
+          </a:ln>
+        </p:spPr>
+        <p:style>
+          <a:lnRef idx="1">
+            <a:schemeClr val="accent1"/>
+          </a:lnRef>
+          <a:fillRef idx="3">
+            <a:schemeClr val="accent1"/>
+          </a:fillRef>
+          <a:effectRef idx="2">
+            <a:schemeClr val="accent1"/>
+          </a:effectRef>
+          <a:fontRef idx="minor">
+            <a:schemeClr val="lt1"/>
+          </a:fontRef>
+        </p:style>
+        <p:txBody>
+          <a:bodyPr rtlCol="0" anchor="ctr"/>
+          <a:lstStyle/>
+          <a:p>
+            <a:pPr algn="ctr"/>
+          </a:p>
+        </p:txBody>
+      </p:sp>
+      <p:sp>
+        <p:nvSpPr>
+          <p:cNvPr id="16" name="TextBox 15"/>
+          <p:cNvSpPr txBox="1"/>
+          <p:nvPr/>
+        </p:nvSpPr>
+        <p:spPr>
+          <a:xfrm>
+            <a:off x="594360" y="3680460"/>
+            <a:ext cx="438912" cy="438912"/>
+          </a:xfrm>
+          <a:prstGeom prst="rect">
+            <a:avLst/>
+          </a:prstGeom>
+          <a:noFill/>
+        </p:spPr>
+        <p:txBody>
+          <a:bodyPr wrap="square" anchor="ctr"/>
+          <a:lstStyle/>
+          <a:p>
+            <a:pPr algn="ctr"/>
+            <a:r>
+              <a:rPr sz="1600" b="1" i="0">
+                <a:solidFill>
+                  <a:srgbClr val="FFFFFF"/>
+                </a:solidFill>
+                <a:latin typeface="Calibri"/>
+              </a:rPr>
+              <a:t>3</a:t>
+            </a:r>
+          </a:p>
+        </p:txBody>
+      </p:sp>
+      <p:sp>
+        <p:nvSpPr>
+          <p:cNvPr id="17" name="TextBox 16"/>
+          <p:cNvSpPr txBox="1"/>
+          <p:nvPr/>
+        </p:nvSpPr>
+        <p:spPr>
+          <a:xfrm>
+            <a:off x="1188720" y="3536899"/>
+            <a:ext cx="10271455" cy="744321"/>
+          </a:xfrm>
+          <a:prstGeom prst="rect">
+            <a:avLst/>
+          </a:prstGeom>
+          <a:noFill/>
+        </p:spPr>
+        <p:txBody>
+          <a:bodyPr wrap="square" anchor="ctr"/>
+          <a:lstStyle/>
+          <a:p>
+            <a:r>
+              <a:rPr sz="1500" b="1" i="0">
+                <a:solidFill>
+                  <a:srgbClr val="095292"/>
+                </a:solidFill>
+                <a:latin typeface="Calibri"/>
+              </a:rPr>
+              <a:t>30 s · La que eligieron</a:t>
+            </a:r>
+          </a:p>
+          <a:p>
+            <a:pPr>
+              <a:spcBef>
+                <a:spcPts val="200"/>
+              </a:spcBef>
+            </a:pPr>
+            <a:r>
+              <a:rPr sz="1300" b="0" i="0">
+                <a:solidFill>
+                  <a:srgbClr val="333333"/>
+                </a:solidFill>
+                <a:latin typeface="Calibri"/>
+              </a:rPr>
+              <a:t>Y el requisito en el que se apoyaron.</a:t>
+            </a:r>
+          </a:p>
+        </p:txBody>
+      </p:sp>
+      <p:sp>
+        <p:nvSpPr>
+          <p:cNvPr id="18" name="Rounded Rectangle 17"/>
+          <p:cNvSpPr/>
+          <p:nvPr/>
+        </p:nvSpPr>
+        <p:spPr>
+          <a:xfrm>
+            <a:off x="457200" y="4445812"/>
+            <a:ext cx="11277295" cy="908913"/>
+          </a:xfrm>
+          <a:prstGeom prst="roundRect">
+            <a:avLst>
+              <a:gd name="adj" fmla="val 12000"/>
+            </a:avLst>
+          </a:prstGeom>
+          <a:solidFill>
+            <a:srgbClr val="E8F4FA"/>
+          </a:solidFill>
+          <a:ln>
+            <a:noFill/>
+          </a:ln>
+        </p:spPr>
+        <p:style>
+          <a:lnRef idx="1">
+            <a:schemeClr val="accent1"/>
+          </a:lnRef>
+          <a:fillRef idx="3">
+            <a:schemeClr val="accent1"/>
+          </a:fillRef>
+          <a:effectRef idx="2">
+            <a:schemeClr val="accent1"/>
+          </a:effectRef>
+          <a:fontRef idx="minor">
+            <a:schemeClr val="lt1"/>
+          </a:fontRef>
+        </p:style>
+        <p:txBody>
+          <a:bodyPr rtlCol="0" anchor="ctr"/>
+          <a:lstStyle/>
+          <a:p>
+            <a:pPr algn="ctr"/>
+          </a:p>
+        </p:txBody>
+      </p:sp>
+      <p:sp>
+        <p:nvSpPr>
+          <p:cNvPr id="19" name="Rounded Rectangle 18"/>
+          <p:cNvSpPr/>
+          <p:nvPr/>
+        </p:nvSpPr>
+        <p:spPr>
+          <a:xfrm>
+            <a:off x="594360" y="4680813"/>
+            <a:ext cx="438912" cy="438912"/>
+          </a:xfrm>
+          <a:prstGeom prst="roundRect">
+            <a:avLst>
+              <a:gd name="adj" fmla="val 12000"/>
+            </a:avLst>
+          </a:prstGeom>
+          <a:solidFill>
+            <a:srgbClr val="095292"/>
+          </a:solidFill>
+          <a:ln>
+            <a:noFill/>
+          </a:ln>
+        </p:spPr>
+        <p:style>
+          <a:lnRef idx="1">
+            <a:schemeClr val="accent1"/>
+          </a:lnRef>
+          <a:fillRef idx="3">
+            <a:schemeClr val="accent1"/>
+          </a:fillRef>
+          <a:effectRef idx="2">
+            <a:schemeClr val="accent1"/>
+          </a:effectRef>
+          <a:fontRef idx="minor">
+            <a:schemeClr val="lt1"/>
+          </a:fontRef>
+        </p:style>
+        <p:txBody>
+          <a:bodyPr rtlCol="0" anchor="ctr"/>
+          <a:lstStyle/>
+          <a:p>
+            <a:pPr algn="ctr"/>
+          </a:p>
+        </p:txBody>
+      </p:sp>
+      <p:sp>
+        <p:nvSpPr>
+          <p:cNvPr id="20" name="TextBox 19"/>
+          <p:cNvSpPr txBox="1"/>
+          <p:nvPr/>
+        </p:nvSpPr>
+        <p:spPr>
+          <a:xfrm>
+            <a:off x="594360" y="4680813"/>
+            <a:ext cx="438912" cy="438912"/>
+          </a:xfrm>
+          <a:prstGeom prst="rect">
+            <a:avLst/>
+          </a:prstGeom>
+          <a:noFill/>
+        </p:spPr>
+        <p:txBody>
+          <a:bodyPr wrap="square" anchor="ctr"/>
+          <a:lstStyle/>
+          <a:p>
+            <a:pPr algn="ctr"/>
+            <a:r>
+              <a:rPr sz="1600" b="1" i="0">
+                <a:solidFill>
+                  <a:srgbClr val="FFFFFF"/>
+                </a:solidFill>
+                <a:latin typeface="Calibri"/>
+              </a:rPr>
+              <a:t>4</a:t>
+            </a:r>
+          </a:p>
+        </p:txBody>
+      </p:sp>
+      <p:sp>
+        <p:nvSpPr>
+          <p:cNvPr id="21" name="TextBox 20"/>
+          <p:cNvSpPr txBox="1"/>
+          <p:nvPr/>
+        </p:nvSpPr>
+        <p:spPr>
+          <a:xfrm>
+            <a:off x="1188720" y="4537252"/>
+            <a:ext cx="10271455" cy="744321"/>
+          </a:xfrm>
+          <a:prstGeom prst="rect">
+            <a:avLst/>
+          </a:prstGeom>
+          <a:noFill/>
+        </p:spPr>
+        <p:txBody>
+          <a:bodyPr wrap="square" anchor="ctr"/>
+          <a:lstStyle/>
+          <a:p>
+            <a:r>
+              <a:rPr sz="1500" b="1" i="0">
+                <a:solidFill>
+                  <a:srgbClr val="095292"/>
+                </a:solidFill>
+                <a:latin typeface="Calibri"/>
+              </a:rPr>
+              <a:t>70 s · Lo que corrigieron</a:t>
+            </a:r>
+          </a:p>
+          <a:p>
+            <a:pPr>
+              <a:spcBef>
+                <a:spcPts val="200"/>
+              </a:spcBef>
+            </a:pPr>
+            <a:r>
+              <a:rPr sz="1300" b="0" i="0">
+                <a:solidFill>
+                  <a:srgbClr val="333333"/>
+                </a:solidFill>
+                <a:latin typeface="Calibri"/>
+              </a:rPr>
+              <a:t>Dos correcciones con su razón y </a:t>
+            </a:r>
+            <a:r>
+              <a:rPr sz="1300" b="1" i="0">
+                <a:solidFill>
+                  <a:srgbClr val="333333"/>
+                </a:solidFill>
+                <a:latin typeface="Calibri"/>
+              </a:rPr>
+              <a:t>de qué sesión sale cada una</a:t>
+            </a:r>
+            <a:r>
+              <a:rPr sz="1300" b="0" i="0">
+                <a:solidFill>
+                  <a:srgbClr val="333333"/>
+                </a:solidFill>
+                <a:latin typeface="Calibri"/>
+              </a:rPr>
+              <a:t>. Es el minuto obligatorio.</a:t>
+            </a:r>
+          </a:p>
+        </p:txBody>
+      </p:sp>
+      <p:sp>
+        <p:nvSpPr>
+          <p:cNvPr id="22" name="Rounded Rectangle 21"/>
+          <p:cNvSpPr/>
+          <p:nvPr/>
+        </p:nvSpPr>
+        <p:spPr>
+          <a:xfrm>
+            <a:off x="457200" y="5446166"/>
+            <a:ext cx="11277295" cy="908913"/>
+          </a:xfrm>
+          <a:prstGeom prst="roundRect">
+            <a:avLst>
+              <a:gd name="adj" fmla="val 12000"/>
+            </a:avLst>
+          </a:prstGeom>
+          <a:solidFill>
+            <a:srgbClr val="F2F2F2"/>
+          </a:solidFill>
+          <a:ln>
+            <a:noFill/>
+          </a:ln>
+        </p:spPr>
+        <p:style>
+          <a:lnRef idx="1">
+            <a:schemeClr val="accent1"/>
+          </a:lnRef>
+          <a:fillRef idx="3">
+            <a:schemeClr val="accent1"/>
+          </a:fillRef>
+          <a:effectRef idx="2">
+            <a:schemeClr val="accent1"/>
+          </a:effectRef>
+          <a:fontRef idx="minor">
+            <a:schemeClr val="lt1"/>
+          </a:fontRef>
+        </p:style>
+        <p:txBody>
+          <a:bodyPr rtlCol="0" anchor="ctr"/>
+          <a:lstStyle/>
+          <a:p>
+            <a:pPr algn="ctr"/>
+          </a:p>
+        </p:txBody>
+      </p:sp>
+      <p:sp>
+        <p:nvSpPr>
+          <p:cNvPr id="23" name="Rounded Rectangle 22"/>
+          <p:cNvSpPr/>
+          <p:nvPr/>
+        </p:nvSpPr>
+        <p:spPr>
+          <a:xfrm>
+            <a:off x="594360" y="5681167"/>
+            <a:ext cx="438912" cy="438912"/>
+          </a:xfrm>
+          <a:prstGeom prst="roundRect">
+            <a:avLst>
+              <a:gd name="adj" fmla="val 12000"/>
+            </a:avLst>
+          </a:prstGeom>
+          <a:solidFill>
+            <a:srgbClr val="095292"/>
+          </a:solidFill>
+          <a:ln>
+            <a:noFill/>
+          </a:ln>
+        </p:spPr>
+        <p:style>
+          <a:lnRef idx="1">
+            <a:schemeClr val="accent1"/>
+          </a:lnRef>
+          <a:fillRef idx="3">
+            <a:schemeClr val="accent1"/>
+          </a:fillRef>
+          <a:effectRef idx="2">
+            <a:schemeClr val="accent1"/>
+          </a:effectRef>
+          <a:fontRef idx="minor">
+            <a:schemeClr val="lt1"/>
+          </a:fontRef>
+        </p:style>
+        <p:txBody>
+          <a:bodyPr rtlCol="0" anchor="ctr"/>
+          <a:lstStyle/>
+          <a:p>
+            <a:pPr algn="ctr"/>
+          </a:p>
+        </p:txBody>
+      </p:sp>
+      <p:sp>
+        <p:nvSpPr>
+          <p:cNvPr id="24" name="TextBox 23"/>
+          <p:cNvSpPr txBox="1"/>
+          <p:nvPr/>
+        </p:nvSpPr>
+        <p:spPr>
+          <a:xfrm>
+            <a:off x="594360" y="5681167"/>
+            <a:ext cx="438912" cy="438912"/>
+          </a:xfrm>
+          <a:prstGeom prst="rect">
+            <a:avLst/>
+          </a:prstGeom>
+          <a:noFill/>
+        </p:spPr>
+        <p:txBody>
+          <a:bodyPr wrap="square" anchor="ctr"/>
+          <a:lstStyle/>
+          <a:p>
+            <a:pPr algn="ctr"/>
+            <a:r>
+              <a:rPr sz="1600" b="1" i="0">
+                <a:solidFill>
+                  <a:srgbClr val="FFFFFF"/>
+                </a:solidFill>
+                <a:latin typeface="Calibri"/>
+              </a:rPr>
+              <a:t>5</a:t>
+            </a:r>
+          </a:p>
+        </p:txBody>
+      </p:sp>
+      <p:sp>
+        <p:nvSpPr>
+          <p:cNvPr id="25" name="TextBox 24"/>
+          <p:cNvSpPr txBox="1"/>
+          <p:nvPr/>
+        </p:nvSpPr>
+        <p:spPr>
+          <a:xfrm>
+            <a:off x="1188720" y="5537606"/>
+            <a:ext cx="10271455" cy="744321"/>
+          </a:xfrm>
+          <a:prstGeom prst="rect">
+            <a:avLst/>
+          </a:prstGeom>
+          <a:noFill/>
+        </p:spPr>
+        <p:txBody>
+          <a:bodyPr wrap="square" anchor="ctr"/>
+          <a:lstStyle/>
+          <a:p>
+            <a:r>
+              <a:rPr sz="1500" b="1" i="0">
+                <a:solidFill>
+                  <a:srgbClr val="095292"/>
+                </a:solidFill>
+                <a:latin typeface="Calibri"/>
+              </a:rPr>
+              <a:t>25 s · Lo que descartaron</a:t>
+            </a:r>
+          </a:p>
+          <a:p>
+            <a:pPr>
+              <a:spcBef>
+                <a:spcPts val="200"/>
+              </a:spcBef>
+            </a:pPr>
+            <a:r>
+              <a:rPr sz="1300" b="0" i="0">
+                <a:solidFill>
+                  <a:srgbClr val="333333"/>
+                </a:solidFill>
+                <a:latin typeface="Calibri"/>
+              </a:rPr>
+              <a:t>Una propuesta rechazada y el motivo.</a:t>
+            </a:r>
+          </a:p>
+        </p:txBody>
+      </p:sp>
+      <p:sp>
+        <p:nvSpPr>
+          <p:cNvPr id="26" name="TextBox 25"/>
+          <p:cNvSpPr txBox="1"/>
+          <p:nvPr/>
+        </p:nvSpPr>
+        <p:spPr>
+          <a:xfrm>
+            <a:off x="11185855" y="6473952"/>
+            <a:ext cx="640080" cy="274320"/>
+          </a:xfrm>
+          <a:prstGeom prst="rect">
+            <a:avLst/>
+          </a:prstGeom>
+          <a:noFill/>
+        </p:spPr>
+        <p:txBody>
+          <a:bodyPr wrap="square">
+            <a:spAutoFit/>
+          </a:bodyPr>
+          <a:lstStyle/>
+          <a:p>
+            <a:pPr algn="r"/>
+            <a:r>
+              <a:rPr sz="1100" b="0" i="0">
+                <a:solidFill>
+                  <a:srgbClr val="666666"/>
+                </a:solidFill>
+                <a:latin typeface="Calibri"/>
+              </a:rPr>
+              <a:t>20</a:t>
+            </a:r>
+          </a:p>
+        </p:txBody>
+      </p:sp>
+    </p:spTree>
+  </p:cSld>
+  <p:clrMapOvr>
+    <a:masterClrMapping/>
+  </p:clrMapOvr>
+</p:sld>
+</file>
+
+<file path=ppt/slides/slide21.xml><?xml version="1.0" encoding="utf-8"?>
+<p:sld xmlns:a="http://schemas.openxmlformats.org/drawingml/2006/main" xmlns:p="http://schemas.openxmlformats.org/presentationml/2006/main" xmlns:r="http://schemas.openxmlformats.org/officeDocument/2006/relationships">
+  <p:cSld>
+    <p:bg>
+      <p:bgPr>
+        <a:solidFill>
+          <a:srgbClr val="FFFFFF"/>
+        </a:solidFill>
+        <a:effectLst/>
+      </p:bgPr>
+    </p:bg>
+    <p:spTree>
+      <p:nvGrpSpPr>
+        <p:cNvPr id="1" name=""/>
+        <p:cNvGrpSpPr/>
+        <p:nvPr/>
+      </p:nvGrpSpPr>
+      <p:grpSpPr/>
+      <p:sp>
+        <p:nvSpPr>
+          <p:cNvPr id="2" name="Rectangle 1"/>
+          <p:cNvSpPr/>
+          <p:nvPr/>
+        </p:nvSpPr>
+        <p:spPr>
+          <a:xfrm>
+            <a:off x="0" y="0"/>
+            <a:ext cx="12191695" cy="960120"/>
+          </a:xfrm>
+          <a:prstGeom prst="rect">
+            <a:avLst/>
+          </a:prstGeom>
+          <a:solidFill>
+            <a:srgbClr val="095292"/>
+          </a:solidFill>
+          <a:ln>
+            <a:noFill/>
+          </a:ln>
+        </p:spPr>
+        <p:style>
+          <a:lnRef idx="1">
+            <a:schemeClr val="accent1"/>
+          </a:lnRef>
+          <a:fillRef idx="3">
+            <a:schemeClr val="accent1"/>
+          </a:fillRef>
+          <a:effectRef idx="2">
+            <a:schemeClr val="accent1"/>
+          </a:effectRef>
+          <a:fontRef idx="minor">
+            <a:schemeClr val="lt1"/>
+          </a:fontRef>
+        </p:style>
+        <p:txBody>
+          <a:bodyPr rtlCol="0" anchor="ctr"/>
+          <a:lstStyle/>
+          <a:p>
+            <a:pPr algn="ctr"/>
+          </a:p>
+        </p:txBody>
+      </p:sp>
+      <p:sp>
+        <p:nvSpPr>
+          <p:cNvPr id="3" name="Rectangle 2"/>
+          <p:cNvSpPr/>
+          <p:nvPr/>
+        </p:nvSpPr>
+        <p:spPr>
+          <a:xfrm>
+            <a:off x="0" y="960120"/>
+            <a:ext cx="12191695" cy="41148"/>
+          </a:xfrm>
+          <a:prstGeom prst="rect">
+            <a:avLst/>
+          </a:prstGeom>
+          <a:solidFill>
+            <a:srgbClr val="FFD000"/>
+          </a:solidFill>
+          <a:ln>
+            <a:noFill/>
+          </a:ln>
+        </p:spPr>
+        <p:style>
+          <a:lnRef idx="1">
+            <a:schemeClr val="accent1"/>
+          </a:lnRef>
+          <a:fillRef idx="3">
+            <a:schemeClr val="accent1"/>
+          </a:fillRef>
+          <a:effectRef idx="2">
+            <a:schemeClr val="accent1"/>
+          </a:effectRef>
+          <a:fontRef idx="minor">
+            <a:schemeClr val="lt1"/>
+          </a:fontRef>
+        </p:style>
+        <p:txBody>
+          <a:bodyPr rtlCol="0" anchor="ctr"/>
+          <a:lstStyle/>
+          <a:p>
+            <a:pPr algn="ctr"/>
+          </a:p>
+        </p:txBody>
+      </p:sp>
+      <p:sp>
+        <p:nvSpPr>
+          <p:cNvPr id="4" name="TextBox 3"/>
+          <p:cNvSpPr txBox="1"/>
+          <p:nvPr/>
+        </p:nvSpPr>
+        <p:spPr>
+          <a:xfrm>
+            <a:off x="457200" y="164592"/>
+            <a:ext cx="11277295" cy="502920"/>
+          </a:xfrm>
+          <a:prstGeom prst="rect">
+            <a:avLst/>
+          </a:prstGeom>
+          <a:noFill/>
+        </p:spPr>
+        <p:txBody>
+          <a:bodyPr wrap="square">
+            <a:spAutoFit/>
+          </a:bodyPr>
+          <a:lstStyle/>
+          <a:p>
+            <a:r>
+              <a:rPr sz="2600" b="1" i="0">
+                <a:solidFill>
+                  <a:srgbClr val="FFFFFF"/>
+                </a:solidFill>
+                <a:latin typeface="Calibri"/>
+              </a:rPr>
+              <a:t>Para la Clase 12</a:t>
+            </a:r>
+          </a:p>
+        </p:txBody>
+      </p:sp>
+      <p:sp>
+        <p:nvSpPr>
+          <p:cNvPr id="5" name="TextBox 4"/>
+          <p:cNvSpPr txBox="1"/>
+          <p:nvPr/>
+        </p:nvSpPr>
+        <p:spPr>
+          <a:xfrm>
+            <a:off x="457200" y="1170432"/>
+            <a:ext cx="11277295" cy="5230368"/>
+          </a:xfrm>
+          <a:prstGeom prst="rect">
+            <a:avLst/>
+          </a:prstGeom>
+          <a:noFill/>
+        </p:spPr>
+        <p:txBody>
+          <a:bodyPr wrap="square">
+            <a:spAutoFit/>
+          </a:bodyPr>
+          <a:lstStyle/>
+          <a:p>
+            <a:pPr>
+              <a:spcAft>
+                <a:spcPts val="800"/>
+              </a:spcAft>
+            </a:pPr>
+            <a:r>
+              <a:rPr sz="2000" b="0" i="0">
+                <a:solidFill>
+                  <a:srgbClr val="333333"/>
+                </a:solidFill>
+                <a:latin typeface="Calibri"/>
+              </a:rPr>
+              <a:t>–   </a:t>
+            </a:r>
+            <a:r>
+              <a:rPr sz="2000" b="1" i="0">
+                <a:solidFill>
+                  <a:srgbClr val="333333"/>
+                </a:solidFill>
+                <a:latin typeface="Calibri"/>
+              </a:rPr>
+              <a:t>Trabajo dirigido:</a:t>
+            </a:r>
+            <a:r>
+              <a:rPr sz="2000" b="0" i="0">
+                <a:solidFill>
+                  <a:srgbClr val="333333"/>
+                </a:solidFill>
+                <a:latin typeface="Calibri"/>
+              </a:rPr>
+              <a:t> Uso de IA para generación de ideas — completar el registro del taller (prompt, variantes, elección, correcciones con su origen, descartes y declaración del uso) en el documento del equipo.</a:t>
+            </a:r>
+          </a:p>
+          <a:p>
+            <a:pPr>
+              <a:spcAft>
+                <a:spcPts val="800"/>
+              </a:spcAft>
+            </a:pPr>
+            <a:r>
+              <a:rPr sz="2000" b="0" i="0">
+                <a:solidFill>
+                  <a:srgbClr val="333333"/>
+                </a:solidFill>
+                <a:latin typeface="Calibri"/>
+              </a:rPr>
+              <a:t>–   </a:t>
+            </a:r>
+            <a:r>
+              <a:rPr sz="2000" b="1" i="0">
+                <a:solidFill>
+                  <a:srgbClr val="333333"/>
+                </a:solidFill>
+                <a:latin typeface="Calibri"/>
+              </a:rPr>
+              <a:t>Trabajo independiente:</a:t>
+            </a:r>
+            <a:r>
+              <a:rPr sz="2000" b="0" i="0">
+                <a:solidFill>
+                  <a:srgbClr val="333333"/>
+                </a:solidFill>
+                <a:latin typeface="Calibri"/>
+              </a:rPr>
+              <a:t> Corrección del prototipo: dejar el </a:t>
+            </a:r>
+            <a:r>
+              <a:rPr sz="2000" b="1" i="0">
+                <a:solidFill>
+                  <a:srgbClr val="333333"/>
+                </a:solidFill>
+                <a:latin typeface="Calibri"/>
+              </a:rPr>
+              <a:t>v2 navegable</a:t>
+            </a:r>
+            <a:r>
+              <a:rPr sz="2000" b="0" i="0">
+                <a:solidFill>
+                  <a:srgbClr val="333333"/>
+                </a:solidFill>
+                <a:latin typeface="Calibri"/>
+              </a:rPr>
+              <a:t> en la carpeta del equipo, con todas las correcciones aplicadas, y </a:t>
+            </a:r>
+            <a:r>
+              <a:rPr sz="2000" b="1" i="0">
+                <a:solidFill>
+                  <a:srgbClr val="333333"/>
+                </a:solidFill>
+                <a:latin typeface="Calibri"/>
+              </a:rPr>
+              <a:t>conseguir a la persona ajena</a:t>
+            </a:r>
+            <a:r>
+              <a:rPr sz="2000" b="0" i="0">
+                <a:solidFill>
+                  <a:srgbClr val="333333"/>
+                </a:solidFill>
+                <a:latin typeface="Calibri"/>
+              </a:rPr>
+              <a:t> que va a probarlo — solo el rol, no el nombre.</a:t>
+            </a:r>
+          </a:p>
+          <a:p>
+            <a:pPr>
+              <a:spcAft>
+                <a:spcPts val="800"/>
+              </a:spcAft>
+            </a:pPr>
+            <a:r>
+              <a:rPr sz="2000" b="0" i="0">
+                <a:solidFill>
+                  <a:srgbClr val="333333"/>
+                </a:solidFill>
+                <a:latin typeface="Calibri"/>
+              </a:rPr>
+              <a:t>–   </a:t>
+            </a:r>
+            <a:r>
+              <a:rPr sz="2000" b="1" i="0">
+                <a:solidFill>
+                  <a:srgbClr val="333333"/>
+                </a:solidFill>
+                <a:latin typeface="Calibri"/>
+              </a:rPr>
+              <a:t>Clase 12 · Presentación de avances de proyectos</a:t>
+            </a:r>
+            <a:r>
+              <a:rPr sz="2000" b="0" i="0">
+                <a:solidFill>
+                  <a:srgbClr val="333333"/>
+                </a:solidFill>
+                <a:latin typeface="Calibri"/>
+              </a:rPr>
+              <a:t> — arranca el </a:t>
+            </a:r>
+            <a:r>
+              <a:rPr sz="2000" b="1" i="0">
+                <a:solidFill>
+                  <a:srgbClr val="333333"/>
+                </a:solidFill>
+                <a:latin typeface="Calibri"/>
+              </a:rPr>
+              <a:t>corte 3</a:t>
+            </a:r>
+            <a:r>
+              <a:rPr sz="2000" b="0" i="0">
+                <a:solidFill>
+                  <a:srgbClr val="333333"/>
+                </a:solidFill>
+                <a:latin typeface="Calibri"/>
+              </a:rPr>
+              <a:t> con la </a:t>
+            </a:r>
+            <a:r>
+              <a:rPr sz="2000" b="1" i="0">
+                <a:solidFill>
+                  <a:srgbClr val="333333"/>
+                </a:solidFill>
+                <a:latin typeface="Calibri"/>
+              </a:rPr>
+              <a:t>presentación de avances</a:t>
+            </a:r>
+            <a:r>
+              <a:rPr sz="2000" b="0" i="0">
+                <a:solidFill>
+                  <a:srgbClr val="333333"/>
+                </a:solidFill>
+                <a:latin typeface="Calibri"/>
+              </a:rPr>
+              <a:t>: el prototipo se prueba con una persona ajena al equipo y se recibe retroalimentación entre pares.</a:t>
+            </a:r>
+          </a:p>
+          <a:p>
+            <a:pPr>
+              <a:spcAft>
+                <a:spcPts val="800"/>
+              </a:spcAft>
+            </a:pPr>
+            <a:r>
+              <a:rPr sz="2000" b="0" i="0">
+                <a:solidFill>
+                  <a:srgbClr val="333333"/>
+                </a:solidFill>
+                <a:latin typeface="Calibri"/>
+              </a:rPr>
+              <a:t>–   </a:t>
+            </a:r>
+            <a:r>
+              <a:rPr sz="2000" b="1" i="0">
+                <a:solidFill>
+                  <a:srgbClr val="333333"/>
+                </a:solidFill>
+                <a:latin typeface="Calibri"/>
+              </a:rPr>
+              <a:t>Aviso:</a:t>
+            </a:r>
+            <a:r>
+              <a:rPr sz="2000" b="0" i="0">
+                <a:solidFill>
+                  <a:srgbClr val="333333"/>
+                </a:solidFill>
+                <a:latin typeface="Calibri"/>
+              </a:rPr>
+              <a:t> Para la Clase 12 traigan el prototipo v2 navegable </a:t>
+            </a:r>
+            <a:r>
+              <a:rPr sz="2000" b="1" i="0">
+                <a:solidFill>
+                  <a:srgbClr val="333333"/>
+                </a:solidFill>
+                <a:latin typeface="Calibri"/>
+              </a:rPr>
+              <a:t>y la prueba ya hecha con una persona ajena al equipo</a:t>
+            </a:r>
+            <a:r>
+              <a:rPr sz="2000" b="0" i="0">
+                <a:solidFill>
+                  <a:srgbClr val="333333"/>
+                </a:solidFill>
+                <a:latin typeface="Calibri"/>
+              </a:rPr>
+              <a:t>, con la lista de lo que falló. Sin esa lista no hay nada que presentar: la Clase 12 es sobre lo que salió mal, no sobre lo que se planeó.</a:t>
+            </a:r>
+          </a:p>
+          <a:p>
+            <a:pPr>
+              <a:spcAft>
+                <a:spcPts val="800"/>
+              </a:spcAft>
+            </a:pPr>
+            <a:r>
+              <a:rPr sz="2000" b="0" i="0">
+                <a:solidFill>
+                  <a:srgbClr val="333333"/>
+                </a:solidFill>
+                <a:latin typeface="Calibri"/>
+              </a:rPr>
+              <a:t>–   </a:t>
+            </a:r>
+            <a:r>
+              <a:rPr sz="2000" b="1" i="0">
+                <a:solidFill>
+                  <a:srgbClr val="333333"/>
+                </a:solidFill>
+                <a:latin typeface="Calibri"/>
+              </a:rPr>
+              <a:t>Antes de salir:</a:t>
+            </a:r>
+            <a:r>
+              <a:rPr sz="2000" b="0" i="0">
+                <a:solidFill>
+                  <a:srgbClr val="333333"/>
+                </a:solidFill>
+                <a:latin typeface="Calibri"/>
+              </a:rPr>
+              <a:t> el enlace del documento del equipo en el chat, con permiso de lectura para el docente, y el nombre del vocero de hoy.</a:t>
+            </a:r>
+          </a:p>
+        </p:txBody>
+      </p:sp>
+      <p:sp>
+        <p:nvSpPr>
+          <p:cNvPr id="6" name="TextBox 5"/>
+          <p:cNvSpPr txBox="1"/>
+          <p:nvPr/>
+        </p:nvSpPr>
+        <p:spPr>
+          <a:xfrm>
+            <a:off x="11185855" y="6473952"/>
+            <a:ext cx="640080" cy="274320"/>
+          </a:xfrm>
+          <a:prstGeom prst="rect">
+            <a:avLst/>
+          </a:prstGeom>
+          <a:noFill/>
+        </p:spPr>
+        <p:txBody>
+          <a:bodyPr wrap="square">
+            <a:spAutoFit/>
+          </a:bodyPr>
+          <a:lstStyle/>
+          <a:p>
+            <a:pPr algn="r"/>
+            <a:r>
+              <a:rPr sz="1100" b="0" i="0">
+                <a:solidFill>
+                  <a:srgbClr val="666666"/>
+                </a:solidFill>
+                <a:latin typeface="Calibri"/>
+              </a:rPr>
+              <a:t>21</a:t>
+            </a:r>
+          </a:p>
+        </p:txBody>
+      </p:sp>
+    </p:spTree>
+  </p:cSld>
+  <p:clrMapOvr>
+    <a:masterClrMapping/>
+  </p:clrMapOvr>
+</p:sld>
+</file>
+
+<file path=ppt/slides/slide22.xml><?xml version="1.0" encoding="utf-8"?>
+<p:sld xmlns:a="http://schemas.openxmlformats.org/drawingml/2006/main" xmlns:p="http://schemas.openxmlformats.org/presentationml/2006/main" xmlns:r="http://schemas.openxmlformats.org/officeDocument/2006/relationships">
+  <p:cSld>
+    <p:bg>
+      <p:bgPr>
+        <a:solidFill>
+          <a:srgbClr val="FFFFFF"/>
+        </a:solidFill>
+        <a:effectLst/>
+      </p:bgPr>
+    </p:bg>
+    <p:spTree>
+      <p:nvGrpSpPr>
+        <p:cNvPr id="1" name=""/>
+        <p:cNvGrpSpPr/>
+        <p:nvPr/>
+      </p:nvGrpSpPr>
+      <p:grpSpPr/>
+      <p:sp>
+        <p:nvSpPr>
+          <p:cNvPr id="2" name="Rectangle 1"/>
+          <p:cNvSpPr/>
+          <p:nvPr/>
+        </p:nvSpPr>
+        <p:spPr>
+          <a:xfrm>
+            <a:off x="0" y="0"/>
             <a:ext cx="12191695" cy="164592"/>
           </a:xfrm>
           <a:prstGeom prst="rect">
@@ -14146,22 +14472,6 @@
                 <a:latin typeface="Calibri"/>
               </a:rPr>
               <a:t>–   El punto que hay que hacer explícito, y que es el eje de toda la sesión: **el asistente no se equivocó por ser malo.</a:t>
-            </a:r>
-          </a:p>
-          <a:p>
-            <a:pPr>
-              <a:spcAft>
-                <a:spcPts val="800"/>
-              </a:spcAft>
-            </a:pPr>
-            <a:r>
-              <a:rPr sz="2000" b="0" i="0">
-                <a:solidFill>
-                  <a:srgbClr val="333333"/>
-                </a:solidFill>
-                <a:latin typeface="Calibri"/>
-              </a:rPr>
-              <a:t>–   Se equivocó porque nadie le dijo las restricciones.** Propuso la solución promedio de internet, que es exactamente lo que hace bien; el problema es que la solución promedio no es la solución de un proyecto con restricciones locales duras.</a:t>
             </a:r>
           </a:p>
         </p:txBody>

--- a/Introduccion a la Ingenieria/Clases/Clase 11 - Taller de prototipado inicial con IA/Presentacion.pptx
+++ b/Introduccion a la Ingenieria/Clases/Clase 11 - Taller de prototipado inicial con IA/Presentacion.pptx
@@ -27,6 +27,8 @@
     <p:sldId id="275" r:id="rId26"/>
     <p:sldId id="276" r:id="rId27"/>
     <p:sldId id="277" r:id="rId28"/>
+    <p:sldId id="278" r:id="rId29"/>
+    <p:sldId id="279" r:id="rId30"/>
   </p:sldIdLst>
   <p:sldSz cx="12191695" cy="6858000" type="screen4x3"/>
   <p:notesSz cx="6858000" cy="9144000"/>
@@ -6191,7 +6193,7 @@
         <p:spPr>
           <a:xfrm>
             <a:off x="0" y="0"/>
-            <a:ext cx="12191695" cy="1170432"/>
+            <a:ext cx="12191695" cy="960120"/>
           </a:xfrm>
           <a:prstGeom prst="rect">
             <a:avLst/>
@@ -6233,7 +6235,7 @@
         </p:nvSpPr>
         <p:spPr>
           <a:xfrm>
-            <a:off x="0" y="1170432"/>
+            <a:off x="0" y="960120"/>
             <a:ext cx="12191695" cy="41148"/>
           </a:xfrm>
           <a:prstGeom prst="rect">
@@ -6277,7 +6279,7 @@
         <p:spPr>
           <a:xfrm>
             <a:off x="457200" y="164592"/>
-            <a:ext cx="11277295" cy="384048"/>
+            <a:ext cx="11277295" cy="502920"/>
           </a:xfrm>
           <a:prstGeom prst="rect">
             <a:avLst/>
@@ -6297,55 +6299,21 @@
                 </a:solidFill>
                 <a:latin typeface="Calibri"/>
               </a:rPr>
-              <a:t>Taller de hoy: Prototipo v2 con IA</a:t>
-            </a:r>
-          </a:p>
-        </p:txBody>
-      </p:sp>
-      <p:sp>
-        <p:nvSpPr>
-          <p:cNvPr id="5" name="TextBox 4"/>
-          <p:cNvSpPr txBox="1"/>
-          <p:nvPr/>
-        </p:nvSpPr>
-        <p:spPr>
-          <a:xfrm>
-            <a:off x="457200" y="566928"/>
-            <a:ext cx="11277295" cy="411480"/>
-          </a:xfrm>
-          <a:prstGeom prst="rect">
-            <a:avLst/>
-          </a:prstGeom>
-          <a:noFill/>
-        </p:spPr>
-        <p:txBody>
-          <a:bodyPr wrap="square">
-            <a:spAutoFit/>
-          </a:bodyPr>
-          <a:lstStyle/>
-          <a:p>
-            <a:r>
-              <a:rPr sz="1400" b="0" i="0">
-                <a:solidFill>
-                  <a:srgbClr val="B8D8EE"/>
-                </a:solidFill>
-                <a:latin typeface="Calibri"/>
-              </a:rPr>
-              <a:t>27 min en equipos · 27 min: prompt, variantes, elección, correcciones y registro · prototipo v2 + registro de prompt, variantes, correcciones y descartes</a:t>
-            </a:r>
-          </a:p>
-        </p:txBody>
-      </p:sp>
-      <p:sp>
-        <p:nvSpPr>
-          <p:cNvPr id="6" name="Rounded Rectangle 5"/>
+              <a:t>Plantilla del entregable: los 5 bloques</a:t>
+            </a:r>
+          </a:p>
+        </p:txBody>
+      </p:sp>
+      <p:sp>
+        <p:nvSpPr>
+          <p:cNvPr id="5" name="Rounded Rectangle 4"/>
           <p:cNvSpPr/>
           <p:nvPr/>
         </p:nvSpPr>
         <p:spPr>
           <a:xfrm>
-            <a:off x="457200" y="1472184"/>
-            <a:ext cx="11277295" cy="566928"/>
+            <a:off x="457200" y="1261872"/>
+            <a:ext cx="11277295" cy="5093208"/>
           </a:xfrm>
           <a:prstGeom prst="roundRect">
             <a:avLst>
@@ -6353,7 +6321,7 @@
             </a:avLst>
           </a:prstGeom>
           <a:solidFill>
-            <a:srgbClr val="F2F2F2"/>
+            <a:srgbClr val="1E2A38"/>
           </a:solidFill>
           <a:ln>
             <a:noFill/>
@@ -6383,25 +6351,23 @@
       </p:sp>
       <p:sp>
         <p:nvSpPr>
-          <p:cNvPr id="7" name="Rectangle 6"/>
+          <p:cNvPr id="6" name="Rectangle 5"/>
           <p:cNvSpPr/>
           <p:nvPr/>
         </p:nvSpPr>
         <p:spPr>
           <a:xfrm>
-            <a:off x="640080" y="1618487"/>
-            <a:ext cx="274320" cy="274320"/>
+            <a:off x="457200" y="1261872"/>
+            <a:ext cx="11277295" cy="320040"/>
           </a:xfrm>
           <a:prstGeom prst="rect">
             <a:avLst/>
           </a:prstGeom>
           <a:solidFill>
-            <a:srgbClr val="FFFFFF"/>
+            <a:srgbClr val="095292"/>
           </a:solidFill>
           <a:ln>
-            <a:solidFill>
-              <a:srgbClr val="333333"/>
-            </a:solidFill>
+            <a:noFill/>
           </a:ln>
         </p:spPr>
         <p:style>
@@ -6428,859 +6394,222 @@
       </p:sp>
       <p:sp>
         <p:nvSpPr>
-          <p:cNvPr id="8" name="Rectangle 7"/>
-          <p:cNvSpPr/>
-          <p:nvPr/>
-        </p:nvSpPr>
-        <p:spPr>
-          <a:xfrm>
-            <a:off x="640080" y="1618487"/>
-            <a:ext cx="73152" cy="274320"/>
-          </a:xfrm>
-          <a:prstGeom prst="rect">
-            <a:avLst/>
-          </a:prstGeom>
-          <a:solidFill>
-            <a:srgbClr val="269CCB"/>
-          </a:solidFill>
-          <a:ln>
-            <a:noFill/>
-          </a:ln>
-        </p:spPr>
-        <p:style>
-          <a:lnRef idx="1">
-            <a:schemeClr val="accent1"/>
-          </a:lnRef>
-          <a:fillRef idx="3">
-            <a:schemeClr val="accent1"/>
-          </a:fillRef>
-          <a:effectRef idx="2">
-            <a:schemeClr val="accent1"/>
-          </a:effectRef>
-          <a:fontRef idx="minor">
-            <a:schemeClr val="lt1"/>
-          </a:fontRef>
-        </p:style>
-        <p:txBody>
-          <a:bodyPr rtlCol="0" anchor="ctr"/>
-          <a:lstStyle/>
-          <a:p>
-            <a:pPr algn="ctr"/>
+          <p:cNvPr id="7" name="TextBox 6"/>
+          <p:cNvSpPr txBox="1"/>
+          <p:nvPr/>
+        </p:nvSpPr>
+        <p:spPr>
+          <a:xfrm>
+            <a:off x="685800" y="1307592"/>
+            <a:ext cx="10820095" cy="256032"/>
+          </a:xfrm>
+          <a:prstGeom prst="rect">
+            <a:avLst/>
+          </a:prstGeom>
+          <a:noFill/>
+        </p:spPr>
+        <p:txBody>
+          <a:bodyPr wrap="square" anchor="ctr"/>
+          <a:lstStyle/>
+          <a:p>
+            <a:r>
+              <a:rPr sz="1000" b="1" i="0">
+                <a:solidFill>
+                  <a:srgbClr val="269CCB"/>
+                </a:solidFill>
+                <a:latin typeface="Calibri"/>
+              </a:rPr>
+              <a:t>● ● ●</a:t>
+            </a:r>
+          </a:p>
+        </p:txBody>
+      </p:sp>
+      <p:sp>
+        <p:nvSpPr>
+          <p:cNvPr id="8" name="TextBox 7"/>
+          <p:cNvSpPr txBox="1"/>
+          <p:nvPr/>
+        </p:nvSpPr>
+        <p:spPr>
+          <a:xfrm>
+            <a:off x="777240" y="1719072"/>
+            <a:ext cx="10637215" cy="4453128"/>
+          </a:xfrm>
+          <a:prstGeom prst="rect">
+            <a:avLst/>
+          </a:prstGeom>
+          <a:noFill/>
+        </p:spPr>
+        <p:txBody>
+          <a:bodyPr wrap="square">
+            <a:spAutoFit/>
+          </a:bodyPr>
+          <a:lstStyle/>
+          <a:p>
+            <a:pPr>
+              <a:spcAft>
+                <a:spcPts val="400"/>
+              </a:spcAft>
+            </a:pPr>
+            <a:r>
+              <a:rPr sz="1400" b="0" i="0">
+                <a:solidFill>
+                  <a:srgbClr val="FFFFFF"/>
+                </a:solidFill>
+                <a:latin typeface="Calibri"/>
+              </a:rPr>
+              <a:t># Prototipo v2 con IA</a:t>
+            </a:r>
+          </a:p>
+          <a:p>
+            <a:pPr>
+              <a:spcAft>
+                <a:spcPts val="400"/>
+              </a:spcAft>
+            </a:pPr>
+            <a:r>
+              <a:rPr sz="1400" b="0" i="0">
+                <a:solidFill>
+                  <a:srgbClr val="FFFFFF"/>
+                </a:solidFill>
+                <a:latin typeface="Calibri"/>
+              </a:rPr>
+              <a:t># Documento del equipo · un bloque por titulo, sin cambiar los nombres</a:t>
+            </a:r>
+          </a:p>
+          <a:p>
+            <a:pPr>
+              <a:spcAft>
+                <a:spcPts val="400"/>
+              </a:spcAft>
+            </a:pPr>
+            <a:r>
+              <a:rPr sz="1400" b="0" i="0">
+                <a:solidFill>
+                  <a:srgbClr val="FFFFFF"/>
+                </a:solidFill>
+                <a:latin typeface="Calibri"/>
+              </a:rPr>
+              <a:t/>
+            </a:r>
+          </a:p>
+          <a:p>
+            <a:pPr>
+              <a:spcAft>
+                <a:spcPts val="400"/>
+              </a:spcAft>
+            </a:pPr>
+            <a:r>
+              <a:rPr sz="1400" b="0" i="0">
+                <a:solidFill>
+                  <a:srgbClr val="FFFFFF"/>
+                </a:solidFill>
+                <a:latin typeface="Calibri"/>
+              </a:rPr>
+              <a:t>## 1. EL PROMPT QUE USAMOS</a:t>
+            </a:r>
+          </a:p>
+          <a:p>
+            <a:pPr>
+              <a:spcAft>
+                <a:spcPts val="400"/>
+              </a:spcAft>
+            </a:pPr>
+            <a:r>
+              <a:rPr sz="1400" b="0" i="0">
+                <a:solidFill>
+                  <a:srgbClr val="FFFFFF"/>
+                </a:solidFill>
+                <a:latin typeface="Calibri"/>
+              </a:rPr>
+              <a:t>## 2. LAS TRES VARIANTES</a:t>
+            </a:r>
+          </a:p>
+          <a:p>
+            <a:pPr>
+              <a:spcAft>
+                <a:spcPts val="400"/>
+              </a:spcAft>
+            </a:pPr>
+            <a:r>
+              <a:rPr sz="1400" b="0" i="0">
+                <a:solidFill>
+                  <a:srgbClr val="FFFFFF"/>
+                </a:solidFill>
+                <a:latin typeface="Calibri"/>
+              </a:rPr>
+              <a:t>## 3. LA QUE ELEGIMOS Y POR QUÉ</a:t>
+            </a:r>
+          </a:p>
+          <a:p>
+            <a:pPr>
+              <a:spcAft>
+                <a:spcPts val="400"/>
+              </a:spcAft>
+            </a:pPr>
+            <a:r>
+              <a:rPr sz="1400" b="0" i="0">
+                <a:solidFill>
+                  <a:srgbClr val="FFFFFF"/>
+                </a:solidFill>
+                <a:latin typeface="Calibri"/>
+              </a:rPr>
+              <a:t>## 4. LO QUE CORREGIMOS A MANO</a:t>
+            </a:r>
+          </a:p>
+          <a:p>
+            <a:pPr>
+              <a:spcAft>
+                <a:spcPts val="400"/>
+              </a:spcAft>
+            </a:pPr>
+            <a:r>
+              <a:rPr sz="1400" b="0" i="0">
+                <a:solidFill>
+                  <a:srgbClr val="FFFFFF"/>
+                </a:solidFill>
+                <a:latin typeface="Calibri"/>
+              </a:rPr>
+              <a:t>## 5. LO QUE DESCARTAMOS Y POR QUÉ</a:t>
+            </a:r>
+          </a:p>
+          <a:p>
+            <a:pPr>
+              <a:spcAft>
+                <a:spcPts val="400"/>
+              </a:spcAft>
+            </a:pPr>
+            <a:r>
+              <a:rPr sz="1400" b="0" i="0">
+                <a:solidFill>
+                  <a:srgbClr val="FFFFFF"/>
+                </a:solidFill>
+                <a:latin typeface="Calibri"/>
+              </a:rPr>
+              <a:t/>
+            </a:r>
+          </a:p>
+          <a:p>
+            <a:pPr>
+              <a:spcAft>
+                <a:spcPts val="400"/>
+              </a:spcAft>
+            </a:pPr>
+            <a:r>
+              <a:rPr sz="1400" b="0" i="0">
+                <a:solidFill>
+                  <a:srgbClr val="FFFFFF"/>
+                </a:solidFill>
+                <a:latin typeface="Calibri"/>
+              </a:rPr>
+              <a:t># Los titulos van TAL CUAL: son con los que se califica.</a:t>
+            </a:r>
           </a:p>
         </p:txBody>
       </p:sp>
       <p:sp>
         <p:nvSpPr>
           <p:cNvPr id="9" name="TextBox 8"/>
-          <p:cNvSpPr txBox="1"/>
-          <p:nvPr/>
-        </p:nvSpPr>
-        <p:spPr>
-          <a:xfrm>
-            <a:off x="1097280" y="1563624"/>
-            <a:ext cx="10362895" cy="402336"/>
-          </a:xfrm>
-          <a:prstGeom prst="rect">
-            <a:avLst/>
-          </a:prstGeom>
-          <a:noFill/>
-        </p:spPr>
-        <p:txBody>
-          <a:bodyPr wrap="square" anchor="ctr"/>
-          <a:lstStyle/>
-          <a:p>
-            <a:r>
-              <a:rPr sz="1500" b="1" i="0">
-                <a:solidFill>
-                  <a:srgbClr val="333333"/>
-                </a:solidFill>
-                <a:latin typeface="Calibri"/>
-              </a:rPr>
-              <a:t>EL PROMPT QUE USAMOS</a:t>
-            </a:r>
-            <a:r>
-              <a:rPr sz="1500" b="0" i="0">
-                <a:solidFill>
-                  <a:srgbClr val="333333"/>
-                </a:solidFill>
-                <a:latin typeface="Calibri"/>
-              </a:rPr>
-              <a:t> — El prompt completo, copiado tal cual. Tiene que incluir </a:t>
-            </a:r>
-            <a:r>
-              <a:rPr sz="1500" b="1" i="0">
-                <a:solidFill>
-                  <a:srgbClr val="333333"/>
-                </a:solidFill>
-                <a:latin typeface="Calibri"/>
-              </a:rPr>
-              <a:t>el problema en una frase, quién lo usa, las restricciones y lo que está prohibido proponer</a:t>
-            </a:r>
-            <a:r>
-              <a:rPr sz="1500" b="0" i="0">
-                <a:solidFill>
-                  <a:srgbClr val="333333"/>
-                </a:solidFill>
-                <a:latin typeface="Calibri"/>
-              </a:rPr>
-              <a:t>.</a:t>
-            </a:r>
-          </a:p>
-        </p:txBody>
-      </p:sp>
-      <p:sp>
-        <p:nvSpPr>
-          <p:cNvPr id="10" name="Rounded Rectangle 9"/>
-          <p:cNvSpPr/>
-          <p:nvPr/>
-        </p:nvSpPr>
-        <p:spPr>
-          <a:xfrm>
-            <a:off x="457200" y="2148839"/>
-            <a:ext cx="11277295" cy="566928"/>
-          </a:xfrm>
-          <a:prstGeom prst="roundRect">
-            <a:avLst>
-              <a:gd name="adj" fmla="val 12000"/>
-            </a:avLst>
-          </a:prstGeom>
-          <a:solidFill>
-            <a:srgbClr val="F2F2F2"/>
-          </a:solidFill>
-          <a:ln>
-            <a:noFill/>
-          </a:ln>
-        </p:spPr>
-        <p:style>
-          <a:lnRef idx="1">
-            <a:schemeClr val="accent1"/>
-          </a:lnRef>
-          <a:fillRef idx="3">
-            <a:schemeClr val="accent1"/>
-          </a:fillRef>
-          <a:effectRef idx="2">
-            <a:schemeClr val="accent1"/>
-          </a:effectRef>
-          <a:fontRef idx="minor">
-            <a:schemeClr val="lt1"/>
-          </a:fontRef>
-        </p:style>
-        <p:txBody>
-          <a:bodyPr rtlCol="0" anchor="ctr"/>
-          <a:lstStyle/>
-          <a:p>
-            <a:pPr algn="ctr"/>
-          </a:p>
-        </p:txBody>
-      </p:sp>
-      <p:sp>
-        <p:nvSpPr>
-          <p:cNvPr id="11" name="Rectangle 10"/>
-          <p:cNvSpPr/>
-          <p:nvPr/>
-        </p:nvSpPr>
-        <p:spPr>
-          <a:xfrm>
-            <a:off x="640080" y="2295144"/>
-            <a:ext cx="274320" cy="274320"/>
-          </a:xfrm>
-          <a:prstGeom prst="rect">
-            <a:avLst/>
-          </a:prstGeom>
-          <a:solidFill>
-            <a:srgbClr val="FFFFFF"/>
-          </a:solidFill>
-          <a:ln>
-            <a:solidFill>
-              <a:srgbClr val="333333"/>
-            </a:solidFill>
-          </a:ln>
-        </p:spPr>
-        <p:style>
-          <a:lnRef idx="1">
-            <a:schemeClr val="accent1"/>
-          </a:lnRef>
-          <a:fillRef idx="3">
-            <a:schemeClr val="accent1"/>
-          </a:fillRef>
-          <a:effectRef idx="2">
-            <a:schemeClr val="accent1"/>
-          </a:effectRef>
-          <a:fontRef idx="minor">
-            <a:schemeClr val="lt1"/>
-          </a:fontRef>
-        </p:style>
-        <p:txBody>
-          <a:bodyPr rtlCol="0" anchor="ctr"/>
-          <a:lstStyle/>
-          <a:p>
-            <a:pPr algn="ctr"/>
-          </a:p>
-        </p:txBody>
-      </p:sp>
-      <p:sp>
-        <p:nvSpPr>
-          <p:cNvPr id="12" name="Rectangle 11"/>
-          <p:cNvSpPr/>
-          <p:nvPr/>
-        </p:nvSpPr>
-        <p:spPr>
-          <a:xfrm>
-            <a:off x="640080" y="2295144"/>
-            <a:ext cx="73152" cy="274320"/>
-          </a:xfrm>
-          <a:prstGeom prst="rect">
-            <a:avLst/>
-          </a:prstGeom>
-          <a:solidFill>
-            <a:srgbClr val="269CCB"/>
-          </a:solidFill>
-          <a:ln>
-            <a:noFill/>
-          </a:ln>
-        </p:spPr>
-        <p:style>
-          <a:lnRef idx="1">
-            <a:schemeClr val="accent1"/>
-          </a:lnRef>
-          <a:fillRef idx="3">
-            <a:schemeClr val="accent1"/>
-          </a:fillRef>
-          <a:effectRef idx="2">
-            <a:schemeClr val="accent1"/>
-          </a:effectRef>
-          <a:fontRef idx="minor">
-            <a:schemeClr val="lt1"/>
-          </a:fontRef>
-        </p:style>
-        <p:txBody>
-          <a:bodyPr rtlCol="0" anchor="ctr"/>
-          <a:lstStyle/>
-          <a:p>
-            <a:pPr algn="ctr"/>
-          </a:p>
-        </p:txBody>
-      </p:sp>
-      <p:sp>
-        <p:nvSpPr>
-          <p:cNvPr id="13" name="TextBox 12"/>
-          <p:cNvSpPr txBox="1"/>
-          <p:nvPr/>
-        </p:nvSpPr>
-        <p:spPr>
-          <a:xfrm>
-            <a:off x="1097280" y="2240279"/>
-            <a:ext cx="10362895" cy="402336"/>
-          </a:xfrm>
-          <a:prstGeom prst="rect">
-            <a:avLst/>
-          </a:prstGeom>
-          <a:noFill/>
-        </p:spPr>
-        <p:txBody>
-          <a:bodyPr wrap="square" anchor="ctr"/>
-          <a:lstStyle/>
-          <a:p>
-            <a:r>
-              <a:rPr sz="1500" b="1" i="0">
-                <a:solidFill>
-                  <a:srgbClr val="333333"/>
-                </a:solidFill>
-                <a:latin typeface="Calibri"/>
-              </a:rPr>
-              <a:t>LAS TRES VARIANTES</a:t>
-            </a:r>
-            <a:r>
-              <a:rPr sz="1500" b="0" i="0">
-                <a:solidFill>
-                  <a:srgbClr val="333333"/>
-                </a:solidFill>
-                <a:latin typeface="Calibri"/>
-              </a:rPr>
-              <a:t> — Las tres opciones que devolvió, resumidas en dos o tres líneas cada una. </a:t>
-            </a:r>
-            <a:r>
-              <a:rPr sz="1500" b="1" i="0">
-                <a:solidFill>
-                  <a:srgbClr val="333333"/>
-                </a:solidFill>
-                <a:latin typeface="Calibri"/>
-              </a:rPr>
-              <a:t>No una sola respuesta</a:t>
-            </a:r>
-            <a:r>
-              <a:rPr sz="1500" b="0" i="0">
-                <a:solidFill>
-                  <a:srgbClr val="333333"/>
-                </a:solidFill>
-                <a:latin typeface="Calibri"/>
-              </a:rPr>
-              <a:t>: tres.</a:t>
-            </a:r>
-          </a:p>
-        </p:txBody>
-      </p:sp>
-      <p:sp>
-        <p:nvSpPr>
-          <p:cNvPr id="14" name="Rounded Rectangle 13"/>
-          <p:cNvSpPr/>
-          <p:nvPr/>
-        </p:nvSpPr>
-        <p:spPr>
-          <a:xfrm>
-            <a:off x="457200" y="2825496"/>
-            <a:ext cx="11277295" cy="566928"/>
-          </a:xfrm>
-          <a:prstGeom prst="roundRect">
-            <a:avLst>
-              <a:gd name="adj" fmla="val 12000"/>
-            </a:avLst>
-          </a:prstGeom>
-          <a:solidFill>
-            <a:srgbClr val="F2F2F2"/>
-          </a:solidFill>
-          <a:ln>
-            <a:noFill/>
-          </a:ln>
-        </p:spPr>
-        <p:style>
-          <a:lnRef idx="1">
-            <a:schemeClr val="accent1"/>
-          </a:lnRef>
-          <a:fillRef idx="3">
-            <a:schemeClr val="accent1"/>
-          </a:fillRef>
-          <a:effectRef idx="2">
-            <a:schemeClr val="accent1"/>
-          </a:effectRef>
-          <a:fontRef idx="minor">
-            <a:schemeClr val="lt1"/>
-          </a:fontRef>
-        </p:style>
-        <p:txBody>
-          <a:bodyPr rtlCol="0" anchor="ctr"/>
-          <a:lstStyle/>
-          <a:p>
-            <a:pPr algn="ctr"/>
-          </a:p>
-        </p:txBody>
-      </p:sp>
-      <p:sp>
-        <p:nvSpPr>
-          <p:cNvPr id="15" name="Rectangle 14"/>
-          <p:cNvSpPr/>
-          <p:nvPr/>
-        </p:nvSpPr>
-        <p:spPr>
-          <a:xfrm>
-            <a:off x="640080" y="2971800"/>
-            <a:ext cx="274320" cy="274320"/>
-          </a:xfrm>
-          <a:prstGeom prst="rect">
-            <a:avLst/>
-          </a:prstGeom>
-          <a:solidFill>
-            <a:srgbClr val="FFFFFF"/>
-          </a:solidFill>
-          <a:ln>
-            <a:solidFill>
-              <a:srgbClr val="333333"/>
-            </a:solidFill>
-          </a:ln>
-        </p:spPr>
-        <p:style>
-          <a:lnRef idx="1">
-            <a:schemeClr val="accent1"/>
-          </a:lnRef>
-          <a:fillRef idx="3">
-            <a:schemeClr val="accent1"/>
-          </a:fillRef>
-          <a:effectRef idx="2">
-            <a:schemeClr val="accent1"/>
-          </a:effectRef>
-          <a:fontRef idx="minor">
-            <a:schemeClr val="lt1"/>
-          </a:fontRef>
-        </p:style>
-        <p:txBody>
-          <a:bodyPr rtlCol="0" anchor="ctr"/>
-          <a:lstStyle/>
-          <a:p>
-            <a:pPr algn="ctr"/>
-          </a:p>
-        </p:txBody>
-      </p:sp>
-      <p:sp>
-        <p:nvSpPr>
-          <p:cNvPr id="16" name="Rectangle 15"/>
-          <p:cNvSpPr/>
-          <p:nvPr/>
-        </p:nvSpPr>
-        <p:spPr>
-          <a:xfrm>
-            <a:off x="640080" y="2971800"/>
-            <a:ext cx="73152" cy="274320"/>
-          </a:xfrm>
-          <a:prstGeom prst="rect">
-            <a:avLst/>
-          </a:prstGeom>
-          <a:solidFill>
-            <a:srgbClr val="269CCB"/>
-          </a:solidFill>
-          <a:ln>
-            <a:noFill/>
-          </a:ln>
-        </p:spPr>
-        <p:style>
-          <a:lnRef idx="1">
-            <a:schemeClr val="accent1"/>
-          </a:lnRef>
-          <a:fillRef idx="3">
-            <a:schemeClr val="accent1"/>
-          </a:fillRef>
-          <a:effectRef idx="2">
-            <a:schemeClr val="accent1"/>
-          </a:effectRef>
-          <a:fontRef idx="minor">
-            <a:schemeClr val="lt1"/>
-          </a:fontRef>
-        </p:style>
-        <p:txBody>
-          <a:bodyPr rtlCol="0" anchor="ctr"/>
-          <a:lstStyle/>
-          <a:p>
-            <a:pPr algn="ctr"/>
-          </a:p>
-        </p:txBody>
-      </p:sp>
-      <p:sp>
-        <p:nvSpPr>
-          <p:cNvPr id="17" name="TextBox 16"/>
-          <p:cNvSpPr txBox="1"/>
-          <p:nvPr/>
-        </p:nvSpPr>
-        <p:spPr>
-          <a:xfrm>
-            <a:off x="1097280" y="2916936"/>
-            <a:ext cx="10362895" cy="402336"/>
-          </a:xfrm>
-          <a:prstGeom prst="rect">
-            <a:avLst/>
-          </a:prstGeom>
-          <a:noFill/>
-        </p:spPr>
-        <p:txBody>
-          <a:bodyPr wrap="square" anchor="ctr"/>
-          <a:lstStyle/>
-          <a:p>
-            <a:r>
-              <a:rPr sz="1500" b="1" i="0">
-                <a:solidFill>
-                  <a:srgbClr val="333333"/>
-                </a:solidFill>
-                <a:latin typeface="Calibri"/>
-              </a:rPr>
-              <a:t>LA QUE ELEGIMOS Y POR QUÉ</a:t>
-            </a:r>
-            <a:r>
-              <a:rPr sz="1500" b="0" i="0">
-                <a:solidFill>
-                  <a:srgbClr val="333333"/>
-                </a:solidFill>
-                <a:latin typeface="Calibri"/>
-              </a:rPr>
-              <a:t> — Cuál eligieron y el criterio, apoyado en sus </a:t>
-            </a:r>
-            <a:r>
-              <a:rPr sz="1500" b="1" i="0">
-                <a:solidFill>
-                  <a:srgbClr val="333333"/>
-                </a:solidFill>
-                <a:latin typeface="Calibri"/>
-              </a:rPr>
-              <a:t>requisitos y restricciones</a:t>
-            </a:r>
-            <a:r>
-              <a:rPr sz="1500" b="0" i="0">
-                <a:solidFill>
-                  <a:srgbClr val="333333"/>
-                </a:solidFill>
-                <a:latin typeface="Calibri"/>
-              </a:rPr>
-              <a:t> — no en «nos gustó más».</a:t>
-            </a:r>
-          </a:p>
-        </p:txBody>
-      </p:sp>
-      <p:sp>
-        <p:nvSpPr>
-          <p:cNvPr id="18" name="Rounded Rectangle 17"/>
-          <p:cNvSpPr/>
-          <p:nvPr/>
-        </p:nvSpPr>
-        <p:spPr>
-          <a:xfrm>
-            <a:off x="457200" y="3502152"/>
-            <a:ext cx="11277295" cy="566928"/>
-          </a:xfrm>
-          <a:prstGeom prst="roundRect">
-            <a:avLst>
-              <a:gd name="adj" fmla="val 12000"/>
-            </a:avLst>
-          </a:prstGeom>
-          <a:solidFill>
-            <a:srgbClr val="F2F2F2"/>
-          </a:solidFill>
-          <a:ln>
-            <a:noFill/>
-          </a:ln>
-        </p:spPr>
-        <p:style>
-          <a:lnRef idx="1">
-            <a:schemeClr val="accent1"/>
-          </a:lnRef>
-          <a:fillRef idx="3">
-            <a:schemeClr val="accent1"/>
-          </a:fillRef>
-          <a:effectRef idx="2">
-            <a:schemeClr val="accent1"/>
-          </a:effectRef>
-          <a:fontRef idx="minor">
-            <a:schemeClr val="lt1"/>
-          </a:fontRef>
-        </p:style>
-        <p:txBody>
-          <a:bodyPr rtlCol="0" anchor="ctr"/>
-          <a:lstStyle/>
-          <a:p>
-            <a:pPr algn="ctr"/>
-          </a:p>
-        </p:txBody>
-      </p:sp>
-      <p:sp>
-        <p:nvSpPr>
-          <p:cNvPr id="19" name="Rectangle 18"/>
-          <p:cNvSpPr/>
-          <p:nvPr/>
-        </p:nvSpPr>
-        <p:spPr>
-          <a:xfrm>
-            <a:off x="640080" y="3648456"/>
-            <a:ext cx="274320" cy="274320"/>
-          </a:xfrm>
-          <a:prstGeom prst="rect">
-            <a:avLst/>
-          </a:prstGeom>
-          <a:solidFill>
-            <a:srgbClr val="FFFFFF"/>
-          </a:solidFill>
-          <a:ln>
-            <a:solidFill>
-              <a:srgbClr val="333333"/>
-            </a:solidFill>
-          </a:ln>
-        </p:spPr>
-        <p:style>
-          <a:lnRef idx="1">
-            <a:schemeClr val="accent1"/>
-          </a:lnRef>
-          <a:fillRef idx="3">
-            <a:schemeClr val="accent1"/>
-          </a:fillRef>
-          <a:effectRef idx="2">
-            <a:schemeClr val="accent1"/>
-          </a:effectRef>
-          <a:fontRef idx="minor">
-            <a:schemeClr val="lt1"/>
-          </a:fontRef>
-        </p:style>
-        <p:txBody>
-          <a:bodyPr rtlCol="0" anchor="ctr"/>
-          <a:lstStyle/>
-          <a:p>
-            <a:pPr algn="ctr"/>
-          </a:p>
-        </p:txBody>
-      </p:sp>
-      <p:sp>
-        <p:nvSpPr>
-          <p:cNvPr id="20" name="Rectangle 19"/>
-          <p:cNvSpPr/>
-          <p:nvPr/>
-        </p:nvSpPr>
-        <p:spPr>
-          <a:xfrm>
-            <a:off x="640080" y="3648456"/>
-            <a:ext cx="73152" cy="274320"/>
-          </a:xfrm>
-          <a:prstGeom prst="rect">
-            <a:avLst/>
-          </a:prstGeom>
-          <a:solidFill>
-            <a:srgbClr val="269CCB"/>
-          </a:solidFill>
-          <a:ln>
-            <a:noFill/>
-          </a:ln>
-        </p:spPr>
-        <p:style>
-          <a:lnRef idx="1">
-            <a:schemeClr val="accent1"/>
-          </a:lnRef>
-          <a:fillRef idx="3">
-            <a:schemeClr val="accent1"/>
-          </a:fillRef>
-          <a:effectRef idx="2">
-            <a:schemeClr val="accent1"/>
-          </a:effectRef>
-          <a:fontRef idx="minor">
-            <a:schemeClr val="lt1"/>
-          </a:fontRef>
-        </p:style>
-        <p:txBody>
-          <a:bodyPr rtlCol="0" anchor="ctr"/>
-          <a:lstStyle/>
-          <a:p>
-            <a:pPr algn="ctr"/>
-          </a:p>
-        </p:txBody>
-      </p:sp>
-      <p:sp>
-        <p:nvSpPr>
-          <p:cNvPr id="21" name="TextBox 20"/>
-          <p:cNvSpPr txBox="1"/>
-          <p:nvPr/>
-        </p:nvSpPr>
-        <p:spPr>
-          <a:xfrm>
-            <a:off x="1097280" y="3593592"/>
-            <a:ext cx="10362895" cy="402336"/>
-          </a:xfrm>
-          <a:prstGeom prst="rect">
-            <a:avLst/>
-          </a:prstGeom>
-          <a:noFill/>
-        </p:spPr>
-        <p:txBody>
-          <a:bodyPr wrap="square" anchor="ctr"/>
-          <a:lstStyle/>
-          <a:p>
-            <a:r>
-              <a:rPr sz="1500" b="1" i="0">
-                <a:solidFill>
-                  <a:srgbClr val="333333"/>
-                </a:solidFill>
-                <a:latin typeface="Calibri"/>
-              </a:rPr>
-              <a:t>LO QUE CORREGIMOS A MANO</a:t>
-            </a:r>
-            <a:r>
-              <a:rPr sz="1500" b="0" i="0">
-                <a:solidFill>
-                  <a:srgbClr val="333333"/>
-                </a:solidFill>
-                <a:latin typeface="Calibri"/>
-              </a:rPr>
-              <a:t> — Cada corrección con </a:t>
-            </a:r>
-            <a:r>
-              <a:rPr sz="1500" b="1" i="0">
-                <a:solidFill>
-                  <a:srgbClr val="333333"/>
-                </a:solidFill>
-                <a:latin typeface="Calibri"/>
-              </a:rPr>
-              <a:t>la razón y la sesión de donde sale</a:t>
-            </a:r>
-            <a:r>
-              <a:rPr sz="1500" b="0" i="0">
-                <a:solidFill>
-                  <a:srgbClr val="333333"/>
-                </a:solidFill>
-                <a:latin typeface="Calibri"/>
-              </a:rPr>
-              <a:t>: qué proponía la IA, qué quedó, y por qué. Es el bloque que más pesa.</a:t>
-            </a:r>
-          </a:p>
-        </p:txBody>
-      </p:sp>
-      <p:sp>
-        <p:nvSpPr>
-          <p:cNvPr id="22" name="Rounded Rectangle 21"/>
-          <p:cNvSpPr/>
-          <p:nvPr/>
-        </p:nvSpPr>
-        <p:spPr>
-          <a:xfrm>
-            <a:off x="457200" y="4178808"/>
-            <a:ext cx="11277295" cy="566928"/>
-          </a:xfrm>
-          <a:prstGeom prst="roundRect">
-            <a:avLst>
-              <a:gd name="adj" fmla="val 12000"/>
-            </a:avLst>
-          </a:prstGeom>
-          <a:solidFill>
-            <a:srgbClr val="F2F2F2"/>
-          </a:solidFill>
-          <a:ln>
-            <a:noFill/>
-          </a:ln>
-        </p:spPr>
-        <p:style>
-          <a:lnRef idx="1">
-            <a:schemeClr val="accent1"/>
-          </a:lnRef>
-          <a:fillRef idx="3">
-            <a:schemeClr val="accent1"/>
-          </a:fillRef>
-          <a:effectRef idx="2">
-            <a:schemeClr val="accent1"/>
-          </a:effectRef>
-          <a:fontRef idx="minor">
-            <a:schemeClr val="lt1"/>
-          </a:fontRef>
-        </p:style>
-        <p:txBody>
-          <a:bodyPr rtlCol="0" anchor="ctr"/>
-          <a:lstStyle/>
-          <a:p>
-            <a:pPr algn="ctr"/>
-          </a:p>
-        </p:txBody>
-      </p:sp>
-      <p:sp>
-        <p:nvSpPr>
-          <p:cNvPr id="23" name="Rectangle 22"/>
-          <p:cNvSpPr/>
-          <p:nvPr/>
-        </p:nvSpPr>
-        <p:spPr>
-          <a:xfrm>
-            <a:off x="640080" y="4325112"/>
-            <a:ext cx="274320" cy="274320"/>
-          </a:xfrm>
-          <a:prstGeom prst="rect">
-            <a:avLst/>
-          </a:prstGeom>
-          <a:solidFill>
-            <a:srgbClr val="FFFFFF"/>
-          </a:solidFill>
-          <a:ln>
-            <a:solidFill>
-              <a:srgbClr val="333333"/>
-            </a:solidFill>
-          </a:ln>
-        </p:spPr>
-        <p:style>
-          <a:lnRef idx="1">
-            <a:schemeClr val="accent1"/>
-          </a:lnRef>
-          <a:fillRef idx="3">
-            <a:schemeClr val="accent1"/>
-          </a:fillRef>
-          <a:effectRef idx="2">
-            <a:schemeClr val="accent1"/>
-          </a:effectRef>
-          <a:fontRef idx="minor">
-            <a:schemeClr val="lt1"/>
-          </a:fontRef>
-        </p:style>
-        <p:txBody>
-          <a:bodyPr rtlCol="0" anchor="ctr"/>
-          <a:lstStyle/>
-          <a:p>
-            <a:pPr algn="ctr"/>
-          </a:p>
-        </p:txBody>
-      </p:sp>
-      <p:sp>
-        <p:nvSpPr>
-          <p:cNvPr id="24" name="Rectangle 23"/>
-          <p:cNvSpPr/>
-          <p:nvPr/>
-        </p:nvSpPr>
-        <p:spPr>
-          <a:xfrm>
-            <a:off x="640080" y="4325112"/>
-            <a:ext cx="73152" cy="274320"/>
-          </a:xfrm>
-          <a:prstGeom prst="rect">
-            <a:avLst/>
-          </a:prstGeom>
-          <a:solidFill>
-            <a:srgbClr val="269CCB"/>
-          </a:solidFill>
-          <a:ln>
-            <a:noFill/>
-          </a:ln>
-        </p:spPr>
-        <p:style>
-          <a:lnRef idx="1">
-            <a:schemeClr val="accent1"/>
-          </a:lnRef>
-          <a:fillRef idx="3">
-            <a:schemeClr val="accent1"/>
-          </a:fillRef>
-          <a:effectRef idx="2">
-            <a:schemeClr val="accent1"/>
-          </a:effectRef>
-          <a:fontRef idx="minor">
-            <a:schemeClr val="lt1"/>
-          </a:fontRef>
-        </p:style>
-        <p:txBody>
-          <a:bodyPr rtlCol="0" anchor="ctr"/>
-          <a:lstStyle/>
-          <a:p>
-            <a:pPr algn="ctr"/>
-          </a:p>
-        </p:txBody>
-      </p:sp>
-      <p:sp>
-        <p:nvSpPr>
-          <p:cNvPr id="25" name="TextBox 24"/>
-          <p:cNvSpPr txBox="1"/>
-          <p:nvPr/>
-        </p:nvSpPr>
-        <p:spPr>
-          <a:xfrm>
-            <a:off x="1097280" y="4270248"/>
-            <a:ext cx="10362895" cy="402336"/>
-          </a:xfrm>
-          <a:prstGeom prst="rect">
-            <a:avLst/>
-          </a:prstGeom>
-          <a:noFill/>
-        </p:spPr>
-        <p:txBody>
-          <a:bodyPr wrap="square" anchor="ctr"/>
-          <a:lstStyle/>
-          <a:p>
-            <a:r>
-              <a:rPr sz="1500" b="1" i="0">
-                <a:solidFill>
-                  <a:srgbClr val="333333"/>
-                </a:solidFill>
-                <a:latin typeface="Calibri"/>
-              </a:rPr>
-              <a:t>LO QUE DESCARTAMOS Y POR QUÉ</a:t>
-            </a:r>
-            <a:r>
-              <a:rPr sz="1500" b="0" i="0">
-                <a:solidFill>
-                  <a:srgbClr val="333333"/>
-                </a:solidFill>
-                <a:latin typeface="Calibri"/>
-              </a:rPr>
-              <a:t> — Las propuestas que se rechazaron completas, y el motivo: fuera del alcance, viola una restricción, viola la ley, o consume demasiado.</a:t>
-            </a:r>
-          </a:p>
-        </p:txBody>
-      </p:sp>
-      <p:sp>
-        <p:nvSpPr>
-          <p:cNvPr id="26" name="TextBox 25"/>
           <p:cNvSpPr txBox="1"/>
           <p:nvPr/>
         </p:nvSpPr>
@@ -8376,7 +7705,7 @@
         <p:spPr>
           <a:xfrm>
             <a:off x="0" y="0"/>
-            <a:ext cx="12191695" cy="1170432"/>
+            <a:ext cx="12191695" cy="960120"/>
           </a:xfrm>
           <a:prstGeom prst="rect">
             <a:avLst/>
@@ -8418,7 +7747,7 @@
         </p:nvSpPr>
         <p:spPr>
           <a:xfrm>
-            <a:off x="0" y="1170432"/>
+            <a:off x="0" y="960120"/>
             <a:ext cx="12191695" cy="41148"/>
           </a:xfrm>
           <a:prstGeom prst="rect">
@@ -8462,7 +7791,7 @@
         <p:spPr>
           <a:xfrm>
             <a:off x="457200" y="164592"/>
-            <a:ext cx="11277295" cy="384048"/>
+            <a:ext cx="11277295" cy="502920"/>
           </a:xfrm>
           <a:prstGeom prst="rect">
             <a:avLst/>
@@ -8482,55 +7811,21 @@
                 </a:solidFill>
                 <a:latin typeface="Calibri"/>
               </a:rPr>
-              <a:t>Cómo se expone en 3 minutos</a:t>
-            </a:r>
-          </a:p>
-        </p:txBody>
-      </p:sp>
-      <p:sp>
-        <p:nvSpPr>
-          <p:cNvPr id="5" name="TextBox 4"/>
-          <p:cNvSpPr txBox="1"/>
-          <p:nvPr/>
-        </p:nvSpPr>
-        <p:spPr>
-          <a:xfrm>
-            <a:off x="457200" y="566928"/>
-            <a:ext cx="11277295" cy="411480"/>
-          </a:xfrm>
-          <a:prstGeom prst="rect">
-            <a:avLst/>
-          </a:prstGeom>
-          <a:noFill/>
-        </p:spPr>
-        <p:txBody>
-          <a:bodyPr wrap="square">
-            <a:spAutoFit/>
-          </a:bodyPr>
-          <a:lstStyle/>
-          <a:p>
-            <a:r>
-              <a:rPr sz="1400" b="0" i="0">
-                <a:solidFill>
-                  <a:srgbClr val="B8D8EE"/>
-                </a:solidFill>
-                <a:latin typeface="Calibri"/>
-              </a:rPr>
-              <a:t>Habla el vocero con la pantalla ya compartida · cronómetro en pantalla · se corta al llegar a cero</a:t>
-            </a:r>
-          </a:p>
-        </p:txBody>
-      </p:sp>
-      <p:sp>
-        <p:nvSpPr>
-          <p:cNvPr id="6" name="Rounded Rectangle 5"/>
+              <a:t>Guion de la exposicion, con tiempos</a:t>
+            </a:r>
+          </a:p>
+        </p:txBody>
+      </p:sp>
+      <p:sp>
+        <p:nvSpPr>
+          <p:cNvPr id="5" name="Rounded Rectangle 4"/>
           <p:cNvSpPr/>
           <p:nvPr/>
         </p:nvSpPr>
         <p:spPr>
           <a:xfrm>
-            <a:off x="457200" y="1444752"/>
-            <a:ext cx="11277295" cy="908913"/>
+            <a:off x="457200" y="1261872"/>
+            <a:ext cx="11277295" cy="5093208"/>
           </a:xfrm>
           <a:prstGeom prst="roundRect">
             <a:avLst>
@@ -8538,7 +7833,7 @@
             </a:avLst>
           </a:prstGeom>
           <a:solidFill>
-            <a:srgbClr val="F2F2F2"/>
+            <a:srgbClr val="1E2A38"/>
           </a:solidFill>
           <a:ln>
             <a:noFill/>
@@ -8568,19 +7863,17 @@
       </p:sp>
       <p:sp>
         <p:nvSpPr>
-          <p:cNvPr id="7" name="Rounded Rectangle 6"/>
+          <p:cNvPr id="6" name="Rectangle 5"/>
           <p:cNvSpPr/>
           <p:nvPr/>
         </p:nvSpPr>
         <p:spPr>
           <a:xfrm>
-            <a:off x="594360" y="1679752"/>
-            <a:ext cx="438912" cy="438912"/>
-          </a:xfrm>
-          <a:prstGeom prst="roundRect">
-            <a:avLst>
-              <a:gd name="adj" fmla="val 12000"/>
-            </a:avLst>
+            <a:off x="457200" y="1261872"/>
+            <a:ext cx="11277295" cy="320040"/>
+          </a:xfrm>
+          <a:prstGeom prst="rect">
+            <a:avLst/>
           </a:prstGeom>
           <a:solidFill>
             <a:srgbClr val="095292"/>
@@ -8613,14 +7906,46 @@
       </p:sp>
       <p:sp>
         <p:nvSpPr>
+          <p:cNvPr id="7" name="TextBox 6"/>
+          <p:cNvSpPr txBox="1"/>
+          <p:nvPr/>
+        </p:nvSpPr>
+        <p:spPr>
+          <a:xfrm>
+            <a:off x="685800" y="1307592"/>
+            <a:ext cx="10820095" cy="256032"/>
+          </a:xfrm>
+          <a:prstGeom prst="rect">
+            <a:avLst/>
+          </a:prstGeom>
+          <a:noFill/>
+        </p:spPr>
+        <p:txBody>
+          <a:bodyPr wrap="square" anchor="ctr"/>
+          <a:lstStyle/>
+          <a:p>
+            <a:r>
+              <a:rPr sz="1000" b="1" i="0">
+                <a:solidFill>
+                  <a:srgbClr val="269CCB"/>
+                </a:solidFill>
+                <a:latin typeface="Calibri"/>
+              </a:rPr>
+              <a:t>● ● ●</a:t>
+            </a:r>
+          </a:p>
+        </p:txBody>
+      </p:sp>
+      <p:sp>
+        <p:nvSpPr>
           <p:cNvPr id="8" name="TextBox 7"/>
           <p:cNvSpPr txBox="1"/>
           <p:nvPr/>
         </p:nvSpPr>
         <p:spPr>
           <a:xfrm>
-            <a:off x="594360" y="1679752"/>
-            <a:ext cx="438912" cy="438912"/>
+            <a:off x="777240" y="1719072"/>
+            <a:ext cx="10637215" cy="4453128"/>
           </a:xfrm>
           <a:prstGeom prst="rect">
             <a:avLst/>
@@ -8628,18 +7953,168 @@
           <a:noFill/>
         </p:spPr>
         <p:txBody>
-          <a:bodyPr wrap="square" anchor="ctr"/>
-          <a:lstStyle/>
-          <a:p>
-            <a:pPr algn="ctr"/>
-            <a:r>
-              <a:rPr sz="1600" b="1" i="0">
+          <a:bodyPr wrap="square">
+            <a:spAutoFit/>
+          </a:bodyPr>
+          <a:lstStyle/>
+          <a:p>
+            <a:pPr>
+              <a:spcAft>
+                <a:spcPts val="400"/>
+              </a:spcAft>
+            </a:pPr>
+            <a:r>
+              <a:rPr sz="1400" b="0" i="0">
                 <a:solidFill>
                   <a:srgbClr val="FFFFFF"/>
                 </a:solidFill>
                 <a:latin typeface="Calibri"/>
               </a:rPr>
-              <a:t>1</a:t>
+              <a:t># Exposicion de hoy · lo que se califica es el reparto, no el total</a:t>
+            </a:r>
+          </a:p>
+          <a:p>
+            <a:pPr>
+              <a:spcAft>
+                <a:spcPts val="400"/>
+              </a:spcAft>
+            </a:pPr>
+            <a:r>
+              <a:rPr sz="1400" b="0" i="0">
+                <a:solidFill>
+                  <a:srgbClr val="FFFFFF"/>
+                </a:solidFill>
+                <a:latin typeface="Calibri"/>
+              </a:rPr>
+              <a:t/>
+            </a:r>
+          </a:p>
+          <a:p>
+            <a:pPr>
+              <a:spcAft>
+                <a:spcPts val="400"/>
+              </a:spcAft>
+            </a:pPr>
+            <a:r>
+              <a:rPr sz="1400" b="0" i="0">
+                <a:solidFill>
+                  <a:srgbClr val="FFFFFF"/>
+                </a:solidFill>
+                <a:latin typeface="Calibri"/>
+              </a:rPr>
+              <a:t>25 s · El prompt                   Lean las restricciones que pusieron. Solo es</a:t>
+            </a:r>
+          </a:p>
+          <a:p>
+            <a:pPr>
+              <a:spcAft>
+                <a:spcPts val="400"/>
+              </a:spcAft>
+            </a:pPr>
+            <a:r>
+              <a:rPr sz="1400" b="0" i="0">
+                <a:solidFill>
+                  <a:srgbClr val="FFFFFF"/>
+                </a:solidFill>
+                <a:latin typeface="Calibri"/>
+              </a:rPr>
+              <a:t>30 s · Las tres variantes          En una frase cada una.</a:t>
+            </a:r>
+          </a:p>
+          <a:p>
+            <a:pPr>
+              <a:spcAft>
+                <a:spcPts val="400"/>
+              </a:spcAft>
+            </a:pPr>
+            <a:r>
+              <a:rPr sz="1400" b="0" i="0">
+                <a:solidFill>
+                  <a:srgbClr val="FFFFFF"/>
+                </a:solidFill>
+                <a:latin typeface="Calibri"/>
+              </a:rPr>
+              <a:t>30 s · La que eligieron            Y el requisito en el que se apoyaron.</a:t>
+            </a:r>
+          </a:p>
+          <a:p>
+            <a:pPr>
+              <a:spcAft>
+                <a:spcPts val="400"/>
+              </a:spcAft>
+            </a:pPr>
+            <a:r>
+              <a:rPr sz="1400" b="0" i="0">
+                <a:solidFill>
+                  <a:srgbClr val="FFFFFF"/>
+                </a:solidFill>
+                <a:latin typeface="Calibri"/>
+              </a:rPr>
+              <a:t>70 s · Lo que corrigieron          Dos correcciones con su razón y **de qué ses</a:t>
+            </a:r>
+          </a:p>
+          <a:p>
+            <a:pPr>
+              <a:spcAft>
+                <a:spcPts val="400"/>
+              </a:spcAft>
+            </a:pPr>
+            <a:r>
+              <a:rPr sz="1400" b="0" i="0">
+                <a:solidFill>
+                  <a:srgbClr val="FFFFFF"/>
+                </a:solidFill>
+                <a:latin typeface="Calibri"/>
+              </a:rPr>
+              <a:t>25 s · Lo que descartaron          Una propuesta rechazada y el motivo.</a:t>
+            </a:r>
+          </a:p>
+          <a:p>
+            <a:pPr>
+              <a:spcAft>
+                <a:spcPts val="400"/>
+              </a:spcAft>
+            </a:pPr>
+            <a:r>
+              <a:rPr sz="1400" b="0" i="0">
+                <a:solidFill>
+                  <a:srgbClr val="FFFFFF"/>
+                </a:solidFill>
+                <a:latin typeface="Calibri"/>
+              </a:rPr>
+              <a:t/>
+            </a:r>
+          </a:p>
+          <a:p>
+            <a:pPr>
+              <a:spcAft>
+                <a:spcPts val="400"/>
+              </a:spcAft>
+            </a:pPr>
+            <a:r>
+              <a:rPr sz="1400" b="0" i="0">
+                <a:solidFill>
+                  <a:srgbClr val="FFFFFF"/>
+                </a:solidFill>
+                <a:latin typeface="Calibri"/>
+              </a:rPr>
+              <a:t># El tramo marcado como obligatorio es el que el jurado califica:</a:t>
+            </a:r>
+          </a:p>
+          <a:p>
+            <a:pPr>
+              <a:spcAft>
+                <a:spcPts val="400"/>
+              </a:spcAft>
+            </a:pPr>
+            <a:r>
+              <a:rPr sz="1400" b="0" i="0">
+                <a:solidFill>
+                  <a:srgbClr val="FFFFFF"/>
+                </a:solidFill>
+                <a:latin typeface="Calibri"/>
+              </a:rPr>
+              <a:t># si el guion no esta cronometrado, es el que se queda sin tiempo.</a:t>
             </a:r>
           </a:p>
         </p:txBody>
@@ -8647,756 +8122,6 @@
       <p:sp>
         <p:nvSpPr>
           <p:cNvPr id="9" name="TextBox 8"/>
-          <p:cNvSpPr txBox="1"/>
-          <p:nvPr/>
-        </p:nvSpPr>
-        <p:spPr>
-          <a:xfrm>
-            <a:off x="1188720" y="1536192"/>
-            <a:ext cx="10271455" cy="744321"/>
-          </a:xfrm>
-          <a:prstGeom prst="rect">
-            <a:avLst/>
-          </a:prstGeom>
-          <a:noFill/>
-        </p:spPr>
-        <p:txBody>
-          <a:bodyPr wrap="square" anchor="ctr"/>
-          <a:lstStyle/>
-          <a:p>
-            <a:r>
-              <a:rPr sz="1500" b="1" i="0">
-                <a:solidFill>
-                  <a:srgbClr val="095292"/>
-                </a:solidFill>
-                <a:latin typeface="Calibri"/>
-              </a:rPr>
-              <a:t>25 s · El prompt</a:t>
-            </a:r>
-          </a:p>
-          <a:p>
-            <a:pPr>
-              <a:spcBef>
-                <a:spcPts val="200"/>
-              </a:spcBef>
-            </a:pPr>
-            <a:r>
-              <a:rPr sz="1300" b="0" i="0">
-                <a:solidFill>
-                  <a:srgbClr val="333333"/>
-                </a:solidFill>
-                <a:latin typeface="Calibri"/>
-              </a:rPr>
-              <a:t>Lean las restricciones que pusieron. Solo esa parte.</a:t>
-            </a:r>
-          </a:p>
-        </p:txBody>
-      </p:sp>
-      <p:sp>
-        <p:nvSpPr>
-          <p:cNvPr id="10" name="Rounded Rectangle 9"/>
-          <p:cNvSpPr/>
-          <p:nvPr/>
-        </p:nvSpPr>
-        <p:spPr>
-          <a:xfrm>
-            <a:off x="457200" y="2445105"/>
-            <a:ext cx="11277295" cy="908913"/>
-          </a:xfrm>
-          <a:prstGeom prst="roundRect">
-            <a:avLst>
-              <a:gd name="adj" fmla="val 12000"/>
-            </a:avLst>
-          </a:prstGeom>
-          <a:solidFill>
-            <a:srgbClr val="E8F4FA"/>
-          </a:solidFill>
-          <a:ln>
-            <a:noFill/>
-          </a:ln>
-        </p:spPr>
-        <p:style>
-          <a:lnRef idx="1">
-            <a:schemeClr val="accent1"/>
-          </a:lnRef>
-          <a:fillRef idx="3">
-            <a:schemeClr val="accent1"/>
-          </a:fillRef>
-          <a:effectRef idx="2">
-            <a:schemeClr val="accent1"/>
-          </a:effectRef>
-          <a:fontRef idx="minor">
-            <a:schemeClr val="lt1"/>
-          </a:fontRef>
-        </p:style>
-        <p:txBody>
-          <a:bodyPr rtlCol="0" anchor="ctr"/>
-          <a:lstStyle/>
-          <a:p>
-            <a:pPr algn="ctr"/>
-          </a:p>
-        </p:txBody>
-      </p:sp>
-      <p:sp>
-        <p:nvSpPr>
-          <p:cNvPr id="11" name="Rounded Rectangle 10"/>
-          <p:cNvSpPr/>
-          <p:nvPr/>
-        </p:nvSpPr>
-        <p:spPr>
-          <a:xfrm>
-            <a:off x="594360" y="2680106"/>
-            <a:ext cx="438912" cy="438912"/>
-          </a:xfrm>
-          <a:prstGeom prst="roundRect">
-            <a:avLst>
-              <a:gd name="adj" fmla="val 12000"/>
-            </a:avLst>
-          </a:prstGeom>
-          <a:solidFill>
-            <a:srgbClr val="095292"/>
-          </a:solidFill>
-          <a:ln>
-            <a:noFill/>
-          </a:ln>
-        </p:spPr>
-        <p:style>
-          <a:lnRef idx="1">
-            <a:schemeClr val="accent1"/>
-          </a:lnRef>
-          <a:fillRef idx="3">
-            <a:schemeClr val="accent1"/>
-          </a:fillRef>
-          <a:effectRef idx="2">
-            <a:schemeClr val="accent1"/>
-          </a:effectRef>
-          <a:fontRef idx="minor">
-            <a:schemeClr val="lt1"/>
-          </a:fontRef>
-        </p:style>
-        <p:txBody>
-          <a:bodyPr rtlCol="0" anchor="ctr"/>
-          <a:lstStyle/>
-          <a:p>
-            <a:pPr algn="ctr"/>
-          </a:p>
-        </p:txBody>
-      </p:sp>
-      <p:sp>
-        <p:nvSpPr>
-          <p:cNvPr id="12" name="TextBox 11"/>
-          <p:cNvSpPr txBox="1"/>
-          <p:nvPr/>
-        </p:nvSpPr>
-        <p:spPr>
-          <a:xfrm>
-            <a:off x="594360" y="2680106"/>
-            <a:ext cx="438912" cy="438912"/>
-          </a:xfrm>
-          <a:prstGeom prst="rect">
-            <a:avLst/>
-          </a:prstGeom>
-          <a:noFill/>
-        </p:spPr>
-        <p:txBody>
-          <a:bodyPr wrap="square" anchor="ctr"/>
-          <a:lstStyle/>
-          <a:p>
-            <a:pPr algn="ctr"/>
-            <a:r>
-              <a:rPr sz="1600" b="1" i="0">
-                <a:solidFill>
-                  <a:srgbClr val="FFFFFF"/>
-                </a:solidFill>
-                <a:latin typeface="Calibri"/>
-              </a:rPr>
-              <a:t>2</a:t>
-            </a:r>
-          </a:p>
-        </p:txBody>
-      </p:sp>
-      <p:sp>
-        <p:nvSpPr>
-          <p:cNvPr id="13" name="TextBox 12"/>
-          <p:cNvSpPr txBox="1"/>
-          <p:nvPr/>
-        </p:nvSpPr>
-        <p:spPr>
-          <a:xfrm>
-            <a:off x="1188720" y="2536545"/>
-            <a:ext cx="10271455" cy="744321"/>
-          </a:xfrm>
-          <a:prstGeom prst="rect">
-            <a:avLst/>
-          </a:prstGeom>
-          <a:noFill/>
-        </p:spPr>
-        <p:txBody>
-          <a:bodyPr wrap="square" anchor="ctr"/>
-          <a:lstStyle/>
-          <a:p>
-            <a:r>
-              <a:rPr sz="1500" b="1" i="0">
-                <a:solidFill>
-                  <a:srgbClr val="095292"/>
-                </a:solidFill>
-                <a:latin typeface="Calibri"/>
-              </a:rPr>
-              <a:t>30 s · Las tres variantes</a:t>
-            </a:r>
-          </a:p>
-          <a:p>
-            <a:pPr>
-              <a:spcBef>
-                <a:spcPts val="200"/>
-              </a:spcBef>
-            </a:pPr>
-            <a:r>
-              <a:rPr sz="1300" b="0" i="0">
-                <a:solidFill>
-                  <a:srgbClr val="333333"/>
-                </a:solidFill>
-                <a:latin typeface="Calibri"/>
-              </a:rPr>
-              <a:t>En una frase cada una.</a:t>
-            </a:r>
-          </a:p>
-        </p:txBody>
-      </p:sp>
-      <p:sp>
-        <p:nvSpPr>
-          <p:cNvPr id="14" name="Rounded Rectangle 13"/>
-          <p:cNvSpPr/>
-          <p:nvPr/>
-        </p:nvSpPr>
-        <p:spPr>
-          <a:xfrm>
-            <a:off x="457200" y="3445459"/>
-            <a:ext cx="11277295" cy="908913"/>
-          </a:xfrm>
-          <a:prstGeom prst="roundRect">
-            <a:avLst>
-              <a:gd name="adj" fmla="val 12000"/>
-            </a:avLst>
-          </a:prstGeom>
-          <a:solidFill>
-            <a:srgbClr val="F2F2F2"/>
-          </a:solidFill>
-          <a:ln>
-            <a:noFill/>
-          </a:ln>
-        </p:spPr>
-        <p:style>
-          <a:lnRef idx="1">
-            <a:schemeClr val="accent1"/>
-          </a:lnRef>
-          <a:fillRef idx="3">
-            <a:schemeClr val="accent1"/>
-          </a:fillRef>
-          <a:effectRef idx="2">
-            <a:schemeClr val="accent1"/>
-          </a:effectRef>
-          <a:fontRef idx="minor">
-            <a:schemeClr val="lt1"/>
-          </a:fontRef>
-        </p:style>
-        <p:txBody>
-          <a:bodyPr rtlCol="0" anchor="ctr"/>
-          <a:lstStyle/>
-          <a:p>
-            <a:pPr algn="ctr"/>
-          </a:p>
-        </p:txBody>
-      </p:sp>
-      <p:sp>
-        <p:nvSpPr>
-          <p:cNvPr id="15" name="Rounded Rectangle 14"/>
-          <p:cNvSpPr/>
-          <p:nvPr/>
-        </p:nvSpPr>
-        <p:spPr>
-          <a:xfrm>
-            <a:off x="594360" y="3680460"/>
-            <a:ext cx="438912" cy="438912"/>
-          </a:xfrm>
-          <a:prstGeom prst="roundRect">
-            <a:avLst>
-              <a:gd name="adj" fmla="val 12000"/>
-            </a:avLst>
-          </a:prstGeom>
-          <a:solidFill>
-            <a:srgbClr val="095292"/>
-          </a:solidFill>
-          <a:ln>
-            <a:noFill/>
-          </a:ln>
-        </p:spPr>
-        <p:style>
-          <a:lnRef idx="1">
-            <a:schemeClr val="accent1"/>
-          </a:lnRef>
-          <a:fillRef idx="3">
-            <a:schemeClr val="accent1"/>
-          </a:fillRef>
-          <a:effectRef idx="2">
-            <a:schemeClr val="accent1"/>
-          </a:effectRef>
-          <a:fontRef idx="minor">
-            <a:schemeClr val="lt1"/>
-          </a:fontRef>
-        </p:style>
-        <p:txBody>
-          <a:bodyPr rtlCol="0" anchor="ctr"/>
-          <a:lstStyle/>
-          <a:p>
-            <a:pPr algn="ctr"/>
-          </a:p>
-        </p:txBody>
-      </p:sp>
-      <p:sp>
-        <p:nvSpPr>
-          <p:cNvPr id="16" name="TextBox 15"/>
-          <p:cNvSpPr txBox="1"/>
-          <p:nvPr/>
-        </p:nvSpPr>
-        <p:spPr>
-          <a:xfrm>
-            <a:off x="594360" y="3680460"/>
-            <a:ext cx="438912" cy="438912"/>
-          </a:xfrm>
-          <a:prstGeom prst="rect">
-            <a:avLst/>
-          </a:prstGeom>
-          <a:noFill/>
-        </p:spPr>
-        <p:txBody>
-          <a:bodyPr wrap="square" anchor="ctr"/>
-          <a:lstStyle/>
-          <a:p>
-            <a:pPr algn="ctr"/>
-            <a:r>
-              <a:rPr sz="1600" b="1" i="0">
-                <a:solidFill>
-                  <a:srgbClr val="FFFFFF"/>
-                </a:solidFill>
-                <a:latin typeface="Calibri"/>
-              </a:rPr>
-              <a:t>3</a:t>
-            </a:r>
-          </a:p>
-        </p:txBody>
-      </p:sp>
-      <p:sp>
-        <p:nvSpPr>
-          <p:cNvPr id="17" name="TextBox 16"/>
-          <p:cNvSpPr txBox="1"/>
-          <p:nvPr/>
-        </p:nvSpPr>
-        <p:spPr>
-          <a:xfrm>
-            <a:off x="1188720" y="3536899"/>
-            <a:ext cx="10271455" cy="744321"/>
-          </a:xfrm>
-          <a:prstGeom prst="rect">
-            <a:avLst/>
-          </a:prstGeom>
-          <a:noFill/>
-        </p:spPr>
-        <p:txBody>
-          <a:bodyPr wrap="square" anchor="ctr"/>
-          <a:lstStyle/>
-          <a:p>
-            <a:r>
-              <a:rPr sz="1500" b="1" i="0">
-                <a:solidFill>
-                  <a:srgbClr val="095292"/>
-                </a:solidFill>
-                <a:latin typeface="Calibri"/>
-              </a:rPr>
-              <a:t>30 s · La que eligieron</a:t>
-            </a:r>
-          </a:p>
-          <a:p>
-            <a:pPr>
-              <a:spcBef>
-                <a:spcPts val="200"/>
-              </a:spcBef>
-            </a:pPr>
-            <a:r>
-              <a:rPr sz="1300" b="0" i="0">
-                <a:solidFill>
-                  <a:srgbClr val="333333"/>
-                </a:solidFill>
-                <a:latin typeface="Calibri"/>
-              </a:rPr>
-              <a:t>Y el requisito en el que se apoyaron.</a:t>
-            </a:r>
-          </a:p>
-        </p:txBody>
-      </p:sp>
-      <p:sp>
-        <p:nvSpPr>
-          <p:cNvPr id="18" name="Rounded Rectangle 17"/>
-          <p:cNvSpPr/>
-          <p:nvPr/>
-        </p:nvSpPr>
-        <p:spPr>
-          <a:xfrm>
-            <a:off x="457200" y="4445812"/>
-            <a:ext cx="11277295" cy="908913"/>
-          </a:xfrm>
-          <a:prstGeom prst="roundRect">
-            <a:avLst>
-              <a:gd name="adj" fmla="val 12000"/>
-            </a:avLst>
-          </a:prstGeom>
-          <a:solidFill>
-            <a:srgbClr val="E8F4FA"/>
-          </a:solidFill>
-          <a:ln>
-            <a:noFill/>
-          </a:ln>
-        </p:spPr>
-        <p:style>
-          <a:lnRef idx="1">
-            <a:schemeClr val="accent1"/>
-          </a:lnRef>
-          <a:fillRef idx="3">
-            <a:schemeClr val="accent1"/>
-          </a:fillRef>
-          <a:effectRef idx="2">
-            <a:schemeClr val="accent1"/>
-          </a:effectRef>
-          <a:fontRef idx="minor">
-            <a:schemeClr val="lt1"/>
-          </a:fontRef>
-        </p:style>
-        <p:txBody>
-          <a:bodyPr rtlCol="0" anchor="ctr"/>
-          <a:lstStyle/>
-          <a:p>
-            <a:pPr algn="ctr"/>
-          </a:p>
-        </p:txBody>
-      </p:sp>
-      <p:sp>
-        <p:nvSpPr>
-          <p:cNvPr id="19" name="Rounded Rectangle 18"/>
-          <p:cNvSpPr/>
-          <p:nvPr/>
-        </p:nvSpPr>
-        <p:spPr>
-          <a:xfrm>
-            <a:off x="594360" y="4680813"/>
-            <a:ext cx="438912" cy="438912"/>
-          </a:xfrm>
-          <a:prstGeom prst="roundRect">
-            <a:avLst>
-              <a:gd name="adj" fmla="val 12000"/>
-            </a:avLst>
-          </a:prstGeom>
-          <a:solidFill>
-            <a:srgbClr val="095292"/>
-          </a:solidFill>
-          <a:ln>
-            <a:noFill/>
-          </a:ln>
-        </p:spPr>
-        <p:style>
-          <a:lnRef idx="1">
-            <a:schemeClr val="accent1"/>
-          </a:lnRef>
-          <a:fillRef idx="3">
-            <a:schemeClr val="accent1"/>
-          </a:fillRef>
-          <a:effectRef idx="2">
-            <a:schemeClr val="accent1"/>
-          </a:effectRef>
-          <a:fontRef idx="minor">
-            <a:schemeClr val="lt1"/>
-          </a:fontRef>
-        </p:style>
-        <p:txBody>
-          <a:bodyPr rtlCol="0" anchor="ctr"/>
-          <a:lstStyle/>
-          <a:p>
-            <a:pPr algn="ctr"/>
-          </a:p>
-        </p:txBody>
-      </p:sp>
-      <p:sp>
-        <p:nvSpPr>
-          <p:cNvPr id="20" name="TextBox 19"/>
-          <p:cNvSpPr txBox="1"/>
-          <p:nvPr/>
-        </p:nvSpPr>
-        <p:spPr>
-          <a:xfrm>
-            <a:off x="594360" y="4680813"/>
-            <a:ext cx="438912" cy="438912"/>
-          </a:xfrm>
-          <a:prstGeom prst="rect">
-            <a:avLst/>
-          </a:prstGeom>
-          <a:noFill/>
-        </p:spPr>
-        <p:txBody>
-          <a:bodyPr wrap="square" anchor="ctr"/>
-          <a:lstStyle/>
-          <a:p>
-            <a:pPr algn="ctr"/>
-            <a:r>
-              <a:rPr sz="1600" b="1" i="0">
-                <a:solidFill>
-                  <a:srgbClr val="FFFFFF"/>
-                </a:solidFill>
-                <a:latin typeface="Calibri"/>
-              </a:rPr>
-              <a:t>4</a:t>
-            </a:r>
-          </a:p>
-        </p:txBody>
-      </p:sp>
-      <p:sp>
-        <p:nvSpPr>
-          <p:cNvPr id="21" name="TextBox 20"/>
-          <p:cNvSpPr txBox="1"/>
-          <p:nvPr/>
-        </p:nvSpPr>
-        <p:spPr>
-          <a:xfrm>
-            <a:off x="1188720" y="4537252"/>
-            <a:ext cx="10271455" cy="744321"/>
-          </a:xfrm>
-          <a:prstGeom prst="rect">
-            <a:avLst/>
-          </a:prstGeom>
-          <a:noFill/>
-        </p:spPr>
-        <p:txBody>
-          <a:bodyPr wrap="square" anchor="ctr"/>
-          <a:lstStyle/>
-          <a:p>
-            <a:r>
-              <a:rPr sz="1500" b="1" i="0">
-                <a:solidFill>
-                  <a:srgbClr val="095292"/>
-                </a:solidFill>
-                <a:latin typeface="Calibri"/>
-              </a:rPr>
-              <a:t>70 s · Lo que corrigieron</a:t>
-            </a:r>
-          </a:p>
-          <a:p>
-            <a:pPr>
-              <a:spcBef>
-                <a:spcPts val="200"/>
-              </a:spcBef>
-            </a:pPr>
-            <a:r>
-              <a:rPr sz="1300" b="0" i="0">
-                <a:solidFill>
-                  <a:srgbClr val="333333"/>
-                </a:solidFill>
-                <a:latin typeface="Calibri"/>
-              </a:rPr>
-              <a:t>Dos correcciones con su razón y </a:t>
-            </a:r>
-            <a:r>
-              <a:rPr sz="1300" b="1" i="0">
-                <a:solidFill>
-                  <a:srgbClr val="333333"/>
-                </a:solidFill>
-                <a:latin typeface="Calibri"/>
-              </a:rPr>
-              <a:t>de qué sesión sale cada una</a:t>
-            </a:r>
-            <a:r>
-              <a:rPr sz="1300" b="0" i="0">
-                <a:solidFill>
-                  <a:srgbClr val="333333"/>
-                </a:solidFill>
-                <a:latin typeface="Calibri"/>
-              </a:rPr>
-              <a:t>. Es el minuto obligatorio.</a:t>
-            </a:r>
-          </a:p>
-        </p:txBody>
-      </p:sp>
-      <p:sp>
-        <p:nvSpPr>
-          <p:cNvPr id="22" name="Rounded Rectangle 21"/>
-          <p:cNvSpPr/>
-          <p:nvPr/>
-        </p:nvSpPr>
-        <p:spPr>
-          <a:xfrm>
-            <a:off x="457200" y="5446166"/>
-            <a:ext cx="11277295" cy="908913"/>
-          </a:xfrm>
-          <a:prstGeom prst="roundRect">
-            <a:avLst>
-              <a:gd name="adj" fmla="val 12000"/>
-            </a:avLst>
-          </a:prstGeom>
-          <a:solidFill>
-            <a:srgbClr val="F2F2F2"/>
-          </a:solidFill>
-          <a:ln>
-            <a:noFill/>
-          </a:ln>
-        </p:spPr>
-        <p:style>
-          <a:lnRef idx="1">
-            <a:schemeClr val="accent1"/>
-          </a:lnRef>
-          <a:fillRef idx="3">
-            <a:schemeClr val="accent1"/>
-          </a:fillRef>
-          <a:effectRef idx="2">
-            <a:schemeClr val="accent1"/>
-          </a:effectRef>
-          <a:fontRef idx="minor">
-            <a:schemeClr val="lt1"/>
-          </a:fontRef>
-        </p:style>
-        <p:txBody>
-          <a:bodyPr rtlCol="0" anchor="ctr"/>
-          <a:lstStyle/>
-          <a:p>
-            <a:pPr algn="ctr"/>
-          </a:p>
-        </p:txBody>
-      </p:sp>
-      <p:sp>
-        <p:nvSpPr>
-          <p:cNvPr id="23" name="Rounded Rectangle 22"/>
-          <p:cNvSpPr/>
-          <p:nvPr/>
-        </p:nvSpPr>
-        <p:spPr>
-          <a:xfrm>
-            <a:off x="594360" y="5681167"/>
-            <a:ext cx="438912" cy="438912"/>
-          </a:xfrm>
-          <a:prstGeom prst="roundRect">
-            <a:avLst>
-              <a:gd name="adj" fmla="val 12000"/>
-            </a:avLst>
-          </a:prstGeom>
-          <a:solidFill>
-            <a:srgbClr val="095292"/>
-          </a:solidFill>
-          <a:ln>
-            <a:noFill/>
-          </a:ln>
-        </p:spPr>
-        <p:style>
-          <a:lnRef idx="1">
-            <a:schemeClr val="accent1"/>
-          </a:lnRef>
-          <a:fillRef idx="3">
-            <a:schemeClr val="accent1"/>
-          </a:fillRef>
-          <a:effectRef idx="2">
-            <a:schemeClr val="accent1"/>
-          </a:effectRef>
-          <a:fontRef idx="minor">
-            <a:schemeClr val="lt1"/>
-          </a:fontRef>
-        </p:style>
-        <p:txBody>
-          <a:bodyPr rtlCol="0" anchor="ctr"/>
-          <a:lstStyle/>
-          <a:p>
-            <a:pPr algn="ctr"/>
-          </a:p>
-        </p:txBody>
-      </p:sp>
-      <p:sp>
-        <p:nvSpPr>
-          <p:cNvPr id="24" name="TextBox 23"/>
-          <p:cNvSpPr txBox="1"/>
-          <p:nvPr/>
-        </p:nvSpPr>
-        <p:spPr>
-          <a:xfrm>
-            <a:off x="594360" y="5681167"/>
-            <a:ext cx="438912" cy="438912"/>
-          </a:xfrm>
-          <a:prstGeom prst="rect">
-            <a:avLst/>
-          </a:prstGeom>
-          <a:noFill/>
-        </p:spPr>
-        <p:txBody>
-          <a:bodyPr wrap="square" anchor="ctr"/>
-          <a:lstStyle/>
-          <a:p>
-            <a:pPr algn="ctr"/>
-            <a:r>
-              <a:rPr sz="1600" b="1" i="0">
-                <a:solidFill>
-                  <a:srgbClr val="FFFFFF"/>
-                </a:solidFill>
-                <a:latin typeface="Calibri"/>
-              </a:rPr>
-              <a:t>5</a:t>
-            </a:r>
-          </a:p>
-        </p:txBody>
-      </p:sp>
-      <p:sp>
-        <p:nvSpPr>
-          <p:cNvPr id="25" name="TextBox 24"/>
-          <p:cNvSpPr txBox="1"/>
-          <p:nvPr/>
-        </p:nvSpPr>
-        <p:spPr>
-          <a:xfrm>
-            <a:off x="1188720" y="5537606"/>
-            <a:ext cx="10271455" cy="744321"/>
-          </a:xfrm>
-          <a:prstGeom prst="rect">
-            <a:avLst/>
-          </a:prstGeom>
-          <a:noFill/>
-        </p:spPr>
-        <p:txBody>
-          <a:bodyPr wrap="square" anchor="ctr"/>
-          <a:lstStyle/>
-          <a:p>
-            <a:r>
-              <a:rPr sz="1500" b="1" i="0">
-                <a:solidFill>
-                  <a:srgbClr val="095292"/>
-                </a:solidFill>
-                <a:latin typeface="Calibri"/>
-              </a:rPr>
-              <a:t>25 s · Lo que descartaron</a:t>
-            </a:r>
-          </a:p>
-          <a:p>
-            <a:pPr>
-              <a:spcBef>
-                <a:spcPts val="200"/>
-              </a:spcBef>
-            </a:pPr>
-            <a:r>
-              <a:rPr sz="1300" b="0" i="0">
-                <a:solidFill>
-                  <a:srgbClr val="333333"/>
-                </a:solidFill>
-                <a:latin typeface="Calibri"/>
-              </a:rPr>
-              <a:t>Una propuesta rechazada y el motivo.</a:t>
-            </a:r>
-          </a:p>
-        </p:txBody>
-      </p:sp>
-      <p:sp>
-        <p:nvSpPr>
-          <p:cNvPr id="26" name="TextBox 25"/>
           <p:cNvSpPr txBox="1"/>
           <p:nvPr/>
         </p:nvSpPr>
@@ -9464,7 +8189,7 @@
         <p:spPr>
           <a:xfrm>
             <a:off x="0" y="0"/>
-            <a:ext cx="12191695" cy="960120"/>
+            <a:ext cx="12191695" cy="1170432"/>
           </a:xfrm>
           <a:prstGeom prst="rect">
             <a:avLst/>
@@ -9506,7 +8231,7 @@
         </p:nvSpPr>
         <p:spPr>
           <a:xfrm>
-            <a:off x="0" y="960120"/>
+            <a:off x="0" y="1170432"/>
             <a:ext cx="12191695" cy="41148"/>
           </a:xfrm>
           <a:prstGeom prst="rect">
@@ -9550,7 +8275,7 @@
         <p:spPr>
           <a:xfrm>
             <a:off x="457200" y="164592"/>
-            <a:ext cx="11277295" cy="502920"/>
+            <a:ext cx="11277295" cy="384048"/>
           </a:xfrm>
           <a:prstGeom prst="rect">
             <a:avLst/>
@@ -9570,7 +8295,7 @@
                 </a:solidFill>
                 <a:latin typeface="Calibri"/>
               </a:rPr>
-              <a:t>Para la Clase 12</a:t>
+              <a:t>Taller de hoy: Prototipo v2 con IA</a:t>
             </a:r>
           </a:p>
         </p:txBody>
@@ -9583,8 +8308,8 @@
         </p:nvSpPr>
         <p:spPr>
           <a:xfrm>
-            <a:off x="457200" y="1170432"/>
-            <a:ext cx="11277295" cy="5230368"/>
+            <a:off x="457200" y="566928"/>
+            <a:ext cx="11277295" cy="411480"/>
           </a:xfrm>
           <a:prstGeom prst="rect">
             <a:avLst/>
@@ -9597,270 +8322,963 @@
           </a:bodyPr>
           <a:lstStyle/>
           <a:p>
-            <a:pPr>
-              <a:spcAft>
-                <a:spcPts val="800"/>
-              </a:spcAft>
-            </a:pPr>
-            <a:r>
-              <a:rPr sz="2000" b="0" i="0">
-                <a:solidFill>
-                  <a:srgbClr val="333333"/>
-                </a:solidFill>
-                <a:latin typeface="Calibri"/>
-              </a:rPr>
-              <a:t>–   </a:t>
-            </a:r>
-            <a:r>
-              <a:rPr sz="2000" b="1" i="0">
-                <a:solidFill>
-                  <a:srgbClr val="333333"/>
-                </a:solidFill>
-                <a:latin typeface="Calibri"/>
-              </a:rPr>
-              <a:t>Trabajo dirigido:</a:t>
-            </a:r>
-            <a:r>
-              <a:rPr sz="2000" b="0" i="0">
-                <a:solidFill>
-                  <a:srgbClr val="333333"/>
-                </a:solidFill>
-                <a:latin typeface="Calibri"/>
-              </a:rPr>
-              <a:t> Uso de IA para generación de ideas — completar el registro del taller (prompt, variantes, elección, correcciones con su origen, descartes y declaración del uso) en el documento del equipo.</a:t>
-            </a:r>
-          </a:p>
-          <a:p>
-            <a:pPr>
-              <a:spcAft>
-                <a:spcPts val="800"/>
-              </a:spcAft>
-            </a:pPr>
-            <a:r>
-              <a:rPr sz="2000" b="0" i="0">
-                <a:solidFill>
-                  <a:srgbClr val="333333"/>
-                </a:solidFill>
-                <a:latin typeface="Calibri"/>
-              </a:rPr>
-              <a:t>–   </a:t>
-            </a:r>
-            <a:r>
-              <a:rPr sz="2000" b="1" i="0">
-                <a:solidFill>
-                  <a:srgbClr val="333333"/>
-                </a:solidFill>
-                <a:latin typeface="Calibri"/>
-              </a:rPr>
-              <a:t>Trabajo independiente:</a:t>
-            </a:r>
-            <a:r>
-              <a:rPr sz="2000" b="0" i="0">
-                <a:solidFill>
-                  <a:srgbClr val="333333"/>
-                </a:solidFill>
-                <a:latin typeface="Calibri"/>
-              </a:rPr>
-              <a:t> Corrección del prototipo: dejar el </a:t>
-            </a:r>
-            <a:r>
-              <a:rPr sz="2000" b="1" i="0">
-                <a:solidFill>
-                  <a:srgbClr val="333333"/>
-                </a:solidFill>
-                <a:latin typeface="Calibri"/>
-              </a:rPr>
-              <a:t>v2 navegable</a:t>
-            </a:r>
-            <a:r>
-              <a:rPr sz="2000" b="0" i="0">
-                <a:solidFill>
-                  <a:srgbClr val="333333"/>
-                </a:solidFill>
-                <a:latin typeface="Calibri"/>
-              </a:rPr>
-              <a:t> en la carpeta del equipo, con todas las correcciones aplicadas, y </a:t>
-            </a:r>
-            <a:r>
-              <a:rPr sz="2000" b="1" i="0">
-                <a:solidFill>
-                  <a:srgbClr val="333333"/>
-                </a:solidFill>
-                <a:latin typeface="Calibri"/>
-              </a:rPr>
-              <a:t>conseguir a la persona ajena</a:t>
-            </a:r>
-            <a:r>
-              <a:rPr sz="2000" b="0" i="0">
-                <a:solidFill>
-                  <a:srgbClr val="333333"/>
-                </a:solidFill>
-                <a:latin typeface="Calibri"/>
-              </a:rPr>
-              <a:t> que va a probarlo — solo el rol, no el nombre.</a:t>
-            </a:r>
-          </a:p>
-          <a:p>
-            <a:pPr>
-              <a:spcAft>
-                <a:spcPts val="800"/>
-              </a:spcAft>
-            </a:pPr>
-            <a:r>
-              <a:rPr sz="2000" b="0" i="0">
-                <a:solidFill>
-                  <a:srgbClr val="333333"/>
-                </a:solidFill>
-                <a:latin typeface="Calibri"/>
-              </a:rPr>
-              <a:t>–   </a:t>
-            </a:r>
-            <a:r>
-              <a:rPr sz="2000" b="1" i="0">
-                <a:solidFill>
-                  <a:srgbClr val="333333"/>
-                </a:solidFill>
-                <a:latin typeface="Calibri"/>
-              </a:rPr>
-              <a:t>Clase 12 · Presentación de avances de proyectos</a:t>
-            </a:r>
-            <a:r>
-              <a:rPr sz="2000" b="0" i="0">
-                <a:solidFill>
-                  <a:srgbClr val="333333"/>
-                </a:solidFill>
-                <a:latin typeface="Calibri"/>
-              </a:rPr>
-              <a:t> — arranca el </a:t>
-            </a:r>
-            <a:r>
-              <a:rPr sz="2000" b="1" i="0">
-                <a:solidFill>
-                  <a:srgbClr val="333333"/>
-                </a:solidFill>
-                <a:latin typeface="Calibri"/>
-              </a:rPr>
-              <a:t>corte 3</a:t>
-            </a:r>
-            <a:r>
-              <a:rPr sz="2000" b="0" i="0">
-                <a:solidFill>
-                  <a:srgbClr val="333333"/>
-                </a:solidFill>
-                <a:latin typeface="Calibri"/>
-              </a:rPr>
-              <a:t> con la </a:t>
-            </a:r>
-            <a:r>
-              <a:rPr sz="2000" b="1" i="0">
-                <a:solidFill>
-                  <a:srgbClr val="333333"/>
-                </a:solidFill>
-                <a:latin typeface="Calibri"/>
-              </a:rPr>
-              <a:t>presentación de avances</a:t>
-            </a:r>
-            <a:r>
-              <a:rPr sz="2000" b="0" i="0">
-                <a:solidFill>
-                  <a:srgbClr val="333333"/>
-                </a:solidFill>
-                <a:latin typeface="Calibri"/>
-              </a:rPr>
-              <a:t>: el prototipo se prueba con una persona ajena al equipo y se recibe retroalimentación entre pares.</a:t>
-            </a:r>
-          </a:p>
-          <a:p>
-            <a:pPr>
-              <a:spcAft>
-                <a:spcPts val="800"/>
-              </a:spcAft>
-            </a:pPr>
-            <a:r>
-              <a:rPr sz="2000" b="0" i="0">
-                <a:solidFill>
-                  <a:srgbClr val="333333"/>
-                </a:solidFill>
-                <a:latin typeface="Calibri"/>
-              </a:rPr>
-              <a:t>–   </a:t>
-            </a:r>
-            <a:r>
-              <a:rPr sz="2000" b="1" i="0">
-                <a:solidFill>
-                  <a:srgbClr val="333333"/>
-                </a:solidFill>
-                <a:latin typeface="Calibri"/>
-              </a:rPr>
-              <a:t>Aviso:</a:t>
-            </a:r>
-            <a:r>
-              <a:rPr sz="2000" b="0" i="0">
-                <a:solidFill>
-                  <a:srgbClr val="333333"/>
-                </a:solidFill>
-                <a:latin typeface="Calibri"/>
-              </a:rPr>
-              <a:t> Para la Clase 12 traigan el prototipo v2 navegable </a:t>
-            </a:r>
-            <a:r>
-              <a:rPr sz="2000" b="1" i="0">
-                <a:solidFill>
-                  <a:srgbClr val="333333"/>
-                </a:solidFill>
-                <a:latin typeface="Calibri"/>
-              </a:rPr>
-              <a:t>y la prueba ya hecha con una persona ajena al equipo</a:t>
-            </a:r>
-            <a:r>
-              <a:rPr sz="2000" b="0" i="0">
-                <a:solidFill>
-                  <a:srgbClr val="333333"/>
-                </a:solidFill>
-                <a:latin typeface="Calibri"/>
-              </a:rPr>
-              <a:t>, con la lista de lo que falló. Sin esa lista no hay nada que presentar: la Clase 12 es sobre lo que salió mal, no sobre lo que se planeó.</a:t>
-            </a:r>
-          </a:p>
-          <a:p>
-            <a:pPr>
-              <a:spcAft>
-                <a:spcPts val="800"/>
-              </a:spcAft>
-            </a:pPr>
-            <a:r>
-              <a:rPr sz="2000" b="0" i="0">
-                <a:solidFill>
-                  <a:srgbClr val="333333"/>
-                </a:solidFill>
-                <a:latin typeface="Calibri"/>
-              </a:rPr>
-              <a:t>–   </a:t>
-            </a:r>
-            <a:r>
-              <a:rPr sz="2000" b="1" i="0">
-                <a:solidFill>
-                  <a:srgbClr val="333333"/>
-                </a:solidFill>
-                <a:latin typeface="Calibri"/>
-              </a:rPr>
-              <a:t>Antes de salir:</a:t>
-            </a:r>
-            <a:r>
-              <a:rPr sz="2000" b="0" i="0">
-                <a:solidFill>
-                  <a:srgbClr val="333333"/>
-                </a:solidFill>
-                <a:latin typeface="Calibri"/>
-              </a:rPr>
-              <a:t> el enlace del documento del equipo en el chat, con permiso de lectura para el docente, y el nombre del vocero de hoy.</a:t>
-            </a:r>
-          </a:p>
-        </p:txBody>
-      </p:sp>
-      <p:sp>
-        <p:nvSpPr>
-          <p:cNvPr id="6" name="TextBox 5"/>
+            <a:r>
+              <a:rPr sz="1400" b="0" i="0">
+                <a:solidFill>
+                  <a:srgbClr val="B8D8EE"/>
+                </a:solidFill>
+                <a:latin typeface="Calibri"/>
+              </a:rPr>
+              <a:t>27 min en equipos · 27 min: prompt, variantes, elección, correcciones y registro · prototipo v2 + registro de prompt, variantes, correcciones y descartes</a:t>
+            </a:r>
+          </a:p>
+        </p:txBody>
+      </p:sp>
+      <p:sp>
+        <p:nvSpPr>
+          <p:cNvPr id="6" name="Rounded Rectangle 5"/>
+          <p:cNvSpPr/>
+          <p:nvPr/>
+        </p:nvSpPr>
+        <p:spPr>
+          <a:xfrm>
+            <a:off x="457200" y="1472184"/>
+            <a:ext cx="11277295" cy="566928"/>
+          </a:xfrm>
+          <a:prstGeom prst="roundRect">
+            <a:avLst>
+              <a:gd name="adj" fmla="val 12000"/>
+            </a:avLst>
+          </a:prstGeom>
+          <a:solidFill>
+            <a:srgbClr val="F2F2F2"/>
+          </a:solidFill>
+          <a:ln>
+            <a:noFill/>
+          </a:ln>
+        </p:spPr>
+        <p:style>
+          <a:lnRef idx="1">
+            <a:schemeClr val="accent1"/>
+          </a:lnRef>
+          <a:fillRef idx="3">
+            <a:schemeClr val="accent1"/>
+          </a:fillRef>
+          <a:effectRef idx="2">
+            <a:schemeClr val="accent1"/>
+          </a:effectRef>
+          <a:fontRef idx="minor">
+            <a:schemeClr val="lt1"/>
+          </a:fontRef>
+        </p:style>
+        <p:txBody>
+          <a:bodyPr rtlCol="0" anchor="ctr"/>
+          <a:lstStyle/>
+          <a:p>
+            <a:pPr algn="ctr"/>
+          </a:p>
+        </p:txBody>
+      </p:sp>
+      <p:sp>
+        <p:nvSpPr>
+          <p:cNvPr id="7" name="Rectangle 6"/>
+          <p:cNvSpPr/>
+          <p:nvPr/>
+        </p:nvSpPr>
+        <p:spPr>
+          <a:xfrm>
+            <a:off x="640080" y="1618487"/>
+            <a:ext cx="274320" cy="274320"/>
+          </a:xfrm>
+          <a:prstGeom prst="rect">
+            <a:avLst/>
+          </a:prstGeom>
+          <a:solidFill>
+            <a:srgbClr val="FFFFFF"/>
+          </a:solidFill>
+          <a:ln>
+            <a:solidFill>
+              <a:srgbClr val="333333"/>
+            </a:solidFill>
+          </a:ln>
+        </p:spPr>
+        <p:style>
+          <a:lnRef idx="1">
+            <a:schemeClr val="accent1"/>
+          </a:lnRef>
+          <a:fillRef idx="3">
+            <a:schemeClr val="accent1"/>
+          </a:fillRef>
+          <a:effectRef idx="2">
+            <a:schemeClr val="accent1"/>
+          </a:effectRef>
+          <a:fontRef idx="minor">
+            <a:schemeClr val="lt1"/>
+          </a:fontRef>
+        </p:style>
+        <p:txBody>
+          <a:bodyPr rtlCol="0" anchor="ctr"/>
+          <a:lstStyle/>
+          <a:p>
+            <a:pPr algn="ctr"/>
+          </a:p>
+        </p:txBody>
+      </p:sp>
+      <p:sp>
+        <p:nvSpPr>
+          <p:cNvPr id="8" name="Rectangle 7"/>
+          <p:cNvSpPr/>
+          <p:nvPr/>
+        </p:nvSpPr>
+        <p:spPr>
+          <a:xfrm>
+            <a:off x="640080" y="1618487"/>
+            <a:ext cx="73152" cy="274320"/>
+          </a:xfrm>
+          <a:prstGeom prst="rect">
+            <a:avLst/>
+          </a:prstGeom>
+          <a:solidFill>
+            <a:srgbClr val="269CCB"/>
+          </a:solidFill>
+          <a:ln>
+            <a:noFill/>
+          </a:ln>
+        </p:spPr>
+        <p:style>
+          <a:lnRef idx="1">
+            <a:schemeClr val="accent1"/>
+          </a:lnRef>
+          <a:fillRef idx="3">
+            <a:schemeClr val="accent1"/>
+          </a:fillRef>
+          <a:effectRef idx="2">
+            <a:schemeClr val="accent1"/>
+          </a:effectRef>
+          <a:fontRef idx="minor">
+            <a:schemeClr val="lt1"/>
+          </a:fontRef>
+        </p:style>
+        <p:txBody>
+          <a:bodyPr rtlCol="0" anchor="ctr"/>
+          <a:lstStyle/>
+          <a:p>
+            <a:pPr algn="ctr"/>
+          </a:p>
+        </p:txBody>
+      </p:sp>
+      <p:sp>
+        <p:nvSpPr>
+          <p:cNvPr id="9" name="TextBox 8"/>
+          <p:cNvSpPr txBox="1"/>
+          <p:nvPr/>
+        </p:nvSpPr>
+        <p:spPr>
+          <a:xfrm>
+            <a:off x="1097280" y="1563624"/>
+            <a:ext cx="10362895" cy="402336"/>
+          </a:xfrm>
+          <a:prstGeom prst="rect">
+            <a:avLst/>
+          </a:prstGeom>
+          <a:noFill/>
+        </p:spPr>
+        <p:txBody>
+          <a:bodyPr wrap="square" anchor="ctr"/>
+          <a:lstStyle/>
+          <a:p>
+            <a:r>
+              <a:rPr sz="1500" b="1" i="0">
+                <a:solidFill>
+                  <a:srgbClr val="333333"/>
+                </a:solidFill>
+                <a:latin typeface="Calibri"/>
+              </a:rPr>
+              <a:t>EL PROMPT QUE USAMOS</a:t>
+            </a:r>
+            <a:r>
+              <a:rPr sz="1500" b="0" i="0">
+                <a:solidFill>
+                  <a:srgbClr val="333333"/>
+                </a:solidFill>
+                <a:latin typeface="Calibri"/>
+              </a:rPr>
+              <a:t> — El prompt completo, copiado tal cual. Tiene que incluir </a:t>
+            </a:r>
+            <a:r>
+              <a:rPr sz="1500" b="1" i="0">
+                <a:solidFill>
+                  <a:srgbClr val="333333"/>
+                </a:solidFill>
+                <a:latin typeface="Calibri"/>
+              </a:rPr>
+              <a:t>el problema en una frase, quién lo usa, las restricciones y lo que está prohibido proponer</a:t>
+            </a:r>
+            <a:r>
+              <a:rPr sz="1500" b="0" i="0">
+                <a:solidFill>
+                  <a:srgbClr val="333333"/>
+                </a:solidFill>
+                <a:latin typeface="Calibri"/>
+              </a:rPr>
+              <a:t>.</a:t>
+            </a:r>
+          </a:p>
+        </p:txBody>
+      </p:sp>
+      <p:sp>
+        <p:nvSpPr>
+          <p:cNvPr id="10" name="Rounded Rectangle 9"/>
+          <p:cNvSpPr/>
+          <p:nvPr/>
+        </p:nvSpPr>
+        <p:spPr>
+          <a:xfrm>
+            <a:off x="457200" y="2148839"/>
+            <a:ext cx="11277295" cy="566928"/>
+          </a:xfrm>
+          <a:prstGeom prst="roundRect">
+            <a:avLst>
+              <a:gd name="adj" fmla="val 12000"/>
+            </a:avLst>
+          </a:prstGeom>
+          <a:solidFill>
+            <a:srgbClr val="F2F2F2"/>
+          </a:solidFill>
+          <a:ln>
+            <a:noFill/>
+          </a:ln>
+        </p:spPr>
+        <p:style>
+          <a:lnRef idx="1">
+            <a:schemeClr val="accent1"/>
+          </a:lnRef>
+          <a:fillRef idx="3">
+            <a:schemeClr val="accent1"/>
+          </a:fillRef>
+          <a:effectRef idx="2">
+            <a:schemeClr val="accent1"/>
+          </a:effectRef>
+          <a:fontRef idx="minor">
+            <a:schemeClr val="lt1"/>
+          </a:fontRef>
+        </p:style>
+        <p:txBody>
+          <a:bodyPr rtlCol="0" anchor="ctr"/>
+          <a:lstStyle/>
+          <a:p>
+            <a:pPr algn="ctr"/>
+          </a:p>
+        </p:txBody>
+      </p:sp>
+      <p:sp>
+        <p:nvSpPr>
+          <p:cNvPr id="11" name="Rectangle 10"/>
+          <p:cNvSpPr/>
+          <p:nvPr/>
+        </p:nvSpPr>
+        <p:spPr>
+          <a:xfrm>
+            <a:off x="640080" y="2295144"/>
+            <a:ext cx="274320" cy="274320"/>
+          </a:xfrm>
+          <a:prstGeom prst="rect">
+            <a:avLst/>
+          </a:prstGeom>
+          <a:solidFill>
+            <a:srgbClr val="FFFFFF"/>
+          </a:solidFill>
+          <a:ln>
+            <a:solidFill>
+              <a:srgbClr val="333333"/>
+            </a:solidFill>
+          </a:ln>
+        </p:spPr>
+        <p:style>
+          <a:lnRef idx="1">
+            <a:schemeClr val="accent1"/>
+          </a:lnRef>
+          <a:fillRef idx="3">
+            <a:schemeClr val="accent1"/>
+          </a:fillRef>
+          <a:effectRef idx="2">
+            <a:schemeClr val="accent1"/>
+          </a:effectRef>
+          <a:fontRef idx="minor">
+            <a:schemeClr val="lt1"/>
+          </a:fontRef>
+        </p:style>
+        <p:txBody>
+          <a:bodyPr rtlCol="0" anchor="ctr"/>
+          <a:lstStyle/>
+          <a:p>
+            <a:pPr algn="ctr"/>
+          </a:p>
+        </p:txBody>
+      </p:sp>
+      <p:sp>
+        <p:nvSpPr>
+          <p:cNvPr id="12" name="Rectangle 11"/>
+          <p:cNvSpPr/>
+          <p:nvPr/>
+        </p:nvSpPr>
+        <p:spPr>
+          <a:xfrm>
+            <a:off x="640080" y="2295144"/>
+            <a:ext cx="73152" cy="274320"/>
+          </a:xfrm>
+          <a:prstGeom prst="rect">
+            <a:avLst/>
+          </a:prstGeom>
+          <a:solidFill>
+            <a:srgbClr val="269CCB"/>
+          </a:solidFill>
+          <a:ln>
+            <a:noFill/>
+          </a:ln>
+        </p:spPr>
+        <p:style>
+          <a:lnRef idx="1">
+            <a:schemeClr val="accent1"/>
+          </a:lnRef>
+          <a:fillRef idx="3">
+            <a:schemeClr val="accent1"/>
+          </a:fillRef>
+          <a:effectRef idx="2">
+            <a:schemeClr val="accent1"/>
+          </a:effectRef>
+          <a:fontRef idx="minor">
+            <a:schemeClr val="lt1"/>
+          </a:fontRef>
+        </p:style>
+        <p:txBody>
+          <a:bodyPr rtlCol="0" anchor="ctr"/>
+          <a:lstStyle/>
+          <a:p>
+            <a:pPr algn="ctr"/>
+          </a:p>
+        </p:txBody>
+      </p:sp>
+      <p:sp>
+        <p:nvSpPr>
+          <p:cNvPr id="13" name="TextBox 12"/>
+          <p:cNvSpPr txBox="1"/>
+          <p:nvPr/>
+        </p:nvSpPr>
+        <p:spPr>
+          <a:xfrm>
+            <a:off x="1097280" y="2240279"/>
+            <a:ext cx="10362895" cy="402336"/>
+          </a:xfrm>
+          <a:prstGeom prst="rect">
+            <a:avLst/>
+          </a:prstGeom>
+          <a:noFill/>
+        </p:spPr>
+        <p:txBody>
+          <a:bodyPr wrap="square" anchor="ctr"/>
+          <a:lstStyle/>
+          <a:p>
+            <a:r>
+              <a:rPr sz="1500" b="1" i="0">
+                <a:solidFill>
+                  <a:srgbClr val="333333"/>
+                </a:solidFill>
+                <a:latin typeface="Calibri"/>
+              </a:rPr>
+              <a:t>LAS TRES VARIANTES</a:t>
+            </a:r>
+            <a:r>
+              <a:rPr sz="1500" b="0" i="0">
+                <a:solidFill>
+                  <a:srgbClr val="333333"/>
+                </a:solidFill>
+                <a:latin typeface="Calibri"/>
+              </a:rPr>
+              <a:t> — Las tres opciones que devolvió, resumidas en dos o tres líneas cada una. </a:t>
+            </a:r>
+            <a:r>
+              <a:rPr sz="1500" b="1" i="0">
+                <a:solidFill>
+                  <a:srgbClr val="333333"/>
+                </a:solidFill>
+                <a:latin typeface="Calibri"/>
+              </a:rPr>
+              <a:t>No una sola respuesta</a:t>
+            </a:r>
+            <a:r>
+              <a:rPr sz="1500" b="0" i="0">
+                <a:solidFill>
+                  <a:srgbClr val="333333"/>
+                </a:solidFill>
+                <a:latin typeface="Calibri"/>
+              </a:rPr>
+              <a:t>: tres.</a:t>
+            </a:r>
+          </a:p>
+        </p:txBody>
+      </p:sp>
+      <p:sp>
+        <p:nvSpPr>
+          <p:cNvPr id="14" name="Rounded Rectangle 13"/>
+          <p:cNvSpPr/>
+          <p:nvPr/>
+        </p:nvSpPr>
+        <p:spPr>
+          <a:xfrm>
+            <a:off x="457200" y="2825496"/>
+            <a:ext cx="11277295" cy="566928"/>
+          </a:xfrm>
+          <a:prstGeom prst="roundRect">
+            <a:avLst>
+              <a:gd name="adj" fmla="val 12000"/>
+            </a:avLst>
+          </a:prstGeom>
+          <a:solidFill>
+            <a:srgbClr val="F2F2F2"/>
+          </a:solidFill>
+          <a:ln>
+            <a:noFill/>
+          </a:ln>
+        </p:spPr>
+        <p:style>
+          <a:lnRef idx="1">
+            <a:schemeClr val="accent1"/>
+          </a:lnRef>
+          <a:fillRef idx="3">
+            <a:schemeClr val="accent1"/>
+          </a:fillRef>
+          <a:effectRef idx="2">
+            <a:schemeClr val="accent1"/>
+          </a:effectRef>
+          <a:fontRef idx="minor">
+            <a:schemeClr val="lt1"/>
+          </a:fontRef>
+        </p:style>
+        <p:txBody>
+          <a:bodyPr rtlCol="0" anchor="ctr"/>
+          <a:lstStyle/>
+          <a:p>
+            <a:pPr algn="ctr"/>
+          </a:p>
+        </p:txBody>
+      </p:sp>
+      <p:sp>
+        <p:nvSpPr>
+          <p:cNvPr id="15" name="Rectangle 14"/>
+          <p:cNvSpPr/>
+          <p:nvPr/>
+        </p:nvSpPr>
+        <p:spPr>
+          <a:xfrm>
+            <a:off x="640080" y="2971800"/>
+            <a:ext cx="274320" cy="274320"/>
+          </a:xfrm>
+          <a:prstGeom prst="rect">
+            <a:avLst/>
+          </a:prstGeom>
+          <a:solidFill>
+            <a:srgbClr val="FFFFFF"/>
+          </a:solidFill>
+          <a:ln>
+            <a:solidFill>
+              <a:srgbClr val="333333"/>
+            </a:solidFill>
+          </a:ln>
+        </p:spPr>
+        <p:style>
+          <a:lnRef idx="1">
+            <a:schemeClr val="accent1"/>
+          </a:lnRef>
+          <a:fillRef idx="3">
+            <a:schemeClr val="accent1"/>
+          </a:fillRef>
+          <a:effectRef idx="2">
+            <a:schemeClr val="accent1"/>
+          </a:effectRef>
+          <a:fontRef idx="minor">
+            <a:schemeClr val="lt1"/>
+          </a:fontRef>
+        </p:style>
+        <p:txBody>
+          <a:bodyPr rtlCol="0" anchor="ctr"/>
+          <a:lstStyle/>
+          <a:p>
+            <a:pPr algn="ctr"/>
+          </a:p>
+        </p:txBody>
+      </p:sp>
+      <p:sp>
+        <p:nvSpPr>
+          <p:cNvPr id="16" name="Rectangle 15"/>
+          <p:cNvSpPr/>
+          <p:nvPr/>
+        </p:nvSpPr>
+        <p:spPr>
+          <a:xfrm>
+            <a:off x="640080" y="2971800"/>
+            <a:ext cx="73152" cy="274320"/>
+          </a:xfrm>
+          <a:prstGeom prst="rect">
+            <a:avLst/>
+          </a:prstGeom>
+          <a:solidFill>
+            <a:srgbClr val="269CCB"/>
+          </a:solidFill>
+          <a:ln>
+            <a:noFill/>
+          </a:ln>
+        </p:spPr>
+        <p:style>
+          <a:lnRef idx="1">
+            <a:schemeClr val="accent1"/>
+          </a:lnRef>
+          <a:fillRef idx="3">
+            <a:schemeClr val="accent1"/>
+          </a:fillRef>
+          <a:effectRef idx="2">
+            <a:schemeClr val="accent1"/>
+          </a:effectRef>
+          <a:fontRef idx="minor">
+            <a:schemeClr val="lt1"/>
+          </a:fontRef>
+        </p:style>
+        <p:txBody>
+          <a:bodyPr rtlCol="0" anchor="ctr"/>
+          <a:lstStyle/>
+          <a:p>
+            <a:pPr algn="ctr"/>
+          </a:p>
+        </p:txBody>
+      </p:sp>
+      <p:sp>
+        <p:nvSpPr>
+          <p:cNvPr id="17" name="TextBox 16"/>
+          <p:cNvSpPr txBox="1"/>
+          <p:nvPr/>
+        </p:nvSpPr>
+        <p:spPr>
+          <a:xfrm>
+            <a:off x="1097280" y="2916936"/>
+            <a:ext cx="10362895" cy="402336"/>
+          </a:xfrm>
+          <a:prstGeom prst="rect">
+            <a:avLst/>
+          </a:prstGeom>
+          <a:noFill/>
+        </p:spPr>
+        <p:txBody>
+          <a:bodyPr wrap="square" anchor="ctr"/>
+          <a:lstStyle/>
+          <a:p>
+            <a:r>
+              <a:rPr sz="1500" b="1" i="0">
+                <a:solidFill>
+                  <a:srgbClr val="333333"/>
+                </a:solidFill>
+                <a:latin typeface="Calibri"/>
+              </a:rPr>
+              <a:t>LA QUE ELEGIMOS Y POR QUÉ</a:t>
+            </a:r>
+            <a:r>
+              <a:rPr sz="1500" b="0" i="0">
+                <a:solidFill>
+                  <a:srgbClr val="333333"/>
+                </a:solidFill>
+                <a:latin typeface="Calibri"/>
+              </a:rPr>
+              <a:t> — Cuál eligieron y el criterio, apoyado en sus </a:t>
+            </a:r>
+            <a:r>
+              <a:rPr sz="1500" b="1" i="0">
+                <a:solidFill>
+                  <a:srgbClr val="333333"/>
+                </a:solidFill>
+                <a:latin typeface="Calibri"/>
+              </a:rPr>
+              <a:t>requisitos y restricciones</a:t>
+            </a:r>
+            <a:r>
+              <a:rPr sz="1500" b="0" i="0">
+                <a:solidFill>
+                  <a:srgbClr val="333333"/>
+                </a:solidFill>
+                <a:latin typeface="Calibri"/>
+              </a:rPr>
+              <a:t> — no en «nos gustó más».</a:t>
+            </a:r>
+          </a:p>
+        </p:txBody>
+      </p:sp>
+      <p:sp>
+        <p:nvSpPr>
+          <p:cNvPr id="18" name="Rounded Rectangle 17"/>
+          <p:cNvSpPr/>
+          <p:nvPr/>
+        </p:nvSpPr>
+        <p:spPr>
+          <a:xfrm>
+            <a:off x="457200" y="3502152"/>
+            <a:ext cx="11277295" cy="566928"/>
+          </a:xfrm>
+          <a:prstGeom prst="roundRect">
+            <a:avLst>
+              <a:gd name="adj" fmla="val 12000"/>
+            </a:avLst>
+          </a:prstGeom>
+          <a:solidFill>
+            <a:srgbClr val="F2F2F2"/>
+          </a:solidFill>
+          <a:ln>
+            <a:noFill/>
+          </a:ln>
+        </p:spPr>
+        <p:style>
+          <a:lnRef idx="1">
+            <a:schemeClr val="accent1"/>
+          </a:lnRef>
+          <a:fillRef idx="3">
+            <a:schemeClr val="accent1"/>
+          </a:fillRef>
+          <a:effectRef idx="2">
+            <a:schemeClr val="accent1"/>
+          </a:effectRef>
+          <a:fontRef idx="minor">
+            <a:schemeClr val="lt1"/>
+          </a:fontRef>
+        </p:style>
+        <p:txBody>
+          <a:bodyPr rtlCol="0" anchor="ctr"/>
+          <a:lstStyle/>
+          <a:p>
+            <a:pPr algn="ctr"/>
+          </a:p>
+        </p:txBody>
+      </p:sp>
+      <p:sp>
+        <p:nvSpPr>
+          <p:cNvPr id="19" name="Rectangle 18"/>
+          <p:cNvSpPr/>
+          <p:nvPr/>
+        </p:nvSpPr>
+        <p:spPr>
+          <a:xfrm>
+            <a:off x="640080" y="3648456"/>
+            <a:ext cx="274320" cy="274320"/>
+          </a:xfrm>
+          <a:prstGeom prst="rect">
+            <a:avLst/>
+          </a:prstGeom>
+          <a:solidFill>
+            <a:srgbClr val="FFFFFF"/>
+          </a:solidFill>
+          <a:ln>
+            <a:solidFill>
+              <a:srgbClr val="333333"/>
+            </a:solidFill>
+          </a:ln>
+        </p:spPr>
+        <p:style>
+          <a:lnRef idx="1">
+            <a:schemeClr val="accent1"/>
+          </a:lnRef>
+          <a:fillRef idx="3">
+            <a:schemeClr val="accent1"/>
+          </a:fillRef>
+          <a:effectRef idx="2">
+            <a:schemeClr val="accent1"/>
+          </a:effectRef>
+          <a:fontRef idx="minor">
+            <a:schemeClr val="lt1"/>
+          </a:fontRef>
+        </p:style>
+        <p:txBody>
+          <a:bodyPr rtlCol="0" anchor="ctr"/>
+          <a:lstStyle/>
+          <a:p>
+            <a:pPr algn="ctr"/>
+          </a:p>
+        </p:txBody>
+      </p:sp>
+      <p:sp>
+        <p:nvSpPr>
+          <p:cNvPr id="20" name="Rectangle 19"/>
+          <p:cNvSpPr/>
+          <p:nvPr/>
+        </p:nvSpPr>
+        <p:spPr>
+          <a:xfrm>
+            <a:off x="640080" y="3648456"/>
+            <a:ext cx="73152" cy="274320"/>
+          </a:xfrm>
+          <a:prstGeom prst="rect">
+            <a:avLst/>
+          </a:prstGeom>
+          <a:solidFill>
+            <a:srgbClr val="269CCB"/>
+          </a:solidFill>
+          <a:ln>
+            <a:noFill/>
+          </a:ln>
+        </p:spPr>
+        <p:style>
+          <a:lnRef idx="1">
+            <a:schemeClr val="accent1"/>
+          </a:lnRef>
+          <a:fillRef idx="3">
+            <a:schemeClr val="accent1"/>
+          </a:fillRef>
+          <a:effectRef idx="2">
+            <a:schemeClr val="accent1"/>
+          </a:effectRef>
+          <a:fontRef idx="minor">
+            <a:schemeClr val="lt1"/>
+          </a:fontRef>
+        </p:style>
+        <p:txBody>
+          <a:bodyPr rtlCol="0" anchor="ctr"/>
+          <a:lstStyle/>
+          <a:p>
+            <a:pPr algn="ctr"/>
+          </a:p>
+        </p:txBody>
+      </p:sp>
+      <p:sp>
+        <p:nvSpPr>
+          <p:cNvPr id="21" name="TextBox 20"/>
+          <p:cNvSpPr txBox="1"/>
+          <p:nvPr/>
+        </p:nvSpPr>
+        <p:spPr>
+          <a:xfrm>
+            <a:off x="1097280" y="3593592"/>
+            <a:ext cx="10362895" cy="402336"/>
+          </a:xfrm>
+          <a:prstGeom prst="rect">
+            <a:avLst/>
+          </a:prstGeom>
+          <a:noFill/>
+        </p:spPr>
+        <p:txBody>
+          <a:bodyPr wrap="square" anchor="ctr"/>
+          <a:lstStyle/>
+          <a:p>
+            <a:r>
+              <a:rPr sz="1500" b="1" i="0">
+                <a:solidFill>
+                  <a:srgbClr val="333333"/>
+                </a:solidFill>
+                <a:latin typeface="Calibri"/>
+              </a:rPr>
+              <a:t>LO QUE CORREGIMOS A MANO</a:t>
+            </a:r>
+            <a:r>
+              <a:rPr sz="1500" b="0" i="0">
+                <a:solidFill>
+                  <a:srgbClr val="333333"/>
+                </a:solidFill>
+                <a:latin typeface="Calibri"/>
+              </a:rPr>
+              <a:t> — Cada corrección con </a:t>
+            </a:r>
+            <a:r>
+              <a:rPr sz="1500" b="1" i="0">
+                <a:solidFill>
+                  <a:srgbClr val="333333"/>
+                </a:solidFill>
+                <a:latin typeface="Calibri"/>
+              </a:rPr>
+              <a:t>la razón y la sesión de donde sale</a:t>
+            </a:r>
+            <a:r>
+              <a:rPr sz="1500" b="0" i="0">
+                <a:solidFill>
+                  <a:srgbClr val="333333"/>
+                </a:solidFill>
+                <a:latin typeface="Calibri"/>
+              </a:rPr>
+              <a:t>: qué proponía la IA, qué quedó, y por qué. Es el bloque que más pesa.</a:t>
+            </a:r>
+          </a:p>
+        </p:txBody>
+      </p:sp>
+      <p:sp>
+        <p:nvSpPr>
+          <p:cNvPr id="22" name="Rounded Rectangle 21"/>
+          <p:cNvSpPr/>
+          <p:nvPr/>
+        </p:nvSpPr>
+        <p:spPr>
+          <a:xfrm>
+            <a:off x="457200" y="4178808"/>
+            <a:ext cx="11277295" cy="566928"/>
+          </a:xfrm>
+          <a:prstGeom prst="roundRect">
+            <a:avLst>
+              <a:gd name="adj" fmla="val 12000"/>
+            </a:avLst>
+          </a:prstGeom>
+          <a:solidFill>
+            <a:srgbClr val="F2F2F2"/>
+          </a:solidFill>
+          <a:ln>
+            <a:noFill/>
+          </a:ln>
+        </p:spPr>
+        <p:style>
+          <a:lnRef idx="1">
+            <a:schemeClr val="accent1"/>
+          </a:lnRef>
+          <a:fillRef idx="3">
+            <a:schemeClr val="accent1"/>
+          </a:fillRef>
+          <a:effectRef idx="2">
+            <a:schemeClr val="accent1"/>
+          </a:effectRef>
+          <a:fontRef idx="minor">
+            <a:schemeClr val="lt1"/>
+          </a:fontRef>
+        </p:style>
+        <p:txBody>
+          <a:bodyPr rtlCol="0" anchor="ctr"/>
+          <a:lstStyle/>
+          <a:p>
+            <a:pPr algn="ctr"/>
+          </a:p>
+        </p:txBody>
+      </p:sp>
+      <p:sp>
+        <p:nvSpPr>
+          <p:cNvPr id="23" name="Rectangle 22"/>
+          <p:cNvSpPr/>
+          <p:nvPr/>
+        </p:nvSpPr>
+        <p:spPr>
+          <a:xfrm>
+            <a:off x="640080" y="4325112"/>
+            <a:ext cx="274320" cy="274320"/>
+          </a:xfrm>
+          <a:prstGeom prst="rect">
+            <a:avLst/>
+          </a:prstGeom>
+          <a:solidFill>
+            <a:srgbClr val="FFFFFF"/>
+          </a:solidFill>
+          <a:ln>
+            <a:solidFill>
+              <a:srgbClr val="333333"/>
+            </a:solidFill>
+          </a:ln>
+        </p:spPr>
+        <p:style>
+          <a:lnRef idx="1">
+            <a:schemeClr val="accent1"/>
+          </a:lnRef>
+          <a:fillRef idx="3">
+            <a:schemeClr val="accent1"/>
+          </a:fillRef>
+          <a:effectRef idx="2">
+            <a:schemeClr val="accent1"/>
+          </a:effectRef>
+          <a:fontRef idx="minor">
+            <a:schemeClr val="lt1"/>
+          </a:fontRef>
+        </p:style>
+        <p:txBody>
+          <a:bodyPr rtlCol="0" anchor="ctr"/>
+          <a:lstStyle/>
+          <a:p>
+            <a:pPr algn="ctr"/>
+          </a:p>
+        </p:txBody>
+      </p:sp>
+      <p:sp>
+        <p:nvSpPr>
+          <p:cNvPr id="24" name="Rectangle 23"/>
+          <p:cNvSpPr/>
+          <p:nvPr/>
+        </p:nvSpPr>
+        <p:spPr>
+          <a:xfrm>
+            <a:off x="640080" y="4325112"/>
+            <a:ext cx="73152" cy="274320"/>
+          </a:xfrm>
+          <a:prstGeom prst="rect">
+            <a:avLst/>
+          </a:prstGeom>
+          <a:solidFill>
+            <a:srgbClr val="269CCB"/>
+          </a:solidFill>
+          <a:ln>
+            <a:noFill/>
+          </a:ln>
+        </p:spPr>
+        <p:style>
+          <a:lnRef idx="1">
+            <a:schemeClr val="accent1"/>
+          </a:lnRef>
+          <a:fillRef idx="3">
+            <a:schemeClr val="accent1"/>
+          </a:fillRef>
+          <a:effectRef idx="2">
+            <a:schemeClr val="accent1"/>
+          </a:effectRef>
+          <a:fontRef idx="minor">
+            <a:schemeClr val="lt1"/>
+          </a:fontRef>
+        </p:style>
+        <p:txBody>
+          <a:bodyPr rtlCol="0" anchor="ctr"/>
+          <a:lstStyle/>
+          <a:p>
+            <a:pPr algn="ctr"/>
+          </a:p>
+        </p:txBody>
+      </p:sp>
+      <p:sp>
+        <p:nvSpPr>
+          <p:cNvPr id="25" name="TextBox 24"/>
+          <p:cNvSpPr txBox="1"/>
+          <p:nvPr/>
+        </p:nvSpPr>
+        <p:spPr>
+          <a:xfrm>
+            <a:off x="1097280" y="4270248"/>
+            <a:ext cx="10362895" cy="402336"/>
+          </a:xfrm>
+          <a:prstGeom prst="rect">
+            <a:avLst/>
+          </a:prstGeom>
+          <a:noFill/>
+        </p:spPr>
+        <p:txBody>
+          <a:bodyPr wrap="square" anchor="ctr"/>
+          <a:lstStyle/>
+          <a:p>
+            <a:r>
+              <a:rPr sz="1500" b="1" i="0">
+                <a:solidFill>
+                  <a:srgbClr val="333333"/>
+                </a:solidFill>
+                <a:latin typeface="Calibri"/>
+              </a:rPr>
+              <a:t>LO QUE DESCARTAMOS Y POR QUÉ</a:t>
+            </a:r>
+            <a:r>
+              <a:rPr sz="1500" b="0" i="0">
+                <a:solidFill>
+                  <a:srgbClr val="333333"/>
+                </a:solidFill>
+                <a:latin typeface="Calibri"/>
+              </a:rPr>
+              <a:t> — Las propuestas que se rechazaron completas, y el motivo: fuera del alcance, viola una restricción, viola la ley, o consume demasiado.</a:t>
+            </a:r>
+          </a:p>
+        </p:txBody>
+      </p:sp>
+      <p:sp>
+        <p:nvSpPr>
+          <p:cNvPr id="26" name="TextBox 25"/>
           <p:cNvSpPr txBox="1"/>
           <p:nvPr/>
         </p:nvSpPr>
@@ -9902,6 +9320,1558 @@
 </file>
 
 <file path=ppt/slides/slide22.xml><?xml version="1.0" encoding="utf-8"?>
+<p:sld xmlns:a="http://schemas.openxmlformats.org/drawingml/2006/main" xmlns:p="http://schemas.openxmlformats.org/presentationml/2006/main" xmlns:r="http://schemas.openxmlformats.org/officeDocument/2006/relationships">
+  <p:cSld>
+    <p:bg>
+      <p:bgPr>
+        <a:solidFill>
+          <a:srgbClr val="FFFFFF"/>
+        </a:solidFill>
+        <a:effectLst/>
+      </p:bgPr>
+    </p:bg>
+    <p:spTree>
+      <p:nvGrpSpPr>
+        <p:cNvPr id="1" name=""/>
+        <p:cNvGrpSpPr/>
+        <p:nvPr/>
+      </p:nvGrpSpPr>
+      <p:grpSpPr/>
+      <p:sp>
+        <p:nvSpPr>
+          <p:cNvPr id="2" name="Rectangle 1"/>
+          <p:cNvSpPr/>
+          <p:nvPr/>
+        </p:nvSpPr>
+        <p:spPr>
+          <a:xfrm>
+            <a:off x="0" y="0"/>
+            <a:ext cx="12191695" cy="1170432"/>
+          </a:xfrm>
+          <a:prstGeom prst="rect">
+            <a:avLst/>
+          </a:prstGeom>
+          <a:solidFill>
+            <a:srgbClr val="095292"/>
+          </a:solidFill>
+          <a:ln>
+            <a:noFill/>
+          </a:ln>
+        </p:spPr>
+        <p:style>
+          <a:lnRef idx="1">
+            <a:schemeClr val="accent1"/>
+          </a:lnRef>
+          <a:fillRef idx="3">
+            <a:schemeClr val="accent1"/>
+          </a:fillRef>
+          <a:effectRef idx="2">
+            <a:schemeClr val="accent1"/>
+          </a:effectRef>
+          <a:fontRef idx="minor">
+            <a:schemeClr val="lt1"/>
+          </a:fontRef>
+        </p:style>
+        <p:txBody>
+          <a:bodyPr rtlCol="0" anchor="ctr"/>
+          <a:lstStyle/>
+          <a:p>
+            <a:pPr algn="ctr"/>
+          </a:p>
+        </p:txBody>
+      </p:sp>
+      <p:sp>
+        <p:nvSpPr>
+          <p:cNvPr id="3" name="Rectangle 2"/>
+          <p:cNvSpPr/>
+          <p:nvPr/>
+        </p:nvSpPr>
+        <p:spPr>
+          <a:xfrm>
+            <a:off x="0" y="1170432"/>
+            <a:ext cx="12191695" cy="41148"/>
+          </a:xfrm>
+          <a:prstGeom prst="rect">
+            <a:avLst/>
+          </a:prstGeom>
+          <a:solidFill>
+            <a:srgbClr val="FFD000"/>
+          </a:solidFill>
+          <a:ln>
+            <a:noFill/>
+          </a:ln>
+        </p:spPr>
+        <p:style>
+          <a:lnRef idx="1">
+            <a:schemeClr val="accent1"/>
+          </a:lnRef>
+          <a:fillRef idx="3">
+            <a:schemeClr val="accent1"/>
+          </a:fillRef>
+          <a:effectRef idx="2">
+            <a:schemeClr val="accent1"/>
+          </a:effectRef>
+          <a:fontRef idx="minor">
+            <a:schemeClr val="lt1"/>
+          </a:fontRef>
+        </p:style>
+        <p:txBody>
+          <a:bodyPr rtlCol="0" anchor="ctr"/>
+          <a:lstStyle/>
+          <a:p>
+            <a:pPr algn="ctr"/>
+          </a:p>
+        </p:txBody>
+      </p:sp>
+      <p:sp>
+        <p:nvSpPr>
+          <p:cNvPr id="4" name="TextBox 3"/>
+          <p:cNvSpPr txBox="1"/>
+          <p:nvPr/>
+        </p:nvSpPr>
+        <p:spPr>
+          <a:xfrm>
+            <a:off x="457200" y="164592"/>
+            <a:ext cx="11277295" cy="384048"/>
+          </a:xfrm>
+          <a:prstGeom prst="rect">
+            <a:avLst/>
+          </a:prstGeom>
+          <a:noFill/>
+        </p:spPr>
+        <p:txBody>
+          <a:bodyPr wrap="square">
+            <a:spAutoFit/>
+          </a:bodyPr>
+          <a:lstStyle/>
+          <a:p>
+            <a:r>
+              <a:rPr sz="2600" b="1" i="0">
+                <a:solidFill>
+                  <a:srgbClr val="FFFFFF"/>
+                </a:solidFill>
+                <a:latin typeface="Calibri"/>
+              </a:rPr>
+              <a:t>Cómo se expone en 3 minutos</a:t>
+            </a:r>
+          </a:p>
+        </p:txBody>
+      </p:sp>
+      <p:sp>
+        <p:nvSpPr>
+          <p:cNvPr id="5" name="TextBox 4"/>
+          <p:cNvSpPr txBox="1"/>
+          <p:nvPr/>
+        </p:nvSpPr>
+        <p:spPr>
+          <a:xfrm>
+            <a:off x="457200" y="566928"/>
+            <a:ext cx="11277295" cy="411480"/>
+          </a:xfrm>
+          <a:prstGeom prst="rect">
+            <a:avLst/>
+          </a:prstGeom>
+          <a:noFill/>
+        </p:spPr>
+        <p:txBody>
+          <a:bodyPr wrap="square">
+            <a:spAutoFit/>
+          </a:bodyPr>
+          <a:lstStyle/>
+          <a:p>
+            <a:r>
+              <a:rPr sz="1400" b="0" i="0">
+                <a:solidFill>
+                  <a:srgbClr val="B8D8EE"/>
+                </a:solidFill>
+                <a:latin typeface="Calibri"/>
+              </a:rPr>
+              <a:t>Habla el vocero con la pantalla ya compartida · cronómetro en pantalla · se corta al llegar a cero</a:t>
+            </a:r>
+          </a:p>
+        </p:txBody>
+      </p:sp>
+      <p:sp>
+        <p:nvSpPr>
+          <p:cNvPr id="6" name="Rounded Rectangle 5"/>
+          <p:cNvSpPr/>
+          <p:nvPr/>
+        </p:nvSpPr>
+        <p:spPr>
+          <a:xfrm>
+            <a:off x="457200" y="1444752"/>
+            <a:ext cx="11277295" cy="908913"/>
+          </a:xfrm>
+          <a:prstGeom prst="roundRect">
+            <a:avLst>
+              <a:gd name="adj" fmla="val 12000"/>
+            </a:avLst>
+          </a:prstGeom>
+          <a:solidFill>
+            <a:srgbClr val="F2F2F2"/>
+          </a:solidFill>
+          <a:ln>
+            <a:noFill/>
+          </a:ln>
+        </p:spPr>
+        <p:style>
+          <a:lnRef idx="1">
+            <a:schemeClr val="accent1"/>
+          </a:lnRef>
+          <a:fillRef idx="3">
+            <a:schemeClr val="accent1"/>
+          </a:fillRef>
+          <a:effectRef idx="2">
+            <a:schemeClr val="accent1"/>
+          </a:effectRef>
+          <a:fontRef idx="minor">
+            <a:schemeClr val="lt1"/>
+          </a:fontRef>
+        </p:style>
+        <p:txBody>
+          <a:bodyPr rtlCol="0" anchor="ctr"/>
+          <a:lstStyle/>
+          <a:p>
+            <a:pPr algn="ctr"/>
+          </a:p>
+        </p:txBody>
+      </p:sp>
+      <p:sp>
+        <p:nvSpPr>
+          <p:cNvPr id="7" name="Rounded Rectangle 6"/>
+          <p:cNvSpPr/>
+          <p:nvPr/>
+        </p:nvSpPr>
+        <p:spPr>
+          <a:xfrm>
+            <a:off x="594360" y="1679752"/>
+            <a:ext cx="438912" cy="438912"/>
+          </a:xfrm>
+          <a:prstGeom prst="roundRect">
+            <a:avLst>
+              <a:gd name="adj" fmla="val 12000"/>
+            </a:avLst>
+          </a:prstGeom>
+          <a:solidFill>
+            <a:srgbClr val="095292"/>
+          </a:solidFill>
+          <a:ln>
+            <a:noFill/>
+          </a:ln>
+        </p:spPr>
+        <p:style>
+          <a:lnRef idx="1">
+            <a:schemeClr val="accent1"/>
+          </a:lnRef>
+          <a:fillRef idx="3">
+            <a:schemeClr val="accent1"/>
+          </a:fillRef>
+          <a:effectRef idx="2">
+            <a:schemeClr val="accent1"/>
+          </a:effectRef>
+          <a:fontRef idx="minor">
+            <a:schemeClr val="lt1"/>
+          </a:fontRef>
+        </p:style>
+        <p:txBody>
+          <a:bodyPr rtlCol="0" anchor="ctr"/>
+          <a:lstStyle/>
+          <a:p>
+            <a:pPr algn="ctr"/>
+          </a:p>
+        </p:txBody>
+      </p:sp>
+      <p:sp>
+        <p:nvSpPr>
+          <p:cNvPr id="8" name="TextBox 7"/>
+          <p:cNvSpPr txBox="1"/>
+          <p:nvPr/>
+        </p:nvSpPr>
+        <p:spPr>
+          <a:xfrm>
+            <a:off x="594360" y="1679752"/>
+            <a:ext cx="438912" cy="438912"/>
+          </a:xfrm>
+          <a:prstGeom prst="rect">
+            <a:avLst/>
+          </a:prstGeom>
+          <a:noFill/>
+        </p:spPr>
+        <p:txBody>
+          <a:bodyPr wrap="square" anchor="ctr"/>
+          <a:lstStyle/>
+          <a:p>
+            <a:pPr algn="ctr"/>
+            <a:r>
+              <a:rPr sz="1600" b="1" i="0">
+                <a:solidFill>
+                  <a:srgbClr val="FFFFFF"/>
+                </a:solidFill>
+                <a:latin typeface="Calibri"/>
+              </a:rPr>
+              <a:t>1</a:t>
+            </a:r>
+          </a:p>
+        </p:txBody>
+      </p:sp>
+      <p:sp>
+        <p:nvSpPr>
+          <p:cNvPr id="9" name="TextBox 8"/>
+          <p:cNvSpPr txBox="1"/>
+          <p:nvPr/>
+        </p:nvSpPr>
+        <p:spPr>
+          <a:xfrm>
+            <a:off x="1188720" y="1536192"/>
+            <a:ext cx="10271455" cy="744321"/>
+          </a:xfrm>
+          <a:prstGeom prst="rect">
+            <a:avLst/>
+          </a:prstGeom>
+          <a:noFill/>
+        </p:spPr>
+        <p:txBody>
+          <a:bodyPr wrap="square" anchor="ctr"/>
+          <a:lstStyle/>
+          <a:p>
+            <a:r>
+              <a:rPr sz="1500" b="1" i="0">
+                <a:solidFill>
+                  <a:srgbClr val="095292"/>
+                </a:solidFill>
+                <a:latin typeface="Calibri"/>
+              </a:rPr>
+              <a:t>25 s · El prompt</a:t>
+            </a:r>
+          </a:p>
+          <a:p>
+            <a:pPr>
+              <a:spcBef>
+                <a:spcPts val="200"/>
+              </a:spcBef>
+            </a:pPr>
+            <a:r>
+              <a:rPr sz="1300" b="0" i="0">
+                <a:solidFill>
+                  <a:srgbClr val="333333"/>
+                </a:solidFill>
+                <a:latin typeface="Calibri"/>
+              </a:rPr>
+              <a:t>Lean las restricciones que pusieron. Solo esa parte.</a:t>
+            </a:r>
+          </a:p>
+        </p:txBody>
+      </p:sp>
+      <p:sp>
+        <p:nvSpPr>
+          <p:cNvPr id="10" name="Rounded Rectangle 9"/>
+          <p:cNvSpPr/>
+          <p:nvPr/>
+        </p:nvSpPr>
+        <p:spPr>
+          <a:xfrm>
+            <a:off x="457200" y="2445105"/>
+            <a:ext cx="11277295" cy="908913"/>
+          </a:xfrm>
+          <a:prstGeom prst="roundRect">
+            <a:avLst>
+              <a:gd name="adj" fmla="val 12000"/>
+            </a:avLst>
+          </a:prstGeom>
+          <a:solidFill>
+            <a:srgbClr val="E8F4FA"/>
+          </a:solidFill>
+          <a:ln>
+            <a:noFill/>
+          </a:ln>
+        </p:spPr>
+        <p:style>
+          <a:lnRef idx="1">
+            <a:schemeClr val="accent1"/>
+          </a:lnRef>
+          <a:fillRef idx="3">
+            <a:schemeClr val="accent1"/>
+          </a:fillRef>
+          <a:effectRef idx="2">
+            <a:schemeClr val="accent1"/>
+          </a:effectRef>
+          <a:fontRef idx="minor">
+            <a:schemeClr val="lt1"/>
+          </a:fontRef>
+        </p:style>
+        <p:txBody>
+          <a:bodyPr rtlCol="0" anchor="ctr"/>
+          <a:lstStyle/>
+          <a:p>
+            <a:pPr algn="ctr"/>
+          </a:p>
+        </p:txBody>
+      </p:sp>
+      <p:sp>
+        <p:nvSpPr>
+          <p:cNvPr id="11" name="Rounded Rectangle 10"/>
+          <p:cNvSpPr/>
+          <p:nvPr/>
+        </p:nvSpPr>
+        <p:spPr>
+          <a:xfrm>
+            <a:off x="594360" y="2680106"/>
+            <a:ext cx="438912" cy="438912"/>
+          </a:xfrm>
+          <a:prstGeom prst="roundRect">
+            <a:avLst>
+              <a:gd name="adj" fmla="val 12000"/>
+            </a:avLst>
+          </a:prstGeom>
+          <a:solidFill>
+            <a:srgbClr val="095292"/>
+          </a:solidFill>
+          <a:ln>
+            <a:noFill/>
+          </a:ln>
+        </p:spPr>
+        <p:style>
+          <a:lnRef idx="1">
+            <a:schemeClr val="accent1"/>
+          </a:lnRef>
+          <a:fillRef idx="3">
+            <a:schemeClr val="accent1"/>
+          </a:fillRef>
+          <a:effectRef idx="2">
+            <a:schemeClr val="accent1"/>
+          </a:effectRef>
+          <a:fontRef idx="minor">
+            <a:schemeClr val="lt1"/>
+          </a:fontRef>
+        </p:style>
+        <p:txBody>
+          <a:bodyPr rtlCol="0" anchor="ctr"/>
+          <a:lstStyle/>
+          <a:p>
+            <a:pPr algn="ctr"/>
+          </a:p>
+        </p:txBody>
+      </p:sp>
+      <p:sp>
+        <p:nvSpPr>
+          <p:cNvPr id="12" name="TextBox 11"/>
+          <p:cNvSpPr txBox="1"/>
+          <p:nvPr/>
+        </p:nvSpPr>
+        <p:spPr>
+          <a:xfrm>
+            <a:off x="594360" y="2680106"/>
+            <a:ext cx="438912" cy="438912"/>
+          </a:xfrm>
+          <a:prstGeom prst="rect">
+            <a:avLst/>
+          </a:prstGeom>
+          <a:noFill/>
+        </p:spPr>
+        <p:txBody>
+          <a:bodyPr wrap="square" anchor="ctr"/>
+          <a:lstStyle/>
+          <a:p>
+            <a:pPr algn="ctr"/>
+            <a:r>
+              <a:rPr sz="1600" b="1" i="0">
+                <a:solidFill>
+                  <a:srgbClr val="FFFFFF"/>
+                </a:solidFill>
+                <a:latin typeface="Calibri"/>
+              </a:rPr>
+              <a:t>2</a:t>
+            </a:r>
+          </a:p>
+        </p:txBody>
+      </p:sp>
+      <p:sp>
+        <p:nvSpPr>
+          <p:cNvPr id="13" name="TextBox 12"/>
+          <p:cNvSpPr txBox="1"/>
+          <p:nvPr/>
+        </p:nvSpPr>
+        <p:spPr>
+          <a:xfrm>
+            <a:off x="1188720" y="2536545"/>
+            <a:ext cx="10271455" cy="744321"/>
+          </a:xfrm>
+          <a:prstGeom prst="rect">
+            <a:avLst/>
+          </a:prstGeom>
+          <a:noFill/>
+        </p:spPr>
+        <p:txBody>
+          <a:bodyPr wrap="square" anchor="ctr"/>
+          <a:lstStyle/>
+          <a:p>
+            <a:r>
+              <a:rPr sz="1500" b="1" i="0">
+                <a:solidFill>
+                  <a:srgbClr val="095292"/>
+                </a:solidFill>
+                <a:latin typeface="Calibri"/>
+              </a:rPr>
+              <a:t>30 s · Las tres variantes</a:t>
+            </a:r>
+          </a:p>
+          <a:p>
+            <a:pPr>
+              <a:spcBef>
+                <a:spcPts val="200"/>
+              </a:spcBef>
+            </a:pPr>
+            <a:r>
+              <a:rPr sz="1300" b="0" i="0">
+                <a:solidFill>
+                  <a:srgbClr val="333333"/>
+                </a:solidFill>
+                <a:latin typeface="Calibri"/>
+              </a:rPr>
+              <a:t>En una frase cada una.</a:t>
+            </a:r>
+          </a:p>
+        </p:txBody>
+      </p:sp>
+      <p:sp>
+        <p:nvSpPr>
+          <p:cNvPr id="14" name="Rounded Rectangle 13"/>
+          <p:cNvSpPr/>
+          <p:nvPr/>
+        </p:nvSpPr>
+        <p:spPr>
+          <a:xfrm>
+            <a:off x="457200" y="3445459"/>
+            <a:ext cx="11277295" cy="908913"/>
+          </a:xfrm>
+          <a:prstGeom prst="roundRect">
+            <a:avLst>
+              <a:gd name="adj" fmla="val 12000"/>
+            </a:avLst>
+          </a:prstGeom>
+          <a:solidFill>
+            <a:srgbClr val="F2F2F2"/>
+          </a:solidFill>
+          <a:ln>
+            <a:noFill/>
+          </a:ln>
+        </p:spPr>
+        <p:style>
+          <a:lnRef idx="1">
+            <a:schemeClr val="accent1"/>
+          </a:lnRef>
+          <a:fillRef idx="3">
+            <a:schemeClr val="accent1"/>
+          </a:fillRef>
+          <a:effectRef idx="2">
+            <a:schemeClr val="accent1"/>
+          </a:effectRef>
+          <a:fontRef idx="minor">
+            <a:schemeClr val="lt1"/>
+          </a:fontRef>
+        </p:style>
+        <p:txBody>
+          <a:bodyPr rtlCol="0" anchor="ctr"/>
+          <a:lstStyle/>
+          <a:p>
+            <a:pPr algn="ctr"/>
+          </a:p>
+        </p:txBody>
+      </p:sp>
+      <p:sp>
+        <p:nvSpPr>
+          <p:cNvPr id="15" name="Rounded Rectangle 14"/>
+          <p:cNvSpPr/>
+          <p:nvPr/>
+        </p:nvSpPr>
+        <p:spPr>
+          <a:xfrm>
+            <a:off x="594360" y="3680460"/>
+            <a:ext cx="438912" cy="438912"/>
+          </a:xfrm>
+          <a:prstGeom prst="roundRect">
+            <a:avLst>
+              <a:gd name="adj" fmla="val 12000"/>
+            </a:avLst>
+          </a:prstGeom>
+          <a:solidFill>
+            <a:srgbClr val="095292"/>
+          </a:solidFill>
+          <a:ln>
+            <a:noFill/>
+          </a:ln>
+        </p:spPr>
+        <p:style>
+          <a:lnRef idx="1">
+            <a:schemeClr val="accent1"/>
+          </a:lnRef>
+          <a:fillRef idx="3">
+            <a:schemeClr val="accent1"/>
+          </a:fillRef>
+          <a:effectRef idx="2">
+            <a:schemeClr val="accent1"/>
+          </a:effectRef>
+          <a:fontRef idx="minor">
+            <a:schemeClr val="lt1"/>
+          </a:fontRef>
+        </p:style>
+        <p:txBody>
+          <a:bodyPr rtlCol="0" anchor="ctr"/>
+          <a:lstStyle/>
+          <a:p>
+            <a:pPr algn="ctr"/>
+          </a:p>
+        </p:txBody>
+      </p:sp>
+      <p:sp>
+        <p:nvSpPr>
+          <p:cNvPr id="16" name="TextBox 15"/>
+          <p:cNvSpPr txBox="1"/>
+          <p:nvPr/>
+        </p:nvSpPr>
+        <p:spPr>
+          <a:xfrm>
+            <a:off x="594360" y="3680460"/>
+            <a:ext cx="438912" cy="438912"/>
+          </a:xfrm>
+          <a:prstGeom prst="rect">
+            <a:avLst/>
+          </a:prstGeom>
+          <a:noFill/>
+        </p:spPr>
+        <p:txBody>
+          <a:bodyPr wrap="square" anchor="ctr"/>
+          <a:lstStyle/>
+          <a:p>
+            <a:pPr algn="ctr"/>
+            <a:r>
+              <a:rPr sz="1600" b="1" i="0">
+                <a:solidFill>
+                  <a:srgbClr val="FFFFFF"/>
+                </a:solidFill>
+                <a:latin typeface="Calibri"/>
+              </a:rPr>
+              <a:t>3</a:t>
+            </a:r>
+          </a:p>
+        </p:txBody>
+      </p:sp>
+      <p:sp>
+        <p:nvSpPr>
+          <p:cNvPr id="17" name="TextBox 16"/>
+          <p:cNvSpPr txBox="1"/>
+          <p:nvPr/>
+        </p:nvSpPr>
+        <p:spPr>
+          <a:xfrm>
+            <a:off x="1188720" y="3536899"/>
+            <a:ext cx="10271455" cy="744321"/>
+          </a:xfrm>
+          <a:prstGeom prst="rect">
+            <a:avLst/>
+          </a:prstGeom>
+          <a:noFill/>
+        </p:spPr>
+        <p:txBody>
+          <a:bodyPr wrap="square" anchor="ctr"/>
+          <a:lstStyle/>
+          <a:p>
+            <a:r>
+              <a:rPr sz="1500" b="1" i="0">
+                <a:solidFill>
+                  <a:srgbClr val="095292"/>
+                </a:solidFill>
+                <a:latin typeface="Calibri"/>
+              </a:rPr>
+              <a:t>30 s · La que eligieron</a:t>
+            </a:r>
+          </a:p>
+          <a:p>
+            <a:pPr>
+              <a:spcBef>
+                <a:spcPts val="200"/>
+              </a:spcBef>
+            </a:pPr>
+            <a:r>
+              <a:rPr sz="1300" b="0" i="0">
+                <a:solidFill>
+                  <a:srgbClr val="333333"/>
+                </a:solidFill>
+                <a:latin typeface="Calibri"/>
+              </a:rPr>
+              <a:t>Y el requisito en el que se apoyaron.</a:t>
+            </a:r>
+          </a:p>
+        </p:txBody>
+      </p:sp>
+      <p:sp>
+        <p:nvSpPr>
+          <p:cNvPr id="18" name="Rounded Rectangle 17"/>
+          <p:cNvSpPr/>
+          <p:nvPr/>
+        </p:nvSpPr>
+        <p:spPr>
+          <a:xfrm>
+            <a:off x="457200" y="4445812"/>
+            <a:ext cx="11277295" cy="908913"/>
+          </a:xfrm>
+          <a:prstGeom prst="roundRect">
+            <a:avLst>
+              <a:gd name="adj" fmla="val 12000"/>
+            </a:avLst>
+          </a:prstGeom>
+          <a:solidFill>
+            <a:srgbClr val="E8F4FA"/>
+          </a:solidFill>
+          <a:ln>
+            <a:noFill/>
+          </a:ln>
+        </p:spPr>
+        <p:style>
+          <a:lnRef idx="1">
+            <a:schemeClr val="accent1"/>
+          </a:lnRef>
+          <a:fillRef idx="3">
+            <a:schemeClr val="accent1"/>
+          </a:fillRef>
+          <a:effectRef idx="2">
+            <a:schemeClr val="accent1"/>
+          </a:effectRef>
+          <a:fontRef idx="minor">
+            <a:schemeClr val="lt1"/>
+          </a:fontRef>
+        </p:style>
+        <p:txBody>
+          <a:bodyPr rtlCol="0" anchor="ctr"/>
+          <a:lstStyle/>
+          <a:p>
+            <a:pPr algn="ctr"/>
+          </a:p>
+        </p:txBody>
+      </p:sp>
+      <p:sp>
+        <p:nvSpPr>
+          <p:cNvPr id="19" name="Rounded Rectangle 18"/>
+          <p:cNvSpPr/>
+          <p:nvPr/>
+        </p:nvSpPr>
+        <p:spPr>
+          <a:xfrm>
+            <a:off x="594360" y="4680813"/>
+            <a:ext cx="438912" cy="438912"/>
+          </a:xfrm>
+          <a:prstGeom prst="roundRect">
+            <a:avLst>
+              <a:gd name="adj" fmla="val 12000"/>
+            </a:avLst>
+          </a:prstGeom>
+          <a:solidFill>
+            <a:srgbClr val="095292"/>
+          </a:solidFill>
+          <a:ln>
+            <a:noFill/>
+          </a:ln>
+        </p:spPr>
+        <p:style>
+          <a:lnRef idx="1">
+            <a:schemeClr val="accent1"/>
+          </a:lnRef>
+          <a:fillRef idx="3">
+            <a:schemeClr val="accent1"/>
+          </a:fillRef>
+          <a:effectRef idx="2">
+            <a:schemeClr val="accent1"/>
+          </a:effectRef>
+          <a:fontRef idx="minor">
+            <a:schemeClr val="lt1"/>
+          </a:fontRef>
+        </p:style>
+        <p:txBody>
+          <a:bodyPr rtlCol="0" anchor="ctr"/>
+          <a:lstStyle/>
+          <a:p>
+            <a:pPr algn="ctr"/>
+          </a:p>
+        </p:txBody>
+      </p:sp>
+      <p:sp>
+        <p:nvSpPr>
+          <p:cNvPr id="20" name="TextBox 19"/>
+          <p:cNvSpPr txBox="1"/>
+          <p:nvPr/>
+        </p:nvSpPr>
+        <p:spPr>
+          <a:xfrm>
+            <a:off x="594360" y="4680813"/>
+            <a:ext cx="438912" cy="438912"/>
+          </a:xfrm>
+          <a:prstGeom prst="rect">
+            <a:avLst/>
+          </a:prstGeom>
+          <a:noFill/>
+        </p:spPr>
+        <p:txBody>
+          <a:bodyPr wrap="square" anchor="ctr"/>
+          <a:lstStyle/>
+          <a:p>
+            <a:pPr algn="ctr"/>
+            <a:r>
+              <a:rPr sz="1600" b="1" i="0">
+                <a:solidFill>
+                  <a:srgbClr val="FFFFFF"/>
+                </a:solidFill>
+                <a:latin typeface="Calibri"/>
+              </a:rPr>
+              <a:t>4</a:t>
+            </a:r>
+          </a:p>
+        </p:txBody>
+      </p:sp>
+      <p:sp>
+        <p:nvSpPr>
+          <p:cNvPr id="21" name="TextBox 20"/>
+          <p:cNvSpPr txBox="1"/>
+          <p:nvPr/>
+        </p:nvSpPr>
+        <p:spPr>
+          <a:xfrm>
+            <a:off x="1188720" y="4537252"/>
+            <a:ext cx="10271455" cy="744321"/>
+          </a:xfrm>
+          <a:prstGeom prst="rect">
+            <a:avLst/>
+          </a:prstGeom>
+          <a:noFill/>
+        </p:spPr>
+        <p:txBody>
+          <a:bodyPr wrap="square" anchor="ctr"/>
+          <a:lstStyle/>
+          <a:p>
+            <a:r>
+              <a:rPr sz="1500" b="1" i="0">
+                <a:solidFill>
+                  <a:srgbClr val="095292"/>
+                </a:solidFill>
+                <a:latin typeface="Calibri"/>
+              </a:rPr>
+              <a:t>70 s · Lo que corrigieron</a:t>
+            </a:r>
+          </a:p>
+          <a:p>
+            <a:pPr>
+              <a:spcBef>
+                <a:spcPts val="200"/>
+              </a:spcBef>
+            </a:pPr>
+            <a:r>
+              <a:rPr sz="1300" b="0" i="0">
+                <a:solidFill>
+                  <a:srgbClr val="333333"/>
+                </a:solidFill>
+                <a:latin typeface="Calibri"/>
+              </a:rPr>
+              <a:t>Dos correcciones con su razón y </a:t>
+            </a:r>
+            <a:r>
+              <a:rPr sz="1300" b="1" i="0">
+                <a:solidFill>
+                  <a:srgbClr val="333333"/>
+                </a:solidFill>
+                <a:latin typeface="Calibri"/>
+              </a:rPr>
+              <a:t>de qué sesión sale cada una</a:t>
+            </a:r>
+            <a:r>
+              <a:rPr sz="1300" b="0" i="0">
+                <a:solidFill>
+                  <a:srgbClr val="333333"/>
+                </a:solidFill>
+                <a:latin typeface="Calibri"/>
+              </a:rPr>
+              <a:t>. Es el minuto obligatorio.</a:t>
+            </a:r>
+          </a:p>
+        </p:txBody>
+      </p:sp>
+      <p:sp>
+        <p:nvSpPr>
+          <p:cNvPr id="22" name="Rounded Rectangle 21"/>
+          <p:cNvSpPr/>
+          <p:nvPr/>
+        </p:nvSpPr>
+        <p:spPr>
+          <a:xfrm>
+            <a:off x="457200" y="5446166"/>
+            <a:ext cx="11277295" cy="908913"/>
+          </a:xfrm>
+          <a:prstGeom prst="roundRect">
+            <a:avLst>
+              <a:gd name="adj" fmla="val 12000"/>
+            </a:avLst>
+          </a:prstGeom>
+          <a:solidFill>
+            <a:srgbClr val="F2F2F2"/>
+          </a:solidFill>
+          <a:ln>
+            <a:noFill/>
+          </a:ln>
+        </p:spPr>
+        <p:style>
+          <a:lnRef idx="1">
+            <a:schemeClr val="accent1"/>
+          </a:lnRef>
+          <a:fillRef idx="3">
+            <a:schemeClr val="accent1"/>
+          </a:fillRef>
+          <a:effectRef idx="2">
+            <a:schemeClr val="accent1"/>
+          </a:effectRef>
+          <a:fontRef idx="minor">
+            <a:schemeClr val="lt1"/>
+          </a:fontRef>
+        </p:style>
+        <p:txBody>
+          <a:bodyPr rtlCol="0" anchor="ctr"/>
+          <a:lstStyle/>
+          <a:p>
+            <a:pPr algn="ctr"/>
+          </a:p>
+        </p:txBody>
+      </p:sp>
+      <p:sp>
+        <p:nvSpPr>
+          <p:cNvPr id="23" name="Rounded Rectangle 22"/>
+          <p:cNvSpPr/>
+          <p:nvPr/>
+        </p:nvSpPr>
+        <p:spPr>
+          <a:xfrm>
+            <a:off x="594360" y="5681167"/>
+            <a:ext cx="438912" cy="438912"/>
+          </a:xfrm>
+          <a:prstGeom prst="roundRect">
+            <a:avLst>
+              <a:gd name="adj" fmla="val 12000"/>
+            </a:avLst>
+          </a:prstGeom>
+          <a:solidFill>
+            <a:srgbClr val="095292"/>
+          </a:solidFill>
+          <a:ln>
+            <a:noFill/>
+          </a:ln>
+        </p:spPr>
+        <p:style>
+          <a:lnRef idx="1">
+            <a:schemeClr val="accent1"/>
+          </a:lnRef>
+          <a:fillRef idx="3">
+            <a:schemeClr val="accent1"/>
+          </a:fillRef>
+          <a:effectRef idx="2">
+            <a:schemeClr val="accent1"/>
+          </a:effectRef>
+          <a:fontRef idx="minor">
+            <a:schemeClr val="lt1"/>
+          </a:fontRef>
+        </p:style>
+        <p:txBody>
+          <a:bodyPr rtlCol="0" anchor="ctr"/>
+          <a:lstStyle/>
+          <a:p>
+            <a:pPr algn="ctr"/>
+          </a:p>
+        </p:txBody>
+      </p:sp>
+      <p:sp>
+        <p:nvSpPr>
+          <p:cNvPr id="24" name="TextBox 23"/>
+          <p:cNvSpPr txBox="1"/>
+          <p:nvPr/>
+        </p:nvSpPr>
+        <p:spPr>
+          <a:xfrm>
+            <a:off x="594360" y="5681167"/>
+            <a:ext cx="438912" cy="438912"/>
+          </a:xfrm>
+          <a:prstGeom prst="rect">
+            <a:avLst/>
+          </a:prstGeom>
+          <a:noFill/>
+        </p:spPr>
+        <p:txBody>
+          <a:bodyPr wrap="square" anchor="ctr"/>
+          <a:lstStyle/>
+          <a:p>
+            <a:pPr algn="ctr"/>
+            <a:r>
+              <a:rPr sz="1600" b="1" i="0">
+                <a:solidFill>
+                  <a:srgbClr val="FFFFFF"/>
+                </a:solidFill>
+                <a:latin typeface="Calibri"/>
+              </a:rPr>
+              <a:t>5</a:t>
+            </a:r>
+          </a:p>
+        </p:txBody>
+      </p:sp>
+      <p:sp>
+        <p:nvSpPr>
+          <p:cNvPr id="25" name="TextBox 24"/>
+          <p:cNvSpPr txBox="1"/>
+          <p:nvPr/>
+        </p:nvSpPr>
+        <p:spPr>
+          <a:xfrm>
+            <a:off x="1188720" y="5537606"/>
+            <a:ext cx="10271455" cy="744321"/>
+          </a:xfrm>
+          <a:prstGeom prst="rect">
+            <a:avLst/>
+          </a:prstGeom>
+          <a:noFill/>
+        </p:spPr>
+        <p:txBody>
+          <a:bodyPr wrap="square" anchor="ctr"/>
+          <a:lstStyle/>
+          <a:p>
+            <a:r>
+              <a:rPr sz="1500" b="1" i="0">
+                <a:solidFill>
+                  <a:srgbClr val="095292"/>
+                </a:solidFill>
+                <a:latin typeface="Calibri"/>
+              </a:rPr>
+              <a:t>25 s · Lo que descartaron</a:t>
+            </a:r>
+          </a:p>
+          <a:p>
+            <a:pPr>
+              <a:spcBef>
+                <a:spcPts val="200"/>
+              </a:spcBef>
+            </a:pPr>
+            <a:r>
+              <a:rPr sz="1300" b="0" i="0">
+                <a:solidFill>
+                  <a:srgbClr val="333333"/>
+                </a:solidFill>
+                <a:latin typeface="Calibri"/>
+              </a:rPr>
+              <a:t>Una propuesta rechazada y el motivo.</a:t>
+            </a:r>
+          </a:p>
+        </p:txBody>
+      </p:sp>
+      <p:sp>
+        <p:nvSpPr>
+          <p:cNvPr id="26" name="TextBox 25"/>
+          <p:cNvSpPr txBox="1"/>
+          <p:nvPr/>
+        </p:nvSpPr>
+        <p:spPr>
+          <a:xfrm>
+            <a:off x="11185855" y="6473952"/>
+            <a:ext cx="640080" cy="274320"/>
+          </a:xfrm>
+          <a:prstGeom prst="rect">
+            <a:avLst/>
+          </a:prstGeom>
+          <a:noFill/>
+        </p:spPr>
+        <p:txBody>
+          <a:bodyPr wrap="square">
+            <a:spAutoFit/>
+          </a:bodyPr>
+          <a:lstStyle/>
+          <a:p>
+            <a:pPr algn="r"/>
+            <a:r>
+              <a:rPr sz="1100" b="0" i="0">
+                <a:solidFill>
+                  <a:srgbClr val="666666"/>
+                </a:solidFill>
+                <a:latin typeface="Calibri"/>
+              </a:rPr>
+              <a:t>22</a:t>
+            </a:r>
+          </a:p>
+        </p:txBody>
+      </p:sp>
+    </p:spTree>
+  </p:cSld>
+  <p:clrMapOvr>
+    <a:masterClrMapping/>
+  </p:clrMapOvr>
+</p:sld>
+</file>
+
+<file path=ppt/slides/slide23.xml><?xml version="1.0" encoding="utf-8"?>
+<p:sld xmlns:a="http://schemas.openxmlformats.org/drawingml/2006/main" xmlns:p="http://schemas.openxmlformats.org/presentationml/2006/main" xmlns:r="http://schemas.openxmlformats.org/officeDocument/2006/relationships">
+  <p:cSld>
+    <p:bg>
+      <p:bgPr>
+        <a:solidFill>
+          <a:srgbClr val="FFFFFF"/>
+        </a:solidFill>
+        <a:effectLst/>
+      </p:bgPr>
+    </p:bg>
+    <p:spTree>
+      <p:nvGrpSpPr>
+        <p:cNvPr id="1" name=""/>
+        <p:cNvGrpSpPr/>
+        <p:nvPr/>
+      </p:nvGrpSpPr>
+      <p:grpSpPr/>
+      <p:sp>
+        <p:nvSpPr>
+          <p:cNvPr id="2" name="Rectangle 1"/>
+          <p:cNvSpPr/>
+          <p:nvPr/>
+        </p:nvSpPr>
+        <p:spPr>
+          <a:xfrm>
+            <a:off x="0" y="0"/>
+            <a:ext cx="12191695" cy="960120"/>
+          </a:xfrm>
+          <a:prstGeom prst="rect">
+            <a:avLst/>
+          </a:prstGeom>
+          <a:solidFill>
+            <a:srgbClr val="095292"/>
+          </a:solidFill>
+          <a:ln>
+            <a:noFill/>
+          </a:ln>
+        </p:spPr>
+        <p:style>
+          <a:lnRef idx="1">
+            <a:schemeClr val="accent1"/>
+          </a:lnRef>
+          <a:fillRef idx="3">
+            <a:schemeClr val="accent1"/>
+          </a:fillRef>
+          <a:effectRef idx="2">
+            <a:schemeClr val="accent1"/>
+          </a:effectRef>
+          <a:fontRef idx="minor">
+            <a:schemeClr val="lt1"/>
+          </a:fontRef>
+        </p:style>
+        <p:txBody>
+          <a:bodyPr rtlCol="0" anchor="ctr"/>
+          <a:lstStyle/>
+          <a:p>
+            <a:pPr algn="ctr"/>
+          </a:p>
+        </p:txBody>
+      </p:sp>
+      <p:sp>
+        <p:nvSpPr>
+          <p:cNvPr id="3" name="Rectangle 2"/>
+          <p:cNvSpPr/>
+          <p:nvPr/>
+        </p:nvSpPr>
+        <p:spPr>
+          <a:xfrm>
+            <a:off x="0" y="960120"/>
+            <a:ext cx="12191695" cy="41148"/>
+          </a:xfrm>
+          <a:prstGeom prst="rect">
+            <a:avLst/>
+          </a:prstGeom>
+          <a:solidFill>
+            <a:srgbClr val="FFD000"/>
+          </a:solidFill>
+          <a:ln>
+            <a:noFill/>
+          </a:ln>
+        </p:spPr>
+        <p:style>
+          <a:lnRef idx="1">
+            <a:schemeClr val="accent1"/>
+          </a:lnRef>
+          <a:fillRef idx="3">
+            <a:schemeClr val="accent1"/>
+          </a:fillRef>
+          <a:effectRef idx="2">
+            <a:schemeClr val="accent1"/>
+          </a:effectRef>
+          <a:fontRef idx="minor">
+            <a:schemeClr val="lt1"/>
+          </a:fontRef>
+        </p:style>
+        <p:txBody>
+          <a:bodyPr rtlCol="0" anchor="ctr"/>
+          <a:lstStyle/>
+          <a:p>
+            <a:pPr algn="ctr"/>
+          </a:p>
+        </p:txBody>
+      </p:sp>
+      <p:sp>
+        <p:nvSpPr>
+          <p:cNvPr id="4" name="TextBox 3"/>
+          <p:cNvSpPr txBox="1"/>
+          <p:nvPr/>
+        </p:nvSpPr>
+        <p:spPr>
+          <a:xfrm>
+            <a:off x="457200" y="164592"/>
+            <a:ext cx="11277295" cy="502920"/>
+          </a:xfrm>
+          <a:prstGeom prst="rect">
+            <a:avLst/>
+          </a:prstGeom>
+          <a:noFill/>
+        </p:spPr>
+        <p:txBody>
+          <a:bodyPr wrap="square">
+            <a:spAutoFit/>
+          </a:bodyPr>
+          <a:lstStyle/>
+          <a:p>
+            <a:r>
+              <a:rPr sz="2600" b="1" i="0">
+                <a:solidFill>
+                  <a:srgbClr val="FFFFFF"/>
+                </a:solidFill>
+                <a:latin typeface="Calibri"/>
+              </a:rPr>
+              <a:t>Para la Clase 12</a:t>
+            </a:r>
+          </a:p>
+        </p:txBody>
+      </p:sp>
+      <p:sp>
+        <p:nvSpPr>
+          <p:cNvPr id="5" name="TextBox 4"/>
+          <p:cNvSpPr txBox="1"/>
+          <p:nvPr/>
+        </p:nvSpPr>
+        <p:spPr>
+          <a:xfrm>
+            <a:off x="457200" y="1170432"/>
+            <a:ext cx="11277295" cy="5230368"/>
+          </a:xfrm>
+          <a:prstGeom prst="rect">
+            <a:avLst/>
+          </a:prstGeom>
+          <a:noFill/>
+        </p:spPr>
+        <p:txBody>
+          <a:bodyPr wrap="square">
+            <a:spAutoFit/>
+          </a:bodyPr>
+          <a:lstStyle/>
+          <a:p>
+            <a:pPr>
+              <a:spcAft>
+                <a:spcPts val="800"/>
+              </a:spcAft>
+            </a:pPr>
+            <a:r>
+              <a:rPr sz="2000" b="0" i="0">
+                <a:solidFill>
+                  <a:srgbClr val="333333"/>
+                </a:solidFill>
+                <a:latin typeface="Calibri"/>
+              </a:rPr>
+              <a:t>–   </a:t>
+            </a:r>
+            <a:r>
+              <a:rPr sz="2000" b="1" i="0">
+                <a:solidFill>
+                  <a:srgbClr val="333333"/>
+                </a:solidFill>
+                <a:latin typeface="Calibri"/>
+              </a:rPr>
+              <a:t>Trabajo dirigido:</a:t>
+            </a:r>
+            <a:r>
+              <a:rPr sz="2000" b="0" i="0">
+                <a:solidFill>
+                  <a:srgbClr val="333333"/>
+                </a:solidFill>
+                <a:latin typeface="Calibri"/>
+              </a:rPr>
+              <a:t> Uso de IA para generación de ideas — completar el registro del taller (prompt, variantes, elección, correcciones con su origen, descartes y declaración del uso) en el documento del equipo.</a:t>
+            </a:r>
+          </a:p>
+          <a:p>
+            <a:pPr>
+              <a:spcAft>
+                <a:spcPts val="800"/>
+              </a:spcAft>
+            </a:pPr>
+            <a:r>
+              <a:rPr sz="2000" b="0" i="0">
+                <a:solidFill>
+                  <a:srgbClr val="333333"/>
+                </a:solidFill>
+                <a:latin typeface="Calibri"/>
+              </a:rPr>
+              <a:t>–   </a:t>
+            </a:r>
+            <a:r>
+              <a:rPr sz="2000" b="1" i="0">
+                <a:solidFill>
+                  <a:srgbClr val="333333"/>
+                </a:solidFill>
+                <a:latin typeface="Calibri"/>
+              </a:rPr>
+              <a:t>Trabajo independiente:</a:t>
+            </a:r>
+            <a:r>
+              <a:rPr sz="2000" b="0" i="0">
+                <a:solidFill>
+                  <a:srgbClr val="333333"/>
+                </a:solidFill>
+                <a:latin typeface="Calibri"/>
+              </a:rPr>
+              <a:t> Corrección del prototipo: dejar el </a:t>
+            </a:r>
+            <a:r>
+              <a:rPr sz="2000" b="1" i="0">
+                <a:solidFill>
+                  <a:srgbClr val="333333"/>
+                </a:solidFill>
+                <a:latin typeface="Calibri"/>
+              </a:rPr>
+              <a:t>v2 navegable</a:t>
+            </a:r>
+            <a:r>
+              <a:rPr sz="2000" b="0" i="0">
+                <a:solidFill>
+                  <a:srgbClr val="333333"/>
+                </a:solidFill>
+                <a:latin typeface="Calibri"/>
+              </a:rPr>
+              <a:t> en la carpeta del equipo, con todas las correcciones aplicadas, y </a:t>
+            </a:r>
+            <a:r>
+              <a:rPr sz="2000" b="1" i="0">
+                <a:solidFill>
+                  <a:srgbClr val="333333"/>
+                </a:solidFill>
+                <a:latin typeface="Calibri"/>
+              </a:rPr>
+              <a:t>conseguir a la persona ajena</a:t>
+            </a:r>
+            <a:r>
+              <a:rPr sz="2000" b="0" i="0">
+                <a:solidFill>
+                  <a:srgbClr val="333333"/>
+                </a:solidFill>
+                <a:latin typeface="Calibri"/>
+              </a:rPr>
+              <a:t> que va a probarlo — solo el rol, no el nombre.</a:t>
+            </a:r>
+          </a:p>
+          <a:p>
+            <a:pPr>
+              <a:spcAft>
+                <a:spcPts val="800"/>
+              </a:spcAft>
+            </a:pPr>
+            <a:r>
+              <a:rPr sz="2000" b="0" i="0">
+                <a:solidFill>
+                  <a:srgbClr val="333333"/>
+                </a:solidFill>
+                <a:latin typeface="Calibri"/>
+              </a:rPr>
+              <a:t>–   </a:t>
+            </a:r>
+            <a:r>
+              <a:rPr sz="2000" b="1" i="0">
+                <a:solidFill>
+                  <a:srgbClr val="333333"/>
+                </a:solidFill>
+                <a:latin typeface="Calibri"/>
+              </a:rPr>
+              <a:t>Clase 12 · Presentación de avances de proyectos</a:t>
+            </a:r>
+            <a:r>
+              <a:rPr sz="2000" b="0" i="0">
+                <a:solidFill>
+                  <a:srgbClr val="333333"/>
+                </a:solidFill>
+                <a:latin typeface="Calibri"/>
+              </a:rPr>
+              <a:t> — arranca el </a:t>
+            </a:r>
+            <a:r>
+              <a:rPr sz="2000" b="1" i="0">
+                <a:solidFill>
+                  <a:srgbClr val="333333"/>
+                </a:solidFill>
+                <a:latin typeface="Calibri"/>
+              </a:rPr>
+              <a:t>corte 3</a:t>
+            </a:r>
+            <a:r>
+              <a:rPr sz="2000" b="0" i="0">
+                <a:solidFill>
+                  <a:srgbClr val="333333"/>
+                </a:solidFill>
+                <a:latin typeface="Calibri"/>
+              </a:rPr>
+              <a:t> con la </a:t>
+            </a:r>
+            <a:r>
+              <a:rPr sz="2000" b="1" i="0">
+                <a:solidFill>
+                  <a:srgbClr val="333333"/>
+                </a:solidFill>
+                <a:latin typeface="Calibri"/>
+              </a:rPr>
+              <a:t>presentación de avances</a:t>
+            </a:r>
+            <a:r>
+              <a:rPr sz="2000" b="0" i="0">
+                <a:solidFill>
+                  <a:srgbClr val="333333"/>
+                </a:solidFill>
+                <a:latin typeface="Calibri"/>
+              </a:rPr>
+              <a:t>: el prototipo se prueba con una persona ajena al equipo y se recibe retroalimentación entre pares.</a:t>
+            </a:r>
+          </a:p>
+          <a:p>
+            <a:pPr>
+              <a:spcAft>
+                <a:spcPts val="800"/>
+              </a:spcAft>
+            </a:pPr>
+            <a:r>
+              <a:rPr sz="2000" b="0" i="0">
+                <a:solidFill>
+                  <a:srgbClr val="333333"/>
+                </a:solidFill>
+                <a:latin typeface="Calibri"/>
+              </a:rPr>
+              <a:t>–   </a:t>
+            </a:r>
+            <a:r>
+              <a:rPr sz="2000" b="1" i="0">
+                <a:solidFill>
+                  <a:srgbClr val="333333"/>
+                </a:solidFill>
+                <a:latin typeface="Calibri"/>
+              </a:rPr>
+              <a:t>Aviso:</a:t>
+            </a:r>
+            <a:r>
+              <a:rPr sz="2000" b="0" i="0">
+                <a:solidFill>
+                  <a:srgbClr val="333333"/>
+                </a:solidFill>
+                <a:latin typeface="Calibri"/>
+              </a:rPr>
+              <a:t> Para la Clase 12 traigan el prototipo v2 navegable </a:t>
+            </a:r>
+            <a:r>
+              <a:rPr sz="2000" b="1" i="0">
+                <a:solidFill>
+                  <a:srgbClr val="333333"/>
+                </a:solidFill>
+                <a:latin typeface="Calibri"/>
+              </a:rPr>
+              <a:t>y la prueba ya hecha con una persona ajena al equipo</a:t>
+            </a:r>
+            <a:r>
+              <a:rPr sz="2000" b="0" i="0">
+                <a:solidFill>
+                  <a:srgbClr val="333333"/>
+                </a:solidFill>
+                <a:latin typeface="Calibri"/>
+              </a:rPr>
+              <a:t>, con la lista de lo que falló. Sin esa lista no hay nada que presentar: la Clase 12 es sobre lo que salió mal, no sobre lo que se planeó.</a:t>
+            </a:r>
+          </a:p>
+          <a:p>
+            <a:pPr>
+              <a:spcAft>
+                <a:spcPts val="800"/>
+              </a:spcAft>
+            </a:pPr>
+            <a:r>
+              <a:rPr sz="2000" b="0" i="0">
+                <a:solidFill>
+                  <a:srgbClr val="333333"/>
+                </a:solidFill>
+                <a:latin typeface="Calibri"/>
+              </a:rPr>
+              <a:t>–   </a:t>
+            </a:r>
+            <a:r>
+              <a:rPr sz="2000" b="1" i="0">
+                <a:solidFill>
+                  <a:srgbClr val="333333"/>
+                </a:solidFill>
+                <a:latin typeface="Calibri"/>
+              </a:rPr>
+              <a:t>Antes de salir:</a:t>
+            </a:r>
+            <a:r>
+              <a:rPr sz="2000" b="0" i="0">
+                <a:solidFill>
+                  <a:srgbClr val="333333"/>
+                </a:solidFill>
+                <a:latin typeface="Calibri"/>
+              </a:rPr>
+              <a:t> el enlace del documento del equipo en el chat, con permiso de lectura para el docente, y el nombre del vocero de hoy.</a:t>
+            </a:r>
+          </a:p>
+        </p:txBody>
+      </p:sp>
+      <p:sp>
+        <p:nvSpPr>
+          <p:cNvPr id="6" name="TextBox 5"/>
+          <p:cNvSpPr txBox="1"/>
+          <p:nvPr/>
+        </p:nvSpPr>
+        <p:spPr>
+          <a:xfrm>
+            <a:off x="11185855" y="6473952"/>
+            <a:ext cx="640080" cy="274320"/>
+          </a:xfrm>
+          <a:prstGeom prst="rect">
+            <a:avLst/>
+          </a:prstGeom>
+          <a:noFill/>
+        </p:spPr>
+        <p:txBody>
+          <a:bodyPr wrap="square">
+            <a:spAutoFit/>
+          </a:bodyPr>
+          <a:lstStyle/>
+          <a:p>
+            <a:pPr algn="r"/>
+            <a:r>
+              <a:rPr sz="1100" b="0" i="0">
+                <a:solidFill>
+                  <a:srgbClr val="666666"/>
+                </a:solidFill>
+                <a:latin typeface="Calibri"/>
+              </a:rPr>
+              <a:t>23</a:t>
+            </a:r>
+          </a:p>
+        </p:txBody>
+      </p:sp>
+    </p:spTree>
+  </p:cSld>
+  <p:clrMapOvr>
+    <a:masterClrMapping/>
+  </p:clrMapOvr>
+</p:sld>
+</file>
+
+<file path=ppt/slides/slide24.xml><?xml version="1.0" encoding="utf-8"?>
 <p:sld xmlns:a="http://schemas.openxmlformats.org/drawingml/2006/main" xmlns:p="http://schemas.openxmlformats.org/presentationml/2006/main" xmlns:r="http://schemas.openxmlformats.org/officeDocument/2006/relationships">
   <p:cSld>
     <p:bg>

--- a/Introduccion a la Ingenieria/Clases/Clase 11 - Taller de prototipado inicial con IA/Presentacion.pptx
+++ b/Introduccion a la Ingenieria/Clases/Clase 11 - Taller de prototipado inicial con IA/Presentacion.pptx
@@ -15,9 +15,6 @@
     <p:sldId id="263" r:id="rId15"/>
     <p:sldId id="264" r:id="rId16"/>
     <p:sldId id="265" r:id="rId17"/>
-    <p:sldId id="266" r:id="rId18"/>
-    <p:sldId id="267" r:id="rId19"/>
-    <p:sldId id="268" r:id="rId20"/>
   </p:sldIdLst>
   <p:sldSz cx="12191695" cy="6858000" type="screen4x3"/>
   <p:notesSz cx="6858000" cy="9144000"/>
@@ -4388,2715 +4385,6 @@
 </file>
 
 <file path=ppt/slides/slide10.xml><?xml version="1.0" encoding="utf-8"?>
-<p:sld xmlns:a="http://schemas.openxmlformats.org/drawingml/2006/main" xmlns:p="http://schemas.openxmlformats.org/presentationml/2006/main" xmlns:r="http://schemas.openxmlformats.org/officeDocument/2006/relationships">
-  <p:cSld>
-    <p:bg>
-      <p:bgPr>
-        <a:solidFill>
-          <a:srgbClr val="FFFFFF"/>
-        </a:solidFill>
-        <a:effectLst/>
-      </p:bgPr>
-    </p:bg>
-    <p:spTree>
-      <p:nvGrpSpPr>
-        <p:cNvPr id="1" name=""/>
-        <p:cNvGrpSpPr/>
-        <p:nvPr/>
-      </p:nvGrpSpPr>
-      <p:grpSpPr/>
-      <p:sp>
-        <p:nvSpPr>
-          <p:cNvPr id="2" name="Rectangle 1"/>
-          <p:cNvSpPr/>
-          <p:nvPr/>
-        </p:nvSpPr>
-        <p:spPr>
-          <a:xfrm>
-            <a:off x="0" y="0"/>
-            <a:ext cx="12191695" cy="1170432"/>
-          </a:xfrm>
-          <a:prstGeom prst="rect">
-            <a:avLst/>
-          </a:prstGeom>
-          <a:solidFill>
-            <a:srgbClr val="095292"/>
-          </a:solidFill>
-          <a:ln>
-            <a:noFill/>
-          </a:ln>
-        </p:spPr>
-        <p:style>
-          <a:lnRef idx="1">
-            <a:schemeClr val="accent1"/>
-          </a:lnRef>
-          <a:fillRef idx="3">
-            <a:schemeClr val="accent1"/>
-          </a:fillRef>
-          <a:effectRef idx="2">
-            <a:schemeClr val="accent1"/>
-          </a:effectRef>
-          <a:fontRef idx="minor">
-            <a:schemeClr val="lt1"/>
-          </a:fontRef>
-        </p:style>
-        <p:txBody>
-          <a:bodyPr rtlCol="0" anchor="ctr"/>
-          <a:lstStyle/>
-          <a:p>
-            <a:pPr algn="ctr"/>
-          </a:p>
-        </p:txBody>
-      </p:sp>
-      <p:sp>
-        <p:nvSpPr>
-          <p:cNvPr id="3" name="Rectangle 2"/>
-          <p:cNvSpPr/>
-          <p:nvPr/>
-        </p:nvSpPr>
-        <p:spPr>
-          <a:xfrm>
-            <a:off x="0" y="1170432"/>
-            <a:ext cx="12191695" cy="41148"/>
-          </a:xfrm>
-          <a:prstGeom prst="rect">
-            <a:avLst/>
-          </a:prstGeom>
-          <a:solidFill>
-            <a:srgbClr val="FFD000"/>
-          </a:solidFill>
-          <a:ln>
-            <a:noFill/>
-          </a:ln>
-        </p:spPr>
-        <p:style>
-          <a:lnRef idx="1">
-            <a:schemeClr val="accent1"/>
-          </a:lnRef>
-          <a:fillRef idx="3">
-            <a:schemeClr val="accent1"/>
-          </a:fillRef>
-          <a:effectRef idx="2">
-            <a:schemeClr val="accent1"/>
-          </a:effectRef>
-          <a:fontRef idx="minor">
-            <a:schemeClr val="lt1"/>
-          </a:fontRef>
-        </p:style>
-        <p:txBody>
-          <a:bodyPr rtlCol="0" anchor="ctr"/>
-          <a:lstStyle/>
-          <a:p>
-            <a:pPr algn="ctr"/>
-          </a:p>
-        </p:txBody>
-      </p:sp>
-      <p:sp>
-        <p:nvSpPr>
-          <p:cNvPr id="4" name="TextBox 3"/>
-          <p:cNvSpPr txBox="1"/>
-          <p:nvPr/>
-        </p:nvSpPr>
-        <p:spPr>
-          <a:xfrm>
-            <a:off x="457200" y="164592"/>
-            <a:ext cx="11277295" cy="384048"/>
-          </a:xfrm>
-          <a:prstGeom prst="rect">
-            <a:avLst/>
-          </a:prstGeom>
-          <a:noFill/>
-        </p:spPr>
-        <p:txBody>
-          <a:bodyPr wrap="square">
-            <a:spAutoFit/>
-          </a:bodyPr>
-          <a:lstStyle/>
-          <a:p>
-            <a:r>
-              <a:rPr sz="2600" b="1" i="0">
-                <a:solidFill>
-                  <a:srgbClr val="FFFFFF"/>
-                </a:solidFill>
-                <a:latin typeface="Calibri"/>
-              </a:rPr>
-              <a:t>Taller de hoy: Prototipo v2 con IA</a:t>
-            </a:r>
-          </a:p>
-        </p:txBody>
-      </p:sp>
-      <p:sp>
-        <p:nvSpPr>
-          <p:cNvPr id="5" name="TextBox 4"/>
-          <p:cNvSpPr txBox="1"/>
-          <p:nvPr/>
-        </p:nvSpPr>
-        <p:spPr>
-          <a:xfrm>
-            <a:off x="457200" y="566928"/>
-            <a:ext cx="11277295" cy="411480"/>
-          </a:xfrm>
-          <a:prstGeom prst="rect">
-            <a:avLst/>
-          </a:prstGeom>
-          <a:noFill/>
-        </p:spPr>
-        <p:txBody>
-          <a:bodyPr wrap="square">
-            <a:spAutoFit/>
-          </a:bodyPr>
-          <a:lstStyle/>
-          <a:p>
-            <a:r>
-              <a:rPr sz="1400" b="0" i="0">
-                <a:solidFill>
-                  <a:srgbClr val="B8D8EE"/>
-                </a:solidFill>
-                <a:latin typeface="Calibri"/>
-              </a:rPr>
-              <a:t>27 min en equipos · 27 min: prompt, variantes, elección, correcciones y registro · prototipo v2 + registro de prompt, variantes, correcciones y descartes</a:t>
-            </a:r>
-          </a:p>
-        </p:txBody>
-      </p:sp>
-      <p:sp>
-        <p:nvSpPr>
-          <p:cNvPr id="6" name="Rounded Rectangle 5"/>
-          <p:cNvSpPr/>
-          <p:nvPr/>
-        </p:nvSpPr>
-        <p:spPr>
-          <a:xfrm>
-            <a:off x="457200" y="1472184"/>
-            <a:ext cx="11277295" cy="566928"/>
-          </a:xfrm>
-          <a:prstGeom prst="roundRect">
-            <a:avLst>
-              <a:gd name="adj" fmla="val 12000"/>
-            </a:avLst>
-          </a:prstGeom>
-          <a:solidFill>
-            <a:srgbClr val="F2F2F2"/>
-          </a:solidFill>
-          <a:ln>
-            <a:noFill/>
-          </a:ln>
-        </p:spPr>
-        <p:style>
-          <a:lnRef idx="1">
-            <a:schemeClr val="accent1"/>
-          </a:lnRef>
-          <a:fillRef idx="3">
-            <a:schemeClr val="accent1"/>
-          </a:fillRef>
-          <a:effectRef idx="2">
-            <a:schemeClr val="accent1"/>
-          </a:effectRef>
-          <a:fontRef idx="minor">
-            <a:schemeClr val="lt1"/>
-          </a:fontRef>
-        </p:style>
-        <p:txBody>
-          <a:bodyPr rtlCol="0" anchor="ctr"/>
-          <a:lstStyle/>
-          <a:p>
-            <a:pPr algn="ctr"/>
-          </a:p>
-        </p:txBody>
-      </p:sp>
-      <p:sp>
-        <p:nvSpPr>
-          <p:cNvPr id="7" name="Rectangle 6"/>
-          <p:cNvSpPr/>
-          <p:nvPr/>
-        </p:nvSpPr>
-        <p:spPr>
-          <a:xfrm>
-            <a:off x="640080" y="1618487"/>
-            <a:ext cx="274320" cy="274320"/>
-          </a:xfrm>
-          <a:prstGeom prst="rect">
-            <a:avLst/>
-          </a:prstGeom>
-          <a:solidFill>
-            <a:srgbClr val="FFFFFF"/>
-          </a:solidFill>
-          <a:ln>
-            <a:solidFill>
-              <a:srgbClr val="333333"/>
-            </a:solidFill>
-          </a:ln>
-        </p:spPr>
-        <p:style>
-          <a:lnRef idx="1">
-            <a:schemeClr val="accent1"/>
-          </a:lnRef>
-          <a:fillRef idx="3">
-            <a:schemeClr val="accent1"/>
-          </a:fillRef>
-          <a:effectRef idx="2">
-            <a:schemeClr val="accent1"/>
-          </a:effectRef>
-          <a:fontRef idx="minor">
-            <a:schemeClr val="lt1"/>
-          </a:fontRef>
-        </p:style>
-        <p:txBody>
-          <a:bodyPr rtlCol="0" anchor="ctr"/>
-          <a:lstStyle/>
-          <a:p>
-            <a:pPr algn="ctr"/>
-          </a:p>
-        </p:txBody>
-      </p:sp>
-      <p:sp>
-        <p:nvSpPr>
-          <p:cNvPr id="8" name="Rectangle 7"/>
-          <p:cNvSpPr/>
-          <p:nvPr/>
-        </p:nvSpPr>
-        <p:spPr>
-          <a:xfrm>
-            <a:off x="640080" y="1618487"/>
-            <a:ext cx="73152" cy="274320"/>
-          </a:xfrm>
-          <a:prstGeom prst="rect">
-            <a:avLst/>
-          </a:prstGeom>
-          <a:solidFill>
-            <a:srgbClr val="269CCB"/>
-          </a:solidFill>
-          <a:ln>
-            <a:noFill/>
-          </a:ln>
-        </p:spPr>
-        <p:style>
-          <a:lnRef idx="1">
-            <a:schemeClr val="accent1"/>
-          </a:lnRef>
-          <a:fillRef idx="3">
-            <a:schemeClr val="accent1"/>
-          </a:fillRef>
-          <a:effectRef idx="2">
-            <a:schemeClr val="accent1"/>
-          </a:effectRef>
-          <a:fontRef idx="minor">
-            <a:schemeClr val="lt1"/>
-          </a:fontRef>
-        </p:style>
-        <p:txBody>
-          <a:bodyPr rtlCol="0" anchor="ctr"/>
-          <a:lstStyle/>
-          <a:p>
-            <a:pPr algn="ctr"/>
-          </a:p>
-        </p:txBody>
-      </p:sp>
-      <p:sp>
-        <p:nvSpPr>
-          <p:cNvPr id="9" name="TextBox 8"/>
-          <p:cNvSpPr txBox="1"/>
-          <p:nvPr/>
-        </p:nvSpPr>
-        <p:spPr>
-          <a:xfrm>
-            <a:off x="1097280" y="1563624"/>
-            <a:ext cx="10362895" cy="402336"/>
-          </a:xfrm>
-          <a:prstGeom prst="rect">
-            <a:avLst/>
-          </a:prstGeom>
-          <a:noFill/>
-        </p:spPr>
-        <p:txBody>
-          <a:bodyPr wrap="square" anchor="ctr"/>
-          <a:lstStyle/>
-          <a:p>
-            <a:r>
-              <a:rPr sz="1500" b="1" i="0">
-                <a:solidFill>
-                  <a:srgbClr val="333333"/>
-                </a:solidFill>
-                <a:latin typeface="Calibri"/>
-              </a:rPr>
-              <a:t>EL PROMPT QUE USAMOS</a:t>
-            </a:r>
-            <a:r>
-              <a:rPr sz="1500" b="0" i="0">
-                <a:solidFill>
-                  <a:srgbClr val="333333"/>
-                </a:solidFill>
-                <a:latin typeface="Calibri"/>
-              </a:rPr>
-              <a:t> — El prompt completo, copiado tal cual. Tiene que incluir </a:t>
-            </a:r>
-            <a:r>
-              <a:rPr sz="1500" b="1" i="0">
-                <a:solidFill>
-                  <a:srgbClr val="333333"/>
-                </a:solidFill>
-                <a:latin typeface="Calibri"/>
-              </a:rPr>
-              <a:t>el problema en una frase, quién lo usa, las restricciones y lo que está prohibido proponer</a:t>
-            </a:r>
-            <a:r>
-              <a:rPr sz="1500" b="0" i="0">
-                <a:solidFill>
-                  <a:srgbClr val="333333"/>
-                </a:solidFill>
-                <a:latin typeface="Calibri"/>
-              </a:rPr>
-              <a:t>.</a:t>
-            </a:r>
-          </a:p>
-        </p:txBody>
-      </p:sp>
-      <p:sp>
-        <p:nvSpPr>
-          <p:cNvPr id="10" name="Rounded Rectangle 9"/>
-          <p:cNvSpPr/>
-          <p:nvPr/>
-        </p:nvSpPr>
-        <p:spPr>
-          <a:xfrm>
-            <a:off x="457200" y="2148839"/>
-            <a:ext cx="11277295" cy="566928"/>
-          </a:xfrm>
-          <a:prstGeom prst="roundRect">
-            <a:avLst>
-              <a:gd name="adj" fmla="val 12000"/>
-            </a:avLst>
-          </a:prstGeom>
-          <a:solidFill>
-            <a:srgbClr val="F2F2F2"/>
-          </a:solidFill>
-          <a:ln>
-            <a:noFill/>
-          </a:ln>
-        </p:spPr>
-        <p:style>
-          <a:lnRef idx="1">
-            <a:schemeClr val="accent1"/>
-          </a:lnRef>
-          <a:fillRef idx="3">
-            <a:schemeClr val="accent1"/>
-          </a:fillRef>
-          <a:effectRef idx="2">
-            <a:schemeClr val="accent1"/>
-          </a:effectRef>
-          <a:fontRef idx="minor">
-            <a:schemeClr val="lt1"/>
-          </a:fontRef>
-        </p:style>
-        <p:txBody>
-          <a:bodyPr rtlCol="0" anchor="ctr"/>
-          <a:lstStyle/>
-          <a:p>
-            <a:pPr algn="ctr"/>
-          </a:p>
-        </p:txBody>
-      </p:sp>
-      <p:sp>
-        <p:nvSpPr>
-          <p:cNvPr id="11" name="Rectangle 10"/>
-          <p:cNvSpPr/>
-          <p:nvPr/>
-        </p:nvSpPr>
-        <p:spPr>
-          <a:xfrm>
-            <a:off x="640080" y="2295144"/>
-            <a:ext cx="274320" cy="274320"/>
-          </a:xfrm>
-          <a:prstGeom prst="rect">
-            <a:avLst/>
-          </a:prstGeom>
-          <a:solidFill>
-            <a:srgbClr val="FFFFFF"/>
-          </a:solidFill>
-          <a:ln>
-            <a:solidFill>
-              <a:srgbClr val="333333"/>
-            </a:solidFill>
-          </a:ln>
-        </p:spPr>
-        <p:style>
-          <a:lnRef idx="1">
-            <a:schemeClr val="accent1"/>
-          </a:lnRef>
-          <a:fillRef idx="3">
-            <a:schemeClr val="accent1"/>
-          </a:fillRef>
-          <a:effectRef idx="2">
-            <a:schemeClr val="accent1"/>
-          </a:effectRef>
-          <a:fontRef idx="minor">
-            <a:schemeClr val="lt1"/>
-          </a:fontRef>
-        </p:style>
-        <p:txBody>
-          <a:bodyPr rtlCol="0" anchor="ctr"/>
-          <a:lstStyle/>
-          <a:p>
-            <a:pPr algn="ctr"/>
-          </a:p>
-        </p:txBody>
-      </p:sp>
-      <p:sp>
-        <p:nvSpPr>
-          <p:cNvPr id="12" name="Rectangle 11"/>
-          <p:cNvSpPr/>
-          <p:nvPr/>
-        </p:nvSpPr>
-        <p:spPr>
-          <a:xfrm>
-            <a:off x="640080" y="2295144"/>
-            <a:ext cx="73152" cy="274320"/>
-          </a:xfrm>
-          <a:prstGeom prst="rect">
-            <a:avLst/>
-          </a:prstGeom>
-          <a:solidFill>
-            <a:srgbClr val="269CCB"/>
-          </a:solidFill>
-          <a:ln>
-            <a:noFill/>
-          </a:ln>
-        </p:spPr>
-        <p:style>
-          <a:lnRef idx="1">
-            <a:schemeClr val="accent1"/>
-          </a:lnRef>
-          <a:fillRef idx="3">
-            <a:schemeClr val="accent1"/>
-          </a:fillRef>
-          <a:effectRef idx="2">
-            <a:schemeClr val="accent1"/>
-          </a:effectRef>
-          <a:fontRef idx="minor">
-            <a:schemeClr val="lt1"/>
-          </a:fontRef>
-        </p:style>
-        <p:txBody>
-          <a:bodyPr rtlCol="0" anchor="ctr"/>
-          <a:lstStyle/>
-          <a:p>
-            <a:pPr algn="ctr"/>
-          </a:p>
-        </p:txBody>
-      </p:sp>
-      <p:sp>
-        <p:nvSpPr>
-          <p:cNvPr id="13" name="TextBox 12"/>
-          <p:cNvSpPr txBox="1"/>
-          <p:nvPr/>
-        </p:nvSpPr>
-        <p:spPr>
-          <a:xfrm>
-            <a:off x="1097280" y="2240279"/>
-            <a:ext cx="10362895" cy="402336"/>
-          </a:xfrm>
-          <a:prstGeom prst="rect">
-            <a:avLst/>
-          </a:prstGeom>
-          <a:noFill/>
-        </p:spPr>
-        <p:txBody>
-          <a:bodyPr wrap="square" anchor="ctr"/>
-          <a:lstStyle/>
-          <a:p>
-            <a:r>
-              <a:rPr sz="1500" b="1" i="0">
-                <a:solidFill>
-                  <a:srgbClr val="333333"/>
-                </a:solidFill>
-                <a:latin typeface="Calibri"/>
-              </a:rPr>
-              <a:t>LAS TRES VARIANTES</a:t>
-            </a:r>
-            <a:r>
-              <a:rPr sz="1500" b="0" i="0">
-                <a:solidFill>
-                  <a:srgbClr val="333333"/>
-                </a:solidFill>
-                <a:latin typeface="Calibri"/>
-              </a:rPr>
-              <a:t> — Las tres opciones que devolvió, resumidas en dos o tres líneas cada una. </a:t>
-            </a:r>
-            <a:r>
-              <a:rPr sz="1500" b="1" i="0">
-                <a:solidFill>
-                  <a:srgbClr val="333333"/>
-                </a:solidFill>
-                <a:latin typeface="Calibri"/>
-              </a:rPr>
-              <a:t>No una sola respuesta</a:t>
-            </a:r>
-            <a:r>
-              <a:rPr sz="1500" b="0" i="0">
-                <a:solidFill>
-                  <a:srgbClr val="333333"/>
-                </a:solidFill>
-                <a:latin typeface="Calibri"/>
-              </a:rPr>
-              <a:t>: tres.</a:t>
-            </a:r>
-          </a:p>
-        </p:txBody>
-      </p:sp>
-      <p:sp>
-        <p:nvSpPr>
-          <p:cNvPr id="14" name="Rounded Rectangle 13"/>
-          <p:cNvSpPr/>
-          <p:nvPr/>
-        </p:nvSpPr>
-        <p:spPr>
-          <a:xfrm>
-            <a:off x="457200" y="2825496"/>
-            <a:ext cx="11277295" cy="566928"/>
-          </a:xfrm>
-          <a:prstGeom prst="roundRect">
-            <a:avLst>
-              <a:gd name="adj" fmla="val 12000"/>
-            </a:avLst>
-          </a:prstGeom>
-          <a:solidFill>
-            <a:srgbClr val="F2F2F2"/>
-          </a:solidFill>
-          <a:ln>
-            <a:noFill/>
-          </a:ln>
-        </p:spPr>
-        <p:style>
-          <a:lnRef idx="1">
-            <a:schemeClr val="accent1"/>
-          </a:lnRef>
-          <a:fillRef idx="3">
-            <a:schemeClr val="accent1"/>
-          </a:fillRef>
-          <a:effectRef idx="2">
-            <a:schemeClr val="accent1"/>
-          </a:effectRef>
-          <a:fontRef idx="minor">
-            <a:schemeClr val="lt1"/>
-          </a:fontRef>
-        </p:style>
-        <p:txBody>
-          <a:bodyPr rtlCol="0" anchor="ctr"/>
-          <a:lstStyle/>
-          <a:p>
-            <a:pPr algn="ctr"/>
-          </a:p>
-        </p:txBody>
-      </p:sp>
-      <p:sp>
-        <p:nvSpPr>
-          <p:cNvPr id="15" name="Rectangle 14"/>
-          <p:cNvSpPr/>
-          <p:nvPr/>
-        </p:nvSpPr>
-        <p:spPr>
-          <a:xfrm>
-            <a:off x="640080" y="2971800"/>
-            <a:ext cx="274320" cy="274320"/>
-          </a:xfrm>
-          <a:prstGeom prst="rect">
-            <a:avLst/>
-          </a:prstGeom>
-          <a:solidFill>
-            <a:srgbClr val="FFFFFF"/>
-          </a:solidFill>
-          <a:ln>
-            <a:solidFill>
-              <a:srgbClr val="333333"/>
-            </a:solidFill>
-          </a:ln>
-        </p:spPr>
-        <p:style>
-          <a:lnRef idx="1">
-            <a:schemeClr val="accent1"/>
-          </a:lnRef>
-          <a:fillRef idx="3">
-            <a:schemeClr val="accent1"/>
-          </a:fillRef>
-          <a:effectRef idx="2">
-            <a:schemeClr val="accent1"/>
-          </a:effectRef>
-          <a:fontRef idx="minor">
-            <a:schemeClr val="lt1"/>
-          </a:fontRef>
-        </p:style>
-        <p:txBody>
-          <a:bodyPr rtlCol="0" anchor="ctr"/>
-          <a:lstStyle/>
-          <a:p>
-            <a:pPr algn="ctr"/>
-          </a:p>
-        </p:txBody>
-      </p:sp>
-      <p:sp>
-        <p:nvSpPr>
-          <p:cNvPr id="16" name="Rectangle 15"/>
-          <p:cNvSpPr/>
-          <p:nvPr/>
-        </p:nvSpPr>
-        <p:spPr>
-          <a:xfrm>
-            <a:off x="640080" y="2971800"/>
-            <a:ext cx="73152" cy="274320"/>
-          </a:xfrm>
-          <a:prstGeom prst="rect">
-            <a:avLst/>
-          </a:prstGeom>
-          <a:solidFill>
-            <a:srgbClr val="269CCB"/>
-          </a:solidFill>
-          <a:ln>
-            <a:noFill/>
-          </a:ln>
-        </p:spPr>
-        <p:style>
-          <a:lnRef idx="1">
-            <a:schemeClr val="accent1"/>
-          </a:lnRef>
-          <a:fillRef idx="3">
-            <a:schemeClr val="accent1"/>
-          </a:fillRef>
-          <a:effectRef idx="2">
-            <a:schemeClr val="accent1"/>
-          </a:effectRef>
-          <a:fontRef idx="minor">
-            <a:schemeClr val="lt1"/>
-          </a:fontRef>
-        </p:style>
-        <p:txBody>
-          <a:bodyPr rtlCol="0" anchor="ctr"/>
-          <a:lstStyle/>
-          <a:p>
-            <a:pPr algn="ctr"/>
-          </a:p>
-        </p:txBody>
-      </p:sp>
-      <p:sp>
-        <p:nvSpPr>
-          <p:cNvPr id="17" name="TextBox 16"/>
-          <p:cNvSpPr txBox="1"/>
-          <p:nvPr/>
-        </p:nvSpPr>
-        <p:spPr>
-          <a:xfrm>
-            <a:off x="1097280" y="2916936"/>
-            <a:ext cx="10362895" cy="402336"/>
-          </a:xfrm>
-          <a:prstGeom prst="rect">
-            <a:avLst/>
-          </a:prstGeom>
-          <a:noFill/>
-        </p:spPr>
-        <p:txBody>
-          <a:bodyPr wrap="square" anchor="ctr"/>
-          <a:lstStyle/>
-          <a:p>
-            <a:r>
-              <a:rPr sz="1500" b="1" i="0">
-                <a:solidFill>
-                  <a:srgbClr val="333333"/>
-                </a:solidFill>
-                <a:latin typeface="Calibri"/>
-              </a:rPr>
-              <a:t>LA QUE ELEGIMOS Y POR QUÉ</a:t>
-            </a:r>
-            <a:r>
-              <a:rPr sz="1500" b="0" i="0">
-                <a:solidFill>
-                  <a:srgbClr val="333333"/>
-                </a:solidFill>
-                <a:latin typeface="Calibri"/>
-              </a:rPr>
-              <a:t> — Cuál eligieron y el criterio, apoyado en sus </a:t>
-            </a:r>
-            <a:r>
-              <a:rPr sz="1500" b="1" i="0">
-                <a:solidFill>
-                  <a:srgbClr val="333333"/>
-                </a:solidFill>
-                <a:latin typeface="Calibri"/>
-              </a:rPr>
-              <a:t>requisitos y restricciones</a:t>
-            </a:r>
-            <a:r>
-              <a:rPr sz="1500" b="0" i="0">
-                <a:solidFill>
-                  <a:srgbClr val="333333"/>
-                </a:solidFill>
-                <a:latin typeface="Calibri"/>
-              </a:rPr>
-              <a:t> — no en «nos gustó más».</a:t>
-            </a:r>
-          </a:p>
-        </p:txBody>
-      </p:sp>
-      <p:sp>
-        <p:nvSpPr>
-          <p:cNvPr id="18" name="Rounded Rectangle 17"/>
-          <p:cNvSpPr/>
-          <p:nvPr/>
-        </p:nvSpPr>
-        <p:spPr>
-          <a:xfrm>
-            <a:off x="457200" y="3502152"/>
-            <a:ext cx="11277295" cy="566928"/>
-          </a:xfrm>
-          <a:prstGeom prst="roundRect">
-            <a:avLst>
-              <a:gd name="adj" fmla="val 12000"/>
-            </a:avLst>
-          </a:prstGeom>
-          <a:solidFill>
-            <a:srgbClr val="F2F2F2"/>
-          </a:solidFill>
-          <a:ln>
-            <a:noFill/>
-          </a:ln>
-        </p:spPr>
-        <p:style>
-          <a:lnRef idx="1">
-            <a:schemeClr val="accent1"/>
-          </a:lnRef>
-          <a:fillRef idx="3">
-            <a:schemeClr val="accent1"/>
-          </a:fillRef>
-          <a:effectRef idx="2">
-            <a:schemeClr val="accent1"/>
-          </a:effectRef>
-          <a:fontRef idx="minor">
-            <a:schemeClr val="lt1"/>
-          </a:fontRef>
-        </p:style>
-        <p:txBody>
-          <a:bodyPr rtlCol="0" anchor="ctr"/>
-          <a:lstStyle/>
-          <a:p>
-            <a:pPr algn="ctr"/>
-          </a:p>
-        </p:txBody>
-      </p:sp>
-      <p:sp>
-        <p:nvSpPr>
-          <p:cNvPr id="19" name="Rectangle 18"/>
-          <p:cNvSpPr/>
-          <p:nvPr/>
-        </p:nvSpPr>
-        <p:spPr>
-          <a:xfrm>
-            <a:off x="640080" y="3648456"/>
-            <a:ext cx="274320" cy="274320"/>
-          </a:xfrm>
-          <a:prstGeom prst="rect">
-            <a:avLst/>
-          </a:prstGeom>
-          <a:solidFill>
-            <a:srgbClr val="FFFFFF"/>
-          </a:solidFill>
-          <a:ln>
-            <a:solidFill>
-              <a:srgbClr val="333333"/>
-            </a:solidFill>
-          </a:ln>
-        </p:spPr>
-        <p:style>
-          <a:lnRef idx="1">
-            <a:schemeClr val="accent1"/>
-          </a:lnRef>
-          <a:fillRef idx="3">
-            <a:schemeClr val="accent1"/>
-          </a:fillRef>
-          <a:effectRef idx="2">
-            <a:schemeClr val="accent1"/>
-          </a:effectRef>
-          <a:fontRef idx="minor">
-            <a:schemeClr val="lt1"/>
-          </a:fontRef>
-        </p:style>
-        <p:txBody>
-          <a:bodyPr rtlCol="0" anchor="ctr"/>
-          <a:lstStyle/>
-          <a:p>
-            <a:pPr algn="ctr"/>
-          </a:p>
-        </p:txBody>
-      </p:sp>
-      <p:sp>
-        <p:nvSpPr>
-          <p:cNvPr id="20" name="Rectangle 19"/>
-          <p:cNvSpPr/>
-          <p:nvPr/>
-        </p:nvSpPr>
-        <p:spPr>
-          <a:xfrm>
-            <a:off x="640080" y="3648456"/>
-            <a:ext cx="73152" cy="274320"/>
-          </a:xfrm>
-          <a:prstGeom prst="rect">
-            <a:avLst/>
-          </a:prstGeom>
-          <a:solidFill>
-            <a:srgbClr val="269CCB"/>
-          </a:solidFill>
-          <a:ln>
-            <a:noFill/>
-          </a:ln>
-        </p:spPr>
-        <p:style>
-          <a:lnRef idx="1">
-            <a:schemeClr val="accent1"/>
-          </a:lnRef>
-          <a:fillRef idx="3">
-            <a:schemeClr val="accent1"/>
-          </a:fillRef>
-          <a:effectRef idx="2">
-            <a:schemeClr val="accent1"/>
-          </a:effectRef>
-          <a:fontRef idx="minor">
-            <a:schemeClr val="lt1"/>
-          </a:fontRef>
-        </p:style>
-        <p:txBody>
-          <a:bodyPr rtlCol="0" anchor="ctr"/>
-          <a:lstStyle/>
-          <a:p>
-            <a:pPr algn="ctr"/>
-          </a:p>
-        </p:txBody>
-      </p:sp>
-      <p:sp>
-        <p:nvSpPr>
-          <p:cNvPr id="21" name="TextBox 20"/>
-          <p:cNvSpPr txBox="1"/>
-          <p:nvPr/>
-        </p:nvSpPr>
-        <p:spPr>
-          <a:xfrm>
-            <a:off x="1097280" y="3593592"/>
-            <a:ext cx="10362895" cy="402336"/>
-          </a:xfrm>
-          <a:prstGeom prst="rect">
-            <a:avLst/>
-          </a:prstGeom>
-          <a:noFill/>
-        </p:spPr>
-        <p:txBody>
-          <a:bodyPr wrap="square" anchor="ctr"/>
-          <a:lstStyle/>
-          <a:p>
-            <a:r>
-              <a:rPr sz="1500" b="1" i="0">
-                <a:solidFill>
-                  <a:srgbClr val="333333"/>
-                </a:solidFill>
-                <a:latin typeface="Calibri"/>
-              </a:rPr>
-              <a:t>LO QUE CORREGIMOS A MANO</a:t>
-            </a:r>
-            <a:r>
-              <a:rPr sz="1500" b="0" i="0">
-                <a:solidFill>
-                  <a:srgbClr val="333333"/>
-                </a:solidFill>
-                <a:latin typeface="Calibri"/>
-              </a:rPr>
-              <a:t> — Cada corrección con </a:t>
-            </a:r>
-            <a:r>
-              <a:rPr sz="1500" b="1" i="0">
-                <a:solidFill>
-                  <a:srgbClr val="333333"/>
-                </a:solidFill>
-                <a:latin typeface="Calibri"/>
-              </a:rPr>
-              <a:t>la razón y la sesión de donde sale</a:t>
-            </a:r>
-            <a:r>
-              <a:rPr sz="1500" b="0" i="0">
-                <a:solidFill>
-                  <a:srgbClr val="333333"/>
-                </a:solidFill>
-                <a:latin typeface="Calibri"/>
-              </a:rPr>
-              <a:t>: qué proponía la IA, qué quedó, y por qué. Es el bloque que más pesa.</a:t>
-            </a:r>
-          </a:p>
-        </p:txBody>
-      </p:sp>
-      <p:sp>
-        <p:nvSpPr>
-          <p:cNvPr id="22" name="Rounded Rectangle 21"/>
-          <p:cNvSpPr/>
-          <p:nvPr/>
-        </p:nvSpPr>
-        <p:spPr>
-          <a:xfrm>
-            <a:off x="457200" y="4178808"/>
-            <a:ext cx="11277295" cy="566928"/>
-          </a:xfrm>
-          <a:prstGeom prst="roundRect">
-            <a:avLst>
-              <a:gd name="adj" fmla="val 12000"/>
-            </a:avLst>
-          </a:prstGeom>
-          <a:solidFill>
-            <a:srgbClr val="F2F2F2"/>
-          </a:solidFill>
-          <a:ln>
-            <a:noFill/>
-          </a:ln>
-        </p:spPr>
-        <p:style>
-          <a:lnRef idx="1">
-            <a:schemeClr val="accent1"/>
-          </a:lnRef>
-          <a:fillRef idx="3">
-            <a:schemeClr val="accent1"/>
-          </a:fillRef>
-          <a:effectRef idx="2">
-            <a:schemeClr val="accent1"/>
-          </a:effectRef>
-          <a:fontRef idx="minor">
-            <a:schemeClr val="lt1"/>
-          </a:fontRef>
-        </p:style>
-        <p:txBody>
-          <a:bodyPr rtlCol="0" anchor="ctr"/>
-          <a:lstStyle/>
-          <a:p>
-            <a:pPr algn="ctr"/>
-          </a:p>
-        </p:txBody>
-      </p:sp>
-      <p:sp>
-        <p:nvSpPr>
-          <p:cNvPr id="23" name="Rectangle 22"/>
-          <p:cNvSpPr/>
-          <p:nvPr/>
-        </p:nvSpPr>
-        <p:spPr>
-          <a:xfrm>
-            <a:off x="640080" y="4325112"/>
-            <a:ext cx="274320" cy="274320"/>
-          </a:xfrm>
-          <a:prstGeom prst="rect">
-            <a:avLst/>
-          </a:prstGeom>
-          <a:solidFill>
-            <a:srgbClr val="FFFFFF"/>
-          </a:solidFill>
-          <a:ln>
-            <a:solidFill>
-              <a:srgbClr val="333333"/>
-            </a:solidFill>
-          </a:ln>
-        </p:spPr>
-        <p:style>
-          <a:lnRef idx="1">
-            <a:schemeClr val="accent1"/>
-          </a:lnRef>
-          <a:fillRef idx="3">
-            <a:schemeClr val="accent1"/>
-          </a:fillRef>
-          <a:effectRef idx="2">
-            <a:schemeClr val="accent1"/>
-          </a:effectRef>
-          <a:fontRef idx="minor">
-            <a:schemeClr val="lt1"/>
-          </a:fontRef>
-        </p:style>
-        <p:txBody>
-          <a:bodyPr rtlCol="0" anchor="ctr"/>
-          <a:lstStyle/>
-          <a:p>
-            <a:pPr algn="ctr"/>
-          </a:p>
-        </p:txBody>
-      </p:sp>
-      <p:sp>
-        <p:nvSpPr>
-          <p:cNvPr id="24" name="Rectangle 23"/>
-          <p:cNvSpPr/>
-          <p:nvPr/>
-        </p:nvSpPr>
-        <p:spPr>
-          <a:xfrm>
-            <a:off x="640080" y="4325112"/>
-            <a:ext cx="73152" cy="274320"/>
-          </a:xfrm>
-          <a:prstGeom prst="rect">
-            <a:avLst/>
-          </a:prstGeom>
-          <a:solidFill>
-            <a:srgbClr val="269CCB"/>
-          </a:solidFill>
-          <a:ln>
-            <a:noFill/>
-          </a:ln>
-        </p:spPr>
-        <p:style>
-          <a:lnRef idx="1">
-            <a:schemeClr val="accent1"/>
-          </a:lnRef>
-          <a:fillRef idx="3">
-            <a:schemeClr val="accent1"/>
-          </a:fillRef>
-          <a:effectRef idx="2">
-            <a:schemeClr val="accent1"/>
-          </a:effectRef>
-          <a:fontRef idx="minor">
-            <a:schemeClr val="lt1"/>
-          </a:fontRef>
-        </p:style>
-        <p:txBody>
-          <a:bodyPr rtlCol="0" anchor="ctr"/>
-          <a:lstStyle/>
-          <a:p>
-            <a:pPr algn="ctr"/>
-          </a:p>
-        </p:txBody>
-      </p:sp>
-      <p:sp>
-        <p:nvSpPr>
-          <p:cNvPr id="25" name="TextBox 24"/>
-          <p:cNvSpPr txBox="1"/>
-          <p:nvPr/>
-        </p:nvSpPr>
-        <p:spPr>
-          <a:xfrm>
-            <a:off x="1097280" y="4270248"/>
-            <a:ext cx="10362895" cy="402336"/>
-          </a:xfrm>
-          <a:prstGeom prst="rect">
-            <a:avLst/>
-          </a:prstGeom>
-          <a:noFill/>
-        </p:spPr>
-        <p:txBody>
-          <a:bodyPr wrap="square" anchor="ctr"/>
-          <a:lstStyle/>
-          <a:p>
-            <a:r>
-              <a:rPr sz="1500" b="1" i="0">
-                <a:solidFill>
-                  <a:srgbClr val="333333"/>
-                </a:solidFill>
-                <a:latin typeface="Calibri"/>
-              </a:rPr>
-              <a:t>LO QUE DESCARTAMOS Y POR QUÉ</a:t>
-            </a:r>
-            <a:r>
-              <a:rPr sz="1500" b="0" i="0">
-                <a:solidFill>
-                  <a:srgbClr val="333333"/>
-                </a:solidFill>
-                <a:latin typeface="Calibri"/>
-              </a:rPr>
-              <a:t> — Las propuestas que se rechazaron completas, y el motivo: fuera del alcance, viola una restricción, viola la ley, o consume demasiado.</a:t>
-            </a:r>
-          </a:p>
-        </p:txBody>
-      </p:sp>
-      <p:sp>
-        <p:nvSpPr>
-          <p:cNvPr id="26" name="TextBox 25"/>
-          <p:cNvSpPr txBox="1"/>
-          <p:nvPr/>
-        </p:nvSpPr>
-        <p:spPr>
-          <a:xfrm>
-            <a:off x="11185855" y="6473952"/>
-            <a:ext cx="640080" cy="274320"/>
-          </a:xfrm>
-          <a:prstGeom prst="rect">
-            <a:avLst/>
-          </a:prstGeom>
-          <a:noFill/>
-        </p:spPr>
-        <p:txBody>
-          <a:bodyPr wrap="square">
-            <a:spAutoFit/>
-          </a:bodyPr>
-          <a:lstStyle/>
-          <a:p>
-            <a:pPr algn="r"/>
-            <a:r>
-              <a:rPr sz="1100" b="0" i="0">
-                <a:solidFill>
-                  <a:srgbClr val="666666"/>
-                </a:solidFill>
-                <a:latin typeface="Calibri"/>
-              </a:rPr>
-              <a:t>10</a:t>
-            </a:r>
-          </a:p>
-        </p:txBody>
-      </p:sp>
-    </p:spTree>
-  </p:cSld>
-  <p:clrMapOvr>
-    <a:masterClrMapping/>
-  </p:clrMapOvr>
-</p:sld>
-</file>
-
-<file path=ppt/slides/slide11.xml><?xml version="1.0" encoding="utf-8"?>
-<p:sld xmlns:a="http://schemas.openxmlformats.org/drawingml/2006/main" xmlns:p="http://schemas.openxmlformats.org/presentationml/2006/main" xmlns:r="http://schemas.openxmlformats.org/officeDocument/2006/relationships">
-  <p:cSld>
-    <p:bg>
-      <p:bgPr>
-        <a:solidFill>
-          <a:srgbClr val="FFFFFF"/>
-        </a:solidFill>
-        <a:effectLst/>
-      </p:bgPr>
-    </p:bg>
-    <p:spTree>
-      <p:nvGrpSpPr>
-        <p:cNvPr id="1" name=""/>
-        <p:cNvGrpSpPr/>
-        <p:nvPr/>
-      </p:nvGrpSpPr>
-      <p:grpSpPr/>
-      <p:sp>
-        <p:nvSpPr>
-          <p:cNvPr id="2" name="Rectangle 1"/>
-          <p:cNvSpPr/>
-          <p:nvPr/>
-        </p:nvSpPr>
-        <p:spPr>
-          <a:xfrm>
-            <a:off x="0" y="0"/>
-            <a:ext cx="12191695" cy="1170432"/>
-          </a:xfrm>
-          <a:prstGeom prst="rect">
-            <a:avLst/>
-          </a:prstGeom>
-          <a:solidFill>
-            <a:srgbClr val="095292"/>
-          </a:solidFill>
-          <a:ln>
-            <a:noFill/>
-          </a:ln>
-        </p:spPr>
-        <p:style>
-          <a:lnRef idx="1">
-            <a:schemeClr val="accent1"/>
-          </a:lnRef>
-          <a:fillRef idx="3">
-            <a:schemeClr val="accent1"/>
-          </a:fillRef>
-          <a:effectRef idx="2">
-            <a:schemeClr val="accent1"/>
-          </a:effectRef>
-          <a:fontRef idx="minor">
-            <a:schemeClr val="lt1"/>
-          </a:fontRef>
-        </p:style>
-        <p:txBody>
-          <a:bodyPr rtlCol="0" anchor="ctr"/>
-          <a:lstStyle/>
-          <a:p>
-            <a:pPr algn="ctr"/>
-          </a:p>
-        </p:txBody>
-      </p:sp>
-      <p:sp>
-        <p:nvSpPr>
-          <p:cNvPr id="3" name="Rectangle 2"/>
-          <p:cNvSpPr/>
-          <p:nvPr/>
-        </p:nvSpPr>
-        <p:spPr>
-          <a:xfrm>
-            <a:off x="0" y="1170432"/>
-            <a:ext cx="12191695" cy="41148"/>
-          </a:xfrm>
-          <a:prstGeom prst="rect">
-            <a:avLst/>
-          </a:prstGeom>
-          <a:solidFill>
-            <a:srgbClr val="FFD000"/>
-          </a:solidFill>
-          <a:ln>
-            <a:noFill/>
-          </a:ln>
-        </p:spPr>
-        <p:style>
-          <a:lnRef idx="1">
-            <a:schemeClr val="accent1"/>
-          </a:lnRef>
-          <a:fillRef idx="3">
-            <a:schemeClr val="accent1"/>
-          </a:fillRef>
-          <a:effectRef idx="2">
-            <a:schemeClr val="accent1"/>
-          </a:effectRef>
-          <a:fontRef idx="minor">
-            <a:schemeClr val="lt1"/>
-          </a:fontRef>
-        </p:style>
-        <p:txBody>
-          <a:bodyPr rtlCol="0" anchor="ctr"/>
-          <a:lstStyle/>
-          <a:p>
-            <a:pPr algn="ctr"/>
-          </a:p>
-        </p:txBody>
-      </p:sp>
-      <p:sp>
-        <p:nvSpPr>
-          <p:cNvPr id="4" name="TextBox 3"/>
-          <p:cNvSpPr txBox="1"/>
-          <p:nvPr/>
-        </p:nvSpPr>
-        <p:spPr>
-          <a:xfrm>
-            <a:off x="457200" y="164592"/>
-            <a:ext cx="11277295" cy="384048"/>
-          </a:xfrm>
-          <a:prstGeom prst="rect">
-            <a:avLst/>
-          </a:prstGeom>
-          <a:noFill/>
-        </p:spPr>
-        <p:txBody>
-          <a:bodyPr wrap="square">
-            <a:spAutoFit/>
-          </a:bodyPr>
-          <a:lstStyle/>
-          <a:p>
-            <a:r>
-              <a:rPr sz="2600" b="1" i="0">
-                <a:solidFill>
-                  <a:srgbClr val="FFFFFF"/>
-                </a:solidFill>
-                <a:latin typeface="Calibri"/>
-              </a:rPr>
-              <a:t>Cómo se expone en 3 minutos</a:t>
-            </a:r>
-          </a:p>
-        </p:txBody>
-      </p:sp>
-      <p:sp>
-        <p:nvSpPr>
-          <p:cNvPr id="5" name="TextBox 4"/>
-          <p:cNvSpPr txBox="1"/>
-          <p:nvPr/>
-        </p:nvSpPr>
-        <p:spPr>
-          <a:xfrm>
-            <a:off x="457200" y="566928"/>
-            <a:ext cx="11277295" cy="411480"/>
-          </a:xfrm>
-          <a:prstGeom prst="rect">
-            <a:avLst/>
-          </a:prstGeom>
-          <a:noFill/>
-        </p:spPr>
-        <p:txBody>
-          <a:bodyPr wrap="square">
-            <a:spAutoFit/>
-          </a:bodyPr>
-          <a:lstStyle/>
-          <a:p>
-            <a:r>
-              <a:rPr sz="1400" b="0" i="0">
-                <a:solidFill>
-                  <a:srgbClr val="B8D8EE"/>
-                </a:solidFill>
-                <a:latin typeface="Calibri"/>
-              </a:rPr>
-              <a:t>Habla el vocero con la pantalla ya compartida · cronómetro en pantalla · se corta al llegar a cero</a:t>
-            </a:r>
-          </a:p>
-        </p:txBody>
-      </p:sp>
-      <p:sp>
-        <p:nvSpPr>
-          <p:cNvPr id="6" name="Rounded Rectangle 5"/>
-          <p:cNvSpPr/>
-          <p:nvPr/>
-        </p:nvSpPr>
-        <p:spPr>
-          <a:xfrm>
-            <a:off x="457200" y="1444752"/>
-            <a:ext cx="11277295" cy="908913"/>
-          </a:xfrm>
-          <a:prstGeom prst="roundRect">
-            <a:avLst>
-              <a:gd name="adj" fmla="val 12000"/>
-            </a:avLst>
-          </a:prstGeom>
-          <a:solidFill>
-            <a:srgbClr val="F2F2F2"/>
-          </a:solidFill>
-          <a:ln>
-            <a:noFill/>
-          </a:ln>
-        </p:spPr>
-        <p:style>
-          <a:lnRef idx="1">
-            <a:schemeClr val="accent1"/>
-          </a:lnRef>
-          <a:fillRef idx="3">
-            <a:schemeClr val="accent1"/>
-          </a:fillRef>
-          <a:effectRef idx="2">
-            <a:schemeClr val="accent1"/>
-          </a:effectRef>
-          <a:fontRef idx="minor">
-            <a:schemeClr val="lt1"/>
-          </a:fontRef>
-        </p:style>
-        <p:txBody>
-          <a:bodyPr rtlCol="0" anchor="ctr"/>
-          <a:lstStyle/>
-          <a:p>
-            <a:pPr algn="ctr"/>
-          </a:p>
-        </p:txBody>
-      </p:sp>
-      <p:sp>
-        <p:nvSpPr>
-          <p:cNvPr id="7" name="Rounded Rectangle 6"/>
-          <p:cNvSpPr/>
-          <p:nvPr/>
-        </p:nvSpPr>
-        <p:spPr>
-          <a:xfrm>
-            <a:off x="594360" y="1679752"/>
-            <a:ext cx="438912" cy="438912"/>
-          </a:xfrm>
-          <a:prstGeom prst="roundRect">
-            <a:avLst>
-              <a:gd name="adj" fmla="val 12000"/>
-            </a:avLst>
-          </a:prstGeom>
-          <a:solidFill>
-            <a:srgbClr val="095292"/>
-          </a:solidFill>
-          <a:ln>
-            <a:noFill/>
-          </a:ln>
-        </p:spPr>
-        <p:style>
-          <a:lnRef idx="1">
-            <a:schemeClr val="accent1"/>
-          </a:lnRef>
-          <a:fillRef idx="3">
-            <a:schemeClr val="accent1"/>
-          </a:fillRef>
-          <a:effectRef idx="2">
-            <a:schemeClr val="accent1"/>
-          </a:effectRef>
-          <a:fontRef idx="minor">
-            <a:schemeClr val="lt1"/>
-          </a:fontRef>
-        </p:style>
-        <p:txBody>
-          <a:bodyPr rtlCol="0" anchor="ctr"/>
-          <a:lstStyle/>
-          <a:p>
-            <a:pPr algn="ctr"/>
-          </a:p>
-        </p:txBody>
-      </p:sp>
-      <p:sp>
-        <p:nvSpPr>
-          <p:cNvPr id="8" name="TextBox 7"/>
-          <p:cNvSpPr txBox="1"/>
-          <p:nvPr/>
-        </p:nvSpPr>
-        <p:spPr>
-          <a:xfrm>
-            <a:off x="594360" y="1679752"/>
-            <a:ext cx="438912" cy="438912"/>
-          </a:xfrm>
-          <a:prstGeom prst="rect">
-            <a:avLst/>
-          </a:prstGeom>
-          <a:noFill/>
-        </p:spPr>
-        <p:txBody>
-          <a:bodyPr wrap="square" anchor="ctr"/>
-          <a:lstStyle/>
-          <a:p>
-            <a:pPr algn="ctr"/>
-            <a:r>
-              <a:rPr sz="1600" b="1" i="0">
-                <a:solidFill>
-                  <a:srgbClr val="FFFFFF"/>
-                </a:solidFill>
-                <a:latin typeface="Calibri"/>
-              </a:rPr>
-              <a:t>1</a:t>
-            </a:r>
-          </a:p>
-        </p:txBody>
-      </p:sp>
-      <p:sp>
-        <p:nvSpPr>
-          <p:cNvPr id="9" name="TextBox 8"/>
-          <p:cNvSpPr txBox="1"/>
-          <p:nvPr/>
-        </p:nvSpPr>
-        <p:spPr>
-          <a:xfrm>
-            <a:off x="1188720" y="1536192"/>
-            <a:ext cx="10271455" cy="744321"/>
-          </a:xfrm>
-          <a:prstGeom prst="rect">
-            <a:avLst/>
-          </a:prstGeom>
-          <a:noFill/>
-        </p:spPr>
-        <p:txBody>
-          <a:bodyPr wrap="square" anchor="ctr"/>
-          <a:lstStyle/>
-          <a:p>
-            <a:r>
-              <a:rPr sz="1500" b="1" i="0">
-                <a:solidFill>
-                  <a:srgbClr val="095292"/>
-                </a:solidFill>
-                <a:latin typeface="Calibri"/>
-              </a:rPr>
-              <a:t>25 s · El prompt</a:t>
-            </a:r>
-          </a:p>
-          <a:p>
-            <a:pPr>
-              <a:spcBef>
-                <a:spcPts val="200"/>
-              </a:spcBef>
-            </a:pPr>
-            <a:r>
-              <a:rPr sz="1300" b="0" i="0">
-                <a:solidFill>
-                  <a:srgbClr val="333333"/>
-                </a:solidFill>
-                <a:latin typeface="Calibri"/>
-              </a:rPr>
-              <a:t>Lean las restricciones que pusieron. Solo esa parte.</a:t>
-            </a:r>
-          </a:p>
-        </p:txBody>
-      </p:sp>
-      <p:sp>
-        <p:nvSpPr>
-          <p:cNvPr id="10" name="Rounded Rectangle 9"/>
-          <p:cNvSpPr/>
-          <p:nvPr/>
-        </p:nvSpPr>
-        <p:spPr>
-          <a:xfrm>
-            <a:off x="457200" y="2445105"/>
-            <a:ext cx="11277295" cy="908913"/>
-          </a:xfrm>
-          <a:prstGeom prst="roundRect">
-            <a:avLst>
-              <a:gd name="adj" fmla="val 12000"/>
-            </a:avLst>
-          </a:prstGeom>
-          <a:solidFill>
-            <a:srgbClr val="E8F4FA"/>
-          </a:solidFill>
-          <a:ln>
-            <a:noFill/>
-          </a:ln>
-        </p:spPr>
-        <p:style>
-          <a:lnRef idx="1">
-            <a:schemeClr val="accent1"/>
-          </a:lnRef>
-          <a:fillRef idx="3">
-            <a:schemeClr val="accent1"/>
-          </a:fillRef>
-          <a:effectRef idx="2">
-            <a:schemeClr val="accent1"/>
-          </a:effectRef>
-          <a:fontRef idx="minor">
-            <a:schemeClr val="lt1"/>
-          </a:fontRef>
-        </p:style>
-        <p:txBody>
-          <a:bodyPr rtlCol="0" anchor="ctr"/>
-          <a:lstStyle/>
-          <a:p>
-            <a:pPr algn="ctr"/>
-          </a:p>
-        </p:txBody>
-      </p:sp>
-      <p:sp>
-        <p:nvSpPr>
-          <p:cNvPr id="11" name="Rounded Rectangle 10"/>
-          <p:cNvSpPr/>
-          <p:nvPr/>
-        </p:nvSpPr>
-        <p:spPr>
-          <a:xfrm>
-            <a:off x="594360" y="2680106"/>
-            <a:ext cx="438912" cy="438912"/>
-          </a:xfrm>
-          <a:prstGeom prst="roundRect">
-            <a:avLst>
-              <a:gd name="adj" fmla="val 12000"/>
-            </a:avLst>
-          </a:prstGeom>
-          <a:solidFill>
-            <a:srgbClr val="095292"/>
-          </a:solidFill>
-          <a:ln>
-            <a:noFill/>
-          </a:ln>
-        </p:spPr>
-        <p:style>
-          <a:lnRef idx="1">
-            <a:schemeClr val="accent1"/>
-          </a:lnRef>
-          <a:fillRef idx="3">
-            <a:schemeClr val="accent1"/>
-          </a:fillRef>
-          <a:effectRef idx="2">
-            <a:schemeClr val="accent1"/>
-          </a:effectRef>
-          <a:fontRef idx="minor">
-            <a:schemeClr val="lt1"/>
-          </a:fontRef>
-        </p:style>
-        <p:txBody>
-          <a:bodyPr rtlCol="0" anchor="ctr"/>
-          <a:lstStyle/>
-          <a:p>
-            <a:pPr algn="ctr"/>
-          </a:p>
-        </p:txBody>
-      </p:sp>
-      <p:sp>
-        <p:nvSpPr>
-          <p:cNvPr id="12" name="TextBox 11"/>
-          <p:cNvSpPr txBox="1"/>
-          <p:nvPr/>
-        </p:nvSpPr>
-        <p:spPr>
-          <a:xfrm>
-            <a:off x="594360" y="2680106"/>
-            <a:ext cx="438912" cy="438912"/>
-          </a:xfrm>
-          <a:prstGeom prst="rect">
-            <a:avLst/>
-          </a:prstGeom>
-          <a:noFill/>
-        </p:spPr>
-        <p:txBody>
-          <a:bodyPr wrap="square" anchor="ctr"/>
-          <a:lstStyle/>
-          <a:p>
-            <a:pPr algn="ctr"/>
-            <a:r>
-              <a:rPr sz="1600" b="1" i="0">
-                <a:solidFill>
-                  <a:srgbClr val="FFFFFF"/>
-                </a:solidFill>
-                <a:latin typeface="Calibri"/>
-              </a:rPr>
-              <a:t>2</a:t>
-            </a:r>
-          </a:p>
-        </p:txBody>
-      </p:sp>
-      <p:sp>
-        <p:nvSpPr>
-          <p:cNvPr id="13" name="TextBox 12"/>
-          <p:cNvSpPr txBox="1"/>
-          <p:nvPr/>
-        </p:nvSpPr>
-        <p:spPr>
-          <a:xfrm>
-            <a:off x="1188720" y="2536545"/>
-            <a:ext cx="10271455" cy="744321"/>
-          </a:xfrm>
-          <a:prstGeom prst="rect">
-            <a:avLst/>
-          </a:prstGeom>
-          <a:noFill/>
-        </p:spPr>
-        <p:txBody>
-          <a:bodyPr wrap="square" anchor="ctr"/>
-          <a:lstStyle/>
-          <a:p>
-            <a:r>
-              <a:rPr sz="1500" b="1" i="0">
-                <a:solidFill>
-                  <a:srgbClr val="095292"/>
-                </a:solidFill>
-                <a:latin typeface="Calibri"/>
-              </a:rPr>
-              <a:t>30 s · Las tres variantes</a:t>
-            </a:r>
-          </a:p>
-          <a:p>
-            <a:pPr>
-              <a:spcBef>
-                <a:spcPts val="200"/>
-              </a:spcBef>
-            </a:pPr>
-            <a:r>
-              <a:rPr sz="1300" b="0" i="0">
-                <a:solidFill>
-                  <a:srgbClr val="333333"/>
-                </a:solidFill>
-                <a:latin typeface="Calibri"/>
-              </a:rPr>
-              <a:t>En una frase cada una.</a:t>
-            </a:r>
-          </a:p>
-        </p:txBody>
-      </p:sp>
-      <p:sp>
-        <p:nvSpPr>
-          <p:cNvPr id="14" name="Rounded Rectangle 13"/>
-          <p:cNvSpPr/>
-          <p:nvPr/>
-        </p:nvSpPr>
-        <p:spPr>
-          <a:xfrm>
-            <a:off x="457200" y="3445459"/>
-            <a:ext cx="11277295" cy="908913"/>
-          </a:xfrm>
-          <a:prstGeom prst="roundRect">
-            <a:avLst>
-              <a:gd name="adj" fmla="val 12000"/>
-            </a:avLst>
-          </a:prstGeom>
-          <a:solidFill>
-            <a:srgbClr val="F2F2F2"/>
-          </a:solidFill>
-          <a:ln>
-            <a:noFill/>
-          </a:ln>
-        </p:spPr>
-        <p:style>
-          <a:lnRef idx="1">
-            <a:schemeClr val="accent1"/>
-          </a:lnRef>
-          <a:fillRef idx="3">
-            <a:schemeClr val="accent1"/>
-          </a:fillRef>
-          <a:effectRef idx="2">
-            <a:schemeClr val="accent1"/>
-          </a:effectRef>
-          <a:fontRef idx="minor">
-            <a:schemeClr val="lt1"/>
-          </a:fontRef>
-        </p:style>
-        <p:txBody>
-          <a:bodyPr rtlCol="0" anchor="ctr"/>
-          <a:lstStyle/>
-          <a:p>
-            <a:pPr algn="ctr"/>
-          </a:p>
-        </p:txBody>
-      </p:sp>
-      <p:sp>
-        <p:nvSpPr>
-          <p:cNvPr id="15" name="Rounded Rectangle 14"/>
-          <p:cNvSpPr/>
-          <p:nvPr/>
-        </p:nvSpPr>
-        <p:spPr>
-          <a:xfrm>
-            <a:off x="594360" y="3680460"/>
-            <a:ext cx="438912" cy="438912"/>
-          </a:xfrm>
-          <a:prstGeom prst="roundRect">
-            <a:avLst>
-              <a:gd name="adj" fmla="val 12000"/>
-            </a:avLst>
-          </a:prstGeom>
-          <a:solidFill>
-            <a:srgbClr val="095292"/>
-          </a:solidFill>
-          <a:ln>
-            <a:noFill/>
-          </a:ln>
-        </p:spPr>
-        <p:style>
-          <a:lnRef idx="1">
-            <a:schemeClr val="accent1"/>
-          </a:lnRef>
-          <a:fillRef idx="3">
-            <a:schemeClr val="accent1"/>
-          </a:fillRef>
-          <a:effectRef idx="2">
-            <a:schemeClr val="accent1"/>
-          </a:effectRef>
-          <a:fontRef idx="minor">
-            <a:schemeClr val="lt1"/>
-          </a:fontRef>
-        </p:style>
-        <p:txBody>
-          <a:bodyPr rtlCol="0" anchor="ctr"/>
-          <a:lstStyle/>
-          <a:p>
-            <a:pPr algn="ctr"/>
-          </a:p>
-        </p:txBody>
-      </p:sp>
-      <p:sp>
-        <p:nvSpPr>
-          <p:cNvPr id="16" name="TextBox 15"/>
-          <p:cNvSpPr txBox="1"/>
-          <p:nvPr/>
-        </p:nvSpPr>
-        <p:spPr>
-          <a:xfrm>
-            <a:off x="594360" y="3680460"/>
-            <a:ext cx="438912" cy="438912"/>
-          </a:xfrm>
-          <a:prstGeom prst="rect">
-            <a:avLst/>
-          </a:prstGeom>
-          <a:noFill/>
-        </p:spPr>
-        <p:txBody>
-          <a:bodyPr wrap="square" anchor="ctr"/>
-          <a:lstStyle/>
-          <a:p>
-            <a:pPr algn="ctr"/>
-            <a:r>
-              <a:rPr sz="1600" b="1" i="0">
-                <a:solidFill>
-                  <a:srgbClr val="FFFFFF"/>
-                </a:solidFill>
-                <a:latin typeface="Calibri"/>
-              </a:rPr>
-              <a:t>3</a:t>
-            </a:r>
-          </a:p>
-        </p:txBody>
-      </p:sp>
-      <p:sp>
-        <p:nvSpPr>
-          <p:cNvPr id="17" name="TextBox 16"/>
-          <p:cNvSpPr txBox="1"/>
-          <p:nvPr/>
-        </p:nvSpPr>
-        <p:spPr>
-          <a:xfrm>
-            <a:off x="1188720" y="3536899"/>
-            <a:ext cx="10271455" cy="744321"/>
-          </a:xfrm>
-          <a:prstGeom prst="rect">
-            <a:avLst/>
-          </a:prstGeom>
-          <a:noFill/>
-        </p:spPr>
-        <p:txBody>
-          <a:bodyPr wrap="square" anchor="ctr"/>
-          <a:lstStyle/>
-          <a:p>
-            <a:r>
-              <a:rPr sz="1500" b="1" i="0">
-                <a:solidFill>
-                  <a:srgbClr val="095292"/>
-                </a:solidFill>
-                <a:latin typeface="Calibri"/>
-              </a:rPr>
-              <a:t>30 s · La que eligieron</a:t>
-            </a:r>
-          </a:p>
-          <a:p>
-            <a:pPr>
-              <a:spcBef>
-                <a:spcPts val="200"/>
-              </a:spcBef>
-            </a:pPr>
-            <a:r>
-              <a:rPr sz="1300" b="0" i="0">
-                <a:solidFill>
-                  <a:srgbClr val="333333"/>
-                </a:solidFill>
-                <a:latin typeface="Calibri"/>
-              </a:rPr>
-              <a:t>Y el requisito en el que se apoyaron.</a:t>
-            </a:r>
-          </a:p>
-        </p:txBody>
-      </p:sp>
-      <p:sp>
-        <p:nvSpPr>
-          <p:cNvPr id="18" name="Rounded Rectangle 17"/>
-          <p:cNvSpPr/>
-          <p:nvPr/>
-        </p:nvSpPr>
-        <p:spPr>
-          <a:xfrm>
-            <a:off x="457200" y="4445812"/>
-            <a:ext cx="11277295" cy="908913"/>
-          </a:xfrm>
-          <a:prstGeom prst="roundRect">
-            <a:avLst>
-              <a:gd name="adj" fmla="val 12000"/>
-            </a:avLst>
-          </a:prstGeom>
-          <a:solidFill>
-            <a:srgbClr val="E8F4FA"/>
-          </a:solidFill>
-          <a:ln>
-            <a:noFill/>
-          </a:ln>
-        </p:spPr>
-        <p:style>
-          <a:lnRef idx="1">
-            <a:schemeClr val="accent1"/>
-          </a:lnRef>
-          <a:fillRef idx="3">
-            <a:schemeClr val="accent1"/>
-          </a:fillRef>
-          <a:effectRef idx="2">
-            <a:schemeClr val="accent1"/>
-          </a:effectRef>
-          <a:fontRef idx="minor">
-            <a:schemeClr val="lt1"/>
-          </a:fontRef>
-        </p:style>
-        <p:txBody>
-          <a:bodyPr rtlCol="0" anchor="ctr"/>
-          <a:lstStyle/>
-          <a:p>
-            <a:pPr algn="ctr"/>
-          </a:p>
-        </p:txBody>
-      </p:sp>
-      <p:sp>
-        <p:nvSpPr>
-          <p:cNvPr id="19" name="Rounded Rectangle 18"/>
-          <p:cNvSpPr/>
-          <p:nvPr/>
-        </p:nvSpPr>
-        <p:spPr>
-          <a:xfrm>
-            <a:off x="594360" y="4680813"/>
-            <a:ext cx="438912" cy="438912"/>
-          </a:xfrm>
-          <a:prstGeom prst="roundRect">
-            <a:avLst>
-              <a:gd name="adj" fmla="val 12000"/>
-            </a:avLst>
-          </a:prstGeom>
-          <a:solidFill>
-            <a:srgbClr val="095292"/>
-          </a:solidFill>
-          <a:ln>
-            <a:noFill/>
-          </a:ln>
-        </p:spPr>
-        <p:style>
-          <a:lnRef idx="1">
-            <a:schemeClr val="accent1"/>
-          </a:lnRef>
-          <a:fillRef idx="3">
-            <a:schemeClr val="accent1"/>
-          </a:fillRef>
-          <a:effectRef idx="2">
-            <a:schemeClr val="accent1"/>
-          </a:effectRef>
-          <a:fontRef idx="minor">
-            <a:schemeClr val="lt1"/>
-          </a:fontRef>
-        </p:style>
-        <p:txBody>
-          <a:bodyPr rtlCol="0" anchor="ctr"/>
-          <a:lstStyle/>
-          <a:p>
-            <a:pPr algn="ctr"/>
-          </a:p>
-        </p:txBody>
-      </p:sp>
-      <p:sp>
-        <p:nvSpPr>
-          <p:cNvPr id="20" name="TextBox 19"/>
-          <p:cNvSpPr txBox="1"/>
-          <p:nvPr/>
-        </p:nvSpPr>
-        <p:spPr>
-          <a:xfrm>
-            <a:off x="594360" y="4680813"/>
-            <a:ext cx="438912" cy="438912"/>
-          </a:xfrm>
-          <a:prstGeom prst="rect">
-            <a:avLst/>
-          </a:prstGeom>
-          <a:noFill/>
-        </p:spPr>
-        <p:txBody>
-          <a:bodyPr wrap="square" anchor="ctr"/>
-          <a:lstStyle/>
-          <a:p>
-            <a:pPr algn="ctr"/>
-            <a:r>
-              <a:rPr sz="1600" b="1" i="0">
-                <a:solidFill>
-                  <a:srgbClr val="FFFFFF"/>
-                </a:solidFill>
-                <a:latin typeface="Calibri"/>
-              </a:rPr>
-              <a:t>4</a:t>
-            </a:r>
-          </a:p>
-        </p:txBody>
-      </p:sp>
-      <p:sp>
-        <p:nvSpPr>
-          <p:cNvPr id="21" name="TextBox 20"/>
-          <p:cNvSpPr txBox="1"/>
-          <p:nvPr/>
-        </p:nvSpPr>
-        <p:spPr>
-          <a:xfrm>
-            <a:off x="1188720" y="4537252"/>
-            <a:ext cx="10271455" cy="744321"/>
-          </a:xfrm>
-          <a:prstGeom prst="rect">
-            <a:avLst/>
-          </a:prstGeom>
-          <a:noFill/>
-        </p:spPr>
-        <p:txBody>
-          <a:bodyPr wrap="square" anchor="ctr"/>
-          <a:lstStyle/>
-          <a:p>
-            <a:r>
-              <a:rPr sz="1500" b="1" i="0">
-                <a:solidFill>
-                  <a:srgbClr val="095292"/>
-                </a:solidFill>
-                <a:latin typeface="Calibri"/>
-              </a:rPr>
-              <a:t>70 s · Lo que corrigieron</a:t>
-            </a:r>
-          </a:p>
-          <a:p>
-            <a:pPr>
-              <a:spcBef>
-                <a:spcPts val="200"/>
-              </a:spcBef>
-            </a:pPr>
-            <a:r>
-              <a:rPr sz="1300" b="0" i="0">
-                <a:solidFill>
-                  <a:srgbClr val="333333"/>
-                </a:solidFill>
-                <a:latin typeface="Calibri"/>
-              </a:rPr>
-              <a:t>Dos correcciones con su razón y </a:t>
-            </a:r>
-            <a:r>
-              <a:rPr sz="1300" b="1" i="0">
-                <a:solidFill>
-                  <a:srgbClr val="333333"/>
-                </a:solidFill>
-                <a:latin typeface="Calibri"/>
-              </a:rPr>
-              <a:t>de qué sesión sale cada una</a:t>
-            </a:r>
-            <a:r>
-              <a:rPr sz="1300" b="0" i="0">
-                <a:solidFill>
-                  <a:srgbClr val="333333"/>
-                </a:solidFill>
-                <a:latin typeface="Calibri"/>
-              </a:rPr>
-              <a:t>. Es el minuto obligatorio.</a:t>
-            </a:r>
-          </a:p>
-        </p:txBody>
-      </p:sp>
-      <p:sp>
-        <p:nvSpPr>
-          <p:cNvPr id="22" name="Rounded Rectangle 21"/>
-          <p:cNvSpPr/>
-          <p:nvPr/>
-        </p:nvSpPr>
-        <p:spPr>
-          <a:xfrm>
-            <a:off x="457200" y="5446166"/>
-            <a:ext cx="11277295" cy="908913"/>
-          </a:xfrm>
-          <a:prstGeom prst="roundRect">
-            <a:avLst>
-              <a:gd name="adj" fmla="val 12000"/>
-            </a:avLst>
-          </a:prstGeom>
-          <a:solidFill>
-            <a:srgbClr val="F2F2F2"/>
-          </a:solidFill>
-          <a:ln>
-            <a:noFill/>
-          </a:ln>
-        </p:spPr>
-        <p:style>
-          <a:lnRef idx="1">
-            <a:schemeClr val="accent1"/>
-          </a:lnRef>
-          <a:fillRef idx="3">
-            <a:schemeClr val="accent1"/>
-          </a:fillRef>
-          <a:effectRef idx="2">
-            <a:schemeClr val="accent1"/>
-          </a:effectRef>
-          <a:fontRef idx="minor">
-            <a:schemeClr val="lt1"/>
-          </a:fontRef>
-        </p:style>
-        <p:txBody>
-          <a:bodyPr rtlCol="0" anchor="ctr"/>
-          <a:lstStyle/>
-          <a:p>
-            <a:pPr algn="ctr"/>
-          </a:p>
-        </p:txBody>
-      </p:sp>
-      <p:sp>
-        <p:nvSpPr>
-          <p:cNvPr id="23" name="Rounded Rectangle 22"/>
-          <p:cNvSpPr/>
-          <p:nvPr/>
-        </p:nvSpPr>
-        <p:spPr>
-          <a:xfrm>
-            <a:off x="594360" y="5681167"/>
-            <a:ext cx="438912" cy="438912"/>
-          </a:xfrm>
-          <a:prstGeom prst="roundRect">
-            <a:avLst>
-              <a:gd name="adj" fmla="val 12000"/>
-            </a:avLst>
-          </a:prstGeom>
-          <a:solidFill>
-            <a:srgbClr val="095292"/>
-          </a:solidFill>
-          <a:ln>
-            <a:noFill/>
-          </a:ln>
-        </p:spPr>
-        <p:style>
-          <a:lnRef idx="1">
-            <a:schemeClr val="accent1"/>
-          </a:lnRef>
-          <a:fillRef idx="3">
-            <a:schemeClr val="accent1"/>
-          </a:fillRef>
-          <a:effectRef idx="2">
-            <a:schemeClr val="accent1"/>
-          </a:effectRef>
-          <a:fontRef idx="minor">
-            <a:schemeClr val="lt1"/>
-          </a:fontRef>
-        </p:style>
-        <p:txBody>
-          <a:bodyPr rtlCol="0" anchor="ctr"/>
-          <a:lstStyle/>
-          <a:p>
-            <a:pPr algn="ctr"/>
-          </a:p>
-        </p:txBody>
-      </p:sp>
-      <p:sp>
-        <p:nvSpPr>
-          <p:cNvPr id="24" name="TextBox 23"/>
-          <p:cNvSpPr txBox="1"/>
-          <p:nvPr/>
-        </p:nvSpPr>
-        <p:spPr>
-          <a:xfrm>
-            <a:off x="594360" y="5681167"/>
-            <a:ext cx="438912" cy="438912"/>
-          </a:xfrm>
-          <a:prstGeom prst="rect">
-            <a:avLst/>
-          </a:prstGeom>
-          <a:noFill/>
-        </p:spPr>
-        <p:txBody>
-          <a:bodyPr wrap="square" anchor="ctr"/>
-          <a:lstStyle/>
-          <a:p>
-            <a:pPr algn="ctr"/>
-            <a:r>
-              <a:rPr sz="1600" b="1" i="0">
-                <a:solidFill>
-                  <a:srgbClr val="FFFFFF"/>
-                </a:solidFill>
-                <a:latin typeface="Calibri"/>
-              </a:rPr>
-              <a:t>5</a:t>
-            </a:r>
-          </a:p>
-        </p:txBody>
-      </p:sp>
-      <p:sp>
-        <p:nvSpPr>
-          <p:cNvPr id="25" name="TextBox 24"/>
-          <p:cNvSpPr txBox="1"/>
-          <p:nvPr/>
-        </p:nvSpPr>
-        <p:spPr>
-          <a:xfrm>
-            <a:off x="1188720" y="5537606"/>
-            <a:ext cx="10271455" cy="744321"/>
-          </a:xfrm>
-          <a:prstGeom prst="rect">
-            <a:avLst/>
-          </a:prstGeom>
-          <a:noFill/>
-        </p:spPr>
-        <p:txBody>
-          <a:bodyPr wrap="square" anchor="ctr"/>
-          <a:lstStyle/>
-          <a:p>
-            <a:r>
-              <a:rPr sz="1500" b="1" i="0">
-                <a:solidFill>
-                  <a:srgbClr val="095292"/>
-                </a:solidFill>
-                <a:latin typeface="Calibri"/>
-              </a:rPr>
-              <a:t>25 s · Lo que descartaron</a:t>
-            </a:r>
-          </a:p>
-          <a:p>
-            <a:pPr>
-              <a:spcBef>
-                <a:spcPts val="200"/>
-              </a:spcBef>
-            </a:pPr>
-            <a:r>
-              <a:rPr sz="1300" b="0" i="0">
-                <a:solidFill>
-                  <a:srgbClr val="333333"/>
-                </a:solidFill>
-                <a:latin typeface="Calibri"/>
-              </a:rPr>
-              <a:t>Una propuesta rechazada y el motivo.</a:t>
-            </a:r>
-          </a:p>
-        </p:txBody>
-      </p:sp>
-      <p:sp>
-        <p:nvSpPr>
-          <p:cNvPr id="26" name="TextBox 25"/>
-          <p:cNvSpPr txBox="1"/>
-          <p:nvPr/>
-        </p:nvSpPr>
-        <p:spPr>
-          <a:xfrm>
-            <a:off x="11185855" y="6473952"/>
-            <a:ext cx="640080" cy="274320"/>
-          </a:xfrm>
-          <a:prstGeom prst="rect">
-            <a:avLst/>
-          </a:prstGeom>
-          <a:noFill/>
-        </p:spPr>
-        <p:txBody>
-          <a:bodyPr wrap="square">
-            <a:spAutoFit/>
-          </a:bodyPr>
-          <a:lstStyle/>
-          <a:p>
-            <a:pPr algn="r"/>
-            <a:r>
-              <a:rPr sz="1100" b="0" i="0">
-                <a:solidFill>
-                  <a:srgbClr val="666666"/>
-                </a:solidFill>
-                <a:latin typeface="Calibri"/>
-              </a:rPr>
-              <a:t>11</a:t>
-            </a:r>
-          </a:p>
-        </p:txBody>
-      </p:sp>
-    </p:spTree>
-  </p:cSld>
-  <p:clrMapOvr>
-    <a:masterClrMapping/>
-  </p:clrMapOvr>
-</p:sld>
-</file>
-
-<file path=ppt/slides/slide12.xml><?xml version="1.0" encoding="utf-8"?>
-<p:sld xmlns:a="http://schemas.openxmlformats.org/drawingml/2006/main" xmlns:p="http://schemas.openxmlformats.org/presentationml/2006/main" xmlns:r="http://schemas.openxmlformats.org/officeDocument/2006/relationships">
-  <p:cSld>
-    <p:bg>
-      <p:bgPr>
-        <a:solidFill>
-          <a:srgbClr val="FFFFFF"/>
-        </a:solidFill>
-        <a:effectLst/>
-      </p:bgPr>
-    </p:bg>
-    <p:spTree>
-      <p:nvGrpSpPr>
-        <p:cNvPr id="1" name=""/>
-        <p:cNvGrpSpPr/>
-        <p:nvPr/>
-      </p:nvGrpSpPr>
-      <p:grpSpPr/>
-      <p:sp>
-        <p:nvSpPr>
-          <p:cNvPr id="2" name="Rectangle 1"/>
-          <p:cNvSpPr/>
-          <p:nvPr/>
-        </p:nvSpPr>
-        <p:spPr>
-          <a:xfrm>
-            <a:off x="0" y="0"/>
-            <a:ext cx="12191695" cy="960120"/>
-          </a:xfrm>
-          <a:prstGeom prst="rect">
-            <a:avLst/>
-          </a:prstGeom>
-          <a:solidFill>
-            <a:srgbClr val="095292"/>
-          </a:solidFill>
-          <a:ln>
-            <a:noFill/>
-          </a:ln>
-        </p:spPr>
-        <p:style>
-          <a:lnRef idx="1">
-            <a:schemeClr val="accent1"/>
-          </a:lnRef>
-          <a:fillRef idx="3">
-            <a:schemeClr val="accent1"/>
-          </a:fillRef>
-          <a:effectRef idx="2">
-            <a:schemeClr val="accent1"/>
-          </a:effectRef>
-          <a:fontRef idx="minor">
-            <a:schemeClr val="lt1"/>
-          </a:fontRef>
-        </p:style>
-        <p:txBody>
-          <a:bodyPr rtlCol="0" anchor="ctr"/>
-          <a:lstStyle/>
-          <a:p>
-            <a:pPr algn="ctr"/>
-          </a:p>
-        </p:txBody>
-      </p:sp>
-      <p:sp>
-        <p:nvSpPr>
-          <p:cNvPr id="3" name="Rectangle 2"/>
-          <p:cNvSpPr/>
-          <p:nvPr/>
-        </p:nvSpPr>
-        <p:spPr>
-          <a:xfrm>
-            <a:off x="0" y="960120"/>
-            <a:ext cx="12191695" cy="41148"/>
-          </a:xfrm>
-          <a:prstGeom prst="rect">
-            <a:avLst/>
-          </a:prstGeom>
-          <a:solidFill>
-            <a:srgbClr val="FFD000"/>
-          </a:solidFill>
-          <a:ln>
-            <a:noFill/>
-          </a:ln>
-        </p:spPr>
-        <p:style>
-          <a:lnRef idx="1">
-            <a:schemeClr val="accent1"/>
-          </a:lnRef>
-          <a:fillRef idx="3">
-            <a:schemeClr val="accent1"/>
-          </a:fillRef>
-          <a:effectRef idx="2">
-            <a:schemeClr val="accent1"/>
-          </a:effectRef>
-          <a:fontRef idx="minor">
-            <a:schemeClr val="lt1"/>
-          </a:fontRef>
-        </p:style>
-        <p:txBody>
-          <a:bodyPr rtlCol="0" anchor="ctr"/>
-          <a:lstStyle/>
-          <a:p>
-            <a:pPr algn="ctr"/>
-          </a:p>
-        </p:txBody>
-      </p:sp>
-      <p:sp>
-        <p:nvSpPr>
-          <p:cNvPr id="4" name="TextBox 3"/>
-          <p:cNvSpPr txBox="1"/>
-          <p:nvPr/>
-        </p:nvSpPr>
-        <p:spPr>
-          <a:xfrm>
-            <a:off x="457200" y="164592"/>
-            <a:ext cx="11277295" cy="502920"/>
-          </a:xfrm>
-          <a:prstGeom prst="rect">
-            <a:avLst/>
-          </a:prstGeom>
-          <a:noFill/>
-        </p:spPr>
-        <p:txBody>
-          <a:bodyPr wrap="square">
-            <a:spAutoFit/>
-          </a:bodyPr>
-          <a:lstStyle/>
-          <a:p>
-            <a:r>
-              <a:rPr sz="2600" b="1" i="0">
-                <a:solidFill>
-                  <a:srgbClr val="FFFFFF"/>
-                </a:solidFill>
-                <a:latin typeface="Calibri"/>
-              </a:rPr>
-              <a:t>Para la Clase 12</a:t>
-            </a:r>
-          </a:p>
-        </p:txBody>
-      </p:sp>
-      <p:sp>
-        <p:nvSpPr>
-          <p:cNvPr id="5" name="TextBox 4"/>
-          <p:cNvSpPr txBox="1"/>
-          <p:nvPr/>
-        </p:nvSpPr>
-        <p:spPr>
-          <a:xfrm>
-            <a:off x="457200" y="1170432"/>
-            <a:ext cx="11277295" cy="5230368"/>
-          </a:xfrm>
-          <a:prstGeom prst="rect">
-            <a:avLst/>
-          </a:prstGeom>
-          <a:noFill/>
-        </p:spPr>
-        <p:txBody>
-          <a:bodyPr wrap="square">
-            <a:spAutoFit/>
-          </a:bodyPr>
-          <a:lstStyle/>
-          <a:p>
-            <a:pPr>
-              <a:spcAft>
-                <a:spcPts val="800"/>
-              </a:spcAft>
-            </a:pPr>
-            <a:r>
-              <a:rPr sz="2000" b="0" i="0">
-                <a:solidFill>
-                  <a:srgbClr val="333333"/>
-                </a:solidFill>
-                <a:latin typeface="Calibri"/>
-              </a:rPr>
-              <a:t>–   </a:t>
-            </a:r>
-            <a:r>
-              <a:rPr sz="2000" b="1" i="0">
-                <a:solidFill>
-                  <a:srgbClr val="333333"/>
-                </a:solidFill>
-                <a:latin typeface="Calibri"/>
-              </a:rPr>
-              <a:t>Trabajo dirigido:</a:t>
-            </a:r>
-            <a:r>
-              <a:rPr sz="2000" b="0" i="0">
-                <a:solidFill>
-                  <a:srgbClr val="333333"/>
-                </a:solidFill>
-                <a:latin typeface="Calibri"/>
-              </a:rPr>
-              <a:t> Uso de IA para generación de ideas — completar el registro del taller (prompt, variantes, elección, correcciones con su origen, descartes y declaración del uso) en el documento del equipo.</a:t>
-            </a:r>
-          </a:p>
-          <a:p>
-            <a:pPr>
-              <a:spcAft>
-                <a:spcPts val="800"/>
-              </a:spcAft>
-            </a:pPr>
-            <a:r>
-              <a:rPr sz="2000" b="0" i="0">
-                <a:solidFill>
-                  <a:srgbClr val="333333"/>
-                </a:solidFill>
-                <a:latin typeface="Calibri"/>
-              </a:rPr>
-              <a:t>–   </a:t>
-            </a:r>
-            <a:r>
-              <a:rPr sz="2000" b="1" i="0">
-                <a:solidFill>
-                  <a:srgbClr val="333333"/>
-                </a:solidFill>
-                <a:latin typeface="Calibri"/>
-              </a:rPr>
-              <a:t>Trabajo independiente:</a:t>
-            </a:r>
-            <a:r>
-              <a:rPr sz="2000" b="0" i="0">
-                <a:solidFill>
-                  <a:srgbClr val="333333"/>
-                </a:solidFill>
-                <a:latin typeface="Calibri"/>
-              </a:rPr>
-              <a:t> Corrección del prototipo: dejar el </a:t>
-            </a:r>
-            <a:r>
-              <a:rPr sz="2000" b="1" i="0">
-                <a:solidFill>
-                  <a:srgbClr val="333333"/>
-                </a:solidFill>
-                <a:latin typeface="Calibri"/>
-              </a:rPr>
-              <a:t>v2 navegable</a:t>
-            </a:r>
-            <a:r>
-              <a:rPr sz="2000" b="0" i="0">
-                <a:solidFill>
-                  <a:srgbClr val="333333"/>
-                </a:solidFill>
-                <a:latin typeface="Calibri"/>
-              </a:rPr>
-              <a:t> en la carpeta del equipo, con todas las correcciones aplicadas, y </a:t>
-            </a:r>
-            <a:r>
-              <a:rPr sz="2000" b="1" i="0">
-                <a:solidFill>
-                  <a:srgbClr val="333333"/>
-                </a:solidFill>
-                <a:latin typeface="Calibri"/>
-              </a:rPr>
-              <a:t>conseguir a la persona ajena</a:t>
-            </a:r>
-            <a:r>
-              <a:rPr sz="2000" b="0" i="0">
-                <a:solidFill>
-                  <a:srgbClr val="333333"/>
-                </a:solidFill>
-                <a:latin typeface="Calibri"/>
-              </a:rPr>
-              <a:t> que va a probarlo — solo el rol, no el nombre.</a:t>
-            </a:r>
-          </a:p>
-          <a:p>
-            <a:pPr>
-              <a:spcAft>
-                <a:spcPts val="800"/>
-              </a:spcAft>
-            </a:pPr>
-            <a:r>
-              <a:rPr sz="2000" b="0" i="0">
-                <a:solidFill>
-                  <a:srgbClr val="333333"/>
-                </a:solidFill>
-                <a:latin typeface="Calibri"/>
-              </a:rPr>
-              <a:t>–   </a:t>
-            </a:r>
-            <a:r>
-              <a:rPr sz="2000" b="1" i="0">
-                <a:solidFill>
-                  <a:srgbClr val="333333"/>
-                </a:solidFill>
-                <a:latin typeface="Calibri"/>
-              </a:rPr>
-              <a:t>Clase 12 · Presentación de avances de proyectos</a:t>
-            </a:r>
-            <a:r>
-              <a:rPr sz="2000" b="0" i="0">
-                <a:solidFill>
-                  <a:srgbClr val="333333"/>
-                </a:solidFill>
-                <a:latin typeface="Calibri"/>
-              </a:rPr>
-              <a:t> — arranca el </a:t>
-            </a:r>
-            <a:r>
-              <a:rPr sz="2000" b="1" i="0">
-                <a:solidFill>
-                  <a:srgbClr val="333333"/>
-                </a:solidFill>
-                <a:latin typeface="Calibri"/>
-              </a:rPr>
-              <a:t>corte 3</a:t>
-            </a:r>
-            <a:r>
-              <a:rPr sz="2000" b="0" i="0">
-                <a:solidFill>
-                  <a:srgbClr val="333333"/>
-                </a:solidFill>
-                <a:latin typeface="Calibri"/>
-              </a:rPr>
-              <a:t> con la </a:t>
-            </a:r>
-            <a:r>
-              <a:rPr sz="2000" b="1" i="0">
-                <a:solidFill>
-                  <a:srgbClr val="333333"/>
-                </a:solidFill>
-                <a:latin typeface="Calibri"/>
-              </a:rPr>
-              <a:t>presentación de avances</a:t>
-            </a:r>
-            <a:r>
-              <a:rPr sz="2000" b="0" i="0">
-                <a:solidFill>
-                  <a:srgbClr val="333333"/>
-                </a:solidFill>
-                <a:latin typeface="Calibri"/>
-              </a:rPr>
-              <a:t>: el prototipo se prueba con una persona ajena al equipo y se recibe retroalimentación entre pares.</a:t>
-            </a:r>
-          </a:p>
-          <a:p>
-            <a:pPr>
-              <a:spcAft>
-                <a:spcPts val="800"/>
-              </a:spcAft>
-            </a:pPr>
-            <a:r>
-              <a:rPr sz="2000" b="0" i="0">
-                <a:solidFill>
-                  <a:srgbClr val="333333"/>
-                </a:solidFill>
-                <a:latin typeface="Calibri"/>
-              </a:rPr>
-              <a:t>–   </a:t>
-            </a:r>
-            <a:r>
-              <a:rPr sz="2000" b="1" i="0">
-                <a:solidFill>
-                  <a:srgbClr val="333333"/>
-                </a:solidFill>
-                <a:latin typeface="Calibri"/>
-              </a:rPr>
-              <a:t>Aviso:</a:t>
-            </a:r>
-            <a:r>
-              <a:rPr sz="2000" b="0" i="0">
-                <a:solidFill>
-                  <a:srgbClr val="333333"/>
-                </a:solidFill>
-                <a:latin typeface="Calibri"/>
-              </a:rPr>
-              <a:t> Para la Clase 12 traigan el prototipo v2 navegable </a:t>
-            </a:r>
-            <a:r>
-              <a:rPr sz="2000" b="1" i="0">
-                <a:solidFill>
-                  <a:srgbClr val="333333"/>
-                </a:solidFill>
-                <a:latin typeface="Calibri"/>
-              </a:rPr>
-              <a:t>y la prueba ya hecha con una persona ajena al equipo</a:t>
-            </a:r>
-            <a:r>
-              <a:rPr sz="2000" b="0" i="0">
-                <a:solidFill>
-                  <a:srgbClr val="333333"/>
-                </a:solidFill>
-                <a:latin typeface="Calibri"/>
-              </a:rPr>
-              <a:t>, con la lista de lo que falló. Sin esa lista no hay nada que presentar: la Clase 12 es sobre lo que salió mal, no sobre lo que se planeó.</a:t>
-            </a:r>
-          </a:p>
-          <a:p>
-            <a:pPr>
-              <a:spcAft>
-                <a:spcPts val="800"/>
-              </a:spcAft>
-            </a:pPr>
-            <a:r>
-              <a:rPr sz="2000" b="0" i="0">
-                <a:solidFill>
-                  <a:srgbClr val="333333"/>
-                </a:solidFill>
-                <a:latin typeface="Calibri"/>
-              </a:rPr>
-              <a:t>–   </a:t>
-            </a:r>
-            <a:r>
-              <a:rPr sz="2000" b="1" i="0">
-                <a:solidFill>
-                  <a:srgbClr val="333333"/>
-                </a:solidFill>
-                <a:latin typeface="Calibri"/>
-              </a:rPr>
-              <a:t>Antes de salir:</a:t>
-            </a:r>
-            <a:r>
-              <a:rPr sz="2000" b="0" i="0">
-                <a:solidFill>
-                  <a:srgbClr val="333333"/>
-                </a:solidFill>
-                <a:latin typeface="Calibri"/>
-              </a:rPr>
-              <a:t> el enlace del documento del equipo en el chat, con permiso de lectura para el docente, y el nombre del vocero de hoy.</a:t>
-            </a:r>
-          </a:p>
-        </p:txBody>
-      </p:sp>
-      <p:sp>
-        <p:nvSpPr>
-          <p:cNvPr id="6" name="TextBox 5"/>
-          <p:cNvSpPr txBox="1"/>
-          <p:nvPr/>
-        </p:nvSpPr>
-        <p:spPr>
-          <a:xfrm>
-            <a:off x="11185855" y="6473952"/>
-            <a:ext cx="640080" cy="274320"/>
-          </a:xfrm>
-          <a:prstGeom prst="rect">
-            <a:avLst/>
-          </a:prstGeom>
-          <a:noFill/>
-        </p:spPr>
-        <p:txBody>
-          <a:bodyPr wrap="square">
-            <a:spAutoFit/>
-          </a:bodyPr>
-          <a:lstStyle/>
-          <a:p>
-            <a:pPr algn="r"/>
-            <a:r>
-              <a:rPr sz="1100" b="0" i="0">
-                <a:solidFill>
-                  <a:srgbClr val="666666"/>
-                </a:solidFill>
-                <a:latin typeface="Calibri"/>
-              </a:rPr>
-              <a:t>12</a:t>
-            </a:r>
-          </a:p>
-        </p:txBody>
-      </p:sp>
-    </p:spTree>
-  </p:cSld>
-  <p:clrMapOvr>
-    <a:masterClrMapping/>
-  </p:clrMapOvr>
-</p:sld>
-</file>
-
-<file path=ppt/slides/slide13.xml><?xml version="1.0" encoding="utf-8"?>
 <p:sld xmlns:a="http://schemas.openxmlformats.org/drawingml/2006/main" xmlns:p="http://schemas.openxmlformats.org/presentationml/2006/main" xmlns:r="http://schemas.openxmlformats.org/officeDocument/2006/relationships">
   <p:cSld>
     <p:bg>

--- a/Introduccion a la Ingenieria/Clases/Clase 11 - Taller de prototipado inicial con IA/Presentacion.pptx
+++ b/Introduccion a la Ingenieria/Clases/Clase 11 - Taller de prototipado inicial con IA/Presentacion.pptx
@@ -14,7 +14,6 @@
     <p:sldId id="262" r:id="rId13"/>
     <p:sldId id="263" r:id="rId15"/>
     <p:sldId id="264" r:id="rId16"/>
-    <p:sldId id="265" r:id="rId17"/>
   </p:sldIdLst>
   <p:sldSz cx="12191695" cy="6858000" type="screen4x3"/>
   <p:notesSz cx="6858000" cy="9144000"/>
@@ -831,100 +830,6 @@
 </file>
 
 <file path=ppt/notesSlides/notesSlide5.xml><?xml version="1.0" encoding="utf-8"?>
-<p:notes xmlns:a="http://schemas.openxmlformats.org/drawingml/2006/main" xmlns:p="http://schemas.openxmlformats.org/presentationml/2006/main" xmlns:r="http://schemas.openxmlformats.org/officeDocument/2006/relationships">
-  <p:cSld>
-    <p:spTree>
-      <p:nvGrpSpPr>
-        <p:cNvPr id="1" name=""/>
-        <p:cNvGrpSpPr/>
-        <p:nvPr/>
-      </p:nvGrpSpPr>
-      <p:grpSpPr>
-        <a:xfrm>
-          <a:off x="0" y="0"/>
-          <a:ext cx="0" cy="0"/>
-          <a:chOff x="0" y="0"/>
-          <a:chExt cx="0" cy="0"/>
-        </a:xfrm>
-      </p:grpSpPr>
-      <p:sp>
-        <p:nvSpPr>
-          <p:cNvPr id="2" name="Slide Image Placeholder 1"/>
-          <p:cNvSpPr>
-            <a:spLocks noGrp="1"/>
-          </p:cNvSpPr>
-          <p:nvPr>
-            <p:ph type="sldImg" idx="2"/>
-          </p:nvPr>
-        </p:nvSpPr>
-        <p:spPr/>
-      </p:sp>
-      <p:sp>
-        <p:nvSpPr>
-          <p:cNvPr id="3" name="Notes Placeholder 2"/>
-          <p:cNvSpPr>
-            <a:spLocks noGrp="1"/>
-          </p:cNvSpPr>
-          <p:nvPr>
-            <p:ph type="body" idx="3" sz="quarter"/>
-          </p:nvPr>
-        </p:nvSpPr>
-        <p:spPr/>
-        <p:txBody>
-          <a:bodyPr/>
-          <a:lstStyle/>
-          <a:p>
-            <a:r>
-              <a:t>EL ANTES Y DESPUÉS, Y CÓMO CIERRA EL CORTE</a:t>
-            </a:r>
-          </a:p>
-          <a:p/>
-          <a:p>
-            <a:r>
-              <a:t>La diapositiva de antes y después es el corazón didáctico de la sesión, y hay que recorrerla con una insistencia: ninguna de las cinco propuestas del asistente era absurda. Cuentas de usuario, avisos por correo, reservas con historial, portadas, y un mensaje de error estándar: las cinco están en sistemas reales de bibliotecas en todo el mundo. Las cinco eran incorrectas para este proyecto, y cada una por una razón distinta que el equipo ya había escrito en una sesión anterior — el requisito «sin cuenta» de la sesión 7, la Ley 1581 de la sesión 4, el alcance mínimo de la sesión 8, el límite de 200 KB de la sesión 5, y la regla de mensajes con salida de la sesión 10.</a:t>
-            </a:r>
-          </a:p>
-          <a:p/>
-          <a:p>
-            <a:r>
-              <a:t>Ese es el hallazgo que hay que dejar dicho en voz alta, porque justifica todo el corte: el equipo pudo corregir al asistente porque tenía sus decisiones escritas. Un equipo sin requisitos no funcionales, sin alcance definido y sin indicador ambiental no habría tenido con qué objetar, y habría aceptado las cinco. La documentación de las sesiones 6 a 10 no era burocracia académica: es lo que hoy les permite ejercer criterio frente a una herramienta que suena más segura que ellos.</a:t>
-            </a:r>
-          </a:p>
-          <a:p/>
-          <a:p>
-            <a:r>
-              <a:t>El cierre del corte. Los últimos 20 minutos son la evaluación del corte 2 en ExamLab, individual y a libro abierto sobre sus propios documentos del equipo. Cubre las sesiones 7 a 11: fases y costo del cambio, requisitos y criterios de aceptación, matriz de decisión y alcance mínimo, calidad de fuentes, fidelidad de prototipos y uso responsable de IA. Que sea a libro abierto es deliberado y conviene explicarlo: premia al equipo que documentó, que es exactamente la conducta que el corte entero intentó enseñar.</a:t>
-            </a:r>
-          </a:p>
-          <a:p/>
-          <a:p>
-            <a:r>
-              <a:t>Hay que decir con claridad, como en la sesión 6, que ExamLab es la herramienta que usa este curso para las evaluaciones y no es una plataforma oficial de la universidad; el enlace se comparte en el chat en el momento y, si algo falla, la evaluación se reprograma y se avisa por el canal del curso. Y la advertencia final del taller, que hay que repetir aunque ya esté en la diapositiva: no se le pasan datos personales a un asistente —ni propios ni de terceros—, porque lo que se escribe ahí sale del computador y no vuelve.</a:t>
-            </a:r>
-          </a:p>
-        </p:txBody>
-      </p:sp>
-      <p:sp>
-        <p:nvSpPr>
-          <p:cNvPr id="4" name="Slide Number Placeholder 3"/>
-          <p:cNvSpPr>
-            <a:spLocks noGrp="1"/>
-          </p:cNvSpPr>
-          <p:nvPr>
-            <p:ph type="sldNum" idx="5" sz="quarter"/>
-          </p:nvPr>
-        </p:nvSpPr>
-        <p:spPr/>
-      </p:sp>
-    </p:spTree>
-  </p:cSld>
-  <p:clrMapOvr>
-    <a:masterClrMapping/>
-  </p:clrMapOvr>
-</p:notes>
-</file>
-
-<file path=ppt/notesSlides/notesSlide6.xml><?xml version="1.0" encoding="utf-8"?>
 <p:notes xmlns:a="http://schemas.openxmlformats.org/drawingml/2006/main" xmlns:p="http://schemas.openxmlformats.org/presentationml/2006/main" xmlns:r="http://schemas.openxmlformats.org/officeDocument/2006/relationships">
   <p:cSld>
     <p:spTree>
@@ -4384,222 +4289,6 @@
 </p:sld>
 </file>
 
-<file path=ppt/slides/slide10.xml><?xml version="1.0" encoding="utf-8"?>
-<p:sld xmlns:a="http://schemas.openxmlformats.org/drawingml/2006/main" xmlns:p="http://schemas.openxmlformats.org/presentationml/2006/main" xmlns:r="http://schemas.openxmlformats.org/officeDocument/2006/relationships">
-  <p:cSld>
-    <p:bg>
-      <p:bgPr>
-        <a:solidFill>
-          <a:srgbClr val="FFFFFF"/>
-        </a:solidFill>
-        <a:effectLst/>
-      </p:bgPr>
-    </p:bg>
-    <p:spTree>
-      <p:nvGrpSpPr>
-        <p:cNvPr id="1" name=""/>
-        <p:cNvGrpSpPr/>
-        <p:nvPr/>
-      </p:nvGrpSpPr>
-      <p:grpSpPr/>
-      <p:sp>
-        <p:nvSpPr>
-          <p:cNvPr id="2" name="Rectangle 1"/>
-          <p:cNvSpPr/>
-          <p:nvPr/>
-        </p:nvSpPr>
-        <p:spPr>
-          <a:xfrm>
-            <a:off x="0" y="0"/>
-            <a:ext cx="12191695" cy="164592"/>
-          </a:xfrm>
-          <a:prstGeom prst="rect">
-            <a:avLst/>
-          </a:prstGeom>
-          <a:solidFill>
-            <a:srgbClr val="269CCB"/>
-          </a:solidFill>
-          <a:ln>
-            <a:noFill/>
-          </a:ln>
-        </p:spPr>
-        <p:style>
-          <a:lnRef idx="1">
-            <a:schemeClr val="accent1"/>
-          </a:lnRef>
-          <a:fillRef idx="3">
-            <a:schemeClr val="accent1"/>
-          </a:fillRef>
-          <a:effectRef idx="2">
-            <a:schemeClr val="accent1"/>
-          </a:effectRef>
-          <a:fontRef idx="minor">
-            <a:schemeClr val="lt1"/>
-          </a:fontRef>
-        </p:style>
-        <p:txBody>
-          <a:bodyPr rtlCol="0" anchor="ctr"/>
-          <a:lstStyle/>
-          <a:p>
-            <a:pPr algn="ctr"/>
-          </a:p>
-        </p:txBody>
-      </p:sp>
-      <p:pic>
-        <p:nvPicPr>
-          <p:cNvPr id="3" name="Picture 2" descr="logo_uniajc_color.png"/>
-          <p:cNvPicPr>
-            <a:picLocks noChangeAspect="1"/>
-          </p:cNvPicPr>
-          <p:nvPr/>
-        </p:nvPicPr>
-        <p:blipFill>
-          <a:blip r:embed="rId2"/>
-          <a:stretch>
-            <a:fillRect/>
-          </a:stretch>
-        </p:blipFill>
-        <p:spPr>
-          <a:xfrm>
-            <a:off x="10271455" y="5998464"/>
-            <a:ext cx="1463040" cy="643233"/>
-          </a:xfrm>
-          <a:prstGeom prst="rect">
-            <a:avLst/>
-          </a:prstGeom>
-        </p:spPr>
-      </p:pic>
-      <p:sp>
-        <p:nvSpPr>
-          <p:cNvPr id="4" name="TextBox 3"/>
-          <p:cNvSpPr txBox="1"/>
-          <p:nvPr/>
-        </p:nvSpPr>
-        <p:spPr>
-          <a:xfrm>
-            <a:off x="457200" y="1737360"/>
-            <a:ext cx="11277295" cy="1097280"/>
-          </a:xfrm>
-          <a:prstGeom prst="rect">
-            <a:avLst/>
-          </a:prstGeom>
-          <a:noFill/>
-        </p:spPr>
-        <p:txBody>
-          <a:bodyPr wrap="square" anchor="ctr"/>
-          <a:lstStyle/>
-          <a:p>
-            <a:pPr algn="ctr"/>
-            <a:r>
-              <a:rPr sz="3400" b="1" i="0">
-                <a:solidFill>
-                  <a:srgbClr val="095292"/>
-                </a:solidFill>
-                <a:latin typeface="Calibri"/>
-              </a:rPr>
-              <a:t>Cierra el corte 2 · Nos vemos en la Clase 12</a:t>
-            </a:r>
-          </a:p>
-        </p:txBody>
-      </p:sp>
-      <p:sp>
-        <p:nvSpPr>
-          <p:cNvPr id="5" name="TextBox 4"/>
-          <p:cNvSpPr txBox="1"/>
-          <p:nvPr/>
-        </p:nvSpPr>
-        <p:spPr>
-          <a:xfrm>
-            <a:off x="457200" y="3017520"/>
-            <a:ext cx="11277295" cy="1645920"/>
-          </a:xfrm>
-          <a:prstGeom prst="rect">
-            <a:avLst/>
-          </a:prstGeom>
-          <a:noFill/>
-        </p:spPr>
-        <p:txBody>
-          <a:bodyPr wrap="square">
-            <a:spAutoFit/>
-          </a:bodyPr>
-          <a:lstStyle/>
-          <a:p>
-            <a:pPr algn="ctr">
-              <a:spcAft>
-                <a:spcPts val="600"/>
-              </a:spcAft>
-            </a:pPr>
-            <a:r>
-              <a:rPr sz="1600" b="0" i="0">
-                <a:solidFill>
-                  <a:srgbClr val="333333"/>
-                </a:solidFill>
-                <a:latin typeface="Calibri"/>
-              </a:rPr>
-              <a:t>Taller de prototipado inicial con IA · Clase 11</a:t>
-            </a:r>
-          </a:p>
-          <a:p>
-            <a:pPr algn="ctr">
-              <a:spcAft>
-                <a:spcPts val="600"/>
-              </a:spcAft>
-            </a:pPr>
-            <a:r>
-              <a:rPr sz="1600" b="0" i="0">
-                <a:solidFill>
-                  <a:srgbClr val="333333"/>
-                </a:solidFill>
-                <a:latin typeface="Calibri"/>
-              </a:rPr>
-              <a:t>FI300101 · UNIAJC · Ingeniería de Sistemas</a:t>
-            </a:r>
-          </a:p>
-        </p:txBody>
-      </p:sp>
-      <p:sp>
-        <p:nvSpPr>
-          <p:cNvPr id="6" name="TextBox 5"/>
-          <p:cNvSpPr txBox="1"/>
-          <p:nvPr/>
-        </p:nvSpPr>
-        <p:spPr>
-          <a:xfrm>
-            <a:off x="457200" y="4754880"/>
-            <a:ext cx="11277295" cy="640080"/>
-          </a:xfrm>
-          <a:prstGeom prst="rect">
-            <a:avLst/>
-          </a:prstGeom>
-          <a:noFill/>
-        </p:spPr>
-        <p:txBody>
-          <a:bodyPr wrap="square">
-            <a:spAutoFit/>
-          </a:bodyPr>
-          <a:lstStyle/>
-          <a:p>
-            <a:pPr algn="ctr"/>
-            <a:r>
-              <a:rPr sz="2000" b="1" i="0">
-                <a:solidFill>
-                  <a:srgbClr val="269CCB"/>
-                </a:solidFill>
-                <a:latin typeface="Calibri"/>
-              </a:rPr>
-              <a:t>Pudieron corregir al asistente porque tenían sus decisiones escritas</a:t>
-            </a:r>
-          </a:p>
-        </p:txBody>
-      </p:sp>
-    </p:spTree>
-  </p:cSld>
-  <p:clrMapOvr>
-    <a:masterClrMapping/>
-  </p:clrMapOvr>
-</p:sld>
-</file>
-
 <file path=ppt/slides/slide2.xml><?xml version="1.0" encoding="utf-8"?>
 <p:sld xmlns:a="http://schemas.openxmlformats.org/drawingml/2006/main" xmlns:p="http://schemas.openxmlformats.org/presentationml/2006/main" xmlns:r="http://schemas.openxmlformats.org/officeDocument/2006/relationships">
   <p:cSld>
@@ -5155,7 +4844,7 @@
                 </a:solidFill>
                 <a:latin typeface="Calibri"/>
               </a:rPr>
-              <a:t>Actividad en equipos — Prototipo v2 con IA, en salas de grupo</a:t>
+              <a:t>Actividad en equipos — opcional · la guía está en la carpeta de la clase</a:t>
             </a:r>
           </a:p>
         </p:txBody>
@@ -5270,7 +4959,7 @@
                 </a:solidFill>
                 <a:latin typeface="Calibri"/>
               </a:rPr>
-              <a:t>Exposiciones — 5 equipos × 3 min — lo que corrigieron a mano</a:t>
+              <a:t>Exposiciones — de la práctica, si se hizo</a:t>
             </a:r>
           </a:p>
         </p:txBody>
@@ -5385,7 +5074,7 @@
                 </a:solidFill>
                 <a:latin typeface="Calibri"/>
               </a:rPr>
-              <a:t>Evaluación de corte 2 — En la plataforma del curso · cubre las sesiones 7 a 11</a:t>
+              <a:t>Evaluación de corte 2 — sobre lo visto en el corte hasta hoy</a:t>
             </a:r>
           </a:p>
         </p:txBody>
@@ -5529,25 +5218,25 @@
           <a:p>
             <a:pPr algn="ctr"/>
             <a:r>
-              <a:rPr sz="1100" b="1" i="1">
+              <a:rPr sz="1200" b="1" i="1">
                 <a:solidFill>
                   <a:srgbClr val="666666"/>
                 </a:solidFill>
                 <a:latin typeface="Calibri"/>
               </a:rPr>
-              <a:t>Esta sesión cierra el corte 2 (30 %).</a:t>
-            </a:r>
-            <a:r>
-              <a:rPr sz="1100" b="0" i="1">
+              <a:t>Esta sesión cierra el corte 2.</a:t>
+            </a:r>
+            <a:r>
+              <a:rPr sz="1200" b="0" i="1">
                 <a:solidFill>
                   <a:srgbClr val="666666"/>
                 </a:solidFill>
                 <a:latin typeface="Calibri"/>
               </a:rPr>
-              <a:t> La teoría baja a 17 minutos y la actividad a 27 para que quepan los </a:t>
-            </a:r>
-            <a:r>
-              <a:rPr sz="1100" b="1" i="1">
+              <a:t> La teoría baja a 17 minutos para que quepan los </a:t>
+            </a:r>
+            <a:r>
+              <a:rPr sz="1200" b="1" i="1">
                 <a:solidFill>
                   <a:srgbClr val="666666"/>
                 </a:solidFill>
@@ -5556,16 +5245,16 @@
               <a:t>20 minutos de evaluación</a:t>
             </a:r>
             <a:r>
-              <a:rPr sz="1100" b="0" i="1">
+              <a:rPr sz="1200" b="0" i="1">
                 <a:solidFill>
                   <a:srgbClr val="666666"/>
                 </a:solidFill>
                 <a:latin typeface="Calibri"/>
               </a:rPr>
-              <a:t> al final, en la plataforma del curso, sobre las sesiones 7 a 11. Es además la </a:t>
-            </a:r>
-            <a:r>
-              <a:rPr sz="1100" b="1" i="1">
+              <a:t> al final, sobre lo visto en el corte hasta hoy. Es además la </a:t>
+            </a:r>
+            <a:r>
+              <a:rPr sz="1200" b="1" i="1">
                 <a:solidFill>
                   <a:srgbClr val="666666"/>
                 </a:solidFill>
@@ -5574,13 +5263,13 @@
               <a:t>segunda y última sesión con asistente de IA autorizado</a:t>
             </a:r>
             <a:r>
-              <a:rPr sz="1100" b="0" i="1">
+              <a:rPr sz="1200" b="0" i="1">
                 <a:solidFill>
                   <a:srgbClr val="666666"/>
                 </a:solidFill>
                 <a:latin typeface="Calibri"/>
               </a:rPr>
-              <a:t> —la otra fue la sesión 3—, y aplica la misma regla, hoy con más peso: se entrega el prompt usado y la lista de lo que se corrigió a mano.</a:t>
+              <a:t> —la otra fue la sesión 3—.</a:t>
             </a:r>
           </a:p>
         </p:txBody>
@@ -8026,7 +7715,7 @@
                 </a:solidFill>
                 <a:latin typeface="Calibri"/>
               </a:rPr>
-              <a:t>es el entregable</a:t>
+              <a:t>es lo que vale</a:t>
             </a:r>
             <a:r>
               <a:rPr sz="1300" b="0" i="0">
@@ -8035,7 +7724,7 @@
                 </a:solidFill>
                 <a:latin typeface="Calibri"/>
               </a:rPr>
-              <a:t>. Es la prueba de que ustedes pensaron, y es lo que más pesa en la rúbrica de hoy.</a:t>
+              <a:t>: es la prueba de que ustedes pensaron, y no la IA.</a:t>
             </a:r>
           </a:p>
         </p:txBody>
@@ -9748,172 +9437,7 @@
         <p:spPr>
           <a:xfrm>
             <a:off x="0" y="0"/>
-            <a:ext cx="12191695" cy="960120"/>
-          </a:xfrm>
-          <a:prstGeom prst="rect">
-            <a:avLst/>
-          </a:prstGeom>
-          <a:solidFill>
-            <a:srgbClr val="095292"/>
-          </a:solidFill>
-          <a:ln>
-            <a:noFill/>
-          </a:ln>
-        </p:spPr>
-        <p:style>
-          <a:lnRef idx="1">
-            <a:schemeClr val="accent1"/>
-          </a:lnRef>
-          <a:fillRef idx="3">
-            <a:schemeClr val="accent1"/>
-          </a:fillRef>
-          <a:effectRef idx="2">
-            <a:schemeClr val="accent1"/>
-          </a:effectRef>
-          <a:fontRef idx="minor">
-            <a:schemeClr val="lt1"/>
-          </a:fontRef>
-        </p:style>
-        <p:txBody>
-          <a:bodyPr rtlCol="0" anchor="ctr"/>
-          <a:lstStyle/>
-          <a:p>
-            <a:pPr algn="ctr"/>
-          </a:p>
-        </p:txBody>
-      </p:sp>
-      <p:sp>
-        <p:nvSpPr>
-          <p:cNvPr id="3" name="Rectangle 2"/>
-          <p:cNvSpPr/>
-          <p:nvPr/>
-        </p:nvSpPr>
-        <p:spPr>
-          <a:xfrm>
-            <a:off x="0" y="960120"/>
-            <a:ext cx="12191695" cy="41148"/>
-          </a:xfrm>
-          <a:prstGeom prst="rect">
-            <a:avLst/>
-          </a:prstGeom>
-          <a:solidFill>
-            <a:srgbClr val="FFD000"/>
-          </a:solidFill>
-          <a:ln>
-            <a:noFill/>
-          </a:ln>
-        </p:spPr>
-        <p:style>
-          <a:lnRef idx="1">
-            <a:schemeClr val="accent1"/>
-          </a:lnRef>
-          <a:fillRef idx="3">
-            <a:schemeClr val="accent1"/>
-          </a:fillRef>
-          <a:effectRef idx="2">
-            <a:schemeClr val="accent1"/>
-          </a:effectRef>
-          <a:fontRef idx="minor">
-            <a:schemeClr val="lt1"/>
-          </a:fontRef>
-        </p:style>
-        <p:txBody>
-          <a:bodyPr rtlCol="0" anchor="ctr"/>
-          <a:lstStyle/>
-          <a:p>
-            <a:pPr algn="ctr"/>
-          </a:p>
-        </p:txBody>
-      </p:sp>
-      <p:sp>
-        <p:nvSpPr>
-          <p:cNvPr id="4" name="TextBox 3"/>
-          <p:cNvSpPr txBox="1"/>
-          <p:nvPr/>
-        </p:nvSpPr>
-        <p:spPr>
-          <a:xfrm>
-            <a:off x="457200" y="164592"/>
-            <a:ext cx="11277295" cy="502920"/>
-          </a:xfrm>
-          <a:prstGeom prst="rect">
-            <a:avLst/>
-          </a:prstGeom>
-          <a:noFill/>
-        </p:spPr>
-        <p:txBody>
-          <a:bodyPr wrap="square">
-            <a:spAutoFit/>
-          </a:bodyPr>
-          <a:lstStyle/>
-          <a:p>
-            <a:r>
-              <a:rPr sz="2600" b="1" i="0">
-                <a:solidFill>
-                  <a:srgbClr val="FFFFFF"/>
-                </a:solidFill>
-                <a:latin typeface="Calibri"/>
-              </a:rPr>
-              <a:t>Cómo cierra el corte 2 hoy</a:t>
-            </a:r>
-          </a:p>
-        </p:txBody>
-      </p:sp>
-      <p:sp>
-        <p:nvSpPr>
-          <p:cNvPr id="5" name="Rounded Rectangle 4"/>
-          <p:cNvSpPr/>
-          <p:nvPr/>
-        </p:nvSpPr>
-        <p:spPr>
-          <a:xfrm>
-            <a:off x="457200" y="1261872"/>
-            <a:ext cx="11277295" cy="1051560"/>
-          </a:xfrm>
-          <a:prstGeom prst="roundRect">
-            <a:avLst>
-              <a:gd name="adj" fmla="val 12000"/>
-            </a:avLst>
-          </a:prstGeom>
-          <a:solidFill>
-            <a:srgbClr val="E8F4FA"/>
-          </a:solidFill>
-          <a:ln>
-            <a:noFill/>
-          </a:ln>
-        </p:spPr>
-        <p:style>
-          <a:lnRef idx="1">
-            <a:schemeClr val="accent1"/>
-          </a:lnRef>
-          <a:fillRef idx="3">
-            <a:schemeClr val="accent1"/>
-          </a:fillRef>
-          <a:effectRef idx="2">
-            <a:schemeClr val="accent1"/>
-          </a:effectRef>
-          <a:fontRef idx="minor">
-            <a:schemeClr val="lt1"/>
-          </a:fontRef>
-        </p:style>
-        <p:txBody>
-          <a:bodyPr rtlCol="0" anchor="ctr"/>
-          <a:lstStyle/>
-          <a:p>
-            <a:pPr algn="ctr"/>
-          </a:p>
-        </p:txBody>
-      </p:sp>
-      <p:sp>
-        <p:nvSpPr>
-          <p:cNvPr id="6" name="Rectangle 5"/>
-          <p:cNvSpPr/>
-          <p:nvPr/>
-        </p:nvSpPr>
-        <p:spPr>
-          <a:xfrm>
-            <a:off x="457200" y="1261872"/>
-            <a:ext cx="128016" cy="1051560"/>
+            <a:ext cx="12191695" cy="164592"/>
           </a:xfrm>
           <a:prstGeom prst="rect">
             <a:avLst/>
@@ -9947,16 +9471,73 @@
           </a:p>
         </p:txBody>
       </p:sp>
-      <p:sp>
-        <p:nvSpPr>
-          <p:cNvPr id="7" name="TextBox 6"/>
+      <p:pic>
+        <p:nvPicPr>
+          <p:cNvPr id="3" name="Picture 2" descr="logo_uniajc_color.png"/>
+          <p:cNvPicPr>
+            <a:picLocks noChangeAspect="1"/>
+          </p:cNvPicPr>
+          <p:nvPr/>
+        </p:nvPicPr>
+        <p:blipFill>
+          <a:blip r:embed="rId2"/>
+          <a:stretch>
+            <a:fillRect/>
+          </a:stretch>
+        </p:blipFill>
+        <p:spPr>
+          <a:xfrm>
+            <a:off x="10271455" y="5998464"/>
+            <a:ext cx="1463040" cy="643233"/>
+          </a:xfrm>
+          <a:prstGeom prst="rect">
+            <a:avLst/>
+          </a:prstGeom>
+        </p:spPr>
+      </p:pic>
+      <p:sp>
+        <p:nvSpPr>
+          <p:cNvPr id="4" name="TextBox 3"/>
           <p:cNvSpPr txBox="1"/>
           <p:nvPr/>
         </p:nvSpPr>
         <p:spPr>
           <a:xfrm>
-            <a:off x="777240" y="1399031"/>
-            <a:ext cx="10774375" cy="822959"/>
+            <a:off x="457200" y="1737360"/>
+            <a:ext cx="11277295" cy="1097280"/>
+          </a:xfrm>
+          <a:prstGeom prst="rect">
+            <a:avLst/>
+          </a:prstGeom>
+          <a:noFill/>
+        </p:spPr>
+        <p:txBody>
+          <a:bodyPr wrap="square" anchor="ctr"/>
+          <a:lstStyle/>
+          <a:p>
+            <a:pPr algn="ctr"/>
+            <a:r>
+              <a:rPr sz="3400" b="1" i="0">
+                <a:solidFill>
+                  <a:srgbClr val="095292"/>
+                </a:solidFill>
+                <a:latin typeface="Calibri"/>
+              </a:rPr>
+              <a:t>Cierra el corte 2 · Nos vemos en la Clase 12</a:t>
+            </a:r>
+          </a:p>
+        </p:txBody>
+      </p:sp>
+      <p:sp>
+        <p:nvSpPr>
+          <p:cNvPr id="5" name="TextBox 4"/>
+          <p:cNvSpPr txBox="1"/>
+          <p:nvPr/>
+        </p:nvSpPr>
+        <p:spPr>
+          <a:xfrm>
+            <a:off x="457200" y="3017520"/>
+            <a:ext cx="11277295" cy="1645920"/>
           </a:xfrm>
           <a:prstGeom prst="rect">
             <a:avLst/>
@@ -9969,159 +9550,49 @@
           </a:bodyPr>
           <a:lstStyle/>
           <a:p>
-            <a:r>
-              <a:rPr sz="1200" b="1" i="0">
-                <a:solidFill>
-                  <a:srgbClr val="269CCB"/>
-                </a:solidFill>
-                <a:latin typeface="Calibri"/>
-              </a:rPr>
-              <a:t>Info</a:t>
-            </a:r>
-          </a:p>
-          <a:p>
-            <a:pPr>
-              <a:spcBef>
-                <a:spcPts val="400"/>
-              </a:spcBef>
+            <a:pPr algn="ctr">
+              <a:spcAft>
+                <a:spcPts val="600"/>
+              </a:spcAft>
             </a:pPr>
             <a:r>
-              <a:rPr sz="1400" b="1" i="0">
+              <a:rPr sz="1600" b="0" i="0">
                 <a:solidFill>
                   <a:srgbClr val="333333"/>
                 </a:solidFill>
                 <a:latin typeface="Calibri"/>
               </a:rPr>
-              <a:t>Al final de la sesión hay 20 minutos de evaluación del corte 2</a:t>
-            </a:r>
-            <a:r>
-              <a:rPr sz="1400" b="0" i="0">
+              <a:t>Taller de prototipado inicial con IA · Clase 11</a:t>
+            </a:r>
+          </a:p>
+          <a:p>
+            <a:pPr algn="ctr">
+              <a:spcAft>
+                <a:spcPts val="600"/>
+              </a:spcAft>
+            </a:pPr>
+            <a:r>
+              <a:rPr sz="1600" b="0" i="0">
                 <a:solidFill>
                   <a:srgbClr val="333333"/>
                 </a:solidFill>
                 <a:latin typeface="Calibri"/>
               </a:rPr>
-              <a:t>, sobre las sesiones 7 a 11: ciclo de vida y costo del cambio, requisitos y criterios de aceptación, decisión entre alternativas y alcance mínimo, antecedentes y fuentes, prototipado y niveles de fidelidad, y uso responsable de IA. Es individual y a libro abierto: </a:t>
-            </a:r>
-            <a:r>
-              <a:rPr sz="1400" b="1" i="0">
-                <a:solidFill>
-                  <a:srgbClr val="333333"/>
-                </a:solidFill>
-                <a:latin typeface="Calibri"/>
-              </a:rPr>
-              <a:t>pueden consultar sus propios documentos del equipo</a:t>
-            </a:r>
-            <a:r>
-              <a:rPr sz="1400" b="0" i="0">
-                <a:solidFill>
-                  <a:srgbClr val="333333"/>
-                </a:solidFill>
-                <a:latin typeface="Calibri"/>
-              </a:rPr>
-              <a:t>.</a:t>
-            </a:r>
-          </a:p>
-        </p:txBody>
-      </p:sp>
-      <p:sp>
-        <p:nvSpPr>
-          <p:cNvPr id="8" name="Rounded Rectangle 7"/>
-          <p:cNvSpPr/>
-          <p:nvPr/>
-        </p:nvSpPr>
-        <p:spPr>
-          <a:xfrm>
-            <a:off x="457200" y="2478024"/>
-            <a:ext cx="11277295" cy="1051560"/>
-          </a:xfrm>
-          <a:prstGeom prst="roundRect">
-            <a:avLst>
-              <a:gd name="adj" fmla="val 12000"/>
-            </a:avLst>
-          </a:prstGeom>
-          <a:solidFill>
-            <a:srgbClr val="FFF8E1"/>
-          </a:solidFill>
-          <a:ln>
-            <a:noFill/>
-          </a:ln>
-        </p:spPr>
-        <p:style>
-          <a:lnRef idx="1">
-            <a:schemeClr val="accent1"/>
-          </a:lnRef>
-          <a:fillRef idx="3">
-            <a:schemeClr val="accent1"/>
-          </a:fillRef>
-          <a:effectRef idx="2">
-            <a:schemeClr val="accent1"/>
-          </a:effectRef>
-          <a:fontRef idx="minor">
-            <a:schemeClr val="lt1"/>
-          </a:fontRef>
-        </p:style>
-        <p:txBody>
-          <a:bodyPr rtlCol="0" anchor="ctr"/>
-          <a:lstStyle/>
-          <a:p>
-            <a:pPr algn="ctr"/>
-          </a:p>
-        </p:txBody>
-      </p:sp>
-      <p:sp>
-        <p:nvSpPr>
-          <p:cNvPr id="9" name="Rectangle 8"/>
-          <p:cNvSpPr/>
-          <p:nvPr/>
-        </p:nvSpPr>
-        <p:spPr>
-          <a:xfrm>
-            <a:off x="457200" y="2478024"/>
-            <a:ext cx="128016" cy="1051560"/>
-          </a:xfrm>
-          <a:prstGeom prst="rect">
-            <a:avLst/>
-          </a:prstGeom>
-          <a:solidFill>
-            <a:srgbClr val="FFD000"/>
-          </a:solidFill>
-          <a:ln>
-            <a:noFill/>
-          </a:ln>
-        </p:spPr>
-        <p:style>
-          <a:lnRef idx="1">
-            <a:schemeClr val="accent1"/>
-          </a:lnRef>
-          <a:fillRef idx="3">
-            <a:schemeClr val="accent1"/>
-          </a:fillRef>
-          <a:effectRef idx="2">
-            <a:schemeClr val="accent1"/>
-          </a:effectRef>
-          <a:fontRef idx="minor">
-            <a:schemeClr val="lt1"/>
-          </a:fontRef>
-        </p:style>
-        <p:txBody>
-          <a:bodyPr rtlCol="0" anchor="ctr"/>
-          <a:lstStyle/>
-          <a:p>
-            <a:pPr algn="ctr"/>
-          </a:p>
-        </p:txBody>
-      </p:sp>
-      <p:sp>
-        <p:nvSpPr>
-          <p:cNvPr id="10" name="TextBox 9"/>
+              <a:t>FI300101 · UNIAJC · Ingeniería de Sistemas</a:t>
+            </a:r>
+          </a:p>
+        </p:txBody>
+      </p:sp>
+      <p:sp>
+        <p:nvSpPr>
+          <p:cNvPr id="6" name="TextBox 5"/>
           <p:cNvSpPr txBox="1"/>
           <p:nvPr/>
         </p:nvSpPr>
         <p:spPr>
           <a:xfrm>
-            <a:off x="777240" y="2615184"/>
-            <a:ext cx="10774375" cy="822959"/>
+            <a:off x="457200" y="4754880"/>
+            <a:ext cx="11277295" cy="640080"/>
           </a:xfrm>
           <a:prstGeom prst="rect">
             <a:avLst/>
@@ -10134,239 +9605,15 @@
           </a:bodyPr>
           <a:lstStyle/>
           <a:p>
-            <a:r>
-              <a:rPr sz="1200" b="1" i="0">
-                <a:solidFill>
-                  <a:srgbClr val="FFD000"/>
-                </a:solidFill>
-                <a:latin typeface="Calibri"/>
-              </a:rPr>
-              <a:t>Aclaración</a:t>
-            </a:r>
-          </a:p>
-          <a:p>
-            <a:pPr>
-              <a:spcBef>
-                <a:spcPts val="400"/>
-              </a:spcBef>
-            </a:pPr>
-            <a:r>
-              <a:rPr sz="1400" b="1" i="0">
-                <a:solidFill>
-                  <a:srgbClr val="333333"/>
-                </a:solidFill>
-                <a:latin typeface="Calibri"/>
-              </a:rPr>
-              <a:t>La evaluación se aplica en la plataforma del curso</a:t>
-            </a:r>
-            <a:r>
-              <a:rPr sz="1400" b="0" i="0">
-                <a:solidFill>
-                  <a:srgbClr val="333333"/>
-                </a:solidFill>
-                <a:latin typeface="Calibri"/>
-              </a:rPr>
-              <a:t>, que es la herramienta que usa este curso para las evaluaciones y </a:t>
-            </a:r>
-            <a:r>
-              <a:rPr sz="1400" b="1" i="0">
-                <a:solidFill>
-                  <a:srgbClr val="333333"/>
-                </a:solidFill>
-                <a:latin typeface="Calibri"/>
-              </a:rPr>
-              <a:t>no es una plataforma oficial de la universidad</a:t>
-            </a:r>
-            <a:r>
-              <a:rPr sz="1400" b="0" i="0">
-                <a:solidFill>
-                  <a:srgbClr val="333333"/>
-                </a:solidFill>
-                <a:latin typeface="Calibri"/>
-              </a:rPr>
-              <a:t>. El enlace se comparte en el chat en el momento; si algo falla, la evaluación se reprograma y se avisa por el canal del curso.</a:t>
-            </a:r>
-          </a:p>
-        </p:txBody>
-      </p:sp>
-      <p:sp>
-        <p:nvSpPr>
-          <p:cNvPr id="11" name="Rounded Rectangle 10"/>
-          <p:cNvSpPr/>
-          <p:nvPr/>
-        </p:nvSpPr>
-        <p:spPr>
-          <a:xfrm>
-            <a:off x="457200" y="3694176"/>
-            <a:ext cx="11277295" cy="1051560"/>
-          </a:xfrm>
-          <a:prstGeom prst="roundRect">
-            <a:avLst>
-              <a:gd name="adj" fmla="val 12000"/>
-            </a:avLst>
-          </a:prstGeom>
-          <a:solidFill>
-            <a:srgbClr val="FBE4E4"/>
-          </a:solidFill>
-          <a:ln>
-            <a:noFill/>
-          </a:ln>
-        </p:spPr>
-        <p:style>
-          <a:lnRef idx="1">
-            <a:schemeClr val="accent1"/>
-          </a:lnRef>
-          <a:fillRef idx="3">
-            <a:schemeClr val="accent1"/>
-          </a:fillRef>
-          <a:effectRef idx="2">
-            <a:schemeClr val="accent1"/>
-          </a:effectRef>
-          <a:fontRef idx="minor">
-            <a:schemeClr val="lt1"/>
-          </a:fontRef>
-        </p:style>
-        <p:txBody>
-          <a:bodyPr rtlCol="0" anchor="ctr"/>
-          <a:lstStyle/>
-          <a:p>
             <a:pPr algn="ctr"/>
-          </a:p>
-        </p:txBody>
-      </p:sp>
-      <p:sp>
-        <p:nvSpPr>
-          <p:cNvPr id="12" name="Rectangle 11"/>
-          <p:cNvSpPr/>
-          <p:nvPr/>
-        </p:nvSpPr>
-        <p:spPr>
-          <a:xfrm>
-            <a:off x="457200" y="3694176"/>
-            <a:ext cx="128016" cy="1051560"/>
-          </a:xfrm>
-          <a:prstGeom prst="rect">
-            <a:avLst/>
-          </a:prstGeom>
-          <a:solidFill>
-            <a:srgbClr val="A02030"/>
-          </a:solidFill>
-          <a:ln>
-            <a:noFill/>
-          </a:ln>
-        </p:spPr>
-        <p:style>
-          <a:lnRef idx="1">
-            <a:schemeClr val="accent1"/>
-          </a:lnRef>
-          <a:fillRef idx="3">
-            <a:schemeClr val="accent1"/>
-          </a:fillRef>
-          <a:effectRef idx="2">
-            <a:schemeClr val="accent1"/>
-          </a:effectRef>
-          <a:fontRef idx="minor">
-            <a:schemeClr val="lt1"/>
-          </a:fontRef>
-        </p:style>
-        <p:txBody>
-          <a:bodyPr rtlCol="0" anchor="ctr"/>
-          <a:lstStyle/>
-          <a:p>
-            <a:pPr algn="ctr"/>
-          </a:p>
-        </p:txBody>
-      </p:sp>
-      <p:sp>
-        <p:nvSpPr>
-          <p:cNvPr id="13" name="TextBox 12"/>
-          <p:cNvSpPr txBox="1"/>
-          <p:nvPr/>
-        </p:nvSpPr>
-        <p:spPr>
-          <a:xfrm>
-            <a:off x="777240" y="3831336"/>
-            <a:ext cx="10774375" cy="822959"/>
-          </a:xfrm>
-          <a:prstGeom prst="rect">
-            <a:avLst/>
-          </a:prstGeom>
-          <a:noFill/>
-        </p:spPr>
-        <p:txBody>
-          <a:bodyPr wrap="square">
-            <a:spAutoFit/>
-          </a:bodyPr>
-          <a:lstStyle/>
-          <a:p>
-            <a:r>
-              <a:rPr sz="1200" b="1" i="0">
-                <a:solidFill>
-                  <a:srgbClr val="A02030"/>
-                </a:solidFill>
-                <a:latin typeface="Calibri"/>
-              </a:rPr>
-              <a:t>Atención</a:t>
-            </a:r>
-          </a:p>
-          <a:p>
-            <a:pPr>
-              <a:spcBef>
-                <a:spcPts val="400"/>
-              </a:spcBef>
-            </a:pPr>
-            <a:r>
-              <a:rPr sz="1400" b="1" i="0">
-                <a:solidFill>
-                  <a:srgbClr val="333333"/>
-                </a:solidFill>
-                <a:latin typeface="Calibri"/>
-              </a:rPr>
-              <a:t>Lo que se califica hoy del taller no es la variante de la IA: es lo que corrigieron.</a:t>
-            </a:r>
-            <a:r>
-              <a:rPr sz="1400" b="0" i="0">
-                <a:solidFill>
-                  <a:srgbClr val="333333"/>
-                </a:solidFill>
-                <a:latin typeface="Calibri"/>
-              </a:rPr>
-              <a:t> Un equipo que entrega tal cual lo que devolvió el asistente tiene la nota más baja del corte, aunque se vea bien. Y no se le pasan datos personales a un asistente: lo que se escribe ahí sale del computador y no vuelve.</a:t>
-            </a:r>
-          </a:p>
-        </p:txBody>
-      </p:sp>
-      <p:sp>
-        <p:nvSpPr>
-          <p:cNvPr id="14" name="TextBox 13"/>
-          <p:cNvSpPr txBox="1"/>
-          <p:nvPr/>
-        </p:nvSpPr>
-        <p:spPr>
-          <a:xfrm>
-            <a:off x="11185855" y="6473952"/>
-            <a:ext cx="640080" cy="274320"/>
-          </a:xfrm>
-          <a:prstGeom prst="rect">
-            <a:avLst/>
-          </a:prstGeom>
-          <a:noFill/>
-        </p:spPr>
-        <p:txBody>
-          <a:bodyPr wrap="square">
-            <a:spAutoFit/>
-          </a:bodyPr>
-          <a:lstStyle/>
-          <a:p>
-            <a:pPr algn="r"/>
-            <a:r>
-              <a:rPr sz="1100" b="0" i="0">
-                <a:solidFill>
-                  <a:srgbClr val="666666"/>
-                </a:solidFill>
-                <a:latin typeface="Calibri"/>
-              </a:rPr>
-              <a:t>9</a:t>
+            <a:r>
+              <a:rPr sz="2000" b="1" i="0">
+                <a:solidFill>
+                  <a:srgbClr val="269CCB"/>
+                </a:solidFill>
+                <a:latin typeface="Calibri"/>
+              </a:rPr>
+              <a:t>Pudieron corregir al asistente porque tenían sus decisiones escritas</a:t>
             </a:r>
           </a:p>
         </p:txBody>

--- a/Introduccion a la Ingenieria/Clases/Clase 11 - Taller de prototipado inicial con IA/Presentacion.pptx
+++ b/Introduccion a la Ingenieria/Clases/Clase 11 - Taller de prototipado inicial con IA/Presentacion.pptx
@@ -4241,7 +4241,7 @@
                 </a:solidFill>
                 <a:latin typeface="Calibri"/>
               </a:rPr>
-              <a:t>La IA propone, ustedes deciden — y lo que corrigieron es lo que se califica</a:t>
+              <a:t>La IA propone, ustedes deciden — y lo que corrigieron es el trabajo de ingeniería</a:t>
             </a:r>
           </a:p>
         </p:txBody>

--- a/Introduccion a la Ingenieria/Clases/Clase 11 - Taller de prototipado inicial con IA/Presentacion.pptx
+++ b/Introduccion a la Ingenieria/Clases/Clase 11 - Taller de prototipado inicial con IA/Presentacion.pptx
@@ -5457,14 +5457,118 @@
       </p:sp>
       <p:sp>
         <p:nvSpPr>
-          <p:cNvPr id="5" name="TextBox 4"/>
+          <p:cNvPr id="5" name="Rounded Rectangle 4"/>
+          <p:cNvSpPr/>
+          <p:nvPr/>
+        </p:nvSpPr>
+        <p:spPr>
+          <a:xfrm>
+            <a:off x="5797149" y="1573813"/>
+            <a:ext cx="6010497" cy="4057845"/>
+          </a:xfrm>
+          <a:prstGeom prst="roundRect">
+            <a:avLst>
+              <a:gd name="adj" fmla="val 4000"/>
+            </a:avLst>
+          </a:prstGeom>
+          <a:solidFill>
+            <a:srgbClr val="E8EEF4"/>
+          </a:solidFill>
+          <a:ln>
+            <a:noFill/>
+          </a:ln>
+        </p:spPr>
+        <p:style>
+          <a:lnRef idx="1">
+            <a:schemeClr val="accent1"/>
+          </a:lnRef>
+          <a:fillRef idx="3">
+            <a:schemeClr val="accent1"/>
+          </a:fillRef>
+          <a:effectRef idx="2">
+            <a:schemeClr val="accent1"/>
+          </a:effectRef>
+          <a:fontRef idx="minor">
+            <a:schemeClr val="lt1"/>
+          </a:fontRef>
+        </p:style>
+        <p:txBody>
+          <a:bodyPr rtlCol="0" anchor="ctr"/>
+          <a:lstStyle/>
+          <a:p>
+            <a:pPr algn="ctr"/>
+          </a:p>
+        </p:txBody>
+      </p:sp>
+      <p:pic>
+        <p:nvPicPr>
+          <p:cNvPr id="6" name="Picture 5" descr="students-learning-laptops-classroom.jpg"/>
+          <p:cNvPicPr>
+            <a:picLocks noChangeAspect="1"/>
+          </p:cNvPicPr>
+          <p:nvPr/>
+        </p:nvPicPr>
+        <p:blipFill>
+          <a:blip r:embed="rId2"/>
+          <a:stretch>
+            <a:fillRect/>
+          </a:stretch>
+        </p:blipFill>
+        <p:spPr>
+          <a:xfrm>
+            <a:off x="5870301" y="1646965"/>
+            <a:ext cx="5864193" cy="3911541"/>
+          </a:xfrm>
+          <a:prstGeom prst="rect">
+            <a:avLst/>
+          </a:prstGeom>
+        </p:spPr>
+      </p:pic>
+      <p:sp>
+        <p:nvSpPr>
+          <p:cNvPr id="7" name="TextBox 6"/>
           <p:cNvSpPr txBox="1"/>
           <p:nvPr/>
         </p:nvSpPr>
         <p:spPr>
           <a:xfrm>
-            <a:off x="457200" y="1170432"/>
-            <a:ext cx="11277295" cy="5230368"/>
+            <a:off x="5870301" y="5961888"/>
+            <a:ext cx="5864193" cy="320040"/>
+          </a:xfrm>
+          <a:prstGeom prst="rect">
+            <a:avLst/>
+          </a:prstGeom>
+          <a:noFill/>
+        </p:spPr>
+        <p:txBody>
+          <a:bodyPr wrap="square">
+            <a:spAutoFit/>
+          </a:bodyPr>
+          <a:lstStyle/>
+          <a:p>
+            <a:pPr algn="ctr"/>
+            <a:r>
+              <a:rPr sz="1100" b="0" i="1">
+                <a:solidFill>
+                  <a:srgbClr val="666666"/>
+                </a:solidFill>
+                <a:latin typeface="Calibri"/>
+              </a:rPr>
+              <a:t>Foto: Mikhail Nilov · Pexels</a:t>
+            </a:r>
+          </a:p>
+        </p:txBody>
+      </p:sp>
+      <p:sp>
+        <p:nvSpPr>
+          <p:cNvPr id="8" name="TextBox 7"/>
+          <p:cNvSpPr txBox="1"/>
+          <p:nvPr/>
+        </p:nvSpPr>
+        <p:spPr>
+          <a:xfrm>
+            <a:off x="457200" y="1353312"/>
+            <a:ext cx="5093061" cy="5047488"/>
           </a:xfrm>
           <a:prstGeom prst="rect">
             <a:avLst/>
@@ -5634,7 +5738,7 @@
       </p:sp>
       <p:sp>
         <p:nvSpPr>
-          <p:cNvPr id="6" name="TextBox 5"/>
+          <p:cNvPr id="9" name="TextBox 8"/>
           <p:cNvSpPr txBox="1"/>
           <p:nvPr/>
         </p:nvSpPr>
@@ -8560,9 +8664,57 @@
           </a:p>
         </p:txBody>
       </p:sp>
-      <p:sp>
-        <p:nvSpPr>
-          <p:cNvPr id="13" name="TextBox 12"/>
+      <p:pic>
+        <p:nvPicPr>
+          <p:cNvPr id="13" name="Picture 12" descr="sello_mal.png"/>
+          <p:cNvPicPr>
+            <a:picLocks noChangeAspect="1"/>
+          </p:cNvPicPr>
+          <p:nvPr/>
+        </p:nvPicPr>
+        <p:blipFill>
+          <a:blip r:embed="rId2"/>
+          <a:stretch>
+            <a:fillRect/>
+          </a:stretch>
+        </p:blipFill>
+        <p:spPr>
+          <a:xfrm>
+            <a:off x="566928" y="1316736"/>
+            <a:ext cx="393192" cy="393192"/>
+          </a:xfrm>
+          <a:prstGeom prst="rect">
+            <a:avLst/>
+          </a:prstGeom>
+        </p:spPr>
+      </p:pic>
+      <p:pic>
+        <p:nvPicPr>
+          <p:cNvPr id="14" name="Picture 13" descr="sello_bien.png"/>
+          <p:cNvPicPr>
+            <a:picLocks noChangeAspect="1"/>
+          </p:cNvPicPr>
+          <p:nvPr/>
+        </p:nvPicPr>
+        <p:blipFill>
+          <a:blip r:embed="rId3"/>
+          <a:stretch>
+            <a:fillRect/>
+          </a:stretch>
+        </p:blipFill>
+        <p:spPr>
+          <a:xfrm>
+            <a:off x="6365595" y="1316736"/>
+            <a:ext cx="393192" cy="393192"/>
+          </a:xfrm>
+          <a:prstGeom prst="rect">
+            <a:avLst/>
+          </a:prstGeom>
+        </p:spPr>
+      </p:pic>
+      <p:sp>
+        <p:nvSpPr>
+          <p:cNvPr id="15" name="TextBox 14"/>
           <p:cNvSpPr txBox="1"/>
           <p:nvPr/>
         </p:nvSpPr>
@@ -9367,9 +9519,57 @@
           </a:p>
         </p:txBody>
       </p:sp>
-      <p:sp>
-        <p:nvSpPr>
-          <p:cNvPr id="14" name="TextBox 13"/>
+      <p:pic>
+        <p:nvPicPr>
+          <p:cNvPr id="14" name="Picture 13" descr="sello_mal.png"/>
+          <p:cNvPicPr>
+            <a:picLocks noChangeAspect="1"/>
+          </p:cNvPicPr>
+          <p:nvPr/>
+        </p:nvPicPr>
+        <p:blipFill>
+          <a:blip r:embed="rId2"/>
+          <a:stretch>
+            <a:fillRect/>
+          </a:stretch>
+        </p:blipFill>
+        <p:spPr>
+          <a:xfrm>
+            <a:off x="566928" y="1527048"/>
+            <a:ext cx="393192" cy="393192"/>
+          </a:xfrm>
+          <a:prstGeom prst="rect">
+            <a:avLst/>
+          </a:prstGeom>
+        </p:spPr>
+      </p:pic>
+      <p:pic>
+        <p:nvPicPr>
+          <p:cNvPr id="15" name="Picture 14" descr="sello_bien.png"/>
+          <p:cNvPicPr>
+            <a:picLocks noChangeAspect="1"/>
+          </p:cNvPicPr>
+          <p:nvPr/>
+        </p:nvPicPr>
+        <p:blipFill>
+          <a:blip r:embed="rId3"/>
+          <a:stretch>
+            <a:fillRect/>
+          </a:stretch>
+        </p:blipFill>
+        <p:spPr>
+          <a:xfrm>
+            <a:off x="6365595" y="1527048"/>
+            <a:ext cx="393192" cy="393192"/>
+          </a:xfrm>
+          <a:prstGeom prst="rect">
+            <a:avLst/>
+          </a:prstGeom>
+        </p:spPr>
+      </p:pic>
+      <p:sp>
+        <p:nvSpPr>
+          <p:cNvPr id="16" name="TextBox 15"/>
           <p:cNvSpPr txBox="1"/>
           <p:nvPr/>
         </p:nvSpPr>

--- a/Introduccion a la Ingenieria/Clases/Clase 11 - Taller de prototipado inicial con IA/Presentacion.pptx
+++ b/Introduccion a la Ingenieria/Clases/Clase 11 - Taller de prototipado inicial con IA/Presentacion.pptx
@@ -5457,118 +5457,14 @@
       </p:sp>
       <p:sp>
         <p:nvSpPr>
-          <p:cNvPr id="5" name="Rounded Rectangle 4"/>
-          <p:cNvSpPr/>
-          <p:nvPr/>
-        </p:nvSpPr>
-        <p:spPr>
-          <a:xfrm>
-            <a:off x="5797149" y="1573813"/>
-            <a:ext cx="6010497" cy="4057845"/>
-          </a:xfrm>
-          <a:prstGeom prst="roundRect">
-            <a:avLst>
-              <a:gd name="adj" fmla="val 4000"/>
-            </a:avLst>
-          </a:prstGeom>
-          <a:solidFill>
-            <a:srgbClr val="E8EEF4"/>
-          </a:solidFill>
-          <a:ln>
-            <a:noFill/>
-          </a:ln>
-        </p:spPr>
-        <p:style>
-          <a:lnRef idx="1">
-            <a:schemeClr val="accent1"/>
-          </a:lnRef>
-          <a:fillRef idx="3">
-            <a:schemeClr val="accent1"/>
-          </a:fillRef>
-          <a:effectRef idx="2">
-            <a:schemeClr val="accent1"/>
-          </a:effectRef>
-          <a:fontRef idx="minor">
-            <a:schemeClr val="lt1"/>
-          </a:fontRef>
-        </p:style>
-        <p:txBody>
-          <a:bodyPr rtlCol="0" anchor="ctr"/>
-          <a:lstStyle/>
-          <a:p>
-            <a:pPr algn="ctr"/>
-          </a:p>
-        </p:txBody>
-      </p:sp>
-      <p:pic>
-        <p:nvPicPr>
-          <p:cNvPr id="6" name="Picture 5" descr="students-learning-laptops-classroom.jpg"/>
-          <p:cNvPicPr>
-            <a:picLocks noChangeAspect="1"/>
-          </p:cNvPicPr>
-          <p:nvPr/>
-        </p:nvPicPr>
-        <p:blipFill>
-          <a:blip r:embed="rId2"/>
-          <a:stretch>
-            <a:fillRect/>
-          </a:stretch>
-        </p:blipFill>
-        <p:spPr>
-          <a:xfrm>
-            <a:off x="5870301" y="1646965"/>
-            <a:ext cx="5864193" cy="3911541"/>
-          </a:xfrm>
-          <a:prstGeom prst="rect">
-            <a:avLst/>
-          </a:prstGeom>
-        </p:spPr>
-      </p:pic>
-      <p:sp>
-        <p:nvSpPr>
-          <p:cNvPr id="7" name="TextBox 6"/>
+          <p:cNvPr id="5" name="TextBox 4"/>
           <p:cNvSpPr txBox="1"/>
           <p:nvPr/>
         </p:nvSpPr>
         <p:spPr>
           <a:xfrm>
-            <a:off x="5870301" y="5961888"/>
-            <a:ext cx="5864193" cy="320040"/>
-          </a:xfrm>
-          <a:prstGeom prst="rect">
-            <a:avLst/>
-          </a:prstGeom>
-          <a:noFill/>
-        </p:spPr>
-        <p:txBody>
-          <a:bodyPr wrap="square">
-            <a:spAutoFit/>
-          </a:bodyPr>
-          <a:lstStyle/>
-          <a:p>
-            <a:pPr algn="ctr"/>
-            <a:r>
-              <a:rPr sz="1100" b="0" i="1">
-                <a:solidFill>
-                  <a:srgbClr val="666666"/>
-                </a:solidFill>
-                <a:latin typeface="Calibri"/>
-              </a:rPr>
-              <a:t>Foto: Mikhail Nilov · Pexels</a:t>
-            </a:r>
-          </a:p>
-        </p:txBody>
-      </p:sp>
-      <p:sp>
-        <p:nvSpPr>
-          <p:cNvPr id="8" name="TextBox 7"/>
-          <p:cNvSpPr txBox="1"/>
-          <p:nvPr/>
-        </p:nvSpPr>
-        <p:spPr>
-          <a:xfrm>
-            <a:off x="457200" y="1353312"/>
-            <a:ext cx="5093061" cy="5047488"/>
+            <a:off x="457200" y="1170432"/>
+            <a:ext cx="11277295" cy="5230368"/>
           </a:xfrm>
           <a:prstGeom prst="rect">
             <a:avLst/>
@@ -5738,7 +5634,7 @@
       </p:sp>
       <p:sp>
         <p:nvSpPr>
-          <p:cNvPr id="9" name="TextBox 8"/>
+          <p:cNvPr id="6" name="TextBox 5"/>
           <p:cNvSpPr txBox="1"/>
           <p:nvPr/>
         </p:nvSpPr>

--- a/Introduccion a la Ingenieria/Clases/Clase 11 - Taller de prototipado inicial con IA/Presentacion.pptx
+++ b/Introduccion a la Ingenieria/Clases/Clase 11 - Taller de prototipado inicial con IA/Presentacion.pptx
@@ -680,7 +680,7 @@
           <a:p/>
           <a:p>
             <a:r>
-              <a:t>Conviene ser preciso y no moralizante, porque estos estudiantes van a trabajar con estas herramientas toda su carrera y lo que necesitan es criterio, no prohibición.</a:t>
+              <a:t>Conviene ser preciso y no dar sermones, porque estos estudiantes van a trabajar con estas herramientas toda su carrera y lo que necesitan es criterio, no prohibición.</a:t>
             </a:r>
           </a:p>
           <a:p/>
@@ -704,7 +704,7 @@
           <a:p/>
           <a:p>
             <a:r>
-              <a:t>Hace mal: inventar con seguridad. Esta es la característica que hay que dejar instalada para siempre, y ya la vieron en la sesión 9 con las referencias bibliográficas inexistentes: un modelo de lenguaje genera texto plausible, y no tiene manera de señalar cuándo lo plausible es incorrecto. Va a proponer funciones que violan las restricciones del equipo y a veces la ley, con el mismo tono seguro con el que propone las buenas. No hay una alarma; la alarma son ustedes.</a:t>
+              <a:t>Hace mal: inventar con seguridad. Esta es la característica que hay que dejar instalada para siempre, y ya la vieron en la sesión 9 con las referencias bibliográficas inexistentes: un modelo de lenguaje genera texto que suena creíble, y no tiene manera de señalar cuándo lo que suena creíble es falso. Va a proponer funciones que violan las restricciones del equipo y a veces la ley, con el mismo tono seguro con el que propone las buenas. No hay una alarma; la alarma son ustedes.</a:t>
             </a:r>
           </a:p>
         </p:txBody>
